--- a/docs/reports/project-status-2026-06-26.pptx
+++ b/docs/reports/project-status-2026-06-26.pptx
@@ -3392,12 +3392,14 @@
           <a:noFill/>
         </p:spPr>
         <p:txBody>
-          <a:bodyPr wrap="none" lIns="0" rIns="0" tIns="0" bIns="0" anchor="t">
-            <a:spAutoFit/>
-          </a:bodyPr>
-          <a:lstStyle/>
-          <a:p>
-            <a:pPr algn="l"/>
+          <a:bodyPr wrap="square" lIns="0" rIns="0" tIns="0" bIns="0" anchor="t"/>
+          <a:lstStyle/>
+          <a:p>
+            <a:pPr algn="l">
+              <a:spcAft>
+                <a:spcPts val="200"/>
+              </a:spcAft>
+            </a:pPr>
             <a:r>
               <a:rPr sz="2000" b="1" i="0">
                 <a:solidFill>
@@ -3427,12 +3429,14 @@
           <a:noFill/>
         </p:spPr>
         <p:txBody>
-          <a:bodyPr wrap="none" lIns="0" rIns="0" tIns="0" bIns="0" anchor="t">
-            <a:spAutoFit/>
-          </a:bodyPr>
-          <a:lstStyle/>
-          <a:p>
-            <a:pPr algn="l"/>
+          <a:bodyPr wrap="square" lIns="0" rIns="0" tIns="0" bIns="0" anchor="t"/>
+          <a:lstStyle/>
+          <a:p>
+            <a:pPr algn="l">
+              <a:spcAft>
+                <a:spcPts val="200"/>
+              </a:spcAft>
+            </a:pPr>
             <a:r>
               <a:rPr sz="4600" b="1" i="0">
                 <a:solidFill>
@@ -3462,12 +3466,14 @@
           <a:noFill/>
         </p:spPr>
         <p:txBody>
-          <a:bodyPr wrap="none" lIns="0" rIns="0" tIns="0" bIns="0" anchor="t">
-            <a:spAutoFit/>
-          </a:bodyPr>
-          <a:lstStyle/>
-          <a:p>
-            <a:pPr algn="l"/>
+          <a:bodyPr wrap="square" lIns="0" rIns="0" tIns="0" bIns="0" anchor="t"/>
+          <a:lstStyle/>
+          <a:p>
+            <a:pPr algn="l">
+              <a:spcAft>
+                <a:spcPts val="200"/>
+              </a:spcAft>
+            </a:pPr>
             <a:r>
               <a:rPr sz="1800" b="0" i="0">
                 <a:solidFill>
@@ -3497,12 +3503,14 @@
           <a:noFill/>
         </p:spPr>
         <p:txBody>
-          <a:bodyPr wrap="none" lIns="0" rIns="0" tIns="0" bIns="0" anchor="t">
-            <a:spAutoFit/>
-          </a:bodyPr>
-          <a:lstStyle/>
-          <a:p>
-            <a:pPr algn="l"/>
+          <a:bodyPr wrap="square" lIns="0" rIns="0" tIns="0" bIns="0" anchor="t"/>
+          <a:lstStyle/>
+          <a:p>
+            <a:pPr algn="l">
+              <a:spcAft>
+                <a:spcPts val="200"/>
+              </a:spcAft>
+            </a:pPr>
             <a:r>
               <a:rPr sz="1500" b="0" i="0">
                 <a:solidFill>
@@ -3510,9 +3518,55 @@
                 </a:solidFill>
                 <a:latin typeface="Calibri"/>
               </a:rPr>
-              <a:t>生成日期：2026-06-26（北京时间）
-触发方式：每日自动化任务
-数据来源：README、模块目录、配置与 git 提交</a:t>
+              <a:t>生成日期：2026-06-26（北京时间）</a:t>
+            </a:r>
+          </a:p>
+          <a:p>
+            <a:pPr algn="l">
+              <a:spcAft>
+                <a:spcPts val="200"/>
+              </a:spcAft>
+            </a:pPr>
+            <a:r>
+              <a:rPr sz="1500" b="0" i="0">
+                <a:solidFill>
+                  <a:srgbClr val="FFFFFF"/>
+                </a:solidFill>
+                <a:latin typeface="Calibri"/>
+              </a:rPr>
+              <a:t>触发方式：每日自动化任务</a:t>
+            </a:r>
+          </a:p>
+          <a:p>
+            <a:pPr algn="l">
+              <a:spcAft>
+                <a:spcPts val="200"/>
+              </a:spcAft>
+            </a:pPr>
+            <a:r>
+              <a:rPr sz="1500" b="0" i="0">
+                <a:solidFill>
+                  <a:srgbClr val="FFFFFF"/>
+                </a:solidFill>
+                <a:latin typeface="Calibri"/>
+              </a:rPr>
+              <a:t>数据来源：README、模块目录、配置与 git</a:t>
+            </a:r>
+          </a:p>
+          <a:p>
+            <a:pPr algn="l">
+              <a:spcAft>
+                <a:spcPts val="200"/>
+              </a:spcAft>
+            </a:pPr>
+            <a:r>
+              <a:rPr sz="1500" b="0" i="0">
+                <a:solidFill>
+                  <a:srgbClr val="FFFFFF"/>
+                </a:solidFill>
+                <a:latin typeface="Calibri"/>
+              </a:rPr>
+              <a:t>提交</a:t>
             </a:r>
           </a:p>
         </p:txBody>
@@ -3532,11 +3586,11 @@
             <a:avLst/>
           </a:prstGeom>
           <a:solidFill>
-            <a:srgbClr val="FFFFFF"/>
+            <a:srgbClr val="065A82"/>
           </a:solidFill>
-          <a:ln w="12700">
+          <a:ln w="10160">
             <a:solidFill>
-              <a:srgbClr val="FFFFFF"/>
+              <a:srgbClr val="B7F4EF"/>
             </a:solidFill>
           </a:ln>
         </p:spPr>
@@ -3579,12 +3633,14 @@
           <a:noFill/>
         </p:spPr>
         <p:txBody>
-          <a:bodyPr wrap="none" lIns="0" rIns="0" tIns="0" bIns="0" anchor="t">
-            <a:spAutoFit/>
-          </a:bodyPr>
-          <a:lstStyle/>
-          <a:p>
-            <a:pPr algn="ctr"/>
+          <a:bodyPr wrap="square" lIns="0" rIns="0" tIns="0" bIns="0" anchor="t"/>
+          <a:lstStyle/>
+          <a:p>
+            <a:pPr algn="ctr">
+              <a:spcAft>
+                <a:spcPts val="200"/>
+              </a:spcAft>
+            </a:pPr>
             <a:r>
               <a:rPr sz="2300" b="1" i="0">
                 <a:solidFill>
@@ -3614,16 +3670,18 @@
           <a:noFill/>
         </p:spPr>
         <p:txBody>
-          <a:bodyPr wrap="none" lIns="0" rIns="0" tIns="0" bIns="0" anchor="t">
-            <a:spAutoFit/>
-          </a:bodyPr>
-          <a:lstStyle/>
-          <a:p>
-            <a:pPr algn="ctr"/>
+          <a:bodyPr wrap="square" lIns="0" rIns="0" tIns="0" bIns="0" anchor="t"/>
+          <a:lstStyle/>
+          <a:p>
+            <a:pPr algn="ctr">
+              <a:spcAft>
+                <a:spcPts val="200"/>
+              </a:spcAft>
+            </a:pPr>
             <a:r>
               <a:rPr sz="880" b="0" i="0">
                 <a:solidFill>
-                  <a:srgbClr val="E6FAFA"/>
+                  <a:srgbClr val="FFFFFF"/>
                 </a:solidFill>
                 <a:latin typeface="Calibri"/>
               </a:rPr>
@@ -3647,11 +3705,11 @@
             <a:avLst/>
           </a:prstGeom>
           <a:solidFill>
-            <a:srgbClr val="FFFFFF"/>
+            <a:srgbClr val="028090"/>
           </a:solidFill>
-          <a:ln w="12700">
+          <a:ln w="10160">
             <a:solidFill>
-              <a:srgbClr val="FFFFFF"/>
+              <a:srgbClr val="B7F4EF"/>
             </a:solidFill>
           </a:ln>
         </p:spPr>
@@ -3694,12 +3752,14 @@
           <a:noFill/>
         </p:spPr>
         <p:txBody>
-          <a:bodyPr wrap="none" lIns="0" rIns="0" tIns="0" bIns="0" anchor="t">
-            <a:spAutoFit/>
-          </a:bodyPr>
-          <a:lstStyle/>
-          <a:p>
-            <a:pPr algn="ctr"/>
+          <a:bodyPr wrap="square" lIns="0" rIns="0" tIns="0" bIns="0" anchor="t"/>
+          <a:lstStyle/>
+          <a:p>
+            <a:pPr algn="ctr">
+              <a:spcAft>
+                <a:spcPts val="200"/>
+              </a:spcAft>
+            </a:pPr>
             <a:r>
               <a:rPr sz="2300" b="1" i="0">
                 <a:solidFill>
@@ -3729,16 +3789,18 @@
           <a:noFill/>
         </p:spPr>
         <p:txBody>
-          <a:bodyPr wrap="none" lIns="0" rIns="0" tIns="0" bIns="0" anchor="t">
-            <a:spAutoFit/>
-          </a:bodyPr>
-          <a:lstStyle/>
-          <a:p>
-            <a:pPr algn="ctr"/>
+          <a:bodyPr wrap="square" lIns="0" rIns="0" tIns="0" bIns="0" anchor="t"/>
+          <a:lstStyle/>
+          <a:p>
+            <a:pPr algn="ctr">
+              <a:spcAft>
+                <a:spcPts val="200"/>
+              </a:spcAft>
+            </a:pPr>
             <a:r>
               <a:rPr sz="880" b="0" i="0">
                 <a:solidFill>
-                  <a:srgbClr val="E6FAFA"/>
+                  <a:srgbClr val="FFFFFF"/>
                 </a:solidFill>
                 <a:latin typeface="Calibri"/>
               </a:rPr>
@@ -3762,11 +3824,11 @@
             <a:avLst/>
           </a:prstGeom>
           <a:solidFill>
-            <a:srgbClr val="FFFFFF"/>
+            <a:srgbClr val="1C7293"/>
           </a:solidFill>
-          <a:ln w="12700">
+          <a:ln w="10160">
             <a:solidFill>
-              <a:srgbClr val="FFFFFF"/>
+              <a:srgbClr val="B7F4EF"/>
             </a:solidFill>
           </a:ln>
         </p:spPr>
@@ -3809,12 +3871,14 @@
           <a:noFill/>
         </p:spPr>
         <p:txBody>
-          <a:bodyPr wrap="none" lIns="0" rIns="0" tIns="0" bIns="0" anchor="t">
-            <a:spAutoFit/>
-          </a:bodyPr>
-          <a:lstStyle/>
-          <a:p>
-            <a:pPr algn="ctr"/>
+          <a:bodyPr wrap="square" lIns="0" rIns="0" tIns="0" bIns="0" anchor="t"/>
+          <a:lstStyle/>
+          <a:p>
+            <a:pPr algn="ctr">
+              <a:spcAft>
+                <a:spcPts val="200"/>
+              </a:spcAft>
+            </a:pPr>
             <a:r>
               <a:rPr sz="2300" b="1" i="0">
                 <a:solidFill>
@@ -3844,16 +3908,18 @@
           <a:noFill/>
         </p:spPr>
         <p:txBody>
-          <a:bodyPr wrap="none" lIns="0" rIns="0" tIns="0" bIns="0" anchor="t">
-            <a:spAutoFit/>
-          </a:bodyPr>
-          <a:lstStyle/>
-          <a:p>
-            <a:pPr algn="ctr"/>
+          <a:bodyPr wrap="square" lIns="0" rIns="0" tIns="0" bIns="0" anchor="t"/>
+          <a:lstStyle/>
+          <a:p>
+            <a:pPr algn="ctr">
+              <a:spcAft>
+                <a:spcPts val="200"/>
+              </a:spcAft>
+            </a:pPr>
             <a:r>
               <a:rPr sz="880" b="0" i="0">
                 <a:solidFill>
-                  <a:srgbClr val="E6FAFA"/>
+                  <a:srgbClr val="FFFFFF"/>
                 </a:solidFill>
                 <a:latin typeface="Calibri"/>
               </a:rPr>
@@ -4175,12 +4241,14 @@
           <a:noFill/>
         </p:spPr>
         <p:txBody>
-          <a:bodyPr wrap="none" lIns="0" rIns="0" tIns="0" bIns="0" anchor="t">
-            <a:spAutoFit/>
-          </a:bodyPr>
-          <a:lstStyle/>
-          <a:p>
-            <a:pPr algn="l"/>
+          <a:bodyPr wrap="square" lIns="0" rIns="0" tIns="0" bIns="0" anchor="t"/>
+          <a:lstStyle/>
+          <a:p>
+            <a:pPr algn="l">
+              <a:spcAft>
+                <a:spcPts val="200"/>
+              </a:spcAft>
+            </a:pPr>
             <a:r>
               <a:rPr sz="2100" b="1" i="0">
                 <a:solidFill>
@@ -4201,8 +4269,8 @@
         </p:nvSpPr>
         <p:spPr>
           <a:xfrm>
-            <a:off x="694944" y="1188720"/>
-            <a:ext cx="8961120" cy="640080"/>
+            <a:off x="694944" y="1115568"/>
+            <a:ext cx="8961120" cy="960120"/>
           </a:xfrm>
           <a:prstGeom prst="rect">
             <a:avLst/>
@@ -4210,20 +4278,38 @@
           <a:noFill/>
         </p:spPr>
         <p:txBody>
-          <a:bodyPr wrap="none" lIns="0" rIns="0" tIns="0" bIns="0" anchor="t">
-            <a:spAutoFit/>
-          </a:bodyPr>
-          <a:lstStyle/>
-          <a:p>
-            <a:pPr algn="l"/>
-            <a:r>
-              <a:rPr sz="3600" b="1" i="0">
+          <a:bodyPr wrap="square" lIns="0" rIns="0" tIns="0" bIns="0" anchor="t"/>
+          <a:lstStyle/>
+          <a:p>
+            <a:pPr algn="l">
+              <a:spcAft>
+                <a:spcPts val="200"/>
+              </a:spcAft>
+            </a:pPr>
+            <a:r>
+              <a:rPr sz="3400" b="1" i="0">
                 <a:solidFill>
                   <a:srgbClr val="FFFFFF"/>
                 </a:solidFill>
                 <a:latin typeface="Georgia"/>
               </a:rPr>
-              <a:t>能力链路已成型，工程化验证是下一阶段重点</a:t>
+              <a:t>能力链路已成型，</a:t>
+            </a:r>
+          </a:p>
+          <a:p>
+            <a:pPr algn="l">
+              <a:spcAft>
+                <a:spcPts val="200"/>
+              </a:spcAft>
+            </a:pPr>
+            <a:r>
+              <a:rPr sz="3400" b="1" i="0">
+                <a:solidFill>
+                  <a:srgbClr val="FFFFFF"/>
+                </a:solidFill>
+                <a:latin typeface="Georgia"/>
+              </a:rPr>
+              <a:t>工程化验证是下一阶段重点</a:t>
             </a:r>
           </a:p>
         </p:txBody>
@@ -4236,18 +4322,18 @@
         </p:nvSpPr>
         <p:spPr>
           <a:xfrm>
-            <a:off x="786384" y="2816352"/>
-            <a:ext cx="3063240" cy="1325880"/>
+            <a:off x="786384" y="2907792"/>
+            <a:ext cx="3063240" cy="1417320"/>
           </a:xfrm>
           <a:prstGeom prst="roundRect">
             <a:avLst/>
           </a:prstGeom>
           <a:solidFill>
-            <a:srgbClr val="FFFFFF"/>
+            <a:srgbClr val="065A82"/>
           </a:solidFill>
-          <a:ln w="12700">
+          <a:ln w="10160">
             <a:solidFill>
-              <a:srgbClr val="FFFFFF"/>
+              <a:srgbClr val="B7F4EF"/>
             </a:solidFill>
           </a:ln>
         </p:spPr>
@@ -4281,7 +4367,7 @@
         </p:nvSpPr>
         <p:spPr>
           <a:xfrm>
-            <a:off x="1005840" y="3017520"/>
+            <a:off x="1005840" y="3127248"/>
             <a:ext cx="2606040" cy="228600"/>
           </a:xfrm>
           <a:prstGeom prst="rect">
@@ -4290,12 +4376,14 @@
           <a:noFill/>
         </p:spPr>
         <p:txBody>
-          <a:bodyPr wrap="none" lIns="0" rIns="0" tIns="0" bIns="0" anchor="t">
-            <a:spAutoFit/>
-          </a:bodyPr>
-          <a:lstStyle/>
-          <a:p>
-            <a:pPr algn="l"/>
+          <a:bodyPr wrap="square" lIns="0" rIns="0" tIns="0" bIns="0" anchor="t"/>
+          <a:lstStyle/>
+          <a:p>
+            <a:pPr algn="l">
+              <a:spcAft>
+                <a:spcPts val="200"/>
+              </a:spcAft>
+            </a:pPr>
             <a:r>
               <a:rPr sz="1700" b="1" i="0">
                 <a:solidFill>
@@ -4316,8 +4404,8 @@
         </p:nvSpPr>
         <p:spPr>
           <a:xfrm>
-            <a:off x="1005840" y="3401568"/>
-            <a:ext cx="2578608" cy="457200"/>
+            <a:off x="1005840" y="3529584"/>
+            <a:ext cx="2578608" cy="548640"/>
           </a:xfrm>
           <a:prstGeom prst="rect">
             <a:avLst/>
@@ -4325,20 +4413,54 @@
           <a:noFill/>
         </p:spPr>
         <p:txBody>
-          <a:bodyPr wrap="none" lIns="0" rIns="0" tIns="0" bIns="0" anchor="t">
-            <a:spAutoFit/>
-          </a:bodyPr>
-          <a:lstStyle/>
-          <a:p>
-            <a:pPr algn="l"/>
-            <a:r>
-              <a:rPr sz="1220" b="0" i="0">
+          <a:bodyPr wrap="square" lIns="0" rIns="0" tIns="0" bIns="0" anchor="t"/>
+          <a:lstStyle/>
+          <a:p>
+            <a:pPr algn="l">
+              <a:spcAft>
+                <a:spcPts val="200"/>
+              </a:spcAft>
+            </a:pPr>
+            <a:r>
+              <a:rPr sz="1180" b="0" i="0">
                 <a:solidFill>
                   <a:srgbClr val="E6FAFA"/>
                 </a:solidFill>
                 <a:latin typeface="Calibri"/>
               </a:rPr>
-              <a:t>生成、预览、部署、管理链路完整，适合继续围绕稳定性与体验打磨。</a:t>
+              <a:t>生成、预览、部署、管理链路</a:t>
+            </a:r>
+          </a:p>
+          <a:p>
+            <a:pPr algn="l">
+              <a:spcAft>
+                <a:spcPts val="200"/>
+              </a:spcAft>
+            </a:pPr>
+            <a:r>
+              <a:rPr sz="1180" b="0" i="0">
+                <a:solidFill>
+                  <a:srgbClr val="E6FAFA"/>
+                </a:solidFill>
+                <a:latin typeface="Calibri"/>
+              </a:rPr>
+              <a:t>完整，适合继续围绕稳定性与</a:t>
+            </a:r>
+          </a:p>
+          <a:p>
+            <a:pPr algn="l">
+              <a:spcAft>
+                <a:spcPts val="200"/>
+              </a:spcAft>
+            </a:pPr>
+            <a:r>
+              <a:rPr sz="1180" b="0" i="0">
+                <a:solidFill>
+                  <a:srgbClr val="E6FAFA"/>
+                </a:solidFill>
+                <a:latin typeface="Calibri"/>
+              </a:rPr>
+              <a:t>体验打磨。</a:t>
             </a:r>
           </a:p>
         </p:txBody>
@@ -4351,18 +4473,18 @@
         </p:nvSpPr>
         <p:spPr>
           <a:xfrm>
-            <a:off x="4489704" y="2816352"/>
-            <a:ext cx="3063240" cy="1325880"/>
+            <a:off x="4489704" y="2907792"/>
+            <a:ext cx="3063240" cy="1417320"/>
           </a:xfrm>
           <a:prstGeom prst="roundRect">
             <a:avLst/>
           </a:prstGeom>
           <a:solidFill>
-            <a:srgbClr val="FFFFFF"/>
+            <a:srgbClr val="028090"/>
           </a:solidFill>
-          <a:ln w="12700">
+          <a:ln w="10160">
             <a:solidFill>
-              <a:srgbClr val="FFFFFF"/>
+              <a:srgbClr val="B7F4EF"/>
             </a:solidFill>
           </a:ln>
         </p:spPr>
@@ -4396,7 +4518,7 @@
         </p:nvSpPr>
         <p:spPr>
           <a:xfrm>
-            <a:off x="4709160" y="3017520"/>
+            <a:off x="4709160" y="3127248"/>
             <a:ext cx="2606040" cy="228600"/>
           </a:xfrm>
           <a:prstGeom prst="rect">
@@ -4405,12 +4527,14 @@
           <a:noFill/>
         </p:spPr>
         <p:txBody>
-          <a:bodyPr wrap="none" lIns="0" rIns="0" tIns="0" bIns="0" anchor="t">
-            <a:spAutoFit/>
-          </a:bodyPr>
-          <a:lstStyle/>
-          <a:p>
-            <a:pPr algn="l"/>
+          <a:bodyPr wrap="square" lIns="0" rIns="0" tIns="0" bIns="0" anchor="t"/>
+          <a:lstStyle/>
+          <a:p>
+            <a:pPr algn="l">
+              <a:spcAft>
+                <a:spcPts val="200"/>
+              </a:spcAft>
+            </a:pPr>
             <a:r>
               <a:rPr sz="1700" b="1" i="0">
                 <a:solidFill>
@@ -4431,8 +4555,8 @@
         </p:nvSpPr>
         <p:spPr>
           <a:xfrm>
-            <a:off x="4709160" y="3401568"/>
-            <a:ext cx="2578608" cy="457200"/>
+            <a:off x="4709160" y="3529584"/>
+            <a:ext cx="2578608" cy="548640"/>
           </a:xfrm>
           <a:prstGeom prst="rect">
             <a:avLst/>
@@ -4440,20 +4564,54 @@
           <a:noFill/>
         </p:spPr>
         <p:txBody>
-          <a:bodyPr wrap="none" lIns="0" rIns="0" tIns="0" bIns="0" anchor="t">
-            <a:spAutoFit/>
-          </a:bodyPr>
-          <a:lstStyle/>
-          <a:p>
-            <a:pPr algn="l"/>
-            <a:r>
-              <a:rPr sz="1220" b="0" i="0">
+          <a:bodyPr wrap="square" lIns="0" rIns="0" tIns="0" bIns="0" anchor="t"/>
+          <a:lstStyle/>
+          <a:p>
+            <a:pPr algn="l">
+              <a:spcAft>
+                <a:spcPts val="200"/>
+              </a:spcAft>
+            </a:pPr>
+            <a:r>
+              <a:rPr sz="1180" b="0" i="0">
                 <a:solidFill>
                   <a:srgbClr val="E6FAFA"/>
                 </a:solidFill>
                 <a:latin typeface="Calibri"/>
               </a:rPr>
-              <a:t>近 7 天无提交；最近一次集中改造为微服务拆分与可观测性增强。</a:t>
+              <a:t>近 7 天无提交；最近集中</a:t>
+            </a:r>
+          </a:p>
+          <a:p>
+            <a:pPr algn="l">
+              <a:spcAft>
+                <a:spcPts val="200"/>
+              </a:spcAft>
+            </a:pPr>
+            <a:r>
+              <a:rPr sz="1180" b="0" i="0">
+                <a:solidFill>
+                  <a:srgbClr val="E6FAFA"/>
+                </a:solidFill>
+                <a:latin typeface="Calibri"/>
+              </a:rPr>
+              <a:t>改造为微服务拆分与可观测性</a:t>
+            </a:r>
+          </a:p>
+          <a:p>
+            <a:pPr algn="l">
+              <a:spcAft>
+                <a:spcPts val="200"/>
+              </a:spcAft>
+            </a:pPr>
+            <a:r>
+              <a:rPr sz="1180" b="0" i="0">
+                <a:solidFill>
+                  <a:srgbClr val="E6FAFA"/>
+                </a:solidFill>
+                <a:latin typeface="Calibri"/>
+              </a:rPr>
+              <a:t>增强。</a:t>
             </a:r>
           </a:p>
         </p:txBody>
@@ -4466,18 +4624,18 @@
         </p:nvSpPr>
         <p:spPr>
           <a:xfrm>
-            <a:off x="8193023" y="2816352"/>
-            <a:ext cx="3063240" cy="1325880"/>
+            <a:off x="8193023" y="2907792"/>
+            <a:ext cx="3063240" cy="1417320"/>
           </a:xfrm>
           <a:prstGeom prst="roundRect">
             <a:avLst/>
           </a:prstGeom>
           <a:solidFill>
-            <a:srgbClr val="FFFFFF"/>
+            <a:srgbClr val="1C7293"/>
           </a:solidFill>
-          <a:ln w="12700">
+          <a:ln w="10160">
             <a:solidFill>
-              <a:srgbClr val="FFFFFF"/>
+              <a:srgbClr val="B7F4EF"/>
             </a:solidFill>
           </a:ln>
         </p:spPr>
@@ -4511,7 +4669,7 @@
         </p:nvSpPr>
         <p:spPr>
           <a:xfrm>
-            <a:off x="8412480" y="3017520"/>
+            <a:off x="8412480" y="3127248"/>
             <a:ext cx="2606040" cy="228600"/>
           </a:xfrm>
           <a:prstGeom prst="rect">
@@ -4520,12 +4678,14 @@
           <a:noFill/>
         </p:spPr>
         <p:txBody>
-          <a:bodyPr wrap="none" lIns="0" rIns="0" tIns="0" bIns="0" anchor="t">
-            <a:spAutoFit/>
-          </a:bodyPr>
-          <a:lstStyle/>
-          <a:p>
-            <a:pPr algn="l"/>
+          <a:bodyPr wrap="square" lIns="0" rIns="0" tIns="0" bIns="0" anchor="t"/>
+          <a:lstStyle/>
+          <a:p>
+            <a:pPr algn="l">
+              <a:spcAft>
+                <a:spcPts val="200"/>
+              </a:spcAft>
+            </a:pPr>
             <a:r>
               <a:rPr sz="1700" b="1" i="0">
                 <a:solidFill>
@@ -4546,8 +4706,8 @@
         </p:nvSpPr>
         <p:spPr>
           <a:xfrm>
-            <a:off x="8412480" y="3401568"/>
-            <a:ext cx="2578608" cy="457200"/>
+            <a:off x="8412480" y="3529584"/>
+            <a:ext cx="2578608" cy="548640"/>
           </a:xfrm>
           <a:prstGeom prst="rect">
             <a:avLst/>
@@ -4555,20 +4715,38 @@
           <a:noFill/>
         </p:spPr>
         <p:txBody>
-          <a:bodyPr wrap="none" lIns="0" rIns="0" tIns="0" bIns="0" anchor="t">
-            <a:spAutoFit/>
-          </a:bodyPr>
-          <a:lstStyle/>
-          <a:p>
-            <a:pPr algn="l"/>
-            <a:r>
-              <a:rPr sz="1220" b="0" i="0">
+          <a:bodyPr wrap="square" lIns="0" rIns="0" tIns="0" bIns="0" anchor="t"/>
+          <a:lstStyle/>
+          <a:p>
+            <a:pPr algn="l">
+              <a:spcAft>
+                <a:spcPts val="200"/>
+              </a:spcAft>
+            </a:pPr>
+            <a:r>
+              <a:rPr sz="1180" b="0" i="0">
                 <a:solidFill>
                   <a:srgbClr val="E6FAFA"/>
                 </a:solidFill>
                 <a:latin typeface="Calibri"/>
               </a:rPr>
-              <a:t>补齐配置治理、CI 门禁、主链路冒烟和运行态监控。</a:t>
+              <a:t>补齐配置治理、CI 门禁、</a:t>
+            </a:r>
+          </a:p>
+          <a:p>
+            <a:pPr algn="l">
+              <a:spcAft>
+                <a:spcPts val="200"/>
+              </a:spcAft>
+            </a:pPr>
+            <a:r>
+              <a:rPr sz="1180" b="0" i="0">
+                <a:solidFill>
+                  <a:srgbClr val="E6FAFA"/>
+                </a:solidFill>
+                <a:latin typeface="Calibri"/>
+              </a:rPr>
+              <a:t>主链路冒烟和运行态监控。</a:t>
             </a:r>
           </a:p>
         </p:txBody>
@@ -4590,12 +4768,14 @@
           <a:noFill/>
         </p:spPr>
         <p:txBody>
-          <a:bodyPr wrap="none" lIns="0" rIns="0" tIns="0" bIns="0" anchor="t">
-            <a:spAutoFit/>
-          </a:bodyPr>
-          <a:lstStyle/>
-          <a:p>
-            <a:pPr algn="l"/>
+          <a:bodyPr wrap="square" lIns="0" rIns="0" tIns="0" bIns="0" anchor="t"/>
+          <a:lstStyle/>
+          <a:p>
+            <a:pPr algn="l">
+              <a:spcAft>
+                <a:spcPts val="200"/>
+              </a:spcAft>
+            </a:pPr>
             <a:r>
               <a:rPr sz="1250" b="0" i="0">
                 <a:solidFill>
@@ -4625,12 +4805,14 @@
           <a:noFill/>
         </p:spPr>
         <p:txBody>
-          <a:bodyPr wrap="none" lIns="0" rIns="0" tIns="0" bIns="0" anchor="t">
-            <a:spAutoFit/>
-          </a:bodyPr>
-          <a:lstStyle/>
-          <a:p>
-            <a:pPr algn="r"/>
+          <a:bodyPr wrap="square" lIns="0" rIns="0" tIns="0" bIns="0" anchor="t"/>
+          <a:lstStyle/>
+          <a:p>
+            <a:pPr algn="r">
+              <a:spcAft>
+                <a:spcPts val="200"/>
+              </a:spcAft>
+            </a:pPr>
             <a:r>
               <a:rPr sz="1250" b="1" i="0">
                 <a:solidFill>
@@ -4731,12 +4913,14 @@
           <a:noFill/>
         </p:spPr>
         <p:txBody>
-          <a:bodyPr wrap="none" lIns="0" rIns="0" tIns="0" bIns="0" anchor="ctr">
-            <a:spAutoFit/>
-          </a:bodyPr>
-          <a:lstStyle/>
-          <a:p>
-            <a:pPr algn="ctr"/>
+          <a:bodyPr wrap="square" lIns="0" rIns="0" tIns="0" bIns="0" anchor="ctr"/>
+          <a:lstStyle/>
+          <a:p>
+            <a:pPr algn="ctr">
+              <a:spcAft>
+                <a:spcPts val="200"/>
+              </a:spcAft>
+            </a:pPr>
             <a:r>
               <a:rPr sz="900" b="1" i="0">
                 <a:solidFill>
@@ -4766,12 +4950,14 @@
           <a:noFill/>
         </p:spPr>
         <p:txBody>
-          <a:bodyPr wrap="none" lIns="0" rIns="0" tIns="0" bIns="0" anchor="t">
-            <a:spAutoFit/>
-          </a:bodyPr>
-          <a:lstStyle/>
-          <a:p>
-            <a:pPr algn="l"/>
+          <a:bodyPr wrap="square" lIns="0" rIns="0" tIns="0" bIns="0" anchor="t"/>
+          <a:lstStyle/>
+          <a:p>
+            <a:pPr algn="l">
+              <a:spcAft>
+                <a:spcPts val="200"/>
+              </a:spcAft>
+            </a:pPr>
             <a:r>
               <a:rPr sz="3400" b="1" i="0">
                 <a:solidFill>
@@ -4793,7 +4979,7 @@
         <p:spPr>
           <a:xfrm>
             <a:off x="1152144" y="841248"/>
-            <a:ext cx="8046720" cy="256032"/>
+            <a:ext cx="8046720" cy="274320"/>
           </a:xfrm>
           <a:prstGeom prst="rect">
             <a:avLst/>
@@ -4801,12 +4987,14 @@
           <a:noFill/>
         </p:spPr>
         <p:txBody>
-          <a:bodyPr wrap="none" lIns="0" rIns="0" tIns="0" bIns="0" anchor="t">
-            <a:spAutoFit/>
-          </a:bodyPr>
-          <a:lstStyle/>
-          <a:p>
-            <a:pPr algn="l"/>
+          <a:bodyPr wrap="square" lIns="0" rIns="0" tIns="0" bIns="0" anchor="t"/>
+          <a:lstStyle/>
+          <a:p>
+            <a:pPr algn="l">
+              <a:spcAft>
+                <a:spcPts val="200"/>
+              </a:spcAft>
+            </a:pPr>
             <a:r>
               <a:rPr sz="1150" b="0" i="0">
                 <a:solidFill>
@@ -4881,12 +5069,14 @@
           <a:noFill/>
         </p:spPr>
         <p:txBody>
-          <a:bodyPr wrap="none" lIns="0" rIns="0" tIns="0" bIns="0" anchor="ctr">
-            <a:spAutoFit/>
-          </a:bodyPr>
-          <a:lstStyle/>
-          <a:p>
-            <a:pPr algn="ctr"/>
+          <a:bodyPr wrap="square" lIns="0" rIns="0" tIns="0" bIns="0" anchor="ctr"/>
+          <a:lstStyle/>
+          <a:p>
+            <a:pPr algn="ctr">
+              <a:spcAft>
+                <a:spcPts val="200"/>
+              </a:spcAft>
+            </a:pPr>
             <a:r>
               <a:rPr sz="1050" b="1" i="0">
                 <a:solidFill>
@@ -5051,12 +5241,14 @@
           <a:noFill/>
         </p:spPr>
         <p:txBody>
-          <a:bodyPr wrap="none" lIns="0" rIns="0" tIns="0" bIns="0" anchor="ctr">
-            <a:spAutoFit/>
-          </a:bodyPr>
-          <a:lstStyle/>
-          <a:p>
-            <a:pPr algn="ctr"/>
+          <a:bodyPr wrap="square" lIns="0" rIns="0" tIns="0" bIns="0" anchor="ctr"/>
+          <a:lstStyle/>
+          <a:p>
+            <a:pPr algn="ctr">
+              <a:spcAft>
+                <a:spcPts val="200"/>
+              </a:spcAft>
+            </a:pPr>
             <a:r>
               <a:rPr sz="850" b="1" i="0">
                 <a:solidFill>
@@ -5086,12 +5278,14 @@
           <a:noFill/>
         </p:spPr>
         <p:txBody>
-          <a:bodyPr wrap="none" lIns="0" rIns="0" tIns="0" bIns="0" anchor="t">
-            <a:spAutoFit/>
-          </a:bodyPr>
-          <a:lstStyle/>
-          <a:p>
-            <a:pPr algn="l"/>
+          <a:bodyPr wrap="square" lIns="0" rIns="0" tIns="0" bIns="0" anchor="t"/>
+          <a:lstStyle/>
+          <a:p>
+            <a:pPr algn="l">
+              <a:spcAft>
+                <a:spcPts val="200"/>
+              </a:spcAft>
+            </a:pPr>
             <a:r>
               <a:rPr sz="2000" b="1" i="0">
                 <a:solidFill>
@@ -5121,20 +5315,86 @@
           <a:noFill/>
         </p:spPr>
         <p:txBody>
-          <a:bodyPr wrap="none" lIns="27432" rIns="27432" tIns="27432" bIns="27432" anchor="t">
-            <a:spAutoFit/>
-          </a:bodyPr>
-          <a:lstStyle/>
-          <a:p>
-            <a:pPr algn="l"/>
-            <a:r>
-              <a:rPr sz="1500" b="0" i="0">
+          <a:bodyPr wrap="square" lIns="27432" rIns="27432" tIns="27432" bIns="27432" anchor="t"/>
+          <a:lstStyle/>
+          <a:p>
+            <a:pPr algn="l">
+              <a:spcAft>
+                <a:spcPts val="200"/>
+              </a:spcAft>
+            </a:pPr>
+            <a:r>
+              <a:rPr sz="1420" b="0" i="0">
                 <a:solidFill>
                   <a:srgbClr val="17323B"/>
                 </a:solidFill>
                 <a:latin typeface="Calibri"/>
               </a:rPr>
-              <a:t>项目已经具备从需求输入、AI 对话生成、实时预览、部署分享到后台管理的主链路雏形；当前代码同时保留单体后端与微服务改造版本，适合作为教学与架构演进样板。</a:t>
+              <a:t>项目已具备从需求输入、AI 对话生成</a:t>
+            </a:r>
+          </a:p>
+          <a:p>
+            <a:pPr algn="l">
+              <a:spcAft>
+                <a:spcPts val="200"/>
+              </a:spcAft>
+            </a:pPr>
+            <a:r>
+              <a:rPr sz="1420" b="0" i="0">
+                <a:solidFill>
+                  <a:srgbClr val="17323B"/>
+                </a:solidFill>
+                <a:latin typeface="Calibri"/>
+              </a:rPr>
+              <a:t>、实时预览、部署分享到后台管理的主链</a:t>
+            </a:r>
+          </a:p>
+          <a:p>
+            <a:pPr algn="l">
+              <a:spcAft>
+                <a:spcPts val="200"/>
+              </a:spcAft>
+            </a:pPr>
+            <a:r>
+              <a:rPr sz="1420" b="0" i="0">
+                <a:solidFill>
+                  <a:srgbClr val="17323B"/>
+                </a:solidFill>
+                <a:latin typeface="Calibri"/>
+              </a:rPr>
+              <a:t>路雏形；当前代码同时保留单体后端与微</a:t>
+            </a:r>
+          </a:p>
+          <a:p>
+            <a:pPr algn="l">
+              <a:spcAft>
+                <a:spcPts val="200"/>
+              </a:spcAft>
+            </a:pPr>
+            <a:r>
+              <a:rPr sz="1420" b="0" i="0">
+                <a:solidFill>
+                  <a:srgbClr val="17323B"/>
+                </a:solidFill>
+                <a:latin typeface="Calibri"/>
+              </a:rPr>
+              <a:t>服务改造版本，适合作为教学与架构演进</a:t>
+            </a:r>
+          </a:p>
+          <a:p>
+            <a:pPr algn="l">
+              <a:spcAft>
+                <a:spcPts val="200"/>
+              </a:spcAft>
+            </a:pPr>
+            <a:r>
+              <a:rPr sz="1420" b="0" i="0">
+                <a:solidFill>
+                  <a:srgbClr val="17323B"/>
+                </a:solidFill>
+                <a:latin typeface="Calibri"/>
+              </a:rPr>
+              <a:t>样板。</a:t>
             </a:r>
           </a:p>
         </p:txBody>
@@ -5201,12 +5461,14 @@
           <a:noFill/>
         </p:spPr>
         <p:txBody>
-          <a:bodyPr wrap="none" lIns="0" rIns="0" tIns="0" bIns="0" anchor="ctr">
-            <a:spAutoFit/>
-          </a:bodyPr>
-          <a:lstStyle/>
-          <a:p>
-            <a:pPr algn="ctr"/>
+          <a:bodyPr wrap="square" lIns="0" rIns="0" tIns="0" bIns="0" anchor="ctr"/>
+          <a:lstStyle/>
+          <a:p>
+            <a:pPr algn="ctr">
+              <a:spcAft>
+                <a:spcPts val="200"/>
+              </a:spcAft>
+            </a:pPr>
             <a:r>
               <a:rPr sz="3100" b="1" i="0">
                 <a:solidFill>
@@ -5228,7 +5490,7 @@
         <p:spPr>
           <a:xfrm>
             <a:off x="5724144" y="2194560"/>
-            <a:ext cx="1115568" cy="274320"/>
+            <a:ext cx="1115568" cy="310896"/>
           </a:xfrm>
           <a:prstGeom prst="rect">
             <a:avLst/>
@@ -5236,20 +5498,54 @@
           <a:noFill/>
         </p:spPr>
         <p:txBody>
-          <a:bodyPr wrap="none" lIns="0" rIns="0" tIns="0" bIns="0" anchor="t">
-            <a:spAutoFit/>
-          </a:bodyPr>
-          <a:lstStyle/>
-          <a:p>
-            <a:pPr algn="ctr"/>
-            <a:r>
-              <a:rPr sz="1250" b="1" i="0">
+          <a:bodyPr wrap="square" lIns="0" rIns="0" tIns="0" bIns="0" anchor="t"/>
+          <a:lstStyle/>
+          <a:p>
+            <a:pPr algn="ctr">
+              <a:spcAft>
+                <a:spcPts val="200"/>
+              </a:spcAft>
+            </a:pPr>
+            <a:r>
+              <a:rPr sz="1220" b="1" i="0">
                 <a:solidFill>
                   <a:srgbClr val="17323B"/>
                 </a:solidFill>
                 <a:latin typeface="Calibri"/>
               </a:rPr>
-              <a:t>单体后端 Java 文件</a:t>
+              <a:t>单体后端</a:t>
+            </a:r>
+          </a:p>
+          <a:p>
+            <a:pPr algn="ctr">
+              <a:spcAft>
+                <a:spcPts val="200"/>
+              </a:spcAft>
+            </a:pPr>
+            <a:r>
+              <a:rPr sz="1220" b="1" i="0">
+                <a:solidFill>
+                  <a:srgbClr val="17323B"/>
+                </a:solidFill>
+                <a:latin typeface="Calibri"/>
+              </a:rPr>
+              <a:t>Java</a:t>
+            </a:r>
+          </a:p>
+          <a:p>
+            <a:pPr algn="ctr">
+              <a:spcAft>
+                <a:spcPts val="200"/>
+              </a:spcAft>
+            </a:pPr>
+            <a:r>
+              <a:rPr sz="1220" b="1" i="0">
+                <a:solidFill>
+                  <a:srgbClr val="17323B"/>
+                </a:solidFill>
+                <a:latin typeface="Calibri"/>
+              </a:rPr>
+              <a:t>文件</a:t>
             </a:r>
           </a:p>
         </p:txBody>
@@ -5262,8 +5558,8 @@
         </p:nvSpPr>
         <p:spPr>
           <a:xfrm>
-            <a:off x="5724144" y="2505456"/>
-            <a:ext cx="1115568" cy="256032"/>
+            <a:off x="5724144" y="2514600"/>
+            <a:ext cx="1115568" cy="274320"/>
           </a:xfrm>
           <a:prstGeom prst="rect">
             <a:avLst/>
@@ -5271,20 +5567,38 @@
           <a:noFill/>
         </p:spPr>
         <p:txBody>
-          <a:bodyPr wrap="none" lIns="0" rIns="0" tIns="0" bIns="0" anchor="t">
-            <a:spAutoFit/>
-          </a:bodyPr>
-          <a:lstStyle/>
-          <a:p>
-            <a:pPr algn="ctr"/>
-            <a:r>
-              <a:rPr sz="950" b="0" i="0">
+          <a:bodyPr wrap="square" lIns="0" rIns="0" tIns="0" bIns="0" anchor="t"/>
+          <a:lstStyle/>
+          <a:p>
+            <a:pPr algn="ctr">
+              <a:spcAft>
+                <a:spcPts val="200"/>
+              </a:spcAft>
+            </a:pPr>
+            <a:r>
+              <a:rPr sz="919" b="0" i="0">
                 <a:solidFill>
                   <a:srgbClr val="5B7780"/>
                 </a:solidFill>
                 <a:latin typeface="Calibri"/>
               </a:rPr>
-              <a:t>核心业务/AI/监控</a:t>
+              <a:t>核心业务/AI</a:t>
+            </a:r>
+          </a:p>
+          <a:p>
+            <a:pPr algn="ctr">
+              <a:spcAft>
+                <a:spcPts val="200"/>
+              </a:spcAft>
+            </a:pPr>
+            <a:r>
+              <a:rPr sz="919" b="0" i="0">
+                <a:solidFill>
+                  <a:srgbClr val="5B7780"/>
+                </a:solidFill>
+                <a:latin typeface="Calibri"/>
+              </a:rPr>
+              <a:t>/监控</a:t>
             </a:r>
           </a:p>
         </p:txBody>
@@ -5351,12 +5665,14 @@
           <a:noFill/>
         </p:spPr>
         <p:txBody>
-          <a:bodyPr wrap="none" lIns="0" rIns="0" tIns="0" bIns="0" anchor="ctr">
-            <a:spAutoFit/>
-          </a:bodyPr>
-          <a:lstStyle/>
-          <a:p>
-            <a:pPr algn="ctr"/>
+          <a:bodyPr wrap="square" lIns="0" rIns="0" tIns="0" bIns="0" anchor="ctr"/>
+          <a:lstStyle/>
+          <a:p>
+            <a:pPr algn="ctr">
+              <a:spcAft>
+                <a:spcPts val="200"/>
+              </a:spcAft>
+            </a:pPr>
             <a:r>
               <a:rPr sz="3100" b="1" i="0">
                 <a:solidFill>
@@ -5378,7 +5694,7 @@
         <p:spPr>
           <a:xfrm>
             <a:off x="7443216" y="2194560"/>
-            <a:ext cx="1115568" cy="274320"/>
+            <a:ext cx="1115568" cy="310896"/>
           </a:xfrm>
           <a:prstGeom prst="rect">
             <a:avLst/>
@@ -5386,14 +5702,16 @@
           <a:noFill/>
         </p:spPr>
         <p:txBody>
-          <a:bodyPr wrap="none" lIns="0" rIns="0" tIns="0" bIns="0" anchor="t">
-            <a:spAutoFit/>
-          </a:bodyPr>
-          <a:lstStyle/>
-          <a:p>
-            <a:pPr algn="ctr"/>
-            <a:r>
-              <a:rPr sz="1250" b="1" i="0">
+          <a:bodyPr wrap="square" lIns="0" rIns="0" tIns="0" bIns="0" anchor="t"/>
+          <a:lstStyle/>
+          <a:p>
+            <a:pPr algn="ctr">
+              <a:spcAft>
+                <a:spcPts val="200"/>
+              </a:spcAft>
+            </a:pPr>
+            <a:r>
+              <a:rPr sz="1220" b="1" i="0">
                 <a:solidFill>
                   <a:srgbClr val="17323B"/>
                 </a:solidFill>
@@ -5412,8 +5730,8 @@
         </p:nvSpPr>
         <p:spPr>
           <a:xfrm>
-            <a:off x="7443216" y="2505456"/>
-            <a:ext cx="1115568" cy="256032"/>
+            <a:off x="7443216" y="2514600"/>
+            <a:ext cx="1115568" cy="274320"/>
           </a:xfrm>
           <a:prstGeom prst="rect">
             <a:avLst/>
@@ -5421,20 +5739,38 @@
           <a:noFill/>
         </p:spPr>
         <p:txBody>
-          <a:bodyPr wrap="none" lIns="0" rIns="0" tIns="0" bIns="0" anchor="t">
-            <a:spAutoFit/>
-          </a:bodyPr>
-          <a:lstStyle/>
-          <a:p>
-            <a:pPr algn="ctr"/>
-            <a:r>
-              <a:rPr sz="950" b="0" i="0">
+          <a:bodyPr wrap="square" lIns="0" rIns="0" tIns="0" bIns="0" anchor="t"/>
+          <a:lstStyle/>
+          <a:p>
+            <a:pPr algn="ctr">
+              <a:spcAft>
+                <a:spcPts val="200"/>
+              </a:spcAft>
+            </a:pPr>
+            <a:r>
+              <a:rPr sz="919" b="0" i="0">
                 <a:solidFill>
                   <a:srgbClr val="5B7780"/>
                 </a:solidFill>
                 <a:latin typeface="Calibri"/>
               </a:rPr>
-              <a:t>Vue 3 + TS</a:t>
+              <a:t>Vue 3 +</a:t>
+            </a:r>
+          </a:p>
+          <a:p>
+            <a:pPr algn="ctr">
+              <a:spcAft>
+                <a:spcPts val="200"/>
+              </a:spcAft>
+            </a:pPr>
+            <a:r>
+              <a:rPr sz="919" b="0" i="0">
+                <a:solidFill>
+                  <a:srgbClr val="5B7780"/>
+                </a:solidFill>
+                <a:latin typeface="Calibri"/>
+              </a:rPr>
+              <a:t>TS</a:t>
             </a:r>
           </a:p>
         </p:txBody>
@@ -5501,12 +5837,14 @@
           <a:noFill/>
         </p:spPr>
         <p:txBody>
-          <a:bodyPr wrap="none" lIns="0" rIns="0" tIns="0" bIns="0" anchor="ctr">
-            <a:spAutoFit/>
-          </a:bodyPr>
-          <a:lstStyle/>
-          <a:p>
-            <a:pPr algn="ctr"/>
+          <a:bodyPr wrap="square" lIns="0" rIns="0" tIns="0" bIns="0" anchor="ctr"/>
+          <a:lstStyle/>
+          <a:p>
+            <a:pPr algn="ctr">
+              <a:spcAft>
+                <a:spcPts val="200"/>
+              </a:spcAft>
+            </a:pPr>
             <a:r>
               <a:rPr sz="3100" b="1" i="0">
                 <a:solidFill>
@@ -5528,7 +5866,7 @@
         <p:spPr>
           <a:xfrm>
             <a:off x="9162288" y="2194560"/>
-            <a:ext cx="1115568" cy="274320"/>
+            <a:ext cx="1115568" cy="310896"/>
           </a:xfrm>
           <a:prstGeom prst="rect">
             <a:avLst/>
@@ -5536,20 +5874,38 @@
           <a:noFill/>
         </p:spPr>
         <p:txBody>
-          <a:bodyPr wrap="none" lIns="0" rIns="0" tIns="0" bIns="0" anchor="t">
-            <a:spAutoFit/>
-          </a:bodyPr>
-          <a:lstStyle/>
-          <a:p>
-            <a:pPr algn="ctr"/>
-            <a:r>
-              <a:rPr sz="1250" b="1" i="0">
+          <a:bodyPr wrap="square" lIns="0" rIns="0" tIns="0" bIns="0" anchor="t"/>
+          <a:lstStyle/>
+          <a:p>
+            <a:pPr algn="ctr">
+              <a:spcAft>
+                <a:spcPts val="200"/>
+              </a:spcAft>
+            </a:pPr>
+            <a:r>
+              <a:rPr sz="1220" b="1" i="0">
                 <a:solidFill>
                   <a:srgbClr val="17323B"/>
                 </a:solidFill>
                 <a:latin typeface="Calibri"/>
               </a:rPr>
-              <a:t>Maven POM</a:t>
+              <a:t>Maven</a:t>
+            </a:r>
+          </a:p>
+          <a:p>
+            <a:pPr algn="ctr">
+              <a:spcAft>
+                <a:spcPts val="200"/>
+              </a:spcAft>
+            </a:pPr>
+            <a:r>
+              <a:rPr sz="1220" b="1" i="0">
+                <a:solidFill>
+                  <a:srgbClr val="17323B"/>
+                </a:solidFill>
+                <a:latin typeface="Calibri"/>
+              </a:rPr>
+              <a:t>POM</a:t>
             </a:r>
           </a:p>
         </p:txBody>
@@ -5562,8 +5918,8 @@
         </p:nvSpPr>
         <p:spPr>
           <a:xfrm>
-            <a:off x="9162288" y="2505456"/>
-            <a:ext cx="1115568" cy="256032"/>
+            <a:off x="9162288" y="2514600"/>
+            <a:ext cx="1115568" cy="274320"/>
           </a:xfrm>
           <a:prstGeom prst="rect">
             <a:avLst/>
@@ -5571,20 +5927,38 @@
           <a:noFill/>
         </p:spPr>
         <p:txBody>
-          <a:bodyPr wrap="none" lIns="0" rIns="0" tIns="0" bIns="0" anchor="t">
-            <a:spAutoFit/>
-          </a:bodyPr>
-          <a:lstStyle/>
-          <a:p>
-            <a:pPr algn="ctr"/>
-            <a:r>
-              <a:rPr sz="950" b="0" i="0">
+          <a:bodyPr wrap="square" lIns="0" rIns="0" tIns="0" bIns="0" anchor="t"/>
+          <a:lstStyle/>
+          <a:p>
+            <a:pPr algn="ctr">
+              <a:spcAft>
+                <a:spcPts val="200"/>
+              </a:spcAft>
+            </a:pPr>
+            <a:r>
+              <a:rPr sz="919" b="0" i="0">
                 <a:solidFill>
                   <a:srgbClr val="5B7780"/>
                 </a:solidFill>
                 <a:latin typeface="Calibri"/>
               </a:rPr>
-              <a:t>单体 + 微服务</a:t>
+              <a:t>单体 +</a:t>
+            </a:r>
+          </a:p>
+          <a:p>
+            <a:pPr algn="ctr">
+              <a:spcAft>
+                <a:spcPts val="200"/>
+              </a:spcAft>
+            </a:pPr>
+            <a:r>
+              <a:rPr sz="919" b="0" i="0">
+                <a:solidFill>
+                  <a:srgbClr val="5B7780"/>
+                </a:solidFill>
+                <a:latin typeface="Calibri"/>
+              </a:rPr>
+              <a:t>微服务</a:t>
             </a:r>
           </a:p>
         </p:txBody>
@@ -5651,12 +6025,14 @@
           <a:noFill/>
         </p:spPr>
         <p:txBody>
-          <a:bodyPr wrap="none" lIns="0" rIns="0" tIns="0" bIns="0" anchor="ctr">
-            <a:spAutoFit/>
-          </a:bodyPr>
-          <a:lstStyle/>
-          <a:p>
-            <a:pPr algn="ctr"/>
+          <a:bodyPr wrap="square" lIns="0" rIns="0" tIns="0" bIns="0" anchor="ctr"/>
+          <a:lstStyle/>
+          <a:p>
+            <a:pPr algn="ctr">
+              <a:spcAft>
+                <a:spcPts val="200"/>
+              </a:spcAft>
+            </a:pPr>
             <a:r>
               <a:rPr sz="3100" b="1" i="0">
                 <a:solidFill>
@@ -5678,7 +6054,7 @@
         <p:spPr>
           <a:xfrm>
             <a:off x="10881360" y="2194560"/>
-            <a:ext cx="676656" cy="274320"/>
+            <a:ext cx="676656" cy="310896"/>
           </a:xfrm>
           <a:prstGeom prst="rect">
             <a:avLst/>
@@ -5686,20 +6062,38 @@
           <a:noFill/>
         </p:spPr>
         <p:txBody>
-          <a:bodyPr wrap="none" lIns="0" rIns="0" tIns="0" bIns="0" anchor="t">
-            <a:spAutoFit/>
-          </a:bodyPr>
-          <a:lstStyle/>
-          <a:p>
-            <a:pPr algn="ctr"/>
-            <a:r>
-              <a:rPr sz="1250" b="1" i="0">
+          <a:bodyPr wrap="square" lIns="0" rIns="0" tIns="0" bIns="0" anchor="t"/>
+          <a:lstStyle/>
+          <a:p>
+            <a:pPr algn="ctr">
+              <a:spcAft>
+                <a:spcPts val="200"/>
+              </a:spcAft>
+            </a:pPr>
+            <a:r>
+              <a:rPr sz="1220" b="1" i="0">
                 <a:solidFill>
                   <a:srgbClr val="17323B"/>
                 </a:solidFill>
                 <a:latin typeface="Calibri"/>
               </a:rPr>
-              <a:t>近 7 天提交</a:t>
+              <a:t>近 7</a:t>
+            </a:r>
+          </a:p>
+          <a:p>
+            <a:pPr algn="ctr">
+              <a:spcAft>
+                <a:spcPts val="200"/>
+              </a:spcAft>
+            </a:pPr>
+            <a:r>
+              <a:rPr sz="1220" b="1" i="0">
+                <a:solidFill>
+                  <a:srgbClr val="17323B"/>
+                </a:solidFill>
+                <a:latin typeface="Calibri"/>
+              </a:rPr>
+              <a:t>天提交</a:t>
             </a:r>
           </a:p>
         </p:txBody>
@@ -5712,8 +6106,8 @@
         </p:nvSpPr>
         <p:spPr>
           <a:xfrm>
-            <a:off x="10881360" y="2505456"/>
-            <a:ext cx="676656" cy="256032"/>
+            <a:off x="10881360" y="2514600"/>
+            <a:ext cx="676656" cy="274320"/>
           </a:xfrm>
           <a:prstGeom prst="rect">
             <a:avLst/>
@@ -5721,14 +6115,16 @@
           <a:noFill/>
         </p:spPr>
         <p:txBody>
-          <a:bodyPr wrap="none" lIns="0" rIns="0" tIns="0" bIns="0" anchor="t">
-            <a:spAutoFit/>
-          </a:bodyPr>
-          <a:lstStyle/>
-          <a:p>
-            <a:pPr algn="ctr"/>
-            <a:r>
-              <a:rPr sz="950" b="0" i="0">
+          <a:bodyPr wrap="square" lIns="0" rIns="0" tIns="0" bIns="0" anchor="t"/>
+          <a:lstStyle/>
+          <a:p>
+            <a:pPr algn="ctr">
+              <a:spcAft>
+                <a:spcPts val="200"/>
+              </a:spcAft>
+            </a:pPr>
+            <a:r>
+              <a:rPr sz="919" b="0" i="0">
                 <a:solidFill>
                   <a:srgbClr val="5B7780"/>
                 </a:solidFill>
@@ -5891,87 +6287,91 @@
           <a:noFill/>
         </p:spPr>
         <p:txBody>
-          <a:bodyPr wrap="none" lIns="0" rIns="0" tIns="0" bIns="0" anchor="ctr">
+          <a:bodyPr wrap="square" lIns="0" rIns="0" tIns="0" bIns="0" anchor="ctr"/>
+          <a:lstStyle/>
+          <a:p>
+            <a:pPr algn="ctr">
+              <a:spcAft>
+                <a:spcPts val="200"/>
+              </a:spcAft>
+            </a:pPr>
+            <a:r>
+              <a:rPr sz="850" b="1" i="0">
+                <a:solidFill>
+                  <a:srgbClr val="FFFFFF"/>
+                </a:solidFill>
+                <a:latin typeface="Calibri"/>
+              </a:rPr>
+              <a:t>WEB</a:t>
+            </a:r>
+          </a:p>
+        </p:txBody>
+      </p:sp>
+      <p:sp>
+        <p:nvSpPr>
+          <p:cNvPr id="34" name="TextBox 33"/>
+          <p:cNvSpPr txBox="1"/>
+          <p:nvPr/>
+        </p:nvSpPr>
+        <p:spPr>
+          <a:xfrm>
+            <a:off x="6419088" y="3374136"/>
+            <a:ext cx="1792224" cy="320040"/>
+          </a:xfrm>
+          <a:prstGeom prst="rect">
+            <a:avLst/>
+          </a:prstGeom>
+          <a:noFill/>
+        </p:spPr>
+        <p:txBody>
+          <a:bodyPr wrap="square" lIns="0" rIns="0" tIns="0" bIns="0" anchor="t"/>
+          <a:lstStyle/>
+          <a:p>
+            <a:pPr algn="l">
+              <a:spcAft>
+                <a:spcPts val="200"/>
+              </a:spcAft>
+            </a:pPr>
+            <a:r>
+              <a:rPr sz="1600" b="1" i="0">
+                <a:solidFill>
+                  <a:srgbClr val="21295C"/>
+                </a:solidFill>
+                <a:latin typeface="Calibri"/>
+              </a:rPr>
+              <a:t>产品入口</a:t>
+            </a:r>
+          </a:p>
+        </p:txBody>
+      </p:sp>
+      <p:sp>
+        <p:nvSpPr>
+          <p:cNvPr id="35" name="TextBox 34"/>
+          <p:cNvSpPr txBox="1"/>
+          <p:nvPr/>
+        </p:nvSpPr>
+        <p:spPr>
+          <a:xfrm>
+            <a:off x="5870448" y="3922776"/>
+            <a:ext cx="2331720" cy="576071"/>
+          </a:xfrm>
+          <a:prstGeom prst="rect">
+            <a:avLst/>
+          </a:prstGeom>
+          <a:noFill/>
+        </p:spPr>
+        <p:txBody>
+          <a:bodyPr wrap="square" lIns="73152" rIns="73152" tIns="36576" bIns="36576">
             <a:spAutoFit/>
           </a:bodyPr>
           <a:lstStyle/>
           <a:p>
-            <a:pPr algn="ctr"/>
-            <a:r>
-              <a:rPr sz="850" b="1" i="0">
-                <a:solidFill>
-                  <a:srgbClr val="FFFFFF"/>
-                </a:solidFill>
-                <a:latin typeface="Calibri"/>
-              </a:rPr>
-              <a:t>WEB</a:t>
-            </a:r>
-          </a:p>
-        </p:txBody>
-      </p:sp>
-      <p:sp>
-        <p:nvSpPr>
-          <p:cNvPr id="34" name="TextBox 33"/>
-          <p:cNvSpPr txBox="1"/>
-          <p:nvPr/>
-        </p:nvSpPr>
-        <p:spPr>
-          <a:xfrm>
-            <a:off x="6419088" y="3374136"/>
-            <a:ext cx="1792224" cy="320040"/>
-          </a:xfrm>
-          <a:prstGeom prst="rect">
-            <a:avLst/>
-          </a:prstGeom>
-          <a:noFill/>
-        </p:spPr>
-        <p:txBody>
-          <a:bodyPr wrap="none" lIns="0" rIns="0" tIns="0" bIns="0" anchor="t">
-            <a:spAutoFit/>
-          </a:bodyPr>
-          <a:lstStyle/>
-          <a:p>
-            <a:pPr algn="l"/>
-            <a:r>
-              <a:rPr sz="1600" b="1" i="0">
-                <a:solidFill>
-                  <a:srgbClr val="21295C"/>
-                </a:solidFill>
-                <a:latin typeface="Calibri"/>
-              </a:rPr>
-              <a:t>产品入口</a:t>
-            </a:r>
-          </a:p>
-        </p:txBody>
-      </p:sp>
-      <p:sp>
-        <p:nvSpPr>
-          <p:cNvPr id="35" name="TextBox 34"/>
-          <p:cNvSpPr txBox="1"/>
-          <p:nvPr/>
-        </p:nvSpPr>
-        <p:spPr>
-          <a:xfrm>
-            <a:off x="5870448" y="3922776"/>
-            <a:ext cx="2331720" cy="576071"/>
-          </a:xfrm>
-          <a:prstGeom prst="rect">
-            <a:avLst/>
-          </a:prstGeom>
-          <a:noFill/>
-        </p:spPr>
-        <p:txBody>
-          <a:bodyPr wrap="none" lIns="54864" rIns="54864" tIns="36576" bIns="36576">
-            <a:spAutoFit/>
-          </a:bodyPr>
-          <a:lstStyle/>
-          <a:p>
             <a:pPr>
               <a:lnSpc>
-                <a:spcPct val="105000"/>
+                <a:spcPct val="100000"/>
               </a:lnSpc>
               <a:spcAft>
-                <a:spcPts val="600"/>
+                <a:spcPts val="400"/>
               </a:spcAft>
             </a:pPr>
             <a:r>
@@ -5987,10 +6387,10 @@
           <a:p>
             <a:pPr>
               <a:lnSpc>
-                <a:spcPct val="105000"/>
+                <a:spcPct val="100000"/>
               </a:lnSpc>
               <a:spcAft>
-                <a:spcPts val="600"/>
+                <a:spcPts val="400"/>
               </a:spcAft>
             </a:pPr>
             <a:r>
@@ -6006,10 +6406,10 @@
           <a:p>
             <a:pPr>
               <a:lnSpc>
-                <a:spcPct val="105000"/>
+                <a:spcPct val="100000"/>
               </a:lnSpc>
               <a:spcAft>
-                <a:spcPts val="600"/>
+                <a:spcPts val="400"/>
               </a:spcAft>
             </a:pPr>
             <a:r>
@@ -6176,87 +6576,91 @@
           <a:noFill/>
         </p:spPr>
         <p:txBody>
-          <a:bodyPr wrap="none" lIns="0" rIns="0" tIns="0" bIns="0" anchor="ctr">
+          <a:bodyPr wrap="square" lIns="0" rIns="0" tIns="0" bIns="0" anchor="ctr"/>
+          <a:lstStyle/>
+          <a:p>
+            <a:pPr algn="ctr">
+              <a:spcAft>
+                <a:spcPts val="200"/>
+              </a:spcAft>
+            </a:pPr>
+            <a:r>
+              <a:rPr sz="850" b="1" i="0">
+                <a:solidFill>
+                  <a:srgbClr val="FFFFFF"/>
+                </a:solidFill>
+                <a:latin typeface="Calibri"/>
+              </a:rPr>
+              <a:t>API</a:t>
+            </a:r>
+          </a:p>
+        </p:txBody>
+      </p:sp>
+      <p:sp>
+        <p:nvSpPr>
+          <p:cNvPr id="40" name="TextBox 39"/>
+          <p:cNvSpPr txBox="1"/>
+          <p:nvPr/>
+        </p:nvSpPr>
+        <p:spPr>
+          <a:xfrm>
+            <a:off x="9592056" y="3374136"/>
+            <a:ext cx="1792224" cy="320040"/>
+          </a:xfrm>
+          <a:prstGeom prst="rect">
+            <a:avLst/>
+          </a:prstGeom>
+          <a:noFill/>
+        </p:spPr>
+        <p:txBody>
+          <a:bodyPr wrap="square" lIns="0" rIns="0" tIns="0" bIns="0" anchor="t"/>
+          <a:lstStyle/>
+          <a:p>
+            <a:pPr algn="l">
+              <a:spcAft>
+                <a:spcPts val="200"/>
+              </a:spcAft>
+            </a:pPr>
+            <a:r>
+              <a:rPr sz="1600" b="1" i="0">
+                <a:solidFill>
+                  <a:srgbClr val="21295C"/>
+                </a:solidFill>
+                <a:latin typeface="Calibri"/>
+              </a:rPr>
+              <a:t>后端底座</a:t>
+            </a:r>
+          </a:p>
+        </p:txBody>
+      </p:sp>
+      <p:sp>
+        <p:nvSpPr>
+          <p:cNvPr id="41" name="TextBox 40"/>
+          <p:cNvSpPr txBox="1"/>
+          <p:nvPr/>
+        </p:nvSpPr>
+        <p:spPr>
+          <a:xfrm>
+            <a:off x="9043416" y="3922776"/>
+            <a:ext cx="2331720" cy="576071"/>
+          </a:xfrm>
+          <a:prstGeom prst="rect">
+            <a:avLst/>
+          </a:prstGeom>
+          <a:noFill/>
+        </p:spPr>
+        <p:txBody>
+          <a:bodyPr wrap="square" lIns="73152" rIns="73152" tIns="36576" bIns="36576">
             <a:spAutoFit/>
           </a:bodyPr>
           <a:lstStyle/>
           <a:p>
-            <a:pPr algn="ctr"/>
-            <a:r>
-              <a:rPr sz="850" b="1" i="0">
-                <a:solidFill>
-                  <a:srgbClr val="FFFFFF"/>
-                </a:solidFill>
-                <a:latin typeface="Calibri"/>
-              </a:rPr>
-              <a:t>API</a:t>
-            </a:r>
-          </a:p>
-        </p:txBody>
-      </p:sp>
-      <p:sp>
-        <p:nvSpPr>
-          <p:cNvPr id="40" name="TextBox 39"/>
-          <p:cNvSpPr txBox="1"/>
-          <p:nvPr/>
-        </p:nvSpPr>
-        <p:spPr>
-          <a:xfrm>
-            <a:off x="9592056" y="3374136"/>
-            <a:ext cx="1792224" cy="320040"/>
-          </a:xfrm>
-          <a:prstGeom prst="rect">
-            <a:avLst/>
-          </a:prstGeom>
-          <a:noFill/>
-        </p:spPr>
-        <p:txBody>
-          <a:bodyPr wrap="none" lIns="0" rIns="0" tIns="0" bIns="0" anchor="t">
-            <a:spAutoFit/>
-          </a:bodyPr>
-          <a:lstStyle/>
-          <a:p>
-            <a:pPr algn="l"/>
-            <a:r>
-              <a:rPr sz="1600" b="1" i="0">
-                <a:solidFill>
-                  <a:srgbClr val="21295C"/>
-                </a:solidFill>
-                <a:latin typeface="Calibri"/>
-              </a:rPr>
-              <a:t>后端底座</a:t>
-            </a:r>
-          </a:p>
-        </p:txBody>
-      </p:sp>
-      <p:sp>
-        <p:nvSpPr>
-          <p:cNvPr id="41" name="TextBox 40"/>
-          <p:cNvSpPr txBox="1"/>
-          <p:nvPr/>
-        </p:nvSpPr>
-        <p:spPr>
-          <a:xfrm>
-            <a:off x="9043416" y="3922776"/>
-            <a:ext cx="2331720" cy="576071"/>
-          </a:xfrm>
-          <a:prstGeom prst="rect">
-            <a:avLst/>
-          </a:prstGeom>
-          <a:noFill/>
-        </p:spPr>
-        <p:txBody>
-          <a:bodyPr wrap="none" lIns="54864" rIns="54864" tIns="36576" bIns="36576">
-            <a:spAutoFit/>
-          </a:bodyPr>
-          <a:lstStyle/>
-          <a:p>
             <a:pPr>
               <a:lnSpc>
-                <a:spcPct val="105000"/>
+                <a:spcPct val="100000"/>
               </a:lnSpc>
               <a:spcAft>
-                <a:spcPts val="600"/>
+                <a:spcPts val="100"/>
               </a:spcAft>
             </a:pPr>
             <a:r>
@@ -6266,16 +6670,16 @@
                 </a:solidFill>
                 <a:latin typeface="Calibri"/>
               </a:rPr>
-              <a:t>Spring Boot 3 / Java 21</a:t>
+              <a:t>Spring Boot</a:t>
             </a:r>
           </a:p>
           <a:p>
             <a:pPr>
               <a:lnSpc>
-                <a:spcPct val="105000"/>
+                <a:spcPct val="100000"/>
               </a:lnSpc>
               <a:spcAft>
-                <a:spcPts val="600"/>
+                <a:spcPts val="400"/>
               </a:spcAft>
             </a:pPr>
             <a:r>
@@ -6285,16 +6689,16 @@
                 </a:solidFill>
                 <a:latin typeface="Calibri"/>
               </a:rPr>
-              <a:t>LangChain4j + LangGraph4j</a:t>
+              <a:t>3 / Java 21</a:t>
             </a:r>
           </a:p>
           <a:p>
             <a:pPr>
               <a:lnSpc>
-                <a:spcPct val="105000"/>
+                <a:spcPct val="100000"/>
               </a:lnSpc>
               <a:spcAft>
-                <a:spcPts val="600"/>
+                <a:spcPts val="100"/>
               </a:spcAft>
             </a:pPr>
             <a:r>
@@ -6304,7 +6708,102 @@
                 </a:solidFill>
                 <a:latin typeface="Calibri"/>
               </a:rPr>
-              <a:t>Redis/MySQL/COS/Prometheus</a:t>
+              <a:t>LangChain4j</a:t>
+            </a:r>
+          </a:p>
+          <a:p>
+            <a:pPr>
+              <a:lnSpc>
+                <a:spcPct val="100000"/>
+              </a:lnSpc>
+              <a:spcAft>
+                <a:spcPts val="100"/>
+              </a:spcAft>
+            </a:pPr>
+            <a:r>
+              <a:rPr sz="1220">
+                <a:solidFill>
+                  <a:srgbClr val="17323B"/>
+                </a:solidFill>
+                <a:latin typeface="Calibri"/>
+              </a:rPr>
+              <a:t>+</a:t>
+            </a:r>
+          </a:p>
+          <a:p>
+            <a:pPr>
+              <a:lnSpc>
+                <a:spcPct val="100000"/>
+              </a:lnSpc>
+              <a:spcAft>
+                <a:spcPts val="400"/>
+              </a:spcAft>
+            </a:pPr>
+            <a:r>
+              <a:rPr sz="1220">
+                <a:solidFill>
+                  <a:srgbClr val="17323B"/>
+                </a:solidFill>
+                <a:latin typeface="Calibri"/>
+              </a:rPr>
+              <a:t>LangGraph4j</a:t>
+            </a:r>
+          </a:p>
+          <a:p>
+            <a:pPr>
+              <a:lnSpc>
+                <a:spcPct val="100000"/>
+              </a:lnSpc>
+              <a:spcAft>
+                <a:spcPts val="100"/>
+              </a:spcAft>
+            </a:pPr>
+            <a:r>
+              <a:rPr sz="1220">
+                <a:solidFill>
+                  <a:srgbClr val="17323B"/>
+                </a:solidFill>
+                <a:latin typeface="Calibri"/>
+              </a:rPr>
+              <a:t>Redis/MySQL/</a:t>
+            </a:r>
+          </a:p>
+          <a:p>
+            <a:pPr>
+              <a:lnSpc>
+                <a:spcPct val="100000"/>
+              </a:lnSpc>
+              <a:spcAft>
+                <a:spcPts val="100"/>
+              </a:spcAft>
+            </a:pPr>
+            <a:r>
+              <a:rPr sz="1220">
+                <a:solidFill>
+                  <a:srgbClr val="17323B"/>
+                </a:solidFill>
+                <a:latin typeface="Calibri"/>
+              </a:rPr>
+              <a:t>COS/Promethe</a:t>
+            </a:r>
+          </a:p>
+          <a:p>
+            <a:pPr>
+              <a:lnSpc>
+                <a:spcPct val="100000"/>
+              </a:lnSpc>
+              <a:spcAft>
+                <a:spcPts val="400"/>
+              </a:spcAft>
+            </a:pPr>
+            <a:r>
+              <a:rPr sz="1220">
+                <a:solidFill>
+                  <a:srgbClr val="17323B"/>
+                </a:solidFill>
+                <a:latin typeface="Calibri"/>
+              </a:rPr>
+              <a:t>us</a:t>
             </a:r>
           </a:p>
         </p:txBody>
@@ -6326,12 +6825,14 @@
           <a:noFill/>
         </p:spPr>
         <p:txBody>
-          <a:bodyPr wrap="none" lIns="0" rIns="0" tIns="0" bIns="0" anchor="t">
-            <a:spAutoFit/>
-          </a:bodyPr>
-          <a:lstStyle/>
-          <a:p>
-            <a:pPr algn="l"/>
+          <a:bodyPr wrap="square" lIns="0" rIns="0" tIns="0" bIns="0" anchor="t"/>
+          <a:lstStyle/>
+          <a:p>
+            <a:pPr algn="l">
+              <a:spcAft>
+                <a:spcPts val="200"/>
+              </a:spcAft>
+            </a:pPr>
             <a:r>
               <a:rPr sz="1050" b="0" i="0">
                 <a:solidFill>
@@ -6522,12 +7023,14 @@
           <a:noFill/>
         </p:spPr>
         <p:txBody>
-          <a:bodyPr wrap="none" lIns="0" rIns="0" tIns="0" bIns="0" anchor="ctr">
-            <a:spAutoFit/>
-          </a:bodyPr>
-          <a:lstStyle/>
-          <a:p>
-            <a:pPr algn="ctr"/>
+          <a:bodyPr wrap="square" lIns="0" rIns="0" tIns="0" bIns="0" anchor="ctr"/>
+          <a:lstStyle/>
+          <a:p>
+            <a:pPr algn="ctr">
+              <a:spcAft>
+                <a:spcPts val="200"/>
+              </a:spcAft>
+            </a:pPr>
             <a:r>
               <a:rPr sz="900" b="1" i="0">
                 <a:solidFill>
@@ -6557,12 +7060,14 @@
           <a:noFill/>
         </p:spPr>
         <p:txBody>
-          <a:bodyPr wrap="none" lIns="0" rIns="0" tIns="0" bIns="0" anchor="t">
-            <a:spAutoFit/>
-          </a:bodyPr>
-          <a:lstStyle/>
-          <a:p>
-            <a:pPr algn="l"/>
+          <a:bodyPr wrap="square" lIns="0" rIns="0" tIns="0" bIns="0" anchor="t"/>
+          <a:lstStyle/>
+          <a:p>
+            <a:pPr algn="l">
+              <a:spcAft>
+                <a:spcPts val="200"/>
+              </a:spcAft>
+            </a:pPr>
             <a:r>
               <a:rPr sz="3400" b="1" i="0">
                 <a:solidFill>
@@ -6584,7 +7089,7 @@
         <p:spPr>
           <a:xfrm>
             <a:off x="1152144" y="841248"/>
-            <a:ext cx="8046720" cy="256032"/>
+            <a:ext cx="8046720" cy="274320"/>
           </a:xfrm>
           <a:prstGeom prst="rect">
             <a:avLst/>
@@ -6592,12 +7097,14 @@
           <a:noFill/>
         </p:spPr>
         <p:txBody>
-          <a:bodyPr wrap="none" lIns="0" rIns="0" tIns="0" bIns="0" anchor="t">
-            <a:spAutoFit/>
-          </a:bodyPr>
-          <a:lstStyle/>
-          <a:p>
-            <a:pPr algn="l"/>
+          <a:bodyPr wrap="square" lIns="0" rIns="0" tIns="0" bIns="0" anchor="t"/>
+          <a:lstStyle/>
+          <a:p>
+            <a:pPr algn="l">
+              <a:spcAft>
+                <a:spcPts val="200"/>
+              </a:spcAft>
+            </a:pPr>
             <a:r>
               <a:rPr sz="1150" b="0" i="0">
                 <a:solidFill>
@@ -6672,12 +7179,14 @@
           <a:noFill/>
         </p:spPr>
         <p:txBody>
-          <a:bodyPr wrap="none" lIns="0" rIns="0" tIns="0" bIns="0" anchor="ctr">
-            <a:spAutoFit/>
-          </a:bodyPr>
-          <a:lstStyle/>
-          <a:p>
-            <a:pPr algn="ctr"/>
+          <a:bodyPr wrap="square" lIns="0" rIns="0" tIns="0" bIns="0" anchor="ctr"/>
+          <a:lstStyle/>
+          <a:p>
+            <a:pPr algn="ctr">
+              <a:spcAft>
+                <a:spcPts val="200"/>
+              </a:spcAft>
+            </a:pPr>
             <a:r>
               <a:rPr sz="1050" b="1" i="0">
                 <a:solidFill>
@@ -6842,87 +7351,91 @@
           <a:noFill/>
         </p:spPr>
         <p:txBody>
-          <a:bodyPr wrap="none" lIns="0" rIns="0" tIns="0" bIns="0" anchor="ctr">
+          <a:bodyPr wrap="square" lIns="0" rIns="0" tIns="0" bIns="0" anchor="ctr"/>
+          <a:lstStyle/>
+          <a:p>
+            <a:pPr algn="ctr">
+              <a:spcAft>
+                <a:spcPts val="200"/>
+              </a:spcAft>
+            </a:pPr>
+            <a:r>
+              <a:rPr sz="850" b="1" i="0">
+                <a:solidFill>
+                  <a:srgbClr val="FFFFFF"/>
+                </a:solidFill>
+                <a:latin typeface="Calibri"/>
+              </a:rPr>
+              <a:t>GEN</a:t>
+            </a:r>
+          </a:p>
+        </p:txBody>
+      </p:sp>
+      <p:sp>
+        <p:nvSpPr>
+          <p:cNvPr id="12" name="TextBox 11"/>
+          <p:cNvSpPr txBox="1"/>
+          <p:nvPr/>
+        </p:nvSpPr>
+        <p:spPr>
+          <a:xfrm>
+            <a:off x="1517904" y="1517904"/>
+            <a:ext cx="3986783" cy="320040"/>
+          </a:xfrm>
+          <a:prstGeom prst="rect">
+            <a:avLst/>
+          </a:prstGeom>
+          <a:noFill/>
+        </p:spPr>
+        <p:txBody>
+          <a:bodyPr wrap="square" lIns="0" rIns="0" tIns="0" bIns="0" anchor="t"/>
+          <a:lstStyle/>
+          <a:p>
+            <a:pPr algn="l">
+              <a:spcAft>
+                <a:spcPts val="200"/>
+              </a:spcAft>
+            </a:pPr>
+            <a:r>
+              <a:rPr sz="1800" b="1" i="0">
+                <a:solidFill>
+                  <a:srgbClr val="21295C"/>
+                </a:solidFill>
+                <a:latin typeface="Calibri"/>
+              </a:rPr>
+              <a:t>智能代码生成</a:t>
+            </a:r>
+          </a:p>
+        </p:txBody>
+      </p:sp>
+      <p:sp>
+        <p:nvSpPr>
+          <p:cNvPr id="13" name="TextBox 12"/>
+          <p:cNvSpPr txBox="1"/>
+          <p:nvPr/>
+        </p:nvSpPr>
+        <p:spPr>
+          <a:xfrm>
+            <a:off x="969264" y="2066543"/>
+            <a:ext cx="4526280" cy="822959"/>
+          </a:xfrm>
+          <a:prstGeom prst="rect">
+            <a:avLst/>
+          </a:prstGeom>
+          <a:noFill/>
+        </p:spPr>
+        <p:txBody>
+          <a:bodyPr wrap="square" lIns="73152" rIns="73152" tIns="36576" bIns="36576">
             <a:spAutoFit/>
           </a:bodyPr>
           <a:lstStyle/>
           <a:p>
-            <a:pPr algn="ctr"/>
-            <a:r>
-              <a:rPr sz="850" b="1" i="0">
-                <a:solidFill>
-                  <a:srgbClr val="FFFFFF"/>
-                </a:solidFill>
-                <a:latin typeface="Calibri"/>
-              </a:rPr>
-              <a:t>GEN</a:t>
-            </a:r>
-          </a:p>
-        </p:txBody>
-      </p:sp>
-      <p:sp>
-        <p:nvSpPr>
-          <p:cNvPr id="12" name="TextBox 11"/>
-          <p:cNvSpPr txBox="1"/>
-          <p:nvPr/>
-        </p:nvSpPr>
-        <p:spPr>
-          <a:xfrm>
-            <a:off x="1517904" y="1517904"/>
-            <a:ext cx="3986783" cy="320040"/>
-          </a:xfrm>
-          <a:prstGeom prst="rect">
-            <a:avLst/>
-          </a:prstGeom>
-          <a:noFill/>
-        </p:spPr>
-        <p:txBody>
-          <a:bodyPr wrap="none" lIns="0" rIns="0" tIns="0" bIns="0" anchor="t">
-            <a:spAutoFit/>
-          </a:bodyPr>
-          <a:lstStyle/>
-          <a:p>
-            <a:pPr algn="l"/>
-            <a:r>
-              <a:rPr sz="1800" b="1" i="0">
-                <a:solidFill>
-                  <a:srgbClr val="21295C"/>
-                </a:solidFill>
-                <a:latin typeface="Calibri"/>
-              </a:rPr>
-              <a:t>智能代码生成</a:t>
-            </a:r>
-          </a:p>
-        </p:txBody>
-      </p:sp>
-      <p:sp>
-        <p:nvSpPr>
-          <p:cNvPr id="13" name="TextBox 12"/>
-          <p:cNvSpPr txBox="1"/>
-          <p:nvPr/>
-        </p:nvSpPr>
-        <p:spPr>
-          <a:xfrm>
-            <a:off x="969264" y="2066543"/>
-            <a:ext cx="4526280" cy="822959"/>
-          </a:xfrm>
-          <a:prstGeom prst="rect">
-            <a:avLst/>
-          </a:prstGeom>
-          <a:noFill/>
-        </p:spPr>
-        <p:txBody>
-          <a:bodyPr wrap="none" lIns="54864" rIns="54864" tIns="36576" bIns="36576">
-            <a:spAutoFit/>
-          </a:bodyPr>
-          <a:lstStyle/>
-          <a:p>
             <a:pPr>
               <a:lnSpc>
-                <a:spcPct val="105000"/>
+                <a:spcPct val="100000"/>
               </a:lnSpc>
               <a:spcAft>
-                <a:spcPts val="600"/>
+                <a:spcPts val="400"/>
               </a:spcAft>
             </a:pPr>
             <a:r>
@@ -6938,10 +7451,10 @@
           <a:p>
             <a:pPr>
               <a:lnSpc>
-                <a:spcPct val="105000"/>
+                <a:spcPct val="100000"/>
               </a:lnSpc>
               <a:spcAft>
-                <a:spcPts val="600"/>
+                <a:spcPts val="400"/>
               </a:spcAft>
             </a:pPr>
             <a:r>
@@ -6957,10 +7470,10 @@
           <a:p>
             <a:pPr>
               <a:lnSpc>
-                <a:spcPct val="105000"/>
+                <a:spcPct val="100000"/>
               </a:lnSpc>
               <a:spcAft>
-                <a:spcPts val="600"/>
+                <a:spcPts val="400"/>
               </a:spcAft>
             </a:pPr>
             <a:r>
@@ -7127,87 +7640,91 @@
           <a:noFill/>
         </p:spPr>
         <p:txBody>
-          <a:bodyPr wrap="none" lIns="0" rIns="0" tIns="0" bIns="0" anchor="ctr">
+          <a:bodyPr wrap="square" lIns="0" rIns="0" tIns="0" bIns="0" anchor="ctr"/>
+          <a:lstStyle/>
+          <a:p>
+            <a:pPr algn="ctr">
+              <a:spcAft>
+                <a:spcPts val="200"/>
+              </a:spcAft>
+            </a:pPr>
+            <a:r>
+              <a:rPr sz="850" b="1" i="0">
+                <a:solidFill>
+                  <a:srgbClr val="FFFFFF"/>
+                </a:solidFill>
+                <a:latin typeface="Calibri"/>
+              </a:rPr>
+              <a:t>VIS</a:t>
+            </a:r>
+          </a:p>
+        </p:txBody>
+      </p:sp>
+      <p:sp>
+        <p:nvSpPr>
+          <p:cNvPr id="18" name="TextBox 17"/>
+          <p:cNvSpPr txBox="1"/>
+          <p:nvPr/>
+        </p:nvSpPr>
+        <p:spPr>
+          <a:xfrm>
+            <a:off x="7123175" y="1517904"/>
+            <a:ext cx="3986784" cy="320040"/>
+          </a:xfrm>
+          <a:prstGeom prst="rect">
+            <a:avLst/>
+          </a:prstGeom>
+          <a:noFill/>
+        </p:spPr>
+        <p:txBody>
+          <a:bodyPr wrap="square" lIns="0" rIns="0" tIns="0" bIns="0" anchor="t"/>
+          <a:lstStyle/>
+          <a:p>
+            <a:pPr algn="l">
+              <a:spcAft>
+                <a:spcPts val="200"/>
+              </a:spcAft>
+            </a:pPr>
+            <a:r>
+              <a:rPr sz="1800" b="1" i="0">
+                <a:solidFill>
+                  <a:srgbClr val="21295C"/>
+                </a:solidFill>
+                <a:latin typeface="Calibri"/>
+              </a:rPr>
+              <a:t>可视化编辑与预览</a:t>
+            </a:r>
+          </a:p>
+        </p:txBody>
+      </p:sp>
+      <p:sp>
+        <p:nvSpPr>
+          <p:cNvPr id="19" name="TextBox 18"/>
+          <p:cNvSpPr txBox="1"/>
+          <p:nvPr/>
+        </p:nvSpPr>
+        <p:spPr>
+          <a:xfrm>
+            <a:off x="6574536" y="2066543"/>
+            <a:ext cx="4526280" cy="822959"/>
+          </a:xfrm>
+          <a:prstGeom prst="rect">
+            <a:avLst/>
+          </a:prstGeom>
+          <a:noFill/>
+        </p:spPr>
+        <p:txBody>
+          <a:bodyPr wrap="square" lIns="73152" rIns="73152" tIns="36576" bIns="36576">
             <a:spAutoFit/>
           </a:bodyPr>
           <a:lstStyle/>
           <a:p>
-            <a:pPr algn="ctr"/>
-            <a:r>
-              <a:rPr sz="850" b="1" i="0">
-                <a:solidFill>
-                  <a:srgbClr val="FFFFFF"/>
-                </a:solidFill>
-                <a:latin typeface="Calibri"/>
-              </a:rPr>
-              <a:t>VIS</a:t>
-            </a:r>
-          </a:p>
-        </p:txBody>
-      </p:sp>
-      <p:sp>
-        <p:nvSpPr>
-          <p:cNvPr id="18" name="TextBox 17"/>
-          <p:cNvSpPr txBox="1"/>
-          <p:nvPr/>
-        </p:nvSpPr>
-        <p:spPr>
-          <a:xfrm>
-            <a:off x="7123175" y="1517904"/>
-            <a:ext cx="3986784" cy="320040"/>
-          </a:xfrm>
-          <a:prstGeom prst="rect">
-            <a:avLst/>
-          </a:prstGeom>
-          <a:noFill/>
-        </p:spPr>
-        <p:txBody>
-          <a:bodyPr wrap="none" lIns="0" rIns="0" tIns="0" bIns="0" anchor="t">
-            <a:spAutoFit/>
-          </a:bodyPr>
-          <a:lstStyle/>
-          <a:p>
-            <a:pPr algn="l"/>
-            <a:r>
-              <a:rPr sz="1800" b="1" i="0">
-                <a:solidFill>
-                  <a:srgbClr val="21295C"/>
-                </a:solidFill>
-                <a:latin typeface="Calibri"/>
-              </a:rPr>
-              <a:t>可视化编辑与预览</a:t>
-            </a:r>
-          </a:p>
-        </p:txBody>
-      </p:sp>
-      <p:sp>
-        <p:nvSpPr>
-          <p:cNvPr id="19" name="TextBox 18"/>
-          <p:cNvSpPr txBox="1"/>
-          <p:nvPr/>
-        </p:nvSpPr>
-        <p:spPr>
-          <a:xfrm>
-            <a:off x="6574536" y="2066543"/>
-            <a:ext cx="4526280" cy="822959"/>
-          </a:xfrm>
-          <a:prstGeom prst="rect">
-            <a:avLst/>
-          </a:prstGeom>
-          <a:noFill/>
-        </p:spPr>
-        <p:txBody>
-          <a:bodyPr wrap="none" lIns="54864" rIns="54864" tIns="36576" bIns="36576">
-            <a:spAutoFit/>
-          </a:bodyPr>
-          <a:lstStyle/>
-          <a:p>
             <a:pPr>
               <a:lnSpc>
-                <a:spcPct val="105000"/>
+                <a:spcPct val="100000"/>
               </a:lnSpc>
               <a:spcAft>
-                <a:spcPts val="600"/>
+                <a:spcPts val="400"/>
               </a:spcAft>
             </a:pPr>
             <a:r>
@@ -7223,10 +7740,10 @@
           <a:p>
             <a:pPr>
               <a:lnSpc>
-                <a:spcPct val="105000"/>
+                <a:spcPct val="100000"/>
               </a:lnSpc>
               <a:spcAft>
-                <a:spcPts val="600"/>
+                <a:spcPts val="400"/>
               </a:spcAft>
             </a:pPr>
             <a:r>
@@ -7242,10 +7759,10 @@
           <a:p>
             <a:pPr>
               <a:lnSpc>
-                <a:spcPct val="105000"/>
+                <a:spcPct val="100000"/>
               </a:lnSpc>
               <a:spcAft>
-                <a:spcPts val="600"/>
+                <a:spcPts val="400"/>
               </a:spcAft>
             </a:pPr>
             <a:r>
@@ -7412,87 +7929,91 @@
           <a:noFill/>
         </p:spPr>
         <p:txBody>
-          <a:bodyPr wrap="none" lIns="0" rIns="0" tIns="0" bIns="0" anchor="ctr">
+          <a:bodyPr wrap="square" lIns="0" rIns="0" tIns="0" bIns="0" anchor="ctr"/>
+          <a:lstStyle/>
+          <a:p>
+            <a:pPr algn="ctr">
+              <a:spcAft>
+                <a:spcPts val="200"/>
+              </a:spcAft>
+            </a:pPr>
+            <a:r>
+              <a:rPr sz="850" b="1" i="0">
+                <a:solidFill>
+                  <a:srgbClr val="FFFFFF"/>
+                </a:solidFill>
+                <a:latin typeface="Calibri"/>
+              </a:rPr>
+              <a:t>DEP</a:t>
+            </a:r>
+          </a:p>
+        </p:txBody>
+      </p:sp>
+      <p:sp>
+        <p:nvSpPr>
+          <p:cNvPr id="24" name="TextBox 23"/>
+          <p:cNvSpPr txBox="1"/>
+          <p:nvPr/>
+        </p:nvSpPr>
+        <p:spPr>
+          <a:xfrm>
+            <a:off x="1517904" y="3730752"/>
+            <a:ext cx="3986783" cy="320040"/>
+          </a:xfrm>
+          <a:prstGeom prst="rect">
+            <a:avLst/>
+          </a:prstGeom>
+          <a:noFill/>
+        </p:spPr>
+        <p:txBody>
+          <a:bodyPr wrap="square" lIns="0" rIns="0" tIns="0" bIns="0" anchor="t"/>
+          <a:lstStyle/>
+          <a:p>
+            <a:pPr algn="l">
+              <a:spcAft>
+                <a:spcPts val="200"/>
+              </a:spcAft>
+            </a:pPr>
+            <a:r>
+              <a:rPr sz="1800" b="1" i="0">
+                <a:solidFill>
+                  <a:srgbClr val="21295C"/>
+                </a:solidFill>
+                <a:latin typeface="Calibri"/>
+              </a:rPr>
+              <a:t>一键部署与分享</a:t>
+            </a:r>
+          </a:p>
+        </p:txBody>
+      </p:sp>
+      <p:sp>
+        <p:nvSpPr>
+          <p:cNvPr id="25" name="TextBox 24"/>
+          <p:cNvSpPr txBox="1"/>
+          <p:nvPr/>
+        </p:nvSpPr>
+        <p:spPr>
+          <a:xfrm>
+            <a:off x="969264" y="4279392"/>
+            <a:ext cx="4526280" cy="822959"/>
+          </a:xfrm>
+          <a:prstGeom prst="rect">
+            <a:avLst/>
+          </a:prstGeom>
+          <a:noFill/>
+        </p:spPr>
+        <p:txBody>
+          <a:bodyPr wrap="square" lIns="73152" rIns="73152" tIns="36576" bIns="36576">
             <a:spAutoFit/>
           </a:bodyPr>
           <a:lstStyle/>
           <a:p>
-            <a:pPr algn="ctr"/>
-            <a:r>
-              <a:rPr sz="850" b="1" i="0">
-                <a:solidFill>
-                  <a:srgbClr val="FFFFFF"/>
-                </a:solidFill>
-                <a:latin typeface="Calibri"/>
-              </a:rPr>
-              <a:t>DEP</a:t>
-            </a:r>
-          </a:p>
-        </p:txBody>
-      </p:sp>
-      <p:sp>
-        <p:nvSpPr>
-          <p:cNvPr id="24" name="TextBox 23"/>
-          <p:cNvSpPr txBox="1"/>
-          <p:nvPr/>
-        </p:nvSpPr>
-        <p:spPr>
-          <a:xfrm>
-            <a:off x="1517904" y="3730752"/>
-            <a:ext cx="3986783" cy="320040"/>
-          </a:xfrm>
-          <a:prstGeom prst="rect">
-            <a:avLst/>
-          </a:prstGeom>
-          <a:noFill/>
-        </p:spPr>
-        <p:txBody>
-          <a:bodyPr wrap="none" lIns="0" rIns="0" tIns="0" bIns="0" anchor="t">
-            <a:spAutoFit/>
-          </a:bodyPr>
-          <a:lstStyle/>
-          <a:p>
-            <a:pPr algn="l"/>
-            <a:r>
-              <a:rPr sz="1800" b="1" i="0">
-                <a:solidFill>
-                  <a:srgbClr val="21295C"/>
-                </a:solidFill>
-                <a:latin typeface="Calibri"/>
-              </a:rPr>
-              <a:t>一键部署与分享</a:t>
-            </a:r>
-          </a:p>
-        </p:txBody>
-      </p:sp>
-      <p:sp>
-        <p:nvSpPr>
-          <p:cNvPr id="25" name="TextBox 24"/>
-          <p:cNvSpPr txBox="1"/>
-          <p:nvPr/>
-        </p:nvSpPr>
-        <p:spPr>
-          <a:xfrm>
-            <a:off x="969264" y="4279392"/>
-            <a:ext cx="4526280" cy="822959"/>
-          </a:xfrm>
-          <a:prstGeom prst="rect">
-            <a:avLst/>
-          </a:prstGeom>
-          <a:noFill/>
-        </p:spPr>
-        <p:txBody>
-          <a:bodyPr wrap="none" lIns="54864" rIns="54864" tIns="36576" bIns="36576">
-            <a:spAutoFit/>
-          </a:bodyPr>
-          <a:lstStyle/>
-          <a:p>
             <a:pPr>
               <a:lnSpc>
-                <a:spcPct val="105000"/>
+                <a:spcPct val="100000"/>
               </a:lnSpc>
               <a:spcAft>
-                <a:spcPts val="600"/>
+                <a:spcPts val="400"/>
               </a:spcAft>
             </a:pPr>
             <a:r>
@@ -7508,10 +8029,10 @@
           <a:p>
             <a:pPr>
               <a:lnSpc>
-                <a:spcPct val="105000"/>
+                <a:spcPct val="100000"/>
               </a:lnSpc>
               <a:spcAft>
-                <a:spcPts val="600"/>
+                <a:spcPts val="400"/>
               </a:spcAft>
             </a:pPr>
             <a:r>
@@ -7527,10 +8048,10 @@
           <a:p>
             <a:pPr>
               <a:lnSpc>
-                <a:spcPct val="105000"/>
+                <a:spcPct val="100000"/>
               </a:lnSpc>
               <a:spcAft>
-                <a:spcPts val="600"/>
+                <a:spcPts val="400"/>
               </a:spcAft>
             </a:pPr>
             <a:r>
@@ -7697,87 +8218,91 @@
           <a:noFill/>
         </p:spPr>
         <p:txBody>
-          <a:bodyPr wrap="none" lIns="0" rIns="0" tIns="0" bIns="0" anchor="ctr">
+          <a:bodyPr wrap="square" lIns="0" rIns="0" tIns="0" bIns="0" anchor="ctr"/>
+          <a:lstStyle/>
+          <a:p>
+            <a:pPr algn="ctr">
+              <a:spcAft>
+                <a:spcPts val="200"/>
+              </a:spcAft>
+            </a:pPr>
+            <a:r>
+              <a:rPr sz="850" b="1" i="0">
+                <a:solidFill>
+                  <a:srgbClr val="FFFFFF"/>
+                </a:solidFill>
+                <a:latin typeface="Calibri"/>
+              </a:rPr>
+              <a:t>OPS</a:t>
+            </a:r>
+          </a:p>
+        </p:txBody>
+      </p:sp>
+      <p:sp>
+        <p:nvSpPr>
+          <p:cNvPr id="30" name="TextBox 29"/>
+          <p:cNvSpPr txBox="1"/>
+          <p:nvPr/>
+        </p:nvSpPr>
+        <p:spPr>
+          <a:xfrm>
+            <a:off x="7123175" y="3730752"/>
+            <a:ext cx="3986784" cy="320040"/>
+          </a:xfrm>
+          <a:prstGeom prst="rect">
+            <a:avLst/>
+          </a:prstGeom>
+          <a:noFill/>
+        </p:spPr>
+        <p:txBody>
+          <a:bodyPr wrap="square" lIns="0" rIns="0" tIns="0" bIns="0" anchor="t"/>
+          <a:lstStyle/>
+          <a:p>
+            <a:pPr algn="l">
+              <a:spcAft>
+                <a:spcPts val="200"/>
+              </a:spcAft>
+            </a:pPr>
+            <a:r>
+              <a:rPr sz="1800" b="1" i="0">
+                <a:solidFill>
+                  <a:srgbClr val="21295C"/>
+                </a:solidFill>
+                <a:latin typeface="Calibri"/>
+              </a:rPr>
+              <a:t>管理与监控</a:t>
+            </a:r>
+          </a:p>
+        </p:txBody>
+      </p:sp>
+      <p:sp>
+        <p:nvSpPr>
+          <p:cNvPr id="31" name="TextBox 30"/>
+          <p:cNvSpPr txBox="1"/>
+          <p:nvPr/>
+        </p:nvSpPr>
+        <p:spPr>
+          <a:xfrm>
+            <a:off x="6574536" y="4279392"/>
+            <a:ext cx="4526280" cy="822959"/>
+          </a:xfrm>
+          <a:prstGeom prst="rect">
+            <a:avLst/>
+          </a:prstGeom>
+          <a:noFill/>
+        </p:spPr>
+        <p:txBody>
+          <a:bodyPr wrap="square" lIns="73152" rIns="73152" tIns="36576" bIns="36576">
             <a:spAutoFit/>
           </a:bodyPr>
           <a:lstStyle/>
           <a:p>
-            <a:pPr algn="ctr"/>
-            <a:r>
-              <a:rPr sz="850" b="1" i="0">
-                <a:solidFill>
-                  <a:srgbClr val="FFFFFF"/>
-                </a:solidFill>
-                <a:latin typeface="Calibri"/>
-              </a:rPr>
-              <a:t>OPS</a:t>
-            </a:r>
-          </a:p>
-        </p:txBody>
-      </p:sp>
-      <p:sp>
-        <p:nvSpPr>
-          <p:cNvPr id="30" name="TextBox 29"/>
-          <p:cNvSpPr txBox="1"/>
-          <p:nvPr/>
-        </p:nvSpPr>
-        <p:spPr>
-          <a:xfrm>
-            <a:off x="7123175" y="3730752"/>
-            <a:ext cx="3986784" cy="320040"/>
-          </a:xfrm>
-          <a:prstGeom prst="rect">
-            <a:avLst/>
-          </a:prstGeom>
-          <a:noFill/>
-        </p:spPr>
-        <p:txBody>
-          <a:bodyPr wrap="none" lIns="0" rIns="0" tIns="0" bIns="0" anchor="t">
-            <a:spAutoFit/>
-          </a:bodyPr>
-          <a:lstStyle/>
-          <a:p>
-            <a:pPr algn="l"/>
-            <a:r>
-              <a:rPr sz="1800" b="1" i="0">
-                <a:solidFill>
-                  <a:srgbClr val="21295C"/>
-                </a:solidFill>
-                <a:latin typeface="Calibri"/>
-              </a:rPr>
-              <a:t>管理与监控</a:t>
-            </a:r>
-          </a:p>
-        </p:txBody>
-      </p:sp>
-      <p:sp>
-        <p:nvSpPr>
-          <p:cNvPr id="31" name="TextBox 30"/>
-          <p:cNvSpPr txBox="1"/>
-          <p:nvPr/>
-        </p:nvSpPr>
-        <p:spPr>
-          <a:xfrm>
-            <a:off x="6574536" y="4279392"/>
-            <a:ext cx="4526280" cy="822959"/>
-          </a:xfrm>
-          <a:prstGeom prst="rect">
-            <a:avLst/>
-          </a:prstGeom>
-          <a:noFill/>
-        </p:spPr>
-        <p:txBody>
-          <a:bodyPr wrap="none" lIns="54864" rIns="54864" tIns="36576" bIns="36576">
-            <a:spAutoFit/>
-          </a:bodyPr>
-          <a:lstStyle/>
-          <a:p>
             <a:pPr>
               <a:lnSpc>
-                <a:spcPct val="105000"/>
+                <a:spcPct val="100000"/>
               </a:lnSpc>
               <a:spcAft>
-                <a:spcPts val="600"/>
+                <a:spcPts val="400"/>
               </a:spcAft>
             </a:pPr>
             <a:r>
@@ -7793,10 +8318,10 @@
           <a:p>
             <a:pPr>
               <a:lnSpc>
-                <a:spcPct val="105000"/>
+                <a:spcPct val="100000"/>
               </a:lnSpc>
               <a:spcAft>
-                <a:spcPts val="600"/>
+                <a:spcPts val="400"/>
               </a:spcAft>
             </a:pPr>
             <a:r>
@@ -7812,10 +8337,10 @@
           <a:p>
             <a:pPr>
               <a:lnSpc>
-                <a:spcPct val="105000"/>
+                <a:spcPct val="100000"/>
               </a:lnSpc>
               <a:spcAft>
-                <a:spcPts val="600"/>
+                <a:spcPts val="100"/>
               </a:spcAft>
             </a:pPr>
             <a:r>
@@ -7825,7 +8350,26 @@
                 </a:solidFill>
                 <a:latin typeface="Calibri"/>
               </a:rPr>
-              <a:t>Actuator + Prometheus 指标出口</a:t>
+              <a:t>Actuator +</a:t>
+            </a:r>
+          </a:p>
+          <a:p>
+            <a:pPr>
+              <a:lnSpc>
+                <a:spcPct val="100000"/>
+              </a:lnSpc>
+              <a:spcAft>
+                <a:spcPts val="400"/>
+              </a:spcAft>
+            </a:pPr>
+            <a:r>
+              <a:rPr sz="1320">
+                <a:solidFill>
+                  <a:srgbClr val="17323B"/>
+                </a:solidFill>
+                <a:latin typeface="Calibri"/>
+              </a:rPr>
+              <a:t>Prometheus 指标出口</a:t>
             </a:r>
           </a:p>
         </p:txBody>
@@ -7847,12 +8391,14 @@
           <a:noFill/>
         </p:spPr>
         <p:txBody>
-          <a:bodyPr wrap="none" lIns="0" rIns="0" tIns="0" bIns="0" anchor="t">
-            <a:spAutoFit/>
-          </a:bodyPr>
-          <a:lstStyle/>
-          <a:p>
-            <a:pPr algn="l"/>
+          <a:bodyPr wrap="square" lIns="0" rIns="0" tIns="0" bIns="0" anchor="t"/>
+          <a:lstStyle/>
+          <a:p>
+            <a:pPr algn="l">
+              <a:spcAft>
+                <a:spcPts val="200"/>
+              </a:spcAft>
+            </a:pPr>
             <a:r>
               <a:rPr sz="1050" b="0" i="0">
                 <a:solidFill>
@@ -8043,12 +8589,14 @@
           <a:noFill/>
         </p:spPr>
         <p:txBody>
-          <a:bodyPr wrap="none" lIns="0" rIns="0" tIns="0" bIns="0" anchor="ctr">
-            <a:spAutoFit/>
-          </a:bodyPr>
-          <a:lstStyle/>
-          <a:p>
-            <a:pPr algn="ctr"/>
+          <a:bodyPr wrap="square" lIns="0" rIns="0" tIns="0" bIns="0" anchor="ctr"/>
+          <a:lstStyle/>
+          <a:p>
+            <a:pPr algn="ctr">
+              <a:spcAft>
+                <a:spcPts val="200"/>
+              </a:spcAft>
+            </a:pPr>
             <a:r>
               <a:rPr sz="900" b="1" i="0">
                 <a:solidFill>
@@ -8078,12 +8626,14 @@
           <a:noFill/>
         </p:spPr>
         <p:txBody>
-          <a:bodyPr wrap="none" lIns="0" rIns="0" tIns="0" bIns="0" anchor="t">
-            <a:spAutoFit/>
-          </a:bodyPr>
-          <a:lstStyle/>
-          <a:p>
-            <a:pPr algn="l"/>
+          <a:bodyPr wrap="square" lIns="0" rIns="0" tIns="0" bIns="0" anchor="t"/>
+          <a:lstStyle/>
+          <a:p>
+            <a:pPr algn="l">
+              <a:spcAft>
+                <a:spcPts val="200"/>
+              </a:spcAft>
+            </a:pPr>
             <a:r>
               <a:rPr sz="3400" b="1" i="0">
                 <a:solidFill>
@@ -8105,7 +8655,7 @@
         <p:spPr>
           <a:xfrm>
             <a:off x="1152144" y="841248"/>
-            <a:ext cx="8046720" cy="256032"/>
+            <a:ext cx="8046720" cy="274320"/>
           </a:xfrm>
           <a:prstGeom prst="rect">
             <a:avLst/>
@@ -8113,12 +8663,14 @@
           <a:noFill/>
         </p:spPr>
         <p:txBody>
-          <a:bodyPr wrap="none" lIns="0" rIns="0" tIns="0" bIns="0" anchor="t">
-            <a:spAutoFit/>
-          </a:bodyPr>
-          <a:lstStyle/>
-          <a:p>
-            <a:pPr algn="l"/>
+          <a:bodyPr wrap="square" lIns="0" rIns="0" tIns="0" bIns="0" anchor="t"/>
+          <a:lstStyle/>
+          <a:p>
+            <a:pPr algn="l">
+              <a:spcAft>
+                <a:spcPts val="200"/>
+              </a:spcAft>
+            </a:pPr>
             <a:r>
               <a:rPr sz="1150" b="0" i="0">
                 <a:solidFill>
@@ -8193,12 +8745,14 @@
           <a:noFill/>
         </p:spPr>
         <p:txBody>
-          <a:bodyPr wrap="none" lIns="0" rIns="0" tIns="0" bIns="0" anchor="ctr">
-            <a:spAutoFit/>
-          </a:bodyPr>
-          <a:lstStyle/>
-          <a:p>
-            <a:pPr algn="ctr"/>
+          <a:bodyPr wrap="square" lIns="0" rIns="0" tIns="0" bIns="0" anchor="ctr"/>
+          <a:lstStyle/>
+          <a:p>
+            <a:pPr algn="ctr">
+              <a:spcAft>
+                <a:spcPts val="200"/>
+              </a:spcAft>
+            </a:pPr>
             <a:r>
               <a:rPr sz="1050" b="1" i="0">
                 <a:solidFill>
@@ -8273,12 +8827,14 @@
           <a:noFill/>
         </p:spPr>
         <p:txBody>
-          <a:bodyPr wrap="none" lIns="0" rIns="0" tIns="0" bIns="0" anchor="t">
-            <a:spAutoFit/>
-          </a:bodyPr>
-          <a:lstStyle/>
-          <a:p>
-            <a:pPr algn="ctr"/>
+          <a:bodyPr wrap="square" lIns="0" rIns="0" tIns="0" bIns="0" anchor="t"/>
+          <a:lstStyle/>
+          <a:p>
+            <a:pPr algn="ctr">
+              <a:spcAft>
+                <a:spcPts val="200"/>
+              </a:spcAft>
+            </a:pPr>
             <a:r>
               <a:rPr sz="1500" b="1" i="0">
                 <a:solidFill>
@@ -8308,12 +8864,14 @@
           <a:noFill/>
         </p:spPr>
         <p:txBody>
-          <a:bodyPr wrap="none" lIns="0" rIns="0" tIns="0" bIns="0" anchor="t">
-            <a:spAutoFit/>
-          </a:bodyPr>
-          <a:lstStyle/>
-          <a:p>
-            <a:pPr algn="ctr"/>
+          <a:bodyPr wrap="square" lIns="0" rIns="0" tIns="0" bIns="0" anchor="t"/>
+          <a:lstStyle/>
+          <a:p>
+            <a:pPr algn="ctr">
+              <a:spcAft>
+                <a:spcPts val="200"/>
+              </a:spcAft>
+            </a:pPr>
             <a:r>
               <a:rPr sz="1050" b="0" i="0">
                 <a:solidFill>
@@ -8423,12 +8981,14 @@
           <a:noFill/>
         </p:spPr>
         <p:txBody>
-          <a:bodyPr wrap="none" lIns="0" rIns="0" tIns="0" bIns="0" anchor="t">
-            <a:spAutoFit/>
-          </a:bodyPr>
-          <a:lstStyle/>
-          <a:p>
-            <a:pPr algn="ctr"/>
+          <a:bodyPr wrap="square" lIns="0" rIns="0" tIns="0" bIns="0" anchor="t"/>
+          <a:lstStyle/>
+          <a:p>
+            <a:pPr algn="ctr">
+              <a:spcAft>
+                <a:spcPts val="200"/>
+              </a:spcAft>
+            </a:pPr>
             <a:r>
               <a:rPr sz="1500" b="1" i="0">
                 <a:solidFill>
@@ -8458,12 +9018,14 @@
           <a:noFill/>
         </p:spPr>
         <p:txBody>
-          <a:bodyPr wrap="none" lIns="0" rIns="0" tIns="0" bIns="0" anchor="t">
-            <a:spAutoFit/>
-          </a:bodyPr>
-          <a:lstStyle/>
-          <a:p>
-            <a:pPr algn="ctr"/>
+          <a:bodyPr wrap="square" lIns="0" rIns="0" tIns="0" bIns="0" anchor="t"/>
+          <a:lstStyle/>
+          <a:p>
+            <a:pPr algn="ctr">
+              <a:spcAft>
+                <a:spcPts val="200"/>
+              </a:spcAft>
+            </a:pPr>
             <a:r>
               <a:rPr sz="1050" b="0" i="0">
                 <a:solidFill>
@@ -8573,12 +9135,14 @@
           <a:noFill/>
         </p:spPr>
         <p:txBody>
-          <a:bodyPr wrap="none" lIns="0" rIns="0" tIns="0" bIns="0" anchor="t">
-            <a:spAutoFit/>
-          </a:bodyPr>
-          <a:lstStyle/>
-          <a:p>
-            <a:pPr algn="ctr"/>
+          <a:bodyPr wrap="square" lIns="0" rIns="0" tIns="0" bIns="0" anchor="t"/>
+          <a:lstStyle/>
+          <a:p>
+            <a:pPr algn="ctr">
+              <a:spcAft>
+                <a:spcPts val="200"/>
+              </a:spcAft>
+            </a:pPr>
             <a:r>
               <a:rPr sz="1500" b="1" i="0">
                 <a:solidFill>
@@ -8608,12 +9172,14 @@
           <a:noFill/>
         </p:spPr>
         <p:txBody>
-          <a:bodyPr wrap="none" lIns="0" rIns="0" tIns="0" bIns="0" anchor="t">
-            <a:spAutoFit/>
-          </a:bodyPr>
-          <a:lstStyle/>
-          <a:p>
-            <a:pPr algn="ctr"/>
+          <a:bodyPr wrap="square" lIns="0" rIns="0" tIns="0" bIns="0" anchor="t"/>
+          <a:lstStyle/>
+          <a:p>
+            <a:pPr algn="ctr">
+              <a:spcAft>
+                <a:spcPts val="200"/>
+              </a:spcAft>
+            </a:pPr>
             <a:r>
               <a:rPr sz="1050" b="0" i="0">
                 <a:solidFill>
@@ -8621,8 +9187,23 @@
                 </a:solidFill>
                 <a:latin typeface="Calibri"/>
               </a:rPr>
-              <a:t>LangChain4j
-LangGraph4j</a:t>
+              <a:t>LangChain4j</a:t>
+            </a:r>
+          </a:p>
+          <a:p>
+            <a:pPr algn="ctr">
+              <a:spcAft>
+                <a:spcPts val="200"/>
+              </a:spcAft>
+            </a:pPr>
+            <a:r>
+              <a:rPr sz="1050" b="0" i="0">
+                <a:solidFill>
+                  <a:srgbClr val="5B7780"/>
+                </a:solidFill>
+                <a:latin typeface="Calibri"/>
+              </a:rPr>
+              <a:t>LangGraph4j</a:t>
             </a:r>
           </a:p>
         </p:txBody>
@@ -8724,12 +9305,14 @@
           <a:noFill/>
         </p:spPr>
         <p:txBody>
-          <a:bodyPr wrap="none" lIns="0" rIns="0" tIns="0" bIns="0" anchor="t">
-            <a:spAutoFit/>
-          </a:bodyPr>
-          <a:lstStyle/>
-          <a:p>
-            <a:pPr algn="ctr"/>
+          <a:bodyPr wrap="square" lIns="0" rIns="0" tIns="0" bIns="0" anchor="t"/>
+          <a:lstStyle/>
+          <a:p>
+            <a:pPr algn="ctr">
+              <a:spcAft>
+                <a:spcPts val="200"/>
+              </a:spcAft>
+            </a:pPr>
             <a:r>
               <a:rPr sz="1500" b="1" i="0">
                 <a:solidFill>
@@ -8759,12 +9342,14 @@
           <a:noFill/>
         </p:spPr>
         <p:txBody>
-          <a:bodyPr wrap="none" lIns="0" rIns="0" tIns="0" bIns="0" anchor="t">
-            <a:spAutoFit/>
-          </a:bodyPr>
-          <a:lstStyle/>
-          <a:p>
-            <a:pPr algn="ctr"/>
+          <a:bodyPr wrap="square" lIns="0" rIns="0" tIns="0" bIns="0" anchor="t"/>
+          <a:lstStyle/>
+          <a:p>
+            <a:pPr algn="ctr">
+              <a:spcAft>
+                <a:spcPts val="200"/>
+              </a:spcAft>
+            </a:pPr>
             <a:r>
               <a:rPr sz="1050" b="0" i="0">
                 <a:solidFill>
@@ -8874,12 +9459,14 @@
           <a:noFill/>
         </p:spPr>
         <p:txBody>
-          <a:bodyPr wrap="none" lIns="0" rIns="0" tIns="0" bIns="0" anchor="t">
-            <a:spAutoFit/>
-          </a:bodyPr>
-          <a:lstStyle/>
-          <a:p>
-            <a:pPr algn="ctr"/>
+          <a:bodyPr wrap="square" lIns="0" rIns="0" tIns="0" bIns="0" anchor="t"/>
+          <a:lstStyle/>
+          <a:p>
+            <a:pPr algn="ctr">
+              <a:spcAft>
+                <a:spcPts val="200"/>
+              </a:spcAft>
+            </a:pPr>
             <a:r>
               <a:rPr sz="1500" b="1" i="0">
                 <a:solidFill>
@@ -8909,12 +9496,14 @@
           <a:noFill/>
         </p:spPr>
         <p:txBody>
-          <a:bodyPr wrap="none" lIns="0" rIns="0" tIns="0" bIns="0" anchor="t">
-            <a:spAutoFit/>
-          </a:bodyPr>
-          <a:lstStyle/>
-          <a:p>
-            <a:pPr algn="ctr"/>
+          <a:bodyPr wrap="square" lIns="0" rIns="0" tIns="0" bIns="0" anchor="t"/>
+          <a:lstStyle/>
+          <a:p>
+            <a:pPr algn="ctr">
+              <a:spcAft>
+                <a:spcPts val="200"/>
+              </a:spcAft>
+            </a:pPr>
             <a:r>
               <a:rPr sz="1050" b="0" i="0">
                 <a:solidFill>
@@ -8922,8 +9511,23 @@
                 </a:solidFill>
                 <a:latin typeface="Calibri"/>
               </a:rPr>
-              <a:t>静态访问
-Prometheus</a:t>
+              <a:t>静态访问</a:t>
+            </a:r>
+          </a:p>
+          <a:p>
+            <a:pPr algn="ctr">
+              <a:spcAft>
+                <a:spcPts val="200"/>
+              </a:spcAft>
+            </a:pPr>
+            <a:r>
+              <a:rPr sz="1050" b="0" i="0">
+                <a:solidFill>
+                  <a:srgbClr val="5B7780"/>
+                </a:solidFill>
+                <a:latin typeface="Calibri"/>
+              </a:rPr>
+              <a:t>Prometheus</a:t>
             </a:r>
           </a:p>
         </p:txBody>
@@ -9080,87 +9684,91 @@
           <a:noFill/>
         </p:spPr>
         <p:txBody>
-          <a:bodyPr wrap="none" lIns="0" rIns="0" tIns="0" bIns="0" anchor="ctr">
+          <a:bodyPr wrap="square" lIns="0" rIns="0" tIns="0" bIns="0" anchor="ctr"/>
+          <a:lstStyle/>
+          <a:p>
+            <a:pPr algn="ctr">
+              <a:spcAft>
+                <a:spcPts val="200"/>
+              </a:spcAft>
+            </a:pPr>
+            <a:r>
+              <a:rPr sz="850" b="1" i="0">
+                <a:solidFill>
+                  <a:srgbClr val="FFFFFF"/>
+                </a:solidFill>
+                <a:latin typeface="Calibri"/>
+              </a:rPr>
+              <a:t>MS</a:t>
+            </a:r>
+          </a:p>
+        </p:txBody>
+      </p:sp>
+      <p:sp>
+        <p:nvSpPr>
+          <p:cNvPr id="31" name="TextBox 30"/>
+          <p:cNvSpPr txBox="1"/>
+          <p:nvPr/>
+        </p:nvSpPr>
+        <p:spPr>
+          <a:xfrm>
+            <a:off x="1572768" y="3374136"/>
+            <a:ext cx="4123944" cy="320040"/>
+          </a:xfrm>
+          <a:prstGeom prst="rect">
+            <a:avLst/>
+          </a:prstGeom>
+          <a:noFill/>
+        </p:spPr>
+        <p:txBody>
+          <a:bodyPr wrap="square" lIns="0" rIns="0" tIns="0" bIns="0" anchor="t"/>
+          <a:lstStyle/>
+          <a:p>
+            <a:pPr algn="l">
+              <a:spcAft>
+                <a:spcPts val="200"/>
+              </a:spcAft>
+            </a:pPr>
+            <a:r>
+              <a:rPr sz="1800" b="1" i="0">
+                <a:solidFill>
+                  <a:srgbClr val="21295C"/>
+                </a:solidFill>
+                <a:latin typeface="Calibri"/>
+              </a:rPr>
+              <a:t>微服务拆分目录</a:t>
+            </a:r>
+          </a:p>
+        </p:txBody>
+      </p:sp>
+      <p:sp>
+        <p:nvSpPr>
+          <p:cNvPr id="32" name="TextBox 31"/>
+          <p:cNvSpPr txBox="1"/>
+          <p:nvPr/>
+        </p:nvSpPr>
+        <p:spPr>
+          <a:xfrm>
+            <a:off x="1024128" y="3922776"/>
+            <a:ext cx="4663440" cy="1216152"/>
+          </a:xfrm>
+          <a:prstGeom prst="rect">
+            <a:avLst/>
+          </a:prstGeom>
+          <a:noFill/>
+        </p:spPr>
+        <p:txBody>
+          <a:bodyPr wrap="square" lIns="73152" rIns="73152" tIns="36576" bIns="36576">
             <a:spAutoFit/>
           </a:bodyPr>
           <a:lstStyle/>
           <a:p>
-            <a:pPr algn="ctr"/>
-            <a:r>
-              <a:rPr sz="850" b="1" i="0">
-                <a:solidFill>
-                  <a:srgbClr val="FFFFFF"/>
-                </a:solidFill>
-                <a:latin typeface="Calibri"/>
-              </a:rPr>
-              <a:t>MS</a:t>
-            </a:r>
-          </a:p>
-        </p:txBody>
-      </p:sp>
-      <p:sp>
-        <p:nvSpPr>
-          <p:cNvPr id="31" name="TextBox 30"/>
-          <p:cNvSpPr txBox="1"/>
-          <p:nvPr/>
-        </p:nvSpPr>
-        <p:spPr>
-          <a:xfrm>
-            <a:off x="1572768" y="3374136"/>
-            <a:ext cx="4123944" cy="320040"/>
-          </a:xfrm>
-          <a:prstGeom prst="rect">
-            <a:avLst/>
-          </a:prstGeom>
-          <a:noFill/>
-        </p:spPr>
-        <p:txBody>
-          <a:bodyPr wrap="none" lIns="0" rIns="0" tIns="0" bIns="0" anchor="t">
-            <a:spAutoFit/>
-          </a:bodyPr>
-          <a:lstStyle/>
-          <a:p>
-            <a:pPr algn="l"/>
-            <a:r>
-              <a:rPr sz="1800" b="1" i="0">
-                <a:solidFill>
-                  <a:srgbClr val="21295C"/>
-                </a:solidFill>
-                <a:latin typeface="Calibri"/>
-              </a:rPr>
-              <a:t>微服务拆分目录</a:t>
-            </a:r>
-          </a:p>
-        </p:txBody>
-      </p:sp>
-      <p:sp>
-        <p:nvSpPr>
-          <p:cNvPr id="32" name="TextBox 31"/>
-          <p:cNvSpPr txBox="1"/>
-          <p:nvPr/>
-        </p:nvSpPr>
-        <p:spPr>
-          <a:xfrm>
-            <a:off x="1024128" y="3922776"/>
-            <a:ext cx="4663440" cy="1216152"/>
-          </a:xfrm>
-          <a:prstGeom prst="rect">
-            <a:avLst/>
-          </a:prstGeom>
-          <a:noFill/>
-        </p:spPr>
-        <p:txBody>
-          <a:bodyPr wrap="none" lIns="54864" rIns="54864" tIns="36576" bIns="36576">
-            <a:spAutoFit/>
-          </a:bodyPr>
-          <a:lstStyle/>
-          <a:p>
             <a:pPr>
               <a:lnSpc>
-                <a:spcPct val="105000"/>
+                <a:spcPct val="100000"/>
               </a:lnSpc>
               <a:spcAft>
-                <a:spcPts val="600"/>
+                <a:spcPts val="400"/>
               </a:spcAft>
             </a:pPr>
             <a:r>
@@ -9176,10 +9784,10 @@
           <a:p>
             <a:pPr>
               <a:lnSpc>
-                <a:spcPct val="105000"/>
+                <a:spcPct val="100000"/>
               </a:lnSpc>
               <a:spcAft>
-                <a:spcPts val="600"/>
+                <a:spcPts val="400"/>
               </a:spcAft>
             </a:pPr>
             <a:r>
@@ -9195,10 +9803,10 @@
           <a:p>
             <a:pPr>
               <a:lnSpc>
-                <a:spcPct val="105000"/>
+                <a:spcPct val="100000"/>
               </a:lnSpc>
               <a:spcAft>
-                <a:spcPts val="600"/>
+                <a:spcPts val="400"/>
               </a:spcAft>
             </a:pPr>
             <a:r>
@@ -9214,10 +9822,10 @@
           <a:p>
             <a:pPr>
               <a:lnSpc>
-                <a:spcPct val="105000"/>
+                <a:spcPct val="100000"/>
               </a:lnSpc>
               <a:spcAft>
-                <a:spcPts val="600"/>
+                <a:spcPts val="100"/>
               </a:spcAft>
             </a:pPr>
             <a:r>
@@ -9227,7 +9835,26 @@
                 </a:solidFill>
                 <a:latin typeface="Calibri"/>
               </a:rPr>
-              <a:t>user / app / ai / screenshot：领域服务</a:t>
+              <a:t>user / app / ai /</a:t>
+            </a:r>
+          </a:p>
+          <a:p>
+            <a:pPr>
+              <a:lnSpc>
+                <a:spcPct val="100000"/>
+              </a:lnSpc>
+              <a:spcAft>
+                <a:spcPts val="400"/>
+              </a:spcAft>
+            </a:pPr>
+            <a:r>
+              <a:rPr sz="1300">
+                <a:solidFill>
+                  <a:srgbClr val="17323B"/>
+                </a:solidFill>
+                <a:latin typeface="Calibri"/>
+              </a:rPr>
+              <a:t>screenshot：领域服务</a:t>
             </a:r>
           </a:p>
         </p:txBody>
@@ -9384,87 +10011,91 @@
           <a:noFill/>
         </p:spPr>
         <p:txBody>
-          <a:bodyPr wrap="none" lIns="0" rIns="0" tIns="0" bIns="0" anchor="ctr">
+          <a:bodyPr wrap="square" lIns="0" rIns="0" tIns="0" bIns="0" anchor="ctr"/>
+          <a:lstStyle/>
+          <a:p>
+            <a:pPr algn="ctr">
+              <a:spcAft>
+                <a:spcPts val="200"/>
+              </a:spcAft>
+            </a:pPr>
+            <a:r>
+              <a:rPr sz="850" b="1" i="0">
+                <a:solidFill>
+                  <a:srgbClr val="FFFFFF"/>
+                </a:solidFill>
+                <a:latin typeface="Calibri"/>
+              </a:rPr>
+              <a:t>RUN</a:t>
+            </a:r>
+          </a:p>
+        </p:txBody>
+      </p:sp>
+      <p:sp>
+        <p:nvSpPr>
+          <p:cNvPr id="37" name="TextBox 36"/>
+          <p:cNvSpPr txBox="1"/>
+          <p:nvPr/>
+        </p:nvSpPr>
+        <p:spPr>
+          <a:xfrm>
+            <a:off x="7132320" y="3374136"/>
+            <a:ext cx="4169663" cy="320040"/>
+          </a:xfrm>
+          <a:prstGeom prst="rect">
+            <a:avLst/>
+          </a:prstGeom>
+          <a:noFill/>
+        </p:spPr>
+        <p:txBody>
+          <a:bodyPr wrap="square" lIns="0" rIns="0" tIns="0" bIns="0" anchor="t"/>
+          <a:lstStyle/>
+          <a:p>
+            <a:pPr algn="l">
+              <a:spcAft>
+                <a:spcPts val="200"/>
+              </a:spcAft>
+            </a:pPr>
+            <a:r>
+              <a:rPr sz="1800" b="1" i="0">
+                <a:solidFill>
+                  <a:srgbClr val="21295C"/>
+                </a:solidFill>
+                <a:latin typeface="Calibri"/>
+              </a:rPr>
+              <a:t>运行依赖</a:t>
+            </a:r>
+          </a:p>
+        </p:txBody>
+      </p:sp>
+      <p:sp>
+        <p:nvSpPr>
+          <p:cNvPr id="38" name="TextBox 37"/>
+          <p:cNvSpPr txBox="1"/>
+          <p:nvPr/>
+        </p:nvSpPr>
+        <p:spPr>
+          <a:xfrm>
+            <a:off x="6583680" y="3922776"/>
+            <a:ext cx="4709160" cy="1216152"/>
+          </a:xfrm>
+          <a:prstGeom prst="rect">
+            <a:avLst/>
+          </a:prstGeom>
+          <a:noFill/>
+        </p:spPr>
+        <p:txBody>
+          <a:bodyPr wrap="square" lIns="73152" rIns="73152" tIns="36576" bIns="36576">
             <a:spAutoFit/>
           </a:bodyPr>
           <a:lstStyle/>
           <a:p>
-            <a:pPr algn="ctr"/>
-            <a:r>
-              <a:rPr sz="850" b="1" i="0">
-                <a:solidFill>
-                  <a:srgbClr val="FFFFFF"/>
-                </a:solidFill>
-                <a:latin typeface="Calibri"/>
-              </a:rPr>
-              <a:t>RUN</a:t>
-            </a:r>
-          </a:p>
-        </p:txBody>
-      </p:sp>
-      <p:sp>
-        <p:nvSpPr>
-          <p:cNvPr id="37" name="TextBox 36"/>
-          <p:cNvSpPr txBox="1"/>
-          <p:nvPr/>
-        </p:nvSpPr>
-        <p:spPr>
-          <a:xfrm>
-            <a:off x="7132320" y="3374136"/>
-            <a:ext cx="4169663" cy="320040"/>
-          </a:xfrm>
-          <a:prstGeom prst="rect">
-            <a:avLst/>
-          </a:prstGeom>
-          <a:noFill/>
-        </p:spPr>
-        <p:txBody>
-          <a:bodyPr wrap="none" lIns="0" rIns="0" tIns="0" bIns="0" anchor="t">
-            <a:spAutoFit/>
-          </a:bodyPr>
-          <a:lstStyle/>
-          <a:p>
-            <a:pPr algn="l"/>
-            <a:r>
-              <a:rPr sz="1800" b="1" i="0">
-                <a:solidFill>
-                  <a:srgbClr val="21295C"/>
-                </a:solidFill>
-                <a:latin typeface="Calibri"/>
-              </a:rPr>
-              <a:t>运行依赖</a:t>
-            </a:r>
-          </a:p>
-        </p:txBody>
-      </p:sp>
-      <p:sp>
-        <p:nvSpPr>
-          <p:cNvPr id="38" name="TextBox 37"/>
-          <p:cNvSpPr txBox="1"/>
-          <p:nvPr/>
-        </p:nvSpPr>
-        <p:spPr>
-          <a:xfrm>
-            <a:off x="6583680" y="3922776"/>
-            <a:ext cx="4709160" cy="1216152"/>
-          </a:xfrm>
-          <a:prstGeom prst="rect">
-            <a:avLst/>
-          </a:prstGeom>
-          <a:noFill/>
-        </p:spPr>
-        <p:txBody>
-          <a:bodyPr wrap="none" lIns="54864" rIns="54864" tIns="36576" bIns="36576">
-            <a:spAutoFit/>
-          </a:bodyPr>
-          <a:lstStyle/>
-          <a:p>
             <a:pPr>
               <a:lnSpc>
-                <a:spcPct val="105000"/>
+                <a:spcPct val="100000"/>
               </a:lnSpc>
               <a:spcAft>
-                <a:spcPts val="600"/>
+                <a:spcPts val="400"/>
               </a:spcAft>
             </a:pPr>
             <a:r>
@@ -9480,10 +10111,10 @@
           <a:p>
             <a:pPr>
               <a:lnSpc>
-                <a:spcPct val="105000"/>
+                <a:spcPct val="100000"/>
               </a:lnSpc>
               <a:spcAft>
-                <a:spcPts val="600"/>
+                <a:spcPts val="400"/>
               </a:spcAft>
             </a:pPr>
             <a:r>
@@ -9499,10 +10130,10 @@
           <a:p>
             <a:pPr>
               <a:lnSpc>
-                <a:spcPct val="105000"/>
+                <a:spcPct val="100000"/>
               </a:lnSpc>
               <a:spcAft>
-                <a:spcPts val="600"/>
+                <a:spcPts val="100"/>
               </a:spcAft>
             </a:pPr>
             <a:r>
@@ -9512,16 +10143,35 @@
                 </a:solidFill>
                 <a:latin typeface="Calibri"/>
               </a:rPr>
-              <a:t>COS、Selenium/Chrome 支撑部署截图</a:t>
+              <a:t>COS、Selenium/Chrome</a:t>
             </a:r>
           </a:p>
           <a:p>
             <a:pPr>
               <a:lnSpc>
-                <a:spcPct val="105000"/>
+                <a:spcPct val="100000"/>
               </a:lnSpc>
               <a:spcAft>
-                <a:spcPts val="600"/>
+                <a:spcPts val="400"/>
+              </a:spcAft>
+            </a:pPr>
+            <a:r>
+              <a:rPr sz="1300">
+                <a:solidFill>
+                  <a:srgbClr val="17323B"/>
+                </a:solidFill>
+                <a:latin typeface="Calibri"/>
+              </a:rPr>
+              <a:t>支撑部署截图</a:t>
+            </a:r>
+          </a:p>
+          <a:p>
+            <a:pPr>
+              <a:lnSpc>
+                <a:spcPct val="100000"/>
+              </a:lnSpc>
+              <a:spcAft>
+                <a:spcPts val="400"/>
               </a:spcAft>
             </a:pPr>
             <a:r>
@@ -9553,12 +10203,14 @@
           <a:noFill/>
         </p:spPr>
         <p:txBody>
-          <a:bodyPr wrap="none" lIns="0" rIns="0" tIns="0" bIns="0" anchor="t">
-            <a:spAutoFit/>
-          </a:bodyPr>
-          <a:lstStyle/>
-          <a:p>
-            <a:pPr algn="l"/>
+          <a:bodyPr wrap="square" lIns="0" rIns="0" tIns="0" bIns="0" anchor="t"/>
+          <a:lstStyle/>
+          <a:p>
+            <a:pPr algn="l">
+              <a:spcAft>
+                <a:spcPts val="200"/>
+              </a:spcAft>
+            </a:pPr>
             <a:r>
               <a:rPr sz="1050" b="0" i="0">
                 <a:solidFill>
@@ -9749,12 +10401,14 @@
           <a:noFill/>
         </p:spPr>
         <p:txBody>
-          <a:bodyPr wrap="none" lIns="0" rIns="0" tIns="0" bIns="0" anchor="ctr">
-            <a:spAutoFit/>
-          </a:bodyPr>
-          <a:lstStyle/>
-          <a:p>
-            <a:pPr algn="ctr"/>
+          <a:bodyPr wrap="square" lIns="0" rIns="0" tIns="0" bIns="0" anchor="ctr"/>
+          <a:lstStyle/>
+          <a:p>
+            <a:pPr algn="ctr">
+              <a:spcAft>
+                <a:spcPts val="200"/>
+              </a:spcAft>
+            </a:pPr>
             <a:r>
               <a:rPr sz="900" b="1" i="0">
                 <a:solidFill>
@@ -9784,12 +10438,14 @@
           <a:noFill/>
         </p:spPr>
         <p:txBody>
-          <a:bodyPr wrap="none" lIns="0" rIns="0" tIns="0" bIns="0" anchor="t">
-            <a:spAutoFit/>
-          </a:bodyPr>
-          <a:lstStyle/>
-          <a:p>
-            <a:pPr algn="l"/>
+          <a:bodyPr wrap="square" lIns="0" rIns="0" tIns="0" bIns="0" anchor="t"/>
+          <a:lstStyle/>
+          <a:p>
+            <a:pPr algn="l">
+              <a:spcAft>
+                <a:spcPts val="200"/>
+              </a:spcAft>
+            </a:pPr>
             <a:r>
               <a:rPr sz="3400" b="1" i="0">
                 <a:solidFill>
@@ -9811,7 +10467,7 @@
         <p:spPr>
           <a:xfrm>
             <a:off x="1152144" y="841248"/>
-            <a:ext cx="8046720" cy="256032"/>
+            <a:ext cx="8046720" cy="274320"/>
           </a:xfrm>
           <a:prstGeom prst="rect">
             <a:avLst/>
@@ -9819,12 +10475,14 @@
           <a:noFill/>
         </p:spPr>
         <p:txBody>
-          <a:bodyPr wrap="none" lIns="0" rIns="0" tIns="0" bIns="0" anchor="t">
-            <a:spAutoFit/>
-          </a:bodyPr>
-          <a:lstStyle/>
-          <a:p>
-            <a:pPr algn="l"/>
+          <a:bodyPr wrap="square" lIns="0" rIns="0" tIns="0" bIns="0" anchor="t"/>
+          <a:lstStyle/>
+          <a:p>
+            <a:pPr algn="l">
+              <a:spcAft>
+                <a:spcPts val="200"/>
+              </a:spcAft>
+            </a:pPr>
             <a:r>
               <a:rPr sz="1150" b="0" i="0">
                 <a:solidFill>
@@ -9899,12 +10557,14 @@
           <a:noFill/>
         </p:spPr>
         <p:txBody>
-          <a:bodyPr wrap="none" lIns="0" rIns="0" tIns="0" bIns="0" anchor="ctr">
-            <a:spAutoFit/>
-          </a:bodyPr>
-          <a:lstStyle/>
-          <a:p>
-            <a:pPr algn="ctr"/>
+          <a:bodyPr wrap="square" lIns="0" rIns="0" tIns="0" bIns="0" anchor="ctr"/>
+          <a:lstStyle/>
+          <a:p>
+            <a:pPr algn="ctr">
+              <a:spcAft>
+                <a:spcPts val="200"/>
+              </a:spcAft>
+            </a:pPr>
             <a:r>
               <a:rPr sz="1050" b="1" i="0">
                 <a:solidFill>
@@ -10014,12 +10674,14 @@
           <a:noFill/>
         </p:spPr>
         <p:txBody>
-          <a:bodyPr wrap="none" lIns="0" rIns="0" tIns="0" bIns="0" anchor="t">
-            <a:spAutoFit/>
-          </a:bodyPr>
-          <a:lstStyle/>
-          <a:p>
-            <a:pPr algn="l"/>
+          <a:bodyPr wrap="square" lIns="0" rIns="0" tIns="0" bIns="0" anchor="t"/>
+          <a:lstStyle/>
+          <a:p>
+            <a:pPr algn="l">
+              <a:spcAft>
+                <a:spcPts val="200"/>
+              </a:spcAft>
+            </a:pPr>
             <a:r>
               <a:rPr sz="1120" b="1" i="0">
                 <a:solidFill>
@@ -10041,7 +10703,7 @@
         <p:spPr>
           <a:xfrm>
             <a:off x="2496312" y="1289304"/>
-            <a:ext cx="3291840" cy="256032"/>
+            <a:ext cx="3566160" cy="256032"/>
           </a:xfrm>
           <a:prstGeom prst="rect">
             <a:avLst/>
@@ -10049,12 +10711,14 @@
           <a:noFill/>
         </p:spPr>
         <p:txBody>
-          <a:bodyPr wrap="none" lIns="0" rIns="0" tIns="0" bIns="0" anchor="t">
-            <a:spAutoFit/>
-          </a:bodyPr>
-          <a:lstStyle/>
-          <a:p>
-            <a:pPr algn="l"/>
+          <a:bodyPr wrap="square" lIns="0" rIns="0" tIns="0" bIns="0" anchor="t"/>
+          <a:lstStyle/>
+          <a:p>
+            <a:pPr algn="l">
+              <a:spcAft>
+                <a:spcPts val="200"/>
+              </a:spcAft>
+            </a:pPr>
             <a:r>
               <a:rPr sz="1550" b="1" i="0">
                 <a:solidFill>
@@ -10076,7 +10740,7 @@
         <p:spPr>
           <a:xfrm>
             <a:off x="2496312" y="1600200"/>
-            <a:ext cx="4572000" cy="256032"/>
+            <a:ext cx="4617720" cy="347472"/>
           </a:xfrm>
           <a:prstGeom prst="rect">
             <a:avLst/>
@@ -10084,12 +10748,14 @@
           <a:noFill/>
         </p:spPr>
         <p:txBody>
-          <a:bodyPr wrap="none" lIns="0" rIns="0" tIns="0" bIns="0" anchor="t">
-            <a:spAutoFit/>
-          </a:bodyPr>
-          <a:lstStyle/>
-          <a:p>
-            <a:pPr algn="l"/>
+          <a:bodyPr wrap="square" lIns="0" rIns="0" tIns="0" bIns="0" anchor="t"/>
+          <a:lstStyle/>
+          <a:p>
+            <a:pPr algn="l">
+              <a:spcAft>
+                <a:spcPts val="200"/>
+              </a:spcAft>
+            </a:pPr>
             <a:r>
               <a:rPr sz="1150" b="0" i="0">
                 <a:solidFill>
@@ -10199,12 +10865,14 @@
           <a:noFill/>
         </p:spPr>
         <p:txBody>
-          <a:bodyPr wrap="none" lIns="0" rIns="0" tIns="0" bIns="0" anchor="t">
-            <a:spAutoFit/>
-          </a:bodyPr>
-          <a:lstStyle/>
-          <a:p>
-            <a:pPr algn="l"/>
+          <a:bodyPr wrap="square" lIns="0" rIns="0" tIns="0" bIns="0" anchor="t"/>
+          <a:lstStyle/>
+          <a:p>
+            <a:pPr algn="l">
+              <a:spcAft>
+                <a:spcPts val="200"/>
+              </a:spcAft>
+            </a:pPr>
             <a:r>
               <a:rPr sz="1120" b="1" i="0">
                 <a:solidFill>
@@ -10226,7 +10894,7 @@
         <p:spPr>
           <a:xfrm>
             <a:off x="2496312" y="2157984"/>
-            <a:ext cx="3291840" cy="256032"/>
+            <a:ext cx="3566160" cy="256032"/>
           </a:xfrm>
           <a:prstGeom prst="rect">
             <a:avLst/>
@@ -10234,12 +10902,14 @@
           <a:noFill/>
         </p:spPr>
         <p:txBody>
-          <a:bodyPr wrap="none" lIns="0" rIns="0" tIns="0" bIns="0" anchor="t">
-            <a:spAutoFit/>
-          </a:bodyPr>
-          <a:lstStyle/>
-          <a:p>
-            <a:pPr algn="l"/>
+          <a:bodyPr wrap="square" lIns="0" rIns="0" tIns="0" bIns="0" anchor="t"/>
+          <a:lstStyle/>
+          <a:p>
+            <a:pPr algn="l">
+              <a:spcAft>
+                <a:spcPts val="200"/>
+              </a:spcAft>
+            </a:pPr>
             <a:r>
               <a:rPr sz="1550" b="1" i="0">
                 <a:solidFill>
@@ -10261,7 +10931,7 @@
         <p:spPr>
           <a:xfrm>
             <a:off x="2496312" y="2468879"/>
-            <a:ext cx="4572000" cy="256032"/>
+            <a:ext cx="4617720" cy="347472"/>
           </a:xfrm>
           <a:prstGeom prst="rect">
             <a:avLst/>
@@ -10269,12 +10939,14 @@
           <a:noFill/>
         </p:spPr>
         <p:txBody>
-          <a:bodyPr wrap="none" lIns="0" rIns="0" tIns="0" bIns="0" anchor="t">
-            <a:spAutoFit/>
-          </a:bodyPr>
-          <a:lstStyle/>
-          <a:p>
-            <a:pPr algn="l"/>
+          <a:bodyPr wrap="square" lIns="0" rIns="0" tIns="0" bIns="0" anchor="t"/>
+          <a:lstStyle/>
+          <a:p>
+            <a:pPr algn="l">
+              <a:spcAft>
+                <a:spcPts val="200"/>
+              </a:spcAft>
+            </a:pPr>
             <a:r>
               <a:rPr sz="1150" b="0" i="0">
                 <a:solidFill>
@@ -10384,12 +11056,14 @@
           <a:noFill/>
         </p:spPr>
         <p:txBody>
-          <a:bodyPr wrap="none" lIns="0" rIns="0" tIns="0" bIns="0" anchor="t">
-            <a:spAutoFit/>
-          </a:bodyPr>
-          <a:lstStyle/>
-          <a:p>
-            <a:pPr algn="l"/>
+          <a:bodyPr wrap="square" lIns="0" rIns="0" tIns="0" bIns="0" anchor="t"/>
+          <a:lstStyle/>
+          <a:p>
+            <a:pPr algn="l">
+              <a:spcAft>
+                <a:spcPts val="200"/>
+              </a:spcAft>
+            </a:pPr>
             <a:r>
               <a:rPr sz="1120" b="1" i="0">
                 <a:solidFill>
@@ -10411,7 +11085,7 @@
         <p:spPr>
           <a:xfrm>
             <a:off x="2496312" y="3026663"/>
-            <a:ext cx="3291840" cy="256032"/>
+            <a:ext cx="3566160" cy="256032"/>
           </a:xfrm>
           <a:prstGeom prst="rect">
             <a:avLst/>
@@ -10419,12 +11093,14 @@
           <a:noFill/>
         </p:spPr>
         <p:txBody>
-          <a:bodyPr wrap="none" lIns="0" rIns="0" tIns="0" bIns="0" anchor="t">
-            <a:spAutoFit/>
-          </a:bodyPr>
-          <a:lstStyle/>
-          <a:p>
-            <a:pPr algn="l"/>
+          <a:bodyPr wrap="square" lIns="0" rIns="0" tIns="0" bIns="0" anchor="t"/>
+          <a:lstStyle/>
+          <a:p>
+            <a:pPr algn="l">
+              <a:spcAft>
+                <a:spcPts val="200"/>
+              </a:spcAft>
+            </a:pPr>
             <a:r>
               <a:rPr sz="1550" b="1" i="0">
                 <a:solidFill>
@@ -10446,7 +11122,7 @@
         <p:spPr>
           <a:xfrm>
             <a:off x="2496312" y="3337559"/>
-            <a:ext cx="4572000" cy="256032"/>
+            <a:ext cx="4617720" cy="347472"/>
           </a:xfrm>
           <a:prstGeom prst="rect">
             <a:avLst/>
@@ -10454,12 +11130,14 @@
           <a:noFill/>
         </p:spPr>
         <p:txBody>
-          <a:bodyPr wrap="none" lIns="0" rIns="0" tIns="0" bIns="0" anchor="t">
-            <a:spAutoFit/>
-          </a:bodyPr>
-          <a:lstStyle/>
-          <a:p>
-            <a:pPr algn="l"/>
+          <a:bodyPr wrap="square" lIns="0" rIns="0" tIns="0" bIns="0" anchor="t"/>
+          <a:lstStyle/>
+          <a:p>
+            <a:pPr algn="l">
+              <a:spcAft>
+                <a:spcPts val="200"/>
+              </a:spcAft>
+            </a:pPr>
             <a:r>
               <a:rPr sz="1150" b="0" i="0">
                 <a:solidFill>
@@ -10467,7 +11145,7 @@
                 </a:solidFill>
                 <a:latin typeface="Calibri"/>
               </a:rPr>
-              <a:t>包含完整单体项目代码及 common/model/client/user/app/ai/screenshot 模块</a:t>
+              <a:t>包含完整单体项目代码及微服务模块</a:t>
             </a:r>
           </a:p>
         </p:txBody>
@@ -10569,12 +11247,14 @@
           <a:noFill/>
         </p:spPr>
         <p:txBody>
-          <a:bodyPr wrap="none" lIns="0" rIns="0" tIns="0" bIns="0" anchor="t">
-            <a:spAutoFit/>
-          </a:bodyPr>
-          <a:lstStyle/>
-          <a:p>
-            <a:pPr algn="l"/>
+          <a:bodyPr wrap="square" lIns="0" rIns="0" tIns="0" bIns="0" anchor="t"/>
+          <a:lstStyle/>
+          <a:p>
+            <a:pPr algn="l">
+              <a:spcAft>
+                <a:spcPts val="200"/>
+              </a:spcAft>
+            </a:pPr>
             <a:r>
               <a:rPr sz="1120" b="1" i="0">
                 <a:solidFill>
@@ -10596,7 +11276,7 @@
         <p:spPr>
           <a:xfrm>
             <a:off x="2496312" y="3895344"/>
-            <a:ext cx="3291840" cy="256032"/>
+            <a:ext cx="3566160" cy="256032"/>
           </a:xfrm>
           <a:prstGeom prst="rect">
             <a:avLst/>
@@ -10604,12 +11284,14 @@
           <a:noFill/>
         </p:spPr>
         <p:txBody>
-          <a:bodyPr wrap="none" lIns="0" rIns="0" tIns="0" bIns="0" anchor="t">
-            <a:spAutoFit/>
-          </a:bodyPr>
-          <a:lstStyle/>
-          <a:p>
-            <a:pPr algn="l"/>
+          <a:bodyPr wrap="square" lIns="0" rIns="0" tIns="0" bIns="0" anchor="t"/>
+          <a:lstStyle/>
+          <a:p>
+            <a:pPr algn="l">
+              <a:spcAft>
+                <a:spcPts val="200"/>
+              </a:spcAft>
+            </a:pPr>
             <a:r>
               <a:rPr sz="1550" b="1" i="0">
                 <a:solidFill>
@@ -10631,7 +11313,7 @@
         <p:spPr>
           <a:xfrm>
             <a:off x="2496312" y="4206240"/>
-            <a:ext cx="4572000" cy="256032"/>
+            <a:ext cx="4617720" cy="347472"/>
           </a:xfrm>
           <a:prstGeom prst="rect">
             <a:avLst/>
@@ -10639,12 +11321,14 @@
           <a:noFill/>
         </p:spPr>
         <p:txBody>
-          <a:bodyPr wrap="none" lIns="0" rIns="0" tIns="0" bIns="0" anchor="t">
-            <a:spAutoFit/>
-          </a:bodyPr>
-          <a:lstStyle/>
-          <a:p>
-            <a:pPr algn="l"/>
+          <a:bodyPr wrap="square" lIns="0" rIns="0" tIns="0" bIns="0" anchor="t"/>
+          <a:lstStyle/>
+          <a:p>
+            <a:pPr algn="l">
+              <a:spcAft>
+                <a:spcPts val="200"/>
+              </a:spcAft>
+            </a:pPr>
             <a:r>
               <a:rPr sz="1150" b="0" i="0">
                 <a:solidFill>
@@ -10652,7 +11336,23 @@
                 </a:solidFill>
                 <a:latin typeface="Calibri"/>
               </a:rPr>
-              <a:t>Actuator、Prometheus 与 Grafana 目录/配置</a:t>
+              <a:t>Actuator、Prometheus 与</a:t>
+            </a:r>
+          </a:p>
+          <a:p>
+            <a:pPr algn="l">
+              <a:spcAft>
+                <a:spcPts val="200"/>
+              </a:spcAft>
+            </a:pPr>
+            <a:r>
+              <a:rPr sz="1150" b="0" i="0">
+                <a:solidFill>
+                  <a:srgbClr val="5B7780"/>
+                </a:solidFill>
+                <a:latin typeface="Calibri"/>
+              </a:rPr>
+              <a:t>Grafana 配置</a:t>
             </a:r>
           </a:p>
         </p:txBody>
@@ -10719,12 +11419,14 @@
           <a:noFill/>
         </p:spPr>
         <p:txBody>
-          <a:bodyPr wrap="none" lIns="0" rIns="0" tIns="0" bIns="0" anchor="t">
-            <a:spAutoFit/>
-          </a:bodyPr>
-          <a:lstStyle/>
-          <a:p>
-            <a:pPr algn="l"/>
+          <a:bodyPr wrap="square" lIns="0" rIns="0" tIns="0" bIns="0" anchor="t"/>
+          <a:lstStyle/>
+          <a:p>
+            <a:pPr algn="l">
+              <a:spcAft>
+                <a:spcPts val="200"/>
+              </a:spcAft>
+            </a:pPr>
             <a:r>
               <a:rPr sz="1120" b="1" i="0">
                 <a:solidFill>
@@ -10746,7 +11448,7 @@
         <p:spPr>
           <a:xfrm>
             <a:off x="2496312" y="4764024"/>
-            <a:ext cx="3291840" cy="256032"/>
+            <a:ext cx="3566160" cy="256032"/>
           </a:xfrm>
           <a:prstGeom prst="rect">
             <a:avLst/>
@@ -10754,12 +11456,14 @@
           <a:noFill/>
         </p:spPr>
         <p:txBody>
-          <a:bodyPr wrap="none" lIns="0" rIns="0" tIns="0" bIns="0" anchor="t">
-            <a:spAutoFit/>
-          </a:bodyPr>
-          <a:lstStyle/>
-          <a:p>
-            <a:pPr algn="l"/>
+          <a:bodyPr wrap="square" lIns="0" rIns="0" tIns="0" bIns="0" anchor="t"/>
+          <a:lstStyle/>
+          <a:p>
+            <a:pPr algn="l">
+              <a:spcAft>
+                <a:spcPts val="200"/>
+              </a:spcAft>
+            </a:pPr>
             <a:r>
               <a:rPr sz="1550" b="1" i="0">
                 <a:solidFill>
@@ -10781,7 +11485,7 @@
         <p:spPr>
           <a:xfrm>
             <a:off x="2496312" y="5074920"/>
-            <a:ext cx="4572000" cy="256032"/>
+            <a:ext cx="4617720" cy="347472"/>
           </a:xfrm>
           <a:prstGeom prst="rect">
             <a:avLst/>
@@ -10789,12 +11493,14 @@
           <a:noFill/>
         </p:spPr>
         <p:txBody>
-          <a:bodyPr wrap="none" lIns="0" rIns="0" tIns="0" bIns="0" anchor="t">
-            <a:spAutoFit/>
-          </a:bodyPr>
-          <a:lstStyle/>
-          <a:p>
-            <a:pPr algn="l"/>
+          <a:bodyPr wrap="square" lIns="0" rIns="0" tIns="0" bIns="0" anchor="t"/>
+          <a:lstStyle/>
+          <a:p>
+            <a:pPr algn="l">
+              <a:spcAft>
+                <a:spcPts val="200"/>
+              </a:spcAft>
+            </a:pPr>
             <a:r>
               <a:rPr sz="1150" b="0" i="0">
                 <a:solidFill>
@@ -10802,7 +11508,7 @@
                 </a:solidFill>
                 <a:latin typeface="Calibri"/>
               </a:rPr>
-              <a:t>实时性、并发、限流、安全 Prompt 审查、稳定性与成本优化</a:t>
+              <a:t>实时性、并发、限流、安全审查、稳定性与成本优化</a:t>
             </a:r>
           </a:p>
         </p:txBody>
@@ -10959,12 +11665,14 @@
           <a:noFill/>
         </p:spPr>
         <p:txBody>
-          <a:bodyPr wrap="none" lIns="0" rIns="0" tIns="0" bIns="0" anchor="ctr">
-            <a:spAutoFit/>
-          </a:bodyPr>
-          <a:lstStyle/>
-          <a:p>
-            <a:pPr algn="ctr"/>
+          <a:bodyPr wrap="square" lIns="0" rIns="0" tIns="0" bIns="0" anchor="ctr"/>
+          <a:lstStyle/>
+          <a:p>
+            <a:pPr algn="ctr">
+              <a:spcAft>
+                <a:spcPts val="200"/>
+              </a:spcAft>
+            </a:pPr>
             <a:r>
               <a:rPr sz="850" b="1" i="0">
                 <a:solidFill>
@@ -10994,12 +11702,14 @@
           <a:noFill/>
         </p:spPr>
         <p:txBody>
-          <a:bodyPr wrap="none" lIns="0" rIns="0" tIns="0" bIns="0" anchor="t">
-            <a:spAutoFit/>
-          </a:bodyPr>
-          <a:lstStyle/>
-          <a:p>
-            <a:pPr algn="l"/>
+          <a:bodyPr wrap="square" lIns="0" rIns="0" tIns="0" bIns="0" anchor="t"/>
+          <a:lstStyle/>
+          <a:p>
+            <a:pPr algn="l">
+              <a:spcAft>
+                <a:spcPts val="200"/>
+              </a:spcAft>
+            </a:pPr>
             <a:r>
               <a:rPr sz="1600" b="1" i="0">
                 <a:solidFill>
@@ -11029,20 +11739,54 @@
           <a:noFill/>
         </p:spPr>
         <p:txBody>
-          <a:bodyPr wrap="none" lIns="27432" rIns="27432" tIns="27432" bIns="27432" anchor="t">
-            <a:spAutoFit/>
-          </a:bodyPr>
-          <a:lstStyle/>
-          <a:p>
-            <a:pPr algn="l"/>
-            <a:r>
-              <a:rPr sz="1280" b="0" i="0">
+          <a:bodyPr wrap="square" lIns="27432" rIns="27432" tIns="27432" bIns="27432" anchor="t"/>
+          <a:lstStyle/>
+          <a:p>
+            <a:pPr algn="l">
+              <a:spcAft>
+                <a:spcPts val="200"/>
+              </a:spcAft>
+            </a:pPr>
+            <a:r>
+              <a:rPr sz="1240" b="0" i="0">
                 <a:solidFill>
                   <a:srgbClr val="17323B"/>
                 </a:solidFill>
                 <a:latin typeface="Calibri"/>
               </a:rPr>
-              <a:t>当前“近期变更”更像一次架构演进快照：主干能力完整，微服务版本已经落盘，但运行与发布还需要环境验证。</a:t>
+              <a:t>近期变更更像架构演进快照：主链路</a:t>
+            </a:r>
+          </a:p>
+          <a:p>
+            <a:pPr algn="l">
+              <a:spcAft>
+                <a:spcPts val="200"/>
+              </a:spcAft>
+            </a:pPr>
+            <a:r>
+              <a:rPr sz="1240" b="0" i="0">
+                <a:solidFill>
+                  <a:srgbClr val="17323B"/>
+                </a:solidFill>
+                <a:latin typeface="Calibri"/>
+              </a:rPr>
+              <a:t>完整，微服务版本已落盘，但运行与</a:t>
+            </a:r>
+          </a:p>
+          <a:p>
+            <a:pPr algn="l">
+              <a:spcAft>
+                <a:spcPts val="200"/>
+              </a:spcAft>
+            </a:pPr>
+            <a:r>
+              <a:rPr sz="1240" b="0" i="0">
+                <a:solidFill>
+                  <a:srgbClr val="17323B"/>
+                </a:solidFill>
+                <a:latin typeface="Calibri"/>
+              </a:rPr>
+              <a:t>发布还需要环境验证。</a:t>
             </a:r>
           </a:p>
         </p:txBody>
@@ -11199,12 +11943,14 @@
           <a:noFill/>
         </p:spPr>
         <p:txBody>
-          <a:bodyPr wrap="none" lIns="0" rIns="0" tIns="0" bIns="0" anchor="ctr">
-            <a:spAutoFit/>
-          </a:bodyPr>
-          <a:lstStyle/>
-          <a:p>
-            <a:pPr algn="ctr"/>
+          <a:bodyPr wrap="square" lIns="0" rIns="0" tIns="0" bIns="0" anchor="ctr"/>
+          <a:lstStyle/>
+          <a:p>
+            <a:pPr algn="ctr">
+              <a:spcAft>
+                <a:spcPts val="200"/>
+              </a:spcAft>
+            </a:pPr>
             <a:r>
               <a:rPr sz="850" b="1" i="0">
                 <a:solidFill>
@@ -11234,12 +11980,14 @@
           <a:noFill/>
         </p:spPr>
         <p:txBody>
-          <a:bodyPr wrap="none" lIns="0" rIns="0" tIns="0" bIns="0" anchor="t">
-            <a:spAutoFit/>
-          </a:bodyPr>
-          <a:lstStyle/>
-          <a:p>
-            <a:pPr algn="l"/>
+          <a:bodyPr wrap="square" lIns="0" rIns="0" tIns="0" bIns="0" anchor="t"/>
+          <a:lstStyle/>
+          <a:p>
+            <a:pPr algn="l">
+              <a:spcAft>
+                <a:spcPts val="200"/>
+              </a:spcAft>
+            </a:pPr>
             <a:r>
               <a:rPr sz="1600" b="1" i="0">
                 <a:solidFill>
@@ -11269,20 +12017,54 @@
           <a:noFill/>
         </p:spPr>
         <p:txBody>
-          <a:bodyPr wrap="none" lIns="27432" rIns="27432" tIns="27432" bIns="27432" anchor="t">
-            <a:spAutoFit/>
-          </a:bodyPr>
-          <a:lstStyle/>
-          <a:p>
-            <a:pPr algn="l"/>
-            <a:r>
-              <a:rPr sz="1280" b="0" i="0">
+          <a:bodyPr wrap="square" lIns="27432" rIns="27432" tIns="27432" bIns="27432" anchor="t"/>
+          <a:lstStyle/>
+          <a:p>
+            <a:pPr algn="l">
+              <a:spcAft>
+                <a:spcPts val="200"/>
+              </a:spcAft>
+            </a:pPr>
+            <a:r>
+              <a:rPr sz="1240" b="0" i="0">
                 <a:solidFill>
                   <a:srgbClr val="17323B"/>
                 </a:solidFill>
                 <a:latin typeface="Calibri"/>
               </a:rPr>
-              <a:t>本次自动化只生成项目状态 PPT；未修改业务代码、配置或依赖声明。</a:t>
+              <a:t>本次自动化只生成项目状态 PPT</a:t>
+            </a:r>
+          </a:p>
+          <a:p>
+            <a:pPr algn="l">
+              <a:spcAft>
+                <a:spcPts val="200"/>
+              </a:spcAft>
+            </a:pPr>
+            <a:r>
+              <a:rPr sz="1240" b="0" i="0">
+                <a:solidFill>
+                  <a:srgbClr val="17323B"/>
+                </a:solidFill>
+                <a:latin typeface="Calibri"/>
+              </a:rPr>
+              <a:t>；未修改业务代码、配置或依赖声明</a:t>
+            </a:r>
+          </a:p>
+          <a:p>
+            <a:pPr algn="l">
+              <a:spcAft>
+                <a:spcPts val="200"/>
+              </a:spcAft>
+            </a:pPr>
+            <a:r>
+              <a:rPr sz="1240" b="0" i="0">
+                <a:solidFill>
+                  <a:srgbClr val="17323B"/>
+                </a:solidFill>
+                <a:latin typeface="Calibri"/>
+              </a:rPr>
+              <a:t>。</a:t>
             </a:r>
           </a:p>
         </p:txBody>
@@ -11304,12 +12086,14 @@
           <a:noFill/>
         </p:spPr>
         <p:txBody>
-          <a:bodyPr wrap="none" lIns="0" rIns="0" tIns="0" bIns="0" anchor="t">
-            <a:spAutoFit/>
-          </a:bodyPr>
-          <a:lstStyle/>
-          <a:p>
-            <a:pPr algn="l"/>
+          <a:bodyPr wrap="square" lIns="0" rIns="0" tIns="0" bIns="0" anchor="t"/>
+          <a:lstStyle/>
+          <a:p>
+            <a:pPr algn="l">
+              <a:spcAft>
+                <a:spcPts val="200"/>
+              </a:spcAft>
+            </a:pPr>
             <a:r>
               <a:rPr sz="1050" b="0" i="0">
                 <a:solidFill>
@@ -11500,12 +12284,14 @@
           <a:noFill/>
         </p:spPr>
         <p:txBody>
-          <a:bodyPr wrap="none" lIns="0" rIns="0" tIns="0" bIns="0" anchor="ctr">
-            <a:spAutoFit/>
-          </a:bodyPr>
-          <a:lstStyle/>
-          <a:p>
-            <a:pPr algn="ctr"/>
+          <a:bodyPr wrap="square" lIns="0" rIns="0" tIns="0" bIns="0" anchor="ctr"/>
+          <a:lstStyle/>
+          <a:p>
+            <a:pPr algn="ctr">
+              <a:spcAft>
+                <a:spcPts val="200"/>
+              </a:spcAft>
+            </a:pPr>
             <a:r>
               <a:rPr sz="900" b="1" i="0">
                 <a:solidFill>
@@ -11535,12 +12321,14 @@
           <a:noFill/>
         </p:spPr>
         <p:txBody>
-          <a:bodyPr wrap="none" lIns="0" rIns="0" tIns="0" bIns="0" anchor="t">
-            <a:spAutoFit/>
-          </a:bodyPr>
-          <a:lstStyle/>
-          <a:p>
-            <a:pPr algn="l"/>
+          <a:bodyPr wrap="square" lIns="0" rIns="0" tIns="0" bIns="0" anchor="t"/>
+          <a:lstStyle/>
+          <a:p>
+            <a:pPr algn="l">
+              <a:spcAft>
+                <a:spcPts val="200"/>
+              </a:spcAft>
+            </a:pPr>
             <a:r>
               <a:rPr sz="3400" b="1" i="0">
                 <a:solidFill>
@@ -11562,7 +12350,7 @@
         <p:spPr>
           <a:xfrm>
             <a:off x="1152144" y="841248"/>
-            <a:ext cx="8046720" cy="256032"/>
+            <a:ext cx="8046720" cy="274320"/>
           </a:xfrm>
           <a:prstGeom prst="rect">
             <a:avLst/>
@@ -11570,12 +12358,14 @@
           <a:noFill/>
         </p:spPr>
         <p:txBody>
-          <a:bodyPr wrap="none" lIns="0" rIns="0" tIns="0" bIns="0" anchor="t">
-            <a:spAutoFit/>
-          </a:bodyPr>
-          <a:lstStyle/>
-          <a:p>
-            <a:pPr algn="l"/>
+          <a:bodyPr wrap="square" lIns="0" rIns="0" tIns="0" bIns="0" anchor="t"/>
+          <a:lstStyle/>
+          <a:p>
+            <a:pPr algn="l">
+              <a:spcAft>
+                <a:spcPts val="200"/>
+              </a:spcAft>
+            </a:pPr>
             <a:r>
               <a:rPr sz="1150" b="0" i="0">
                 <a:solidFill>
@@ -11650,12 +12440,14 @@
           <a:noFill/>
         </p:spPr>
         <p:txBody>
-          <a:bodyPr wrap="none" lIns="0" rIns="0" tIns="0" bIns="0" anchor="ctr">
-            <a:spAutoFit/>
-          </a:bodyPr>
-          <a:lstStyle/>
-          <a:p>
-            <a:pPr algn="ctr"/>
+          <a:bodyPr wrap="square" lIns="0" rIns="0" tIns="0" bIns="0" anchor="ctr"/>
+          <a:lstStyle/>
+          <a:p>
+            <a:pPr algn="ctr">
+              <a:spcAft>
+                <a:spcPts val="200"/>
+              </a:spcAft>
+            </a:pPr>
             <a:r>
               <a:rPr sz="1050" b="1" i="0">
                 <a:solidFill>
@@ -11730,12 +12522,14 @@
           <a:noFill/>
         </p:spPr>
         <p:txBody>
-          <a:bodyPr wrap="none" lIns="0" rIns="0" tIns="0" bIns="0" anchor="ctr">
-            <a:spAutoFit/>
-          </a:bodyPr>
-          <a:lstStyle/>
-          <a:p>
-            <a:pPr algn="ctr"/>
+          <a:bodyPr wrap="square" lIns="0" rIns="0" tIns="0" bIns="0" anchor="ctr"/>
+          <a:lstStyle/>
+          <a:p>
+            <a:pPr algn="ctr">
+              <a:spcAft>
+                <a:spcPts val="200"/>
+              </a:spcAft>
+            </a:pPr>
             <a:r>
               <a:rPr sz="3100" b="1" i="0">
                 <a:solidFill>
@@ -11757,7 +12551,7 @@
         <p:spPr>
           <a:xfrm>
             <a:off x="969264" y="2221992"/>
-            <a:ext cx="1728216" cy="274320"/>
+            <a:ext cx="1728216" cy="310896"/>
           </a:xfrm>
           <a:prstGeom prst="rect">
             <a:avLst/>
@@ -11765,20 +12559,38 @@
           <a:noFill/>
         </p:spPr>
         <p:txBody>
-          <a:bodyPr wrap="none" lIns="0" rIns="0" tIns="0" bIns="0" anchor="t">
-            <a:spAutoFit/>
-          </a:bodyPr>
-          <a:lstStyle/>
-          <a:p>
-            <a:pPr algn="ctr"/>
-            <a:r>
-              <a:rPr sz="1250" b="1" i="0">
+          <a:bodyPr wrap="square" lIns="0" rIns="0" tIns="0" bIns="0" anchor="t"/>
+          <a:lstStyle/>
+          <a:p>
+            <a:pPr algn="ctr">
+              <a:spcAft>
+                <a:spcPts val="200"/>
+              </a:spcAft>
+            </a:pPr>
+            <a:r>
+              <a:rPr sz="1220" b="1" i="0">
                 <a:solidFill>
                   <a:srgbClr val="17323B"/>
                 </a:solidFill>
                 <a:latin typeface="Calibri"/>
               </a:rPr>
-              <a:t>Prometheus 抓取间隔</a:t>
+              <a:t>Prometheu</a:t>
+            </a:r>
+          </a:p>
+          <a:p>
+            <a:pPr algn="ctr">
+              <a:spcAft>
+                <a:spcPts val="200"/>
+              </a:spcAft>
+            </a:pPr>
+            <a:r>
+              <a:rPr sz="1220" b="1" i="0">
+                <a:solidFill>
+                  <a:srgbClr val="17323B"/>
+                </a:solidFill>
+                <a:latin typeface="Calibri"/>
+              </a:rPr>
+              <a:t>s 抓取间隔</a:t>
             </a:r>
           </a:p>
         </p:txBody>
@@ -11791,8 +12603,8 @@
         </p:nvSpPr>
         <p:spPr>
           <a:xfrm>
-            <a:off x="969264" y="2532888"/>
-            <a:ext cx="1728216" cy="256032"/>
+            <a:off x="969264" y="2542032"/>
+            <a:ext cx="1728216" cy="274320"/>
           </a:xfrm>
           <a:prstGeom prst="rect">
             <a:avLst/>
@@ -11800,20 +12612,54 @@
           <a:noFill/>
         </p:spPr>
         <p:txBody>
-          <a:bodyPr wrap="none" lIns="0" rIns="0" tIns="0" bIns="0" anchor="t">
-            <a:spAutoFit/>
-          </a:bodyPr>
-          <a:lstStyle/>
-          <a:p>
-            <a:pPr algn="ctr"/>
-            <a:r>
-              <a:rPr sz="950" b="0" i="0">
+          <a:bodyPr wrap="square" lIns="0" rIns="0" tIns="0" bIns="0" anchor="t"/>
+          <a:lstStyle/>
+          <a:p>
+            <a:pPr algn="ctr">
+              <a:spcAft>
+                <a:spcPts val="200"/>
+              </a:spcAft>
+            </a:pPr>
+            <a:r>
+              <a:rPr sz="919" b="0" i="0">
                 <a:solidFill>
                   <a:srgbClr val="5B7780"/>
                 </a:solidFill>
                 <a:latin typeface="Calibri"/>
               </a:rPr>
-              <a:t>/api/actuator/prometheus</a:t>
+              <a:t>/api/actua</a:t>
+            </a:r>
+          </a:p>
+          <a:p>
+            <a:pPr algn="ctr">
+              <a:spcAft>
+                <a:spcPts val="200"/>
+              </a:spcAft>
+            </a:pPr>
+            <a:r>
+              <a:rPr sz="919" b="0" i="0">
+                <a:solidFill>
+                  <a:srgbClr val="5B7780"/>
+                </a:solidFill>
+                <a:latin typeface="Calibri"/>
+              </a:rPr>
+              <a:t>tor/promet</a:t>
+            </a:r>
+          </a:p>
+          <a:p>
+            <a:pPr algn="ctr">
+              <a:spcAft>
+                <a:spcPts val="200"/>
+              </a:spcAft>
+            </a:pPr>
+            <a:r>
+              <a:rPr sz="919" b="0" i="0">
+                <a:solidFill>
+                  <a:srgbClr val="5B7780"/>
+                </a:solidFill>
+                <a:latin typeface="Calibri"/>
+              </a:rPr>
+              <a:t>heus</a:t>
             </a:r>
           </a:p>
         </p:txBody>
@@ -11880,12 +12726,14 @@
           <a:noFill/>
         </p:spPr>
         <p:txBody>
-          <a:bodyPr wrap="none" lIns="0" rIns="0" tIns="0" bIns="0" anchor="ctr">
-            <a:spAutoFit/>
-          </a:bodyPr>
-          <a:lstStyle/>
-          <a:p>
-            <a:pPr algn="ctr"/>
+          <a:bodyPr wrap="square" lIns="0" rIns="0" tIns="0" bIns="0" anchor="ctr"/>
+          <a:lstStyle/>
+          <a:p>
+            <a:pPr algn="ctr">
+              <a:spcAft>
+                <a:spcPts val="200"/>
+              </a:spcAft>
+            </a:pPr>
             <a:r>
               <a:rPr sz="3100" b="1" i="0">
                 <a:solidFill>
@@ -11907,7 +12755,7 @@
         <p:spPr>
           <a:xfrm>
             <a:off x="3291840" y="2221992"/>
-            <a:ext cx="1728216" cy="274320"/>
+            <a:ext cx="1728216" cy="310896"/>
           </a:xfrm>
           <a:prstGeom prst="rect">
             <a:avLst/>
@@ -11915,14 +12763,16 @@
           <a:noFill/>
         </p:spPr>
         <p:txBody>
-          <a:bodyPr wrap="none" lIns="0" rIns="0" tIns="0" bIns="0" anchor="t">
-            <a:spAutoFit/>
-          </a:bodyPr>
-          <a:lstStyle/>
-          <a:p>
-            <a:pPr algn="ctr"/>
-            <a:r>
-              <a:rPr sz="1250" b="1" i="0">
+          <a:bodyPr wrap="square" lIns="0" rIns="0" tIns="0" bIns="0" anchor="t"/>
+          <a:lstStyle/>
+          <a:p>
+            <a:pPr algn="ctr">
+              <a:spcAft>
+                <a:spcPts val="200"/>
+              </a:spcAft>
+            </a:pPr>
+            <a:r>
+              <a:rPr sz="1220" b="1" i="0">
                 <a:solidFill>
                   <a:srgbClr val="17323B"/>
                 </a:solidFill>
@@ -11941,8 +12791,8 @@
         </p:nvSpPr>
         <p:spPr>
           <a:xfrm>
-            <a:off x="3291840" y="2532888"/>
-            <a:ext cx="1728216" cy="256032"/>
+            <a:off x="3291840" y="2542032"/>
+            <a:ext cx="1728216" cy="274320"/>
           </a:xfrm>
           <a:prstGeom prst="rect">
             <a:avLst/>
@@ -11950,20 +12800,54 @@
           <a:noFill/>
         </p:spPr>
         <p:txBody>
-          <a:bodyPr wrap="none" lIns="0" rIns="0" tIns="0" bIns="0" anchor="t">
-            <a:spAutoFit/>
-          </a:bodyPr>
-          <a:lstStyle/>
-          <a:p>
-            <a:pPr algn="ctr"/>
-            <a:r>
-              <a:rPr sz="950" b="0" i="0">
+          <a:bodyPr wrap="square" lIns="0" rIns="0" tIns="0" bIns="0" anchor="t"/>
+          <a:lstStyle/>
+          <a:p>
+            <a:pPr algn="ctr">
+              <a:spcAft>
+                <a:spcPts val="200"/>
+              </a:spcAft>
+            </a:pPr>
+            <a:r>
+              <a:rPr sz="919" b="0" i="0">
                 <a:solidFill>
                   <a:srgbClr val="5B7780"/>
                 </a:solidFill>
                 <a:latin typeface="Calibri"/>
               </a:rPr>
-              <a:t>user / app / chat_history</a:t>
+              <a:t>user / app</a:t>
+            </a:r>
+          </a:p>
+          <a:p>
+            <a:pPr algn="ctr">
+              <a:spcAft>
+                <a:spcPts val="200"/>
+              </a:spcAft>
+            </a:pPr>
+            <a:r>
+              <a:rPr sz="919" b="0" i="0">
+                <a:solidFill>
+                  <a:srgbClr val="5B7780"/>
+                </a:solidFill>
+                <a:latin typeface="Calibri"/>
+              </a:rPr>
+              <a:t>/ chat_his</a:t>
+            </a:r>
+          </a:p>
+          <a:p>
+            <a:pPr algn="ctr">
+              <a:spcAft>
+                <a:spcPts val="200"/>
+              </a:spcAft>
+            </a:pPr>
+            <a:r>
+              <a:rPr sz="919" b="0" i="0">
+                <a:solidFill>
+                  <a:srgbClr val="5B7780"/>
+                </a:solidFill>
+                <a:latin typeface="Calibri"/>
+              </a:rPr>
+              <a:t>tory</a:t>
             </a:r>
           </a:p>
         </p:txBody>
@@ -12030,12 +12914,14 @@
           <a:noFill/>
         </p:spPr>
         <p:txBody>
-          <a:bodyPr wrap="none" lIns="0" rIns="0" tIns="0" bIns="0" anchor="ctr">
-            <a:spAutoFit/>
-          </a:bodyPr>
-          <a:lstStyle/>
-          <a:p>
-            <a:pPr algn="ctr"/>
+          <a:bodyPr wrap="square" lIns="0" rIns="0" tIns="0" bIns="0" anchor="ctr"/>
+          <a:lstStyle/>
+          <a:p>
+            <a:pPr algn="ctr">
+              <a:spcAft>
+                <a:spcPts val="200"/>
+              </a:spcAft>
+            </a:pPr>
             <a:r>
               <a:rPr sz="3100" b="1" i="0">
                 <a:solidFill>
@@ -12057,7 +12943,7 @@
         <p:spPr>
           <a:xfrm>
             <a:off x="5614416" y="2221992"/>
-            <a:ext cx="1728216" cy="274320"/>
+            <a:ext cx="1728216" cy="310896"/>
           </a:xfrm>
           <a:prstGeom prst="rect">
             <a:avLst/>
@@ -12065,14 +12951,16 @@
           <a:noFill/>
         </p:spPr>
         <p:txBody>
-          <a:bodyPr wrap="none" lIns="0" rIns="0" tIns="0" bIns="0" anchor="t">
-            <a:spAutoFit/>
-          </a:bodyPr>
-          <a:lstStyle/>
-          <a:p>
-            <a:pPr algn="ctr"/>
-            <a:r>
-              <a:rPr sz="1250" b="1" i="0">
+          <a:bodyPr wrap="square" lIns="0" rIns="0" tIns="0" bIns="0" anchor="t"/>
+          <a:lstStyle/>
+          <a:p>
+            <a:pPr algn="ctr">
+              <a:spcAft>
+                <a:spcPts val="200"/>
+              </a:spcAft>
+            </a:pPr>
+            <a:r>
+              <a:rPr sz="1220" b="1" i="0">
                 <a:solidFill>
                   <a:srgbClr val="17323B"/>
                 </a:solidFill>
@@ -12091,8 +12979,8 @@
         </p:nvSpPr>
         <p:spPr>
           <a:xfrm>
-            <a:off x="5614416" y="2532888"/>
-            <a:ext cx="1728216" cy="256032"/>
+            <a:off x="5614416" y="2542032"/>
+            <a:ext cx="1728216" cy="274320"/>
           </a:xfrm>
           <a:prstGeom prst="rect">
             <a:avLst/>
@@ -12100,20 +12988,38 @@
           <a:noFill/>
         </p:spPr>
         <p:txBody>
-          <a:bodyPr wrap="none" lIns="0" rIns="0" tIns="0" bIns="0" anchor="t">
-            <a:spAutoFit/>
-          </a:bodyPr>
-          <a:lstStyle/>
-          <a:p>
-            <a:pPr algn="ctr"/>
-            <a:r>
-              <a:rPr sz="950" b="0" i="0">
+          <a:bodyPr wrap="square" lIns="0" rIns="0" tIns="0" bIns="0" anchor="t"/>
+          <a:lstStyle/>
+          <a:p>
+            <a:pPr algn="ctr">
+              <a:spcAft>
+                <a:spcPts val="200"/>
+              </a:spcAft>
+            </a:pPr>
+            <a:r>
+              <a:rPr sz="919" b="0" i="0">
                 <a:solidFill>
                   <a:srgbClr val="5B7780"/>
                 </a:solidFill>
                 <a:latin typeface="Calibri"/>
               </a:rPr>
-              <a:t>HTML / 多文件 / Vue</a:t>
+              <a:t>HTML / 多文件</a:t>
+            </a:r>
+          </a:p>
+          <a:p>
+            <a:pPr algn="ctr">
+              <a:spcAft>
+                <a:spcPts val="200"/>
+              </a:spcAft>
+            </a:pPr>
+            <a:r>
+              <a:rPr sz="919" b="0" i="0">
+                <a:solidFill>
+                  <a:srgbClr val="5B7780"/>
+                </a:solidFill>
+                <a:latin typeface="Calibri"/>
+              </a:rPr>
+              <a:t>/ Vue</a:t>
             </a:r>
           </a:p>
         </p:txBody>
@@ -12180,12 +13086,14 @@
           <a:noFill/>
         </p:spPr>
         <p:txBody>
-          <a:bodyPr wrap="none" lIns="0" rIns="0" tIns="0" bIns="0" anchor="ctr">
-            <a:spAutoFit/>
-          </a:bodyPr>
-          <a:lstStyle/>
-          <a:p>
-            <a:pPr algn="ctr"/>
+          <a:bodyPr wrap="square" lIns="0" rIns="0" tIns="0" bIns="0" anchor="ctr"/>
+          <a:lstStyle/>
+          <a:p>
+            <a:pPr algn="ctr">
+              <a:spcAft>
+                <a:spcPts val="200"/>
+              </a:spcAft>
+            </a:pPr>
             <a:r>
               <a:rPr sz="3100" b="1" i="0">
                 <a:solidFill>
@@ -12207,7 +13115,7 @@
         <p:spPr>
           <a:xfrm>
             <a:off x="7936992" y="2221992"/>
-            <a:ext cx="1728216" cy="274320"/>
+            <a:ext cx="1728216" cy="310896"/>
           </a:xfrm>
           <a:prstGeom prst="rect">
             <a:avLst/>
@@ -12215,14 +13123,16 @@
           <a:noFill/>
         </p:spPr>
         <p:txBody>
-          <a:bodyPr wrap="none" lIns="0" rIns="0" tIns="0" bIns="0" anchor="t">
-            <a:spAutoFit/>
-          </a:bodyPr>
-          <a:lstStyle/>
-          <a:p>
-            <a:pPr algn="ctr"/>
-            <a:r>
-              <a:rPr sz="1250" b="1" i="0">
+          <a:bodyPr wrap="square" lIns="0" rIns="0" tIns="0" bIns="0" anchor="t"/>
+          <a:lstStyle/>
+          <a:p>
+            <a:pPr algn="ctr">
+              <a:spcAft>
+                <a:spcPts val="200"/>
+              </a:spcAft>
+            </a:pPr>
+            <a:r>
+              <a:rPr sz="1220" b="1" i="0">
                 <a:solidFill>
                   <a:srgbClr val="17323B"/>
                 </a:solidFill>
@@ -12241,8 +13151,8 @@
         </p:nvSpPr>
         <p:spPr>
           <a:xfrm>
-            <a:off x="7936992" y="2532888"/>
-            <a:ext cx="1728216" cy="256032"/>
+            <a:off x="7936992" y="2542032"/>
+            <a:ext cx="1728216" cy="274320"/>
           </a:xfrm>
           <a:prstGeom prst="rect">
             <a:avLst/>
@@ -12250,14 +13160,16 @@
           <a:noFill/>
         </p:spPr>
         <p:txBody>
-          <a:bodyPr wrap="none" lIns="0" rIns="0" tIns="0" bIns="0" anchor="t">
-            <a:spAutoFit/>
-          </a:bodyPr>
-          <a:lstStyle/>
-          <a:p>
-            <a:pPr algn="ctr"/>
-            <a:r>
-              <a:rPr sz="950" b="0" i="0">
+          <a:bodyPr wrap="square" lIns="0" rIns="0" tIns="0" bIns="0" anchor="t"/>
+          <a:lstStyle/>
+          <a:p>
+            <a:pPr algn="ctr">
+              <a:spcAft>
+                <a:spcPts val="200"/>
+              </a:spcAft>
+            </a:pPr>
+            <a:r>
+              <a:rPr sz="919" b="0" i="0">
                 <a:solidFill>
                   <a:srgbClr val="5B7780"/>
                 </a:solidFill>
@@ -12420,135 +13332,177 @@
           <a:noFill/>
         </p:spPr>
         <p:txBody>
-          <a:bodyPr wrap="none" lIns="0" rIns="0" tIns="0" bIns="0" anchor="ctr">
+          <a:bodyPr wrap="square" lIns="0" rIns="0" tIns="0" bIns="0" anchor="ctr"/>
+          <a:lstStyle/>
+          <a:p>
+            <a:pPr algn="ctr">
+              <a:spcAft>
+                <a:spcPts val="200"/>
+              </a:spcAft>
+            </a:pPr>
+            <a:r>
+              <a:rPr sz="850" b="1" i="0">
+                <a:solidFill>
+                  <a:srgbClr val="FFFFFF"/>
+                </a:solidFill>
+                <a:latin typeface="Calibri"/>
+              </a:rPr>
+              <a:t>OBS</a:t>
+            </a:r>
+          </a:p>
+        </p:txBody>
+      </p:sp>
+      <p:sp>
+        <p:nvSpPr>
+          <p:cNvPr id="28" name="TextBox 27"/>
+          <p:cNvSpPr txBox="1"/>
+          <p:nvPr/>
+        </p:nvSpPr>
+        <p:spPr>
+          <a:xfrm>
+            <a:off x="1664207" y="3922776"/>
+            <a:ext cx="3895344" cy="320040"/>
+          </a:xfrm>
+          <a:prstGeom prst="rect">
+            <a:avLst/>
+          </a:prstGeom>
+          <a:noFill/>
+        </p:spPr>
+        <p:txBody>
+          <a:bodyPr wrap="square" lIns="0" rIns="0" tIns="0" bIns="0" anchor="t"/>
+          <a:lstStyle/>
+          <a:p>
+            <a:pPr algn="l">
+              <a:spcAft>
+                <a:spcPts val="200"/>
+              </a:spcAft>
+            </a:pPr>
+            <a:r>
+              <a:rPr sz="1600" b="1" i="0">
+                <a:solidFill>
+                  <a:srgbClr val="21295C"/>
+                </a:solidFill>
+                <a:latin typeface="Calibri"/>
+              </a:rPr>
+              <a:t>已具备的观测入口</a:t>
+            </a:r>
+          </a:p>
+        </p:txBody>
+      </p:sp>
+      <p:sp>
+        <p:nvSpPr>
+          <p:cNvPr id="29" name="TextBox 28"/>
+          <p:cNvSpPr txBox="1"/>
+          <p:nvPr/>
+        </p:nvSpPr>
+        <p:spPr>
+          <a:xfrm>
+            <a:off x="1115568" y="4471416"/>
+            <a:ext cx="4434840" cy="786383"/>
+          </a:xfrm>
+          <a:prstGeom prst="rect">
+            <a:avLst/>
+          </a:prstGeom>
+          <a:noFill/>
+        </p:spPr>
+        <p:txBody>
+          <a:bodyPr wrap="square" lIns="73152" rIns="73152" tIns="36576" bIns="36576">
             <a:spAutoFit/>
           </a:bodyPr>
           <a:lstStyle/>
           <a:p>
-            <a:pPr algn="ctr"/>
-            <a:r>
-              <a:rPr sz="850" b="1" i="0">
-                <a:solidFill>
-                  <a:srgbClr val="FFFFFF"/>
-                </a:solidFill>
-                <a:latin typeface="Calibri"/>
-              </a:rPr>
-              <a:t>OBS</a:t>
-            </a:r>
-          </a:p>
-        </p:txBody>
-      </p:sp>
-      <p:sp>
-        <p:nvSpPr>
-          <p:cNvPr id="28" name="TextBox 27"/>
-          <p:cNvSpPr txBox="1"/>
-          <p:nvPr/>
-        </p:nvSpPr>
-        <p:spPr>
-          <a:xfrm>
-            <a:off x="1664207" y="3922776"/>
-            <a:ext cx="3895344" cy="320040"/>
-          </a:xfrm>
-          <a:prstGeom prst="rect">
-            <a:avLst/>
-          </a:prstGeom>
-          <a:noFill/>
-        </p:spPr>
-        <p:txBody>
-          <a:bodyPr wrap="none" lIns="0" rIns="0" tIns="0" bIns="0" anchor="t">
-            <a:spAutoFit/>
-          </a:bodyPr>
-          <a:lstStyle/>
-          <a:p>
-            <a:pPr algn="l"/>
-            <a:r>
-              <a:rPr sz="1600" b="1" i="0">
-                <a:solidFill>
-                  <a:srgbClr val="21295C"/>
-                </a:solidFill>
-                <a:latin typeface="Calibri"/>
-              </a:rPr>
-              <a:t>已具备的观测入口</a:t>
-            </a:r>
-          </a:p>
-        </p:txBody>
-      </p:sp>
-      <p:sp>
-        <p:nvSpPr>
-          <p:cNvPr id="29" name="TextBox 28"/>
-          <p:cNvSpPr txBox="1"/>
-          <p:nvPr/>
-        </p:nvSpPr>
-        <p:spPr>
-          <a:xfrm>
-            <a:off x="1115568" y="4471416"/>
-            <a:ext cx="4434840" cy="786383"/>
-          </a:xfrm>
-          <a:prstGeom prst="rect">
-            <a:avLst/>
-          </a:prstGeom>
-          <a:noFill/>
-        </p:spPr>
-        <p:txBody>
-          <a:bodyPr wrap="none" lIns="54864" rIns="54864" tIns="36576" bIns="36576">
-            <a:spAutoFit/>
-          </a:bodyPr>
-          <a:lstStyle/>
-          <a:p>
             <a:pPr>
               <a:lnSpc>
-                <a:spcPct val="105000"/>
+                <a:spcPct val="100000"/>
               </a:lnSpc>
               <a:spcAft>
-                <a:spcPts val="600"/>
-              </a:spcAft>
-            </a:pPr>
-            <a:r>
-              <a:rPr sz="1270">
+                <a:spcPts val="100"/>
+              </a:spcAft>
+            </a:pPr>
+            <a:r>
+              <a:rPr sz="1230">
                 <a:solidFill>
                   <a:srgbClr val="17323B"/>
                 </a:solidFill>
                 <a:latin typeface="Calibri"/>
               </a:rPr>
-              <a:t>Spring Boot Actuator 暴露 health、info、prometheus</a:t>
+              <a:t>Actuator 暴露 health、i</a:t>
             </a:r>
           </a:p>
           <a:p>
             <a:pPr>
               <a:lnSpc>
-                <a:spcPct val="105000"/>
+                <a:spcPct val="100000"/>
               </a:lnSpc>
               <a:spcAft>
-                <a:spcPts val="600"/>
-              </a:spcAft>
-            </a:pPr>
-            <a:r>
-              <a:rPr sz="1270">
+                <a:spcPts val="400"/>
+              </a:spcAft>
+            </a:pPr>
+            <a:r>
+              <a:rPr sz="1230">
                 <a:solidFill>
                   <a:srgbClr val="17323B"/>
                 </a:solidFill>
                 <a:latin typeface="Calibri"/>
               </a:rPr>
-              <a:t>prometheus.yml 指向 localhost:8123/api/actuator/prometheus</a:t>
+              <a:t>nfo、prometheus</a:t>
             </a:r>
           </a:p>
           <a:p>
             <a:pPr>
               <a:lnSpc>
-                <a:spcPct val="105000"/>
+                <a:spcPct val="100000"/>
               </a:lnSpc>
               <a:spcAft>
-                <a:spcPts val="600"/>
-              </a:spcAft>
-            </a:pPr>
-            <a:r>
-              <a:rPr sz="1270">
+                <a:spcPts val="100"/>
+              </a:spcAft>
+            </a:pPr>
+            <a:r>
+              <a:rPr sz="1230">
                 <a:solidFill>
                   <a:srgbClr val="17323B"/>
                 </a:solidFill>
                 <a:latin typeface="Calibri"/>
               </a:rPr>
-              <a:t>grafana 目录存在，可继续沉淀仪表盘</a:t>
+              <a:t>prometheus.yml</a:t>
+            </a:r>
+          </a:p>
+          <a:p>
+            <a:pPr>
+              <a:lnSpc>
+                <a:spcPct val="100000"/>
+              </a:lnSpc>
+              <a:spcAft>
+                <a:spcPts val="400"/>
+              </a:spcAft>
+            </a:pPr>
+            <a:r>
+              <a:rPr sz="1230">
+                <a:solidFill>
+                  <a:srgbClr val="17323B"/>
+                </a:solidFill>
+                <a:latin typeface="Calibri"/>
+              </a:rPr>
+              <a:t>指向应用指标端点</a:t>
+            </a:r>
+          </a:p>
+          <a:p>
+            <a:pPr>
+              <a:lnSpc>
+                <a:spcPct val="100000"/>
+              </a:lnSpc>
+              <a:spcAft>
+                <a:spcPts val="400"/>
+              </a:spcAft>
+            </a:pPr>
+            <a:r>
+              <a:rPr sz="1230">
+                <a:solidFill>
+                  <a:srgbClr val="17323B"/>
+                </a:solidFill>
+                <a:latin typeface="Calibri"/>
+              </a:rPr>
+              <a:t>grafana 目录存在，可沉淀仪表盘</a:t>
             </a:r>
           </a:p>
         </p:txBody>
@@ -12705,91 +13659,95 @@
           <a:noFill/>
         </p:spPr>
         <p:txBody>
-          <a:bodyPr wrap="none" lIns="0" rIns="0" tIns="0" bIns="0" anchor="ctr">
+          <a:bodyPr wrap="square" lIns="0" rIns="0" tIns="0" bIns="0" anchor="ctr"/>
+          <a:lstStyle/>
+          <a:p>
+            <a:pPr algn="ctr">
+              <a:spcAft>
+                <a:spcPts val="200"/>
+              </a:spcAft>
+            </a:pPr>
+            <a:r>
+              <a:rPr sz="850" b="1" i="0">
+                <a:solidFill>
+                  <a:srgbClr val="FFFFFF"/>
+                </a:solidFill>
+                <a:latin typeface="Calibri"/>
+              </a:rPr>
+              <a:t>RUN</a:t>
+            </a:r>
+          </a:p>
+        </p:txBody>
+      </p:sp>
+      <p:sp>
+        <p:nvSpPr>
+          <p:cNvPr id="34" name="TextBox 33"/>
+          <p:cNvSpPr txBox="1"/>
+          <p:nvPr/>
+        </p:nvSpPr>
+        <p:spPr>
+          <a:xfrm>
+            <a:off x="7123175" y="3922776"/>
+            <a:ext cx="3895344" cy="320040"/>
+          </a:xfrm>
+          <a:prstGeom prst="rect">
+            <a:avLst/>
+          </a:prstGeom>
+          <a:noFill/>
+        </p:spPr>
+        <p:txBody>
+          <a:bodyPr wrap="square" lIns="0" rIns="0" tIns="0" bIns="0" anchor="t"/>
+          <a:lstStyle/>
+          <a:p>
+            <a:pPr algn="l">
+              <a:spcAft>
+                <a:spcPts val="200"/>
+              </a:spcAft>
+            </a:pPr>
+            <a:r>
+              <a:rPr sz="1600" b="1" i="0">
+                <a:solidFill>
+                  <a:srgbClr val="21295C"/>
+                </a:solidFill>
+                <a:latin typeface="Calibri"/>
+              </a:rPr>
+              <a:t>仍需从运行环境补齐</a:t>
+            </a:r>
+          </a:p>
+        </p:txBody>
+      </p:sp>
+      <p:sp>
+        <p:nvSpPr>
+          <p:cNvPr id="35" name="TextBox 34"/>
+          <p:cNvSpPr txBox="1"/>
+          <p:nvPr/>
+        </p:nvSpPr>
+        <p:spPr>
+          <a:xfrm>
+            <a:off x="6574536" y="4471416"/>
+            <a:ext cx="4434840" cy="786383"/>
+          </a:xfrm>
+          <a:prstGeom prst="rect">
+            <a:avLst/>
+          </a:prstGeom>
+          <a:noFill/>
+        </p:spPr>
+        <p:txBody>
+          <a:bodyPr wrap="square" lIns="73152" rIns="73152" tIns="36576" bIns="36576">
             <a:spAutoFit/>
           </a:bodyPr>
           <a:lstStyle/>
           <a:p>
-            <a:pPr algn="ctr"/>
-            <a:r>
-              <a:rPr sz="850" b="1" i="0">
-                <a:solidFill>
-                  <a:srgbClr val="FFFFFF"/>
-                </a:solidFill>
-                <a:latin typeface="Calibri"/>
-              </a:rPr>
-              <a:t>RUN</a:t>
-            </a:r>
-          </a:p>
-        </p:txBody>
-      </p:sp>
-      <p:sp>
-        <p:nvSpPr>
-          <p:cNvPr id="34" name="TextBox 33"/>
-          <p:cNvSpPr txBox="1"/>
-          <p:nvPr/>
-        </p:nvSpPr>
-        <p:spPr>
-          <a:xfrm>
-            <a:off x="7123175" y="3922776"/>
-            <a:ext cx="3895344" cy="320040"/>
-          </a:xfrm>
-          <a:prstGeom prst="rect">
-            <a:avLst/>
-          </a:prstGeom>
-          <a:noFill/>
-        </p:spPr>
-        <p:txBody>
-          <a:bodyPr wrap="none" lIns="0" rIns="0" tIns="0" bIns="0" anchor="t">
-            <a:spAutoFit/>
-          </a:bodyPr>
-          <a:lstStyle/>
-          <a:p>
-            <a:pPr algn="l"/>
-            <a:r>
-              <a:rPr sz="1600" b="1" i="0">
-                <a:solidFill>
-                  <a:srgbClr val="21295C"/>
-                </a:solidFill>
-                <a:latin typeface="Calibri"/>
-              </a:rPr>
-              <a:t>仍需从运行环境补齐</a:t>
-            </a:r>
-          </a:p>
-        </p:txBody>
-      </p:sp>
-      <p:sp>
-        <p:nvSpPr>
-          <p:cNvPr id="35" name="TextBox 34"/>
-          <p:cNvSpPr txBox="1"/>
-          <p:nvPr/>
-        </p:nvSpPr>
-        <p:spPr>
-          <a:xfrm>
-            <a:off x="6574536" y="4471416"/>
-            <a:ext cx="4434840" cy="786383"/>
-          </a:xfrm>
-          <a:prstGeom prst="rect">
-            <a:avLst/>
-          </a:prstGeom>
-          <a:noFill/>
-        </p:spPr>
-        <p:txBody>
-          <a:bodyPr wrap="none" lIns="54864" rIns="54864" tIns="36576" bIns="36576">
-            <a:spAutoFit/>
-          </a:bodyPr>
-          <a:lstStyle/>
-          <a:p>
             <a:pPr>
               <a:lnSpc>
-                <a:spcPct val="105000"/>
+                <a:spcPct val="100000"/>
               </a:lnSpc>
               <a:spcAft>
-                <a:spcPts val="600"/>
-              </a:spcAft>
-            </a:pPr>
-            <a:r>
-              <a:rPr sz="1270">
+                <a:spcPts val="400"/>
+              </a:spcAft>
+            </a:pPr>
+            <a:r>
+              <a:rPr sz="1230">
                 <a:solidFill>
                   <a:srgbClr val="17323B"/>
                 </a:solidFill>
@@ -12801,33 +13759,52 @@
           <a:p>
             <a:pPr>
               <a:lnSpc>
-                <a:spcPct val="105000"/>
+                <a:spcPct val="100000"/>
               </a:lnSpc>
               <a:spcAft>
-                <a:spcPts val="600"/>
-              </a:spcAft>
-            </a:pPr>
-            <a:r>
-              <a:rPr sz="1270">
+                <a:spcPts val="100"/>
+              </a:spcAft>
+            </a:pPr>
+            <a:r>
+              <a:rPr sz="1230">
                 <a:solidFill>
                   <a:srgbClr val="17323B"/>
                 </a:solidFill>
                 <a:latin typeface="Calibri"/>
               </a:rPr>
-              <a:t>AI 调用耗时、token/成本、失败类型</a:t>
+              <a:t>AI</a:t>
             </a:r>
           </a:p>
           <a:p>
             <a:pPr>
               <a:lnSpc>
-                <a:spcPct val="105000"/>
+                <a:spcPct val="100000"/>
               </a:lnSpc>
               <a:spcAft>
-                <a:spcPts val="600"/>
-              </a:spcAft>
-            </a:pPr>
-            <a:r>
-              <a:rPr sz="1270">
+                <a:spcPts val="400"/>
+              </a:spcAft>
+            </a:pPr>
+            <a:r>
+              <a:rPr sz="1230">
+                <a:solidFill>
+                  <a:srgbClr val="17323B"/>
+                </a:solidFill>
+                <a:latin typeface="Calibri"/>
+              </a:rPr>
+              <a:t>调用耗时、token/成本、失败类型</a:t>
+            </a:r>
+          </a:p>
+          <a:p>
+            <a:pPr>
+              <a:lnSpc>
+                <a:spcPct val="100000"/>
+              </a:lnSpc>
+              <a:spcAft>
+                <a:spcPts val="400"/>
+              </a:spcAft>
+            </a:pPr>
+            <a:r>
+              <a:rPr sz="1230">
                 <a:solidFill>
                   <a:srgbClr val="17323B"/>
                 </a:solidFill>
@@ -12855,12 +13832,14 @@
           <a:noFill/>
         </p:spPr>
         <p:txBody>
-          <a:bodyPr wrap="none" lIns="0" rIns="0" tIns="0" bIns="0" anchor="t">
-            <a:spAutoFit/>
-          </a:bodyPr>
-          <a:lstStyle/>
-          <a:p>
-            <a:pPr algn="l"/>
+          <a:bodyPr wrap="square" lIns="0" rIns="0" tIns="0" bIns="0" anchor="t"/>
+          <a:lstStyle/>
+          <a:p>
+            <a:pPr algn="l">
+              <a:spcAft>
+                <a:spcPts val="200"/>
+              </a:spcAft>
+            </a:pPr>
             <a:r>
               <a:rPr sz="1050" b="0" i="0">
                 <a:solidFill>
@@ -13051,12 +14030,14 @@
           <a:noFill/>
         </p:spPr>
         <p:txBody>
-          <a:bodyPr wrap="none" lIns="0" rIns="0" tIns="0" bIns="0" anchor="ctr">
-            <a:spAutoFit/>
-          </a:bodyPr>
-          <a:lstStyle/>
-          <a:p>
-            <a:pPr algn="ctr"/>
+          <a:bodyPr wrap="square" lIns="0" rIns="0" tIns="0" bIns="0" anchor="ctr"/>
+          <a:lstStyle/>
+          <a:p>
+            <a:pPr algn="ctr">
+              <a:spcAft>
+                <a:spcPts val="200"/>
+              </a:spcAft>
+            </a:pPr>
             <a:r>
               <a:rPr sz="900" b="1" i="0">
                 <a:solidFill>
@@ -13086,12 +14067,14 @@
           <a:noFill/>
         </p:spPr>
         <p:txBody>
-          <a:bodyPr wrap="none" lIns="0" rIns="0" tIns="0" bIns="0" anchor="t">
-            <a:spAutoFit/>
-          </a:bodyPr>
-          <a:lstStyle/>
-          <a:p>
-            <a:pPr algn="l"/>
+          <a:bodyPr wrap="square" lIns="0" rIns="0" tIns="0" bIns="0" anchor="t"/>
+          <a:lstStyle/>
+          <a:p>
+            <a:pPr algn="l">
+              <a:spcAft>
+                <a:spcPts val="200"/>
+              </a:spcAft>
+            </a:pPr>
             <a:r>
               <a:rPr sz="3400" b="1" i="0">
                 <a:solidFill>
@@ -13113,7 +14096,7 @@
         <p:spPr>
           <a:xfrm>
             <a:off x="1152144" y="841248"/>
-            <a:ext cx="8046720" cy="256032"/>
+            <a:ext cx="8046720" cy="274320"/>
           </a:xfrm>
           <a:prstGeom prst="rect">
             <a:avLst/>
@@ -13121,12 +14104,14 @@
           <a:noFill/>
         </p:spPr>
         <p:txBody>
-          <a:bodyPr wrap="none" lIns="0" rIns="0" tIns="0" bIns="0" anchor="t">
-            <a:spAutoFit/>
-          </a:bodyPr>
-          <a:lstStyle/>
-          <a:p>
-            <a:pPr algn="l"/>
+          <a:bodyPr wrap="square" lIns="0" rIns="0" tIns="0" bIns="0" anchor="t"/>
+          <a:lstStyle/>
+          <a:p>
+            <a:pPr algn="l">
+              <a:spcAft>
+                <a:spcPts val="200"/>
+              </a:spcAft>
+            </a:pPr>
             <a:r>
               <a:rPr sz="1150" b="0" i="0">
                 <a:solidFill>
@@ -13201,12 +14186,14 @@
           <a:noFill/>
         </p:spPr>
         <p:txBody>
-          <a:bodyPr wrap="none" lIns="0" rIns="0" tIns="0" bIns="0" anchor="ctr">
-            <a:spAutoFit/>
-          </a:bodyPr>
-          <a:lstStyle/>
-          <a:p>
-            <a:pPr algn="ctr"/>
+          <a:bodyPr wrap="square" lIns="0" rIns="0" tIns="0" bIns="0" anchor="ctr"/>
+          <a:lstStyle/>
+          <a:p>
+            <a:pPr algn="ctr">
+              <a:spcAft>
+                <a:spcPts val="200"/>
+              </a:spcAft>
+            </a:pPr>
             <a:r>
               <a:rPr sz="1050" b="1" i="0">
                 <a:solidFill>
@@ -13371,91 +14358,95 @@
           <a:noFill/>
         </p:spPr>
         <p:txBody>
-          <a:bodyPr wrap="none" lIns="0" rIns="0" tIns="0" bIns="0" anchor="ctr">
+          <a:bodyPr wrap="square" lIns="0" rIns="0" tIns="0" bIns="0" anchor="ctr"/>
+          <a:lstStyle/>
+          <a:p>
+            <a:pPr algn="ctr">
+              <a:spcAft>
+                <a:spcPts val="200"/>
+              </a:spcAft>
+            </a:pPr>
+            <a:r>
+              <a:rPr sz="850" b="1" i="0">
+                <a:solidFill>
+                  <a:srgbClr val="FFFFFF"/>
+                </a:solidFill>
+                <a:latin typeface="Calibri"/>
+              </a:rPr>
+              <a:t>BE</a:t>
+            </a:r>
+          </a:p>
+        </p:txBody>
+      </p:sp>
+      <p:sp>
+        <p:nvSpPr>
+          <p:cNvPr id="12" name="TextBox 11"/>
+          <p:cNvSpPr txBox="1"/>
+          <p:nvPr/>
+        </p:nvSpPr>
+        <p:spPr>
+          <a:xfrm>
+            <a:off x="1572768" y="1636776"/>
+            <a:ext cx="2404872" cy="320040"/>
+          </a:xfrm>
+          <a:prstGeom prst="rect">
+            <a:avLst/>
+          </a:prstGeom>
+          <a:noFill/>
+        </p:spPr>
+        <p:txBody>
+          <a:bodyPr wrap="square" lIns="0" rIns="0" tIns="0" bIns="0" anchor="t"/>
+          <a:lstStyle/>
+          <a:p>
+            <a:pPr algn="l">
+              <a:spcAft>
+                <a:spcPts val="200"/>
+              </a:spcAft>
+            </a:pPr>
+            <a:r>
+              <a:rPr sz="1600" b="1" i="0">
+                <a:solidFill>
+                  <a:srgbClr val="21295C"/>
+                </a:solidFill>
+                <a:latin typeface="Calibri"/>
+              </a:rPr>
+              <a:t>后端测试面</a:t>
+            </a:r>
+          </a:p>
+        </p:txBody>
+      </p:sp>
+      <p:sp>
+        <p:nvSpPr>
+          <p:cNvPr id="13" name="TextBox 12"/>
+          <p:cNvSpPr txBox="1"/>
+          <p:nvPr/>
+        </p:nvSpPr>
+        <p:spPr>
+          <a:xfrm>
+            <a:off x="1024128" y="2185416"/>
+            <a:ext cx="2944368" cy="1124712"/>
+          </a:xfrm>
+          <a:prstGeom prst="rect">
+            <a:avLst/>
+          </a:prstGeom>
+          <a:noFill/>
+        </p:spPr>
+        <p:txBody>
+          <a:bodyPr wrap="square" lIns="73152" rIns="73152" tIns="36576" bIns="36576">
             <a:spAutoFit/>
           </a:bodyPr>
           <a:lstStyle/>
           <a:p>
-            <a:pPr algn="ctr"/>
-            <a:r>
-              <a:rPr sz="850" b="1" i="0">
-                <a:solidFill>
-                  <a:srgbClr val="FFFFFF"/>
-                </a:solidFill>
-                <a:latin typeface="Calibri"/>
-              </a:rPr>
-              <a:t>BE</a:t>
-            </a:r>
-          </a:p>
-        </p:txBody>
-      </p:sp>
-      <p:sp>
-        <p:nvSpPr>
-          <p:cNvPr id="12" name="TextBox 11"/>
-          <p:cNvSpPr txBox="1"/>
-          <p:nvPr/>
-        </p:nvSpPr>
-        <p:spPr>
-          <a:xfrm>
-            <a:off x="1572768" y="1636776"/>
-            <a:ext cx="2404872" cy="320040"/>
-          </a:xfrm>
-          <a:prstGeom prst="rect">
-            <a:avLst/>
-          </a:prstGeom>
-          <a:noFill/>
-        </p:spPr>
-        <p:txBody>
-          <a:bodyPr wrap="none" lIns="0" rIns="0" tIns="0" bIns="0" anchor="t">
-            <a:spAutoFit/>
-          </a:bodyPr>
-          <a:lstStyle/>
-          <a:p>
-            <a:pPr algn="l"/>
-            <a:r>
-              <a:rPr sz="1600" b="1" i="0">
-                <a:solidFill>
-                  <a:srgbClr val="21295C"/>
-                </a:solidFill>
-                <a:latin typeface="Calibri"/>
-              </a:rPr>
-              <a:t>后端测试面</a:t>
-            </a:r>
-          </a:p>
-        </p:txBody>
-      </p:sp>
-      <p:sp>
-        <p:nvSpPr>
-          <p:cNvPr id="13" name="TextBox 12"/>
-          <p:cNvSpPr txBox="1"/>
-          <p:nvPr/>
-        </p:nvSpPr>
-        <p:spPr>
-          <a:xfrm>
-            <a:off x="1024128" y="2185416"/>
-            <a:ext cx="2944368" cy="1124712"/>
-          </a:xfrm>
-          <a:prstGeom prst="rect">
-            <a:avLst/>
-          </a:prstGeom>
-          <a:noFill/>
-        </p:spPr>
-        <p:txBody>
-          <a:bodyPr wrap="none" lIns="54864" rIns="54864" tIns="36576" bIns="36576">
-            <a:spAutoFit/>
-          </a:bodyPr>
-          <a:lstStyle/>
-          <a:p>
             <a:pPr>
               <a:lnSpc>
-                <a:spcPct val="105000"/>
+                <a:spcPct val="100000"/>
               </a:lnSpc>
               <a:spcAft>
-                <a:spcPts val="600"/>
-              </a:spcAft>
-            </a:pPr>
-            <a:r>
-              <a:rPr sz="1220">
+                <a:spcPts val="400"/>
+              </a:spcAft>
+            </a:pPr>
+            <a:r>
+              <a:rPr sz="1150">
                 <a:solidFill>
                   <a:srgbClr val="17323B"/>
                 </a:solidFill>
@@ -13467,39 +14458,115 @@
           <a:p>
             <a:pPr>
               <a:lnSpc>
-                <a:spcPct val="105000"/>
+                <a:spcPct val="100000"/>
               </a:lnSpc>
               <a:spcAft>
-                <a:spcPts val="600"/>
-              </a:spcAft>
-            </a:pPr>
-            <a:r>
-              <a:rPr sz="1220">
+                <a:spcPts val="100"/>
+              </a:spcAft>
+            </a:pPr>
+            <a:r>
+              <a:rPr sz="1150">
                 <a:solidFill>
                   <a:srgbClr val="17323B"/>
                 </a:solidFill>
                 <a:latin typeface="Calibri"/>
               </a:rPr>
-              <a:t>覆盖 AI 生成、类型路由、LangGraph4j 工作流、图片/Logo/Mermaid 工具、截图工具</a:t>
+              <a:t>覆盖 AI 生成、类型路由、</a:t>
             </a:r>
           </a:p>
           <a:p>
             <a:pPr>
               <a:lnSpc>
-                <a:spcPct val="105000"/>
+                <a:spcPct val="100000"/>
               </a:lnSpc>
               <a:spcAft>
-                <a:spcPts val="600"/>
-              </a:spcAft>
-            </a:pPr>
-            <a:r>
-              <a:rPr sz="1220">
+                <a:spcPts val="100"/>
+              </a:spcAft>
+            </a:pPr>
+            <a:r>
+              <a:rPr sz="1150">
                 <a:solidFill>
                   <a:srgbClr val="17323B"/>
                 </a:solidFill>
                 <a:latin typeface="Calibri"/>
               </a:rPr>
-              <a:t>基于 Maven / Spring Boot Test</a:t>
+              <a:t>工作流、图片/Logo/Me</a:t>
+            </a:r>
+          </a:p>
+          <a:p>
+            <a:pPr>
+              <a:lnSpc>
+                <a:spcPct val="100000"/>
+              </a:lnSpc>
+              <a:spcAft>
+                <a:spcPts val="400"/>
+              </a:spcAft>
+            </a:pPr>
+            <a:r>
+              <a:rPr sz="1150">
+                <a:solidFill>
+                  <a:srgbClr val="17323B"/>
+                </a:solidFill>
+                <a:latin typeface="Calibri"/>
+              </a:rPr>
+              <a:t>rmaid 工具</a:t>
+            </a:r>
+          </a:p>
+          <a:p>
+            <a:pPr>
+              <a:lnSpc>
+                <a:spcPct val="100000"/>
+              </a:lnSpc>
+              <a:spcAft>
+                <a:spcPts val="100"/>
+              </a:spcAft>
+            </a:pPr>
+            <a:r>
+              <a:rPr sz="1150">
+                <a:solidFill>
+                  <a:srgbClr val="17323B"/>
+                </a:solidFill>
+                <a:latin typeface="Calibri"/>
+              </a:rPr>
+              <a:t>基于 Maven /</a:t>
+            </a:r>
+          </a:p>
+          <a:p>
+            <a:pPr>
+              <a:lnSpc>
+                <a:spcPct val="100000"/>
+              </a:lnSpc>
+              <a:spcAft>
+                <a:spcPts val="100"/>
+              </a:spcAft>
+            </a:pPr>
+            <a:r>
+              <a:rPr sz="1150">
+                <a:solidFill>
+                  <a:srgbClr val="17323B"/>
+                </a:solidFill>
+                <a:latin typeface="Calibri"/>
+              </a:rPr>
+              <a:t>Spring Boot</a:t>
+            </a:r>
+          </a:p>
+          <a:p>
+            <a:pPr>
+              <a:lnSpc>
+                <a:spcPct val="100000"/>
+              </a:lnSpc>
+              <a:spcAft>
+                <a:spcPts val="400"/>
+              </a:spcAft>
+            </a:pPr>
+            <a:r>
+              <a:rPr sz="1150">
+                <a:solidFill>
+                  <a:srgbClr val="17323B"/>
+                </a:solidFill>
+                <a:latin typeface="Calibri"/>
+              </a:rPr>
+              <a:t>Test</a:t>
             </a:r>
           </a:p>
         </p:txBody>
@@ -13656,135 +14723,253 @@
           <a:noFill/>
         </p:spPr>
         <p:txBody>
-          <a:bodyPr wrap="none" lIns="0" rIns="0" tIns="0" bIns="0" anchor="ctr">
+          <a:bodyPr wrap="square" lIns="0" rIns="0" tIns="0" bIns="0" anchor="ctr"/>
+          <a:lstStyle/>
+          <a:p>
+            <a:pPr algn="ctr">
+              <a:spcAft>
+                <a:spcPts val="200"/>
+              </a:spcAft>
+            </a:pPr>
+            <a:r>
+              <a:rPr sz="850" b="1" i="0">
+                <a:solidFill>
+                  <a:srgbClr val="FFFFFF"/>
+                </a:solidFill>
+                <a:latin typeface="Calibri"/>
+              </a:rPr>
+              <a:t>FE</a:t>
+            </a:r>
+          </a:p>
+        </p:txBody>
+      </p:sp>
+      <p:sp>
+        <p:nvSpPr>
+          <p:cNvPr id="18" name="TextBox 17"/>
+          <p:cNvSpPr txBox="1"/>
+          <p:nvPr/>
+        </p:nvSpPr>
+        <p:spPr>
+          <a:xfrm>
+            <a:off x="5376672" y="1636776"/>
+            <a:ext cx="2404871" cy="320040"/>
+          </a:xfrm>
+          <a:prstGeom prst="rect">
+            <a:avLst/>
+          </a:prstGeom>
+          <a:noFill/>
+        </p:spPr>
+        <p:txBody>
+          <a:bodyPr wrap="square" lIns="0" rIns="0" tIns="0" bIns="0" anchor="t"/>
+          <a:lstStyle/>
+          <a:p>
+            <a:pPr algn="l">
+              <a:spcAft>
+                <a:spcPts val="200"/>
+              </a:spcAft>
+            </a:pPr>
+            <a:r>
+              <a:rPr sz="1600" b="1" i="0">
+                <a:solidFill>
+                  <a:srgbClr val="21295C"/>
+                </a:solidFill>
+                <a:latin typeface="Calibri"/>
+              </a:rPr>
+              <a:t>前端质量脚本</a:t>
+            </a:r>
+          </a:p>
+        </p:txBody>
+      </p:sp>
+      <p:sp>
+        <p:nvSpPr>
+          <p:cNvPr id="19" name="TextBox 18"/>
+          <p:cNvSpPr txBox="1"/>
+          <p:nvPr/>
+        </p:nvSpPr>
+        <p:spPr>
+          <a:xfrm>
+            <a:off x="4828032" y="2185416"/>
+            <a:ext cx="2944368" cy="1124712"/>
+          </a:xfrm>
+          <a:prstGeom prst="rect">
+            <a:avLst/>
+          </a:prstGeom>
+          <a:noFill/>
+        </p:spPr>
+        <p:txBody>
+          <a:bodyPr wrap="square" lIns="73152" rIns="73152" tIns="36576" bIns="36576">
             <a:spAutoFit/>
           </a:bodyPr>
           <a:lstStyle/>
           <a:p>
-            <a:pPr algn="ctr"/>
-            <a:r>
-              <a:rPr sz="850" b="1" i="0">
-                <a:solidFill>
-                  <a:srgbClr val="FFFFFF"/>
-                </a:solidFill>
-                <a:latin typeface="Calibri"/>
-              </a:rPr>
-              <a:t>FE</a:t>
-            </a:r>
-          </a:p>
-        </p:txBody>
-      </p:sp>
-      <p:sp>
-        <p:nvSpPr>
-          <p:cNvPr id="18" name="TextBox 17"/>
-          <p:cNvSpPr txBox="1"/>
-          <p:nvPr/>
-        </p:nvSpPr>
-        <p:spPr>
-          <a:xfrm>
-            <a:off x="5376672" y="1636776"/>
-            <a:ext cx="2404871" cy="320040"/>
-          </a:xfrm>
-          <a:prstGeom prst="rect">
-            <a:avLst/>
-          </a:prstGeom>
-          <a:noFill/>
-        </p:spPr>
-        <p:txBody>
-          <a:bodyPr wrap="none" lIns="0" rIns="0" tIns="0" bIns="0" anchor="t">
-            <a:spAutoFit/>
-          </a:bodyPr>
-          <a:lstStyle/>
-          <a:p>
-            <a:pPr algn="l"/>
-            <a:r>
-              <a:rPr sz="1600" b="1" i="0">
-                <a:solidFill>
-                  <a:srgbClr val="21295C"/>
-                </a:solidFill>
-                <a:latin typeface="Calibri"/>
-              </a:rPr>
-              <a:t>前端质量脚本</a:t>
-            </a:r>
-          </a:p>
-        </p:txBody>
-      </p:sp>
-      <p:sp>
-        <p:nvSpPr>
-          <p:cNvPr id="19" name="TextBox 18"/>
-          <p:cNvSpPr txBox="1"/>
-          <p:nvPr/>
-        </p:nvSpPr>
-        <p:spPr>
-          <a:xfrm>
-            <a:off x="4828032" y="2185416"/>
-            <a:ext cx="2944368" cy="1124712"/>
-          </a:xfrm>
-          <a:prstGeom prst="rect">
-            <a:avLst/>
-          </a:prstGeom>
-          <a:noFill/>
-        </p:spPr>
-        <p:txBody>
-          <a:bodyPr wrap="none" lIns="54864" rIns="54864" tIns="36576" bIns="36576">
-            <a:spAutoFit/>
-          </a:bodyPr>
-          <a:lstStyle/>
-          <a:p>
             <a:pPr>
               <a:lnSpc>
-                <a:spcPct val="105000"/>
+                <a:spcPct val="100000"/>
               </a:lnSpc>
               <a:spcAft>
-                <a:spcPts val="600"/>
-              </a:spcAft>
-            </a:pPr>
-            <a:r>
-              <a:rPr sz="1220">
+                <a:spcPts val="100"/>
+              </a:spcAft>
+            </a:pPr>
+            <a:r>
+              <a:rPr sz="1150">
                 <a:solidFill>
                   <a:srgbClr val="17323B"/>
                 </a:solidFill>
                 <a:latin typeface="Calibri"/>
               </a:rPr>
-              <a:t>npm run build：类型检查 + Vite 构建</a:t>
+              <a:t>npm run</a:t>
             </a:r>
           </a:p>
           <a:p>
             <a:pPr>
               <a:lnSpc>
-                <a:spcPct val="105000"/>
+                <a:spcPct val="100000"/>
               </a:lnSpc>
               <a:spcAft>
-                <a:spcPts val="600"/>
-              </a:spcAft>
-            </a:pPr>
-            <a:r>
-              <a:rPr sz="1220">
+                <a:spcPts val="100"/>
+              </a:spcAft>
+            </a:pPr>
+            <a:r>
+              <a:rPr sz="1150">
                 <a:solidFill>
                   <a:srgbClr val="17323B"/>
                 </a:solidFill>
                 <a:latin typeface="Calibri"/>
               </a:rPr>
-              <a:t>npm run lint：ESLint 自动修复</a:t>
+              <a:t>build：类型检查 +</a:t>
             </a:r>
           </a:p>
           <a:p>
             <a:pPr>
               <a:lnSpc>
-                <a:spcPct val="105000"/>
+                <a:spcPct val="100000"/>
               </a:lnSpc>
               <a:spcAft>
-                <a:spcPts val="600"/>
-              </a:spcAft>
-            </a:pPr>
-            <a:r>
-              <a:rPr sz="1220">
+                <a:spcPts val="400"/>
+              </a:spcAft>
+            </a:pPr>
+            <a:r>
+              <a:rPr sz="1150">
                 <a:solidFill>
                   <a:srgbClr val="17323B"/>
                 </a:solidFill>
                 <a:latin typeface="Calibri"/>
               </a:rPr>
-              <a:t>npm run format：Prettier 格式化 src</a:t>
+              <a:t>Vite 构建</a:t>
+            </a:r>
+          </a:p>
+          <a:p>
+            <a:pPr>
+              <a:lnSpc>
+                <a:spcPct val="100000"/>
+              </a:lnSpc>
+              <a:spcAft>
+                <a:spcPts val="100"/>
+              </a:spcAft>
+            </a:pPr>
+            <a:r>
+              <a:rPr sz="1150">
+                <a:solidFill>
+                  <a:srgbClr val="17323B"/>
+                </a:solidFill>
+                <a:latin typeface="Calibri"/>
+              </a:rPr>
+              <a:t>npm run</a:t>
+            </a:r>
+          </a:p>
+          <a:p>
+            <a:pPr>
+              <a:lnSpc>
+                <a:spcPct val="100000"/>
+              </a:lnSpc>
+              <a:spcAft>
+                <a:spcPts val="100"/>
+              </a:spcAft>
+            </a:pPr>
+            <a:r>
+              <a:rPr sz="1150">
+                <a:solidFill>
+                  <a:srgbClr val="17323B"/>
+                </a:solidFill>
+                <a:latin typeface="Calibri"/>
+              </a:rPr>
+              <a:t>lint：ESLint</a:t>
+            </a:r>
+          </a:p>
+          <a:p>
+            <a:pPr>
+              <a:lnSpc>
+                <a:spcPct val="100000"/>
+              </a:lnSpc>
+              <a:spcAft>
+                <a:spcPts val="400"/>
+              </a:spcAft>
+            </a:pPr>
+            <a:r>
+              <a:rPr sz="1150">
+                <a:solidFill>
+                  <a:srgbClr val="17323B"/>
+                </a:solidFill>
+                <a:latin typeface="Calibri"/>
+              </a:rPr>
+              <a:t>自动修复</a:t>
+            </a:r>
+          </a:p>
+          <a:p>
+            <a:pPr>
+              <a:lnSpc>
+                <a:spcPct val="100000"/>
+              </a:lnSpc>
+              <a:spcAft>
+                <a:spcPts val="100"/>
+              </a:spcAft>
+            </a:pPr>
+            <a:r>
+              <a:rPr sz="1150">
+                <a:solidFill>
+                  <a:srgbClr val="17323B"/>
+                </a:solidFill>
+                <a:latin typeface="Calibri"/>
+              </a:rPr>
+              <a:t>npm run format</a:t>
+            </a:r>
+          </a:p>
+          <a:p>
+            <a:pPr>
+              <a:lnSpc>
+                <a:spcPct val="100000"/>
+              </a:lnSpc>
+              <a:spcAft>
+                <a:spcPts val="100"/>
+              </a:spcAft>
+            </a:pPr>
+            <a:r>
+              <a:rPr sz="1150">
+                <a:solidFill>
+                  <a:srgbClr val="17323B"/>
+                </a:solidFill>
+                <a:latin typeface="Calibri"/>
+              </a:rPr>
+              <a:t>：Prettier 格式化</a:t>
+            </a:r>
+          </a:p>
+          <a:p>
+            <a:pPr>
+              <a:lnSpc>
+                <a:spcPct val="100000"/>
+              </a:lnSpc>
+              <a:spcAft>
+                <a:spcPts val="400"/>
+              </a:spcAft>
+            </a:pPr>
+            <a:r>
+              <a:rPr sz="1150">
+                <a:solidFill>
+                  <a:srgbClr val="17323B"/>
+                </a:solidFill>
+                <a:latin typeface="Calibri"/>
+              </a:rPr>
+              <a:t>src</a:t>
             </a:r>
           </a:p>
         </p:txBody>
@@ -13941,135 +15126,196 @@
           <a:noFill/>
         </p:spPr>
         <p:txBody>
-          <a:bodyPr wrap="none" lIns="0" rIns="0" tIns="0" bIns="0" anchor="ctr">
+          <a:bodyPr wrap="square" lIns="0" rIns="0" tIns="0" bIns="0" anchor="ctr"/>
+          <a:lstStyle/>
+          <a:p>
+            <a:pPr algn="ctr">
+              <a:spcAft>
+                <a:spcPts val="200"/>
+              </a:spcAft>
+            </a:pPr>
+            <a:r>
+              <a:rPr sz="850" b="1" i="0">
+                <a:solidFill>
+                  <a:srgbClr val="FFFFFF"/>
+                </a:solidFill>
+                <a:latin typeface="Calibri"/>
+              </a:rPr>
+              <a:t>CI</a:t>
+            </a:r>
+          </a:p>
+        </p:txBody>
+      </p:sp>
+      <p:sp>
+        <p:nvSpPr>
+          <p:cNvPr id="24" name="TextBox 23"/>
+          <p:cNvSpPr txBox="1"/>
+          <p:nvPr/>
+        </p:nvSpPr>
+        <p:spPr>
+          <a:xfrm>
+            <a:off x="9180576" y="1636776"/>
+            <a:ext cx="1911096" cy="320040"/>
+          </a:xfrm>
+          <a:prstGeom prst="rect">
+            <a:avLst/>
+          </a:prstGeom>
+          <a:noFill/>
+        </p:spPr>
+        <p:txBody>
+          <a:bodyPr wrap="square" lIns="0" rIns="0" tIns="0" bIns="0" anchor="t"/>
+          <a:lstStyle/>
+          <a:p>
+            <a:pPr algn="l">
+              <a:spcAft>
+                <a:spcPts val="200"/>
+              </a:spcAft>
+            </a:pPr>
+            <a:r>
+              <a:rPr sz="1600" b="1" i="0">
+                <a:solidFill>
+                  <a:srgbClr val="21295C"/>
+                </a:solidFill>
+                <a:latin typeface="Calibri"/>
+              </a:rPr>
+              <a:t>CI 状态</a:t>
+            </a:r>
+          </a:p>
+        </p:txBody>
+      </p:sp>
+      <p:sp>
+        <p:nvSpPr>
+          <p:cNvPr id="25" name="TextBox 24"/>
+          <p:cNvSpPr txBox="1"/>
+          <p:nvPr/>
+        </p:nvSpPr>
+        <p:spPr>
+          <a:xfrm>
+            <a:off x="8631936" y="2185416"/>
+            <a:ext cx="2450591" cy="1124712"/>
+          </a:xfrm>
+          <a:prstGeom prst="rect">
+            <a:avLst/>
+          </a:prstGeom>
+          <a:noFill/>
+        </p:spPr>
+        <p:txBody>
+          <a:bodyPr wrap="square" lIns="73152" rIns="73152" tIns="36576" bIns="36576">
             <a:spAutoFit/>
           </a:bodyPr>
           <a:lstStyle/>
           <a:p>
-            <a:pPr algn="ctr"/>
-            <a:r>
-              <a:rPr sz="850" b="1" i="0">
-                <a:solidFill>
-                  <a:srgbClr val="FFFFFF"/>
-                </a:solidFill>
-                <a:latin typeface="Calibri"/>
-              </a:rPr>
-              <a:t>CI</a:t>
-            </a:r>
-          </a:p>
-        </p:txBody>
-      </p:sp>
-      <p:sp>
-        <p:nvSpPr>
-          <p:cNvPr id="24" name="TextBox 23"/>
-          <p:cNvSpPr txBox="1"/>
-          <p:nvPr/>
-        </p:nvSpPr>
-        <p:spPr>
-          <a:xfrm>
-            <a:off x="9180576" y="1636776"/>
-            <a:ext cx="1911096" cy="320040"/>
-          </a:xfrm>
-          <a:prstGeom prst="rect">
-            <a:avLst/>
-          </a:prstGeom>
-          <a:noFill/>
-        </p:spPr>
-        <p:txBody>
-          <a:bodyPr wrap="none" lIns="0" rIns="0" tIns="0" bIns="0" anchor="t">
-            <a:spAutoFit/>
-          </a:bodyPr>
-          <a:lstStyle/>
-          <a:p>
-            <a:pPr algn="l"/>
-            <a:r>
-              <a:rPr sz="1600" b="1" i="0">
-                <a:solidFill>
-                  <a:srgbClr val="21295C"/>
-                </a:solidFill>
-                <a:latin typeface="Calibri"/>
-              </a:rPr>
-              <a:t>CI 状态</a:t>
-            </a:r>
-          </a:p>
-        </p:txBody>
-      </p:sp>
-      <p:sp>
-        <p:nvSpPr>
-          <p:cNvPr id="25" name="TextBox 24"/>
-          <p:cNvSpPr txBox="1"/>
-          <p:nvPr/>
-        </p:nvSpPr>
-        <p:spPr>
-          <a:xfrm>
-            <a:off x="8631936" y="2185416"/>
-            <a:ext cx="2450591" cy="1124712"/>
-          </a:xfrm>
-          <a:prstGeom prst="rect">
-            <a:avLst/>
-          </a:prstGeom>
-          <a:noFill/>
-        </p:spPr>
-        <p:txBody>
-          <a:bodyPr wrap="none" lIns="54864" rIns="54864" tIns="36576" bIns="36576">
-            <a:spAutoFit/>
-          </a:bodyPr>
-          <a:lstStyle/>
-          <a:p>
             <a:pPr>
               <a:lnSpc>
-                <a:spcPct val="105000"/>
+                <a:spcPct val="100000"/>
               </a:lnSpc>
               <a:spcAft>
-                <a:spcPts val="600"/>
-              </a:spcAft>
-            </a:pPr>
-            <a:r>
-              <a:rPr sz="1220">
+                <a:spcPts val="100"/>
+              </a:spcAft>
+            </a:pPr>
+            <a:r>
+              <a:rPr sz="1150">
                 <a:solidFill>
                   <a:srgbClr val="17323B"/>
                 </a:solidFill>
                 <a:latin typeface="Calibri"/>
               </a:rPr>
-              <a:t>未发现 .github/workflows</a:t>
+              <a:t>未发现 .github/</a:t>
             </a:r>
           </a:p>
           <a:p>
             <a:pPr>
               <a:lnSpc>
-                <a:spcPct val="105000"/>
+                <a:spcPct val="100000"/>
               </a:lnSpc>
               <a:spcAft>
-                <a:spcPts val="600"/>
-              </a:spcAft>
-            </a:pPr>
-            <a:r>
-              <a:rPr sz="1220">
+                <a:spcPts val="400"/>
+              </a:spcAft>
+            </a:pPr>
+            <a:r>
+              <a:rPr sz="1150">
                 <a:solidFill>
                   <a:srgbClr val="17323B"/>
                 </a:solidFill>
                 <a:latin typeface="Calibri"/>
               </a:rPr>
-              <a:t>无法从仓库配置判断最近 CI 结果</a:t>
+              <a:t>workflows</a:t>
             </a:r>
           </a:p>
           <a:p>
             <a:pPr>
               <a:lnSpc>
-                <a:spcPct val="105000"/>
+                <a:spcPct val="100000"/>
               </a:lnSpc>
               <a:spcAft>
-                <a:spcPts val="600"/>
-              </a:spcAft>
-            </a:pPr>
-            <a:r>
-              <a:rPr sz="1220">
+                <a:spcPts val="100"/>
+              </a:spcAft>
+            </a:pPr>
+            <a:r>
+              <a:rPr sz="1150">
                 <a:solidFill>
                   <a:srgbClr val="17323B"/>
                 </a:solidFill>
                 <a:latin typeface="Calibri"/>
               </a:rPr>
-              <a:t>建议补充 PR 级构建/测试流水线</a:t>
+              <a:t>无法从仓库配置判断最近</a:t>
+            </a:r>
+          </a:p>
+          <a:p>
+            <a:pPr>
+              <a:lnSpc>
+                <a:spcPct val="100000"/>
+              </a:lnSpc>
+              <a:spcAft>
+                <a:spcPts val="400"/>
+              </a:spcAft>
+            </a:pPr>
+            <a:r>
+              <a:rPr sz="1150">
+                <a:solidFill>
+                  <a:srgbClr val="17323B"/>
+                </a:solidFill>
+                <a:latin typeface="Calibri"/>
+              </a:rPr>
+              <a:t>CI 结果</a:t>
+            </a:r>
+          </a:p>
+          <a:p>
+            <a:pPr>
+              <a:lnSpc>
+                <a:spcPct val="100000"/>
+              </a:lnSpc>
+              <a:spcAft>
+                <a:spcPts val="100"/>
+              </a:spcAft>
+            </a:pPr>
+            <a:r>
+              <a:rPr sz="1150">
+                <a:solidFill>
+                  <a:srgbClr val="17323B"/>
+                </a:solidFill>
+                <a:latin typeface="Calibri"/>
+              </a:rPr>
+              <a:t>建议补充 PR</a:t>
+            </a:r>
+          </a:p>
+          <a:p>
+            <a:pPr>
+              <a:lnSpc>
+                <a:spcPct val="100000"/>
+              </a:lnSpc>
+              <a:spcAft>
+                <a:spcPts val="400"/>
+              </a:spcAft>
+            </a:pPr>
+            <a:r>
+              <a:rPr sz="1150">
+                <a:solidFill>
+                  <a:srgbClr val="17323B"/>
+                </a:solidFill>
+                <a:latin typeface="Calibri"/>
+              </a:rPr>
+              <a:t>级构建/测试流水线</a:t>
             </a:r>
           </a:p>
         </p:txBody>
@@ -14136,12 +15382,14 @@
           <a:noFill/>
         </p:spPr>
         <p:txBody>
-          <a:bodyPr wrap="none" lIns="0" rIns="0" tIns="0" bIns="0" anchor="t">
-            <a:spAutoFit/>
-          </a:bodyPr>
-          <a:lstStyle/>
-          <a:p>
-            <a:pPr algn="ctr"/>
+          <a:bodyPr wrap="square" lIns="0" rIns="0" tIns="0" bIns="0" anchor="t"/>
+          <a:lstStyle/>
+          <a:p>
+            <a:pPr algn="ctr">
+              <a:spcAft>
+                <a:spcPts val="200"/>
+              </a:spcAft>
+            </a:pPr>
             <a:r>
               <a:rPr sz="1400" b="1" i="0">
                 <a:solidFill>
@@ -14171,12 +15419,14 @@
           <a:noFill/>
         </p:spPr>
         <p:txBody>
-          <a:bodyPr wrap="none" lIns="0" rIns="0" tIns="0" bIns="0" anchor="t">
-            <a:spAutoFit/>
-          </a:bodyPr>
-          <a:lstStyle/>
-          <a:p>
-            <a:pPr algn="ctr"/>
+          <a:bodyPr wrap="square" lIns="0" rIns="0" tIns="0" bIns="0" anchor="t"/>
+          <a:lstStyle/>
+          <a:p>
+            <a:pPr algn="ctr">
+              <a:spcAft>
+                <a:spcPts val="200"/>
+              </a:spcAft>
+            </a:pPr>
             <a:r>
               <a:rPr sz="1050" b="0" i="0">
                 <a:solidFill>
@@ -14251,12 +15501,14 @@
           <a:noFill/>
         </p:spPr>
         <p:txBody>
-          <a:bodyPr wrap="none" lIns="0" rIns="0" tIns="0" bIns="0" anchor="t">
-            <a:spAutoFit/>
-          </a:bodyPr>
-          <a:lstStyle/>
-          <a:p>
-            <a:pPr algn="ctr"/>
+          <a:bodyPr wrap="square" lIns="0" rIns="0" tIns="0" bIns="0" anchor="t"/>
+          <a:lstStyle/>
+          <a:p>
+            <a:pPr algn="ctr">
+              <a:spcAft>
+                <a:spcPts val="200"/>
+              </a:spcAft>
+            </a:pPr>
             <a:r>
               <a:rPr sz="1400" b="1" i="0">
                 <a:solidFill>
@@ -14286,12 +15538,14 @@
           <a:noFill/>
         </p:spPr>
         <p:txBody>
-          <a:bodyPr wrap="none" lIns="0" rIns="0" tIns="0" bIns="0" anchor="t">
-            <a:spAutoFit/>
-          </a:bodyPr>
-          <a:lstStyle/>
-          <a:p>
-            <a:pPr algn="ctr"/>
+          <a:bodyPr wrap="square" lIns="0" rIns="0" tIns="0" bIns="0" anchor="t"/>
+          <a:lstStyle/>
+          <a:p>
+            <a:pPr algn="ctr">
+              <a:spcAft>
+                <a:spcPts val="200"/>
+              </a:spcAft>
+            </a:pPr>
             <a:r>
               <a:rPr sz="1050" b="0" i="0">
                 <a:solidFill>
@@ -14366,12 +15620,14 @@
           <a:noFill/>
         </p:spPr>
         <p:txBody>
-          <a:bodyPr wrap="none" lIns="0" rIns="0" tIns="0" bIns="0" anchor="t">
-            <a:spAutoFit/>
-          </a:bodyPr>
-          <a:lstStyle/>
-          <a:p>
-            <a:pPr algn="ctr"/>
+          <a:bodyPr wrap="square" lIns="0" rIns="0" tIns="0" bIns="0" anchor="t"/>
+          <a:lstStyle/>
+          <a:p>
+            <a:pPr algn="ctr">
+              <a:spcAft>
+                <a:spcPts val="200"/>
+              </a:spcAft>
+            </a:pPr>
             <a:r>
               <a:rPr sz="1400" b="1" i="0">
                 <a:solidFill>
@@ -14401,12 +15657,14 @@
           <a:noFill/>
         </p:spPr>
         <p:txBody>
-          <a:bodyPr wrap="none" lIns="0" rIns="0" tIns="0" bIns="0" anchor="t">
-            <a:spAutoFit/>
-          </a:bodyPr>
-          <a:lstStyle/>
-          <a:p>
-            <a:pPr algn="ctr"/>
+          <a:bodyPr wrap="square" lIns="0" rIns="0" tIns="0" bIns="0" anchor="t"/>
+          <a:lstStyle/>
+          <a:p>
+            <a:pPr algn="ctr">
+              <a:spcAft>
+                <a:spcPts val="200"/>
+              </a:spcAft>
+            </a:pPr>
             <a:r>
               <a:rPr sz="1050" b="0" i="0">
                 <a:solidFill>
@@ -14481,12 +15739,14 @@
           <a:noFill/>
         </p:spPr>
         <p:txBody>
-          <a:bodyPr wrap="none" lIns="0" rIns="0" tIns="0" bIns="0" anchor="t">
-            <a:spAutoFit/>
-          </a:bodyPr>
-          <a:lstStyle/>
-          <a:p>
-            <a:pPr algn="ctr"/>
+          <a:bodyPr wrap="square" lIns="0" rIns="0" tIns="0" bIns="0" anchor="t"/>
+          <a:lstStyle/>
+          <a:p>
+            <a:pPr algn="ctr">
+              <a:spcAft>
+                <a:spcPts val="200"/>
+              </a:spcAft>
+            </a:pPr>
             <a:r>
               <a:rPr sz="1400" b="1" i="0">
                 <a:solidFill>
@@ -14516,12 +15776,14 @@
           <a:noFill/>
         </p:spPr>
         <p:txBody>
-          <a:bodyPr wrap="none" lIns="0" rIns="0" tIns="0" bIns="0" anchor="t">
-            <a:spAutoFit/>
-          </a:bodyPr>
-          <a:lstStyle/>
-          <a:p>
-            <a:pPr algn="ctr"/>
+          <a:bodyPr wrap="square" lIns="0" rIns="0" tIns="0" bIns="0" anchor="t"/>
+          <a:lstStyle/>
+          <a:p>
+            <a:pPr algn="ctr">
+              <a:spcAft>
+                <a:spcPts val="200"/>
+              </a:spcAft>
+            </a:pPr>
             <a:r>
               <a:rPr sz="1050" b="0" i="0">
                 <a:solidFill>
@@ -14551,12 +15813,14 @@
           <a:noFill/>
         </p:spPr>
         <p:txBody>
-          <a:bodyPr wrap="none" lIns="0" rIns="0" tIns="0" bIns="0" anchor="t">
-            <a:spAutoFit/>
-          </a:bodyPr>
-          <a:lstStyle/>
-          <a:p>
-            <a:pPr algn="l"/>
+          <a:bodyPr wrap="square" lIns="0" rIns="0" tIns="0" bIns="0" anchor="t"/>
+          <a:lstStyle/>
+          <a:p>
+            <a:pPr algn="l">
+              <a:spcAft>
+                <a:spcPts val="200"/>
+              </a:spcAft>
+            </a:pPr>
             <a:r>
               <a:rPr sz="1050" b="0" i="0">
                 <a:solidFill>
@@ -14747,12 +16011,14 @@
           <a:noFill/>
         </p:spPr>
         <p:txBody>
-          <a:bodyPr wrap="none" lIns="0" rIns="0" tIns="0" bIns="0" anchor="ctr">
-            <a:spAutoFit/>
-          </a:bodyPr>
-          <a:lstStyle/>
-          <a:p>
-            <a:pPr algn="ctr"/>
+          <a:bodyPr wrap="square" lIns="0" rIns="0" tIns="0" bIns="0" anchor="ctr"/>
+          <a:lstStyle/>
+          <a:p>
+            <a:pPr algn="ctr">
+              <a:spcAft>
+                <a:spcPts val="200"/>
+              </a:spcAft>
+            </a:pPr>
             <a:r>
               <a:rPr sz="900" b="1" i="0">
                 <a:solidFill>
@@ -14782,12 +16048,14 @@
           <a:noFill/>
         </p:spPr>
         <p:txBody>
-          <a:bodyPr wrap="none" lIns="0" rIns="0" tIns="0" bIns="0" anchor="t">
-            <a:spAutoFit/>
-          </a:bodyPr>
-          <a:lstStyle/>
-          <a:p>
-            <a:pPr algn="l"/>
+          <a:bodyPr wrap="square" lIns="0" rIns="0" tIns="0" bIns="0" anchor="t"/>
+          <a:lstStyle/>
+          <a:p>
+            <a:pPr algn="l">
+              <a:spcAft>
+                <a:spcPts val="200"/>
+              </a:spcAft>
+            </a:pPr>
             <a:r>
               <a:rPr sz="3400" b="1" i="0">
                 <a:solidFill>
@@ -14809,7 +16077,7 @@
         <p:spPr>
           <a:xfrm>
             <a:off x="1152144" y="841248"/>
-            <a:ext cx="8046720" cy="256032"/>
+            <a:ext cx="8046720" cy="274320"/>
           </a:xfrm>
           <a:prstGeom prst="rect">
             <a:avLst/>
@@ -14817,12 +16085,14 @@
           <a:noFill/>
         </p:spPr>
         <p:txBody>
-          <a:bodyPr wrap="none" lIns="0" rIns="0" tIns="0" bIns="0" anchor="t">
-            <a:spAutoFit/>
-          </a:bodyPr>
-          <a:lstStyle/>
-          <a:p>
-            <a:pPr algn="l"/>
+          <a:bodyPr wrap="square" lIns="0" rIns="0" tIns="0" bIns="0" anchor="t"/>
+          <a:lstStyle/>
+          <a:p>
+            <a:pPr algn="l">
+              <a:spcAft>
+                <a:spcPts val="200"/>
+              </a:spcAft>
+            </a:pPr>
             <a:r>
               <a:rPr sz="1150" b="0" i="0">
                 <a:solidFill>
@@ -14897,12 +16167,14 @@
           <a:noFill/>
         </p:spPr>
         <p:txBody>
-          <a:bodyPr wrap="none" lIns="0" rIns="0" tIns="0" bIns="0" anchor="ctr">
-            <a:spAutoFit/>
-          </a:bodyPr>
-          <a:lstStyle/>
-          <a:p>
-            <a:pPr algn="ctr"/>
+          <a:bodyPr wrap="square" lIns="0" rIns="0" tIns="0" bIns="0" anchor="ctr"/>
+          <a:lstStyle/>
+          <a:p>
+            <a:pPr algn="ctr">
+              <a:spcAft>
+                <a:spcPts val="200"/>
+              </a:spcAft>
+            </a:pPr>
             <a:r>
               <a:rPr sz="1050" b="1" i="0">
                 <a:solidFill>
@@ -15067,116 +16339,177 @@
           <a:noFill/>
         </p:spPr>
         <p:txBody>
-          <a:bodyPr wrap="none" lIns="0" rIns="0" tIns="0" bIns="0" anchor="ctr">
+          <a:bodyPr wrap="square" lIns="0" rIns="0" tIns="0" bIns="0" anchor="ctr"/>
+          <a:lstStyle/>
+          <a:p>
+            <a:pPr algn="ctr">
+              <a:spcAft>
+                <a:spcPts val="200"/>
+              </a:spcAft>
+            </a:pPr>
+            <a:r>
+              <a:rPr sz="850" b="1" i="0">
+                <a:solidFill>
+                  <a:srgbClr val="FFFFFF"/>
+                </a:solidFill>
+                <a:latin typeface="Calibri"/>
+              </a:rPr>
+              <a:t>HIGH</a:t>
+            </a:r>
+          </a:p>
+        </p:txBody>
+      </p:sp>
+      <p:sp>
+        <p:nvSpPr>
+          <p:cNvPr id="12" name="TextBox 11"/>
+          <p:cNvSpPr txBox="1"/>
+          <p:nvPr/>
+        </p:nvSpPr>
+        <p:spPr>
+          <a:xfrm>
+            <a:off x="1517904" y="1517904"/>
+            <a:ext cx="3986783" cy="320040"/>
+          </a:xfrm>
+          <a:prstGeom prst="rect">
+            <a:avLst/>
+          </a:prstGeom>
+          <a:noFill/>
+        </p:spPr>
+        <p:txBody>
+          <a:bodyPr wrap="square" lIns="0" rIns="0" tIns="0" bIns="0" anchor="t"/>
+          <a:lstStyle/>
+          <a:p>
+            <a:pPr algn="l">
+              <a:spcAft>
+                <a:spcPts val="200"/>
+              </a:spcAft>
+            </a:pPr>
+            <a:r>
+              <a:rPr sz="1650" b="1" i="0">
+                <a:solidFill>
+                  <a:srgbClr val="21295C"/>
+                </a:solidFill>
+                <a:latin typeface="Calibri"/>
+              </a:rPr>
+              <a:t>运行配置未固化</a:t>
+            </a:r>
+          </a:p>
+        </p:txBody>
+      </p:sp>
+      <p:sp>
+        <p:nvSpPr>
+          <p:cNvPr id="13" name="TextBox 12"/>
+          <p:cNvSpPr txBox="1"/>
+          <p:nvPr/>
+        </p:nvSpPr>
+        <p:spPr>
+          <a:xfrm>
+            <a:off x="969264" y="2066543"/>
+            <a:ext cx="4526280" cy="786383"/>
+          </a:xfrm>
+          <a:prstGeom prst="rect">
+            <a:avLst/>
+          </a:prstGeom>
+          <a:noFill/>
+        </p:spPr>
+        <p:txBody>
+          <a:bodyPr wrap="square" lIns="73152" rIns="73152" tIns="36576" bIns="36576">
             <a:spAutoFit/>
           </a:bodyPr>
           <a:lstStyle/>
           <a:p>
-            <a:pPr algn="ctr"/>
-            <a:r>
-              <a:rPr sz="850" b="1" i="0">
-                <a:solidFill>
-                  <a:srgbClr val="FFFFFF"/>
-                </a:solidFill>
-                <a:latin typeface="Calibri"/>
-              </a:rPr>
-              <a:t>HIGH</a:t>
-            </a:r>
-          </a:p>
-        </p:txBody>
-      </p:sp>
-      <p:sp>
-        <p:nvSpPr>
-          <p:cNvPr id="12" name="TextBox 11"/>
-          <p:cNvSpPr txBox="1"/>
-          <p:nvPr/>
-        </p:nvSpPr>
-        <p:spPr>
-          <a:xfrm>
-            <a:off x="1517904" y="1517904"/>
-            <a:ext cx="3986783" cy="320040"/>
-          </a:xfrm>
-          <a:prstGeom prst="rect">
-            <a:avLst/>
-          </a:prstGeom>
-          <a:noFill/>
-        </p:spPr>
-        <p:txBody>
-          <a:bodyPr wrap="none" lIns="0" rIns="0" tIns="0" bIns="0" anchor="t">
-            <a:spAutoFit/>
-          </a:bodyPr>
-          <a:lstStyle/>
-          <a:p>
-            <a:pPr algn="l"/>
-            <a:r>
-              <a:rPr sz="1650" b="1" i="0">
-                <a:solidFill>
-                  <a:srgbClr val="21295C"/>
-                </a:solidFill>
-                <a:latin typeface="Calibri"/>
-              </a:rPr>
-              <a:t>运行配置未固化</a:t>
-            </a:r>
-          </a:p>
-        </p:txBody>
-      </p:sp>
-      <p:sp>
-        <p:nvSpPr>
-          <p:cNvPr id="13" name="TextBox 12"/>
-          <p:cNvSpPr txBox="1"/>
-          <p:nvPr/>
-        </p:nvSpPr>
-        <p:spPr>
-          <a:xfrm>
-            <a:off x="969264" y="2066543"/>
-            <a:ext cx="4526280" cy="786383"/>
-          </a:xfrm>
-          <a:prstGeom prst="rect">
-            <a:avLst/>
-          </a:prstGeom>
-          <a:noFill/>
-        </p:spPr>
-        <p:txBody>
-          <a:bodyPr wrap="none" lIns="54864" rIns="54864" tIns="36576" bIns="36576">
-            <a:spAutoFit/>
-          </a:bodyPr>
-          <a:lstStyle/>
-          <a:p>
             <a:pPr>
               <a:lnSpc>
-                <a:spcPct val="105000"/>
+                <a:spcPct val="100000"/>
               </a:lnSpc>
               <a:spcAft>
-                <a:spcPts val="600"/>
-              </a:spcAft>
-            </a:pPr>
-            <a:r>
-              <a:rPr sz="1250">
+                <a:spcPts val="100"/>
+              </a:spcAft>
+            </a:pPr>
+            <a:r>
+              <a:rPr sz="1200">
                 <a:solidFill>
                   <a:srgbClr val="17323B"/>
                 </a:solidFill>
                 <a:latin typeface="Calibri"/>
               </a:rPr>
-              <a:t>application.yml 中仍有 API Key、COS、Bucket 示例值</a:t>
+              <a:t>application.yml</a:t>
             </a:r>
           </a:p>
           <a:p>
             <a:pPr>
               <a:lnSpc>
-                <a:spcPct val="105000"/>
+                <a:spcPct val="100000"/>
               </a:lnSpc>
               <a:spcAft>
-                <a:spcPts val="600"/>
-              </a:spcAft>
-            </a:pPr>
-            <a:r>
-              <a:rPr sz="1250">
+                <a:spcPts val="100"/>
+              </a:spcAft>
+            </a:pPr>
+            <a:r>
+              <a:rPr sz="1200">
                 <a:solidFill>
                   <a:srgbClr val="17323B"/>
                 </a:solidFill>
                 <a:latin typeface="Calibri"/>
               </a:rPr>
-              <a:t>本地 MySQL/Redis/部署域名依赖需按环境注入</a:t>
+              <a:t>中仍有 API</a:t>
+            </a:r>
+          </a:p>
+          <a:p>
+            <a:pPr>
+              <a:lnSpc>
+                <a:spcPct val="100000"/>
+              </a:lnSpc>
+              <a:spcAft>
+                <a:spcPts val="400"/>
+              </a:spcAft>
+            </a:pPr>
+            <a:r>
+              <a:rPr sz="1200">
+                <a:solidFill>
+                  <a:srgbClr val="17323B"/>
+                </a:solidFill>
+                <a:latin typeface="Calibri"/>
+              </a:rPr>
+              <a:t>Key、COS、Bucket 示例值</a:t>
+            </a:r>
+          </a:p>
+          <a:p>
+            <a:pPr>
+              <a:lnSpc>
+                <a:spcPct val="100000"/>
+              </a:lnSpc>
+              <a:spcAft>
+                <a:spcPts val="100"/>
+              </a:spcAft>
+            </a:pPr>
+            <a:r>
+              <a:rPr sz="1200">
+                <a:solidFill>
+                  <a:srgbClr val="17323B"/>
+                </a:solidFill>
+                <a:latin typeface="Calibri"/>
+              </a:rPr>
+              <a:t>本地 MySQL/Redis/部署域</a:t>
+            </a:r>
+          </a:p>
+          <a:p>
+            <a:pPr>
+              <a:lnSpc>
+                <a:spcPct val="100000"/>
+              </a:lnSpc>
+              <a:spcAft>
+                <a:spcPts val="400"/>
+              </a:spcAft>
+            </a:pPr>
+            <a:r>
+              <a:rPr sz="1200">
+                <a:solidFill>
+                  <a:srgbClr val="17323B"/>
+                </a:solidFill>
+                <a:latin typeface="Calibri"/>
+              </a:rPr>
+              <a:t>名依赖需按环境注入</a:t>
             </a:r>
           </a:p>
         </p:txBody>
@@ -15333,110 +16666,152 @@
           <a:noFill/>
         </p:spPr>
         <p:txBody>
-          <a:bodyPr wrap="none" lIns="0" rIns="0" tIns="0" bIns="0" anchor="ctr">
+          <a:bodyPr wrap="square" lIns="0" rIns="0" tIns="0" bIns="0" anchor="ctr"/>
+          <a:lstStyle/>
+          <a:p>
+            <a:pPr algn="ctr">
+              <a:spcAft>
+                <a:spcPts val="200"/>
+              </a:spcAft>
+            </a:pPr>
+            <a:r>
+              <a:rPr sz="850" b="1" i="0">
+                <a:solidFill>
+                  <a:srgbClr val="FFFFFF"/>
+                </a:solidFill>
+                <a:latin typeface="Calibri"/>
+              </a:rPr>
+              <a:t>MED</a:t>
+            </a:r>
+          </a:p>
+        </p:txBody>
+      </p:sp>
+      <p:sp>
+        <p:nvSpPr>
+          <p:cNvPr id="18" name="TextBox 17"/>
+          <p:cNvSpPr txBox="1"/>
+          <p:nvPr/>
+        </p:nvSpPr>
+        <p:spPr>
+          <a:xfrm>
+            <a:off x="7123175" y="1517904"/>
+            <a:ext cx="3986784" cy="320040"/>
+          </a:xfrm>
+          <a:prstGeom prst="rect">
+            <a:avLst/>
+          </a:prstGeom>
+          <a:noFill/>
+        </p:spPr>
+        <p:txBody>
+          <a:bodyPr wrap="square" lIns="0" rIns="0" tIns="0" bIns="0" anchor="t"/>
+          <a:lstStyle/>
+          <a:p>
+            <a:pPr algn="l">
+              <a:spcAft>
+                <a:spcPts val="200"/>
+              </a:spcAft>
+            </a:pPr>
+            <a:r>
+              <a:rPr sz="1650" b="1" i="0">
+                <a:solidFill>
+                  <a:srgbClr val="21295C"/>
+                </a:solidFill>
+                <a:latin typeface="Calibri"/>
+              </a:rPr>
+              <a:t>外部服务链路多</a:t>
+            </a:r>
+          </a:p>
+        </p:txBody>
+      </p:sp>
+      <p:sp>
+        <p:nvSpPr>
+          <p:cNvPr id="19" name="TextBox 18"/>
+          <p:cNvSpPr txBox="1"/>
+          <p:nvPr/>
+        </p:nvSpPr>
+        <p:spPr>
+          <a:xfrm>
+            <a:off x="6574536" y="2066543"/>
+            <a:ext cx="4526280" cy="786383"/>
+          </a:xfrm>
+          <a:prstGeom prst="rect">
+            <a:avLst/>
+          </a:prstGeom>
+          <a:noFill/>
+        </p:spPr>
+        <p:txBody>
+          <a:bodyPr wrap="square" lIns="73152" rIns="73152" tIns="36576" bIns="36576">
             <a:spAutoFit/>
           </a:bodyPr>
           <a:lstStyle/>
           <a:p>
-            <a:pPr algn="ctr"/>
-            <a:r>
-              <a:rPr sz="850" b="1" i="0">
-                <a:solidFill>
-                  <a:srgbClr val="FFFFFF"/>
-                </a:solidFill>
-                <a:latin typeface="Calibri"/>
-              </a:rPr>
-              <a:t>MED</a:t>
-            </a:r>
-          </a:p>
-        </p:txBody>
-      </p:sp>
-      <p:sp>
-        <p:nvSpPr>
-          <p:cNvPr id="18" name="TextBox 17"/>
-          <p:cNvSpPr txBox="1"/>
-          <p:nvPr/>
-        </p:nvSpPr>
-        <p:spPr>
-          <a:xfrm>
-            <a:off x="7123175" y="1517904"/>
-            <a:ext cx="3986784" cy="320040"/>
-          </a:xfrm>
-          <a:prstGeom prst="rect">
-            <a:avLst/>
-          </a:prstGeom>
-          <a:noFill/>
-        </p:spPr>
-        <p:txBody>
-          <a:bodyPr wrap="none" lIns="0" rIns="0" tIns="0" bIns="0" anchor="t">
-            <a:spAutoFit/>
-          </a:bodyPr>
-          <a:lstStyle/>
-          <a:p>
-            <a:pPr algn="l"/>
-            <a:r>
-              <a:rPr sz="1650" b="1" i="0">
-                <a:solidFill>
-                  <a:srgbClr val="21295C"/>
-                </a:solidFill>
-                <a:latin typeface="Calibri"/>
-              </a:rPr>
-              <a:t>外部服务链路多</a:t>
-            </a:r>
-          </a:p>
-        </p:txBody>
-      </p:sp>
-      <p:sp>
-        <p:nvSpPr>
-          <p:cNvPr id="19" name="TextBox 18"/>
-          <p:cNvSpPr txBox="1"/>
-          <p:nvPr/>
-        </p:nvSpPr>
-        <p:spPr>
-          <a:xfrm>
-            <a:off x="6574536" y="2066543"/>
-            <a:ext cx="4526280" cy="786383"/>
-          </a:xfrm>
-          <a:prstGeom prst="rect">
-            <a:avLst/>
-          </a:prstGeom>
-          <a:noFill/>
-        </p:spPr>
-        <p:txBody>
-          <a:bodyPr wrap="none" lIns="54864" rIns="54864" tIns="36576" bIns="36576">
-            <a:spAutoFit/>
-          </a:bodyPr>
-          <a:lstStyle/>
-          <a:p>
             <a:pPr>
               <a:lnSpc>
-                <a:spcPct val="105000"/>
+                <a:spcPct val="100000"/>
               </a:lnSpc>
               <a:spcAft>
-                <a:spcPts val="600"/>
-              </a:spcAft>
-            </a:pPr>
-            <a:r>
-              <a:rPr sz="1250">
+                <a:spcPts val="100"/>
+              </a:spcAft>
+            </a:pPr>
+            <a:r>
+              <a:rPr sz="1200">
                 <a:solidFill>
                   <a:srgbClr val="17323B"/>
                 </a:solidFill>
                 <a:latin typeface="Calibri"/>
               </a:rPr>
-              <a:t>AI 模型、DashScope、Pexels、COS、Selenium 截图任一失败都会影响体验</a:t>
+              <a:t>AI 模型、DashScope、Pe</a:t>
             </a:r>
           </a:p>
           <a:p>
             <a:pPr>
               <a:lnSpc>
-                <a:spcPct val="105000"/>
+                <a:spcPct val="100000"/>
               </a:lnSpc>
               <a:spcAft>
-                <a:spcPts val="600"/>
-              </a:spcAft>
-            </a:pPr>
-            <a:r>
-              <a:rPr sz="1250">
+                <a:spcPts val="100"/>
+              </a:spcAft>
+            </a:pPr>
+            <a:r>
+              <a:rPr sz="1200">
+                <a:solidFill>
+                  <a:srgbClr val="17323B"/>
+                </a:solidFill>
+                <a:latin typeface="Calibri"/>
+              </a:rPr>
+              <a:t>xels、COS、Selenium</a:t>
+            </a:r>
+          </a:p>
+          <a:p>
+            <a:pPr>
+              <a:lnSpc>
+                <a:spcPct val="100000"/>
+              </a:lnSpc>
+              <a:spcAft>
+                <a:spcPts val="400"/>
+              </a:spcAft>
+            </a:pPr>
+            <a:r>
+              <a:rPr sz="1200">
+                <a:solidFill>
+                  <a:srgbClr val="17323B"/>
+                </a:solidFill>
+                <a:latin typeface="Calibri"/>
+              </a:rPr>
+              <a:t>截图都会影响体验</a:t>
+            </a:r>
+          </a:p>
+          <a:p>
+            <a:pPr>
+              <a:lnSpc>
+                <a:spcPct val="100000"/>
+              </a:lnSpc>
+              <a:spcAft>
+                <a:spcPts val="400"/>
+              </a:spcAft>
+            </a:pPr>
+            <a:r>
+              <a:rPr sz="1200">
                 <a:solidFill>
                   <a:srgbClr val="17323B"/>
                 </a:solidFill>
@@ -15599,91 +16974,95 @@
           <a:noFill/>
         </p:spPr>
         <p:txBody>
-          <a:bodyPr wrap="none" lIns="0" rIns="0" tIns="0" bIns="0" anchor="ctr">
+          <a:bodyPr wrap="square" lIns="0" rIns="0" tIns="0" bIns="0" anchor="ctr"/>
+          <a:lstStyle/>
+          <a:p>
+            <a:pPr algn="ctr">
+              <a:spcAft>
+                <a:spcPts val="200"/>
+              </a:spcAft>
+            </a:pPr>
+            <a:r>
+              <a:rPr sz="850" b="1" i="0">
+                <a:solidFill>
+                  <a:srgbClr val="FFFFFF"/>
+                </a:solidFill>
+                <a:latin typeface="Calibri"/>
+              </a:rPr>
+              <a:t>MED</a:t>
+            </a:r>
+          </a:p>
+        </p:txBody>
+      </p:sp>
+      <p:sp>
+        <p:nvSpPr>
+          <p:cNvPr id="24" name="TextBox 23"/>
+          <p:cNvSpPr txBox="1"/>
+          <p:nvPr/>
+        </p:nvSpPr>
+        <p:spPr>
+          <a:xfrm>
+            <a:off x="1517904" y="3712463"/>
+            <a:ext cx="3986783" cy="320040"/>
+          </a:xfrm>
+          <a:prstGeom prst="rect">
+            <a:avLst/>
+          </a:prstGeom>
+          <a:noFill/>
+        </p:spPr>
+        <p:txBody>
+          <a:bodyPr wrap="square" lIns="0" rIns="0" tIns="0" bIns="0" anchor="t"/>
+          <a:lstStyle/>
+          <a:p>
+            <a:pPr algn="l">
+              <a:spcAft>
+                <a:spcPts val="200"/>
+              </a:spcAft>
+            </a:pPr>
+            <a:r>
+              <a:rPr sz="1650" b="1" i="0">
+                <a:solidFill>
+                  <a:srgbClr val="21295C"/>
+                </a:solidFill>
+                <a:latin typeface="Calibri"/>
+              </a:rPr>
+              <a:t>微服务版本需验证</a:t>
+            </a:r>
+          </a:p>
+        </p:txBody>
+      </p:sp>
+      <p:sp>
+        <p:nvSpPr>
+          <p:cNvPr id="25" name="TextBox 24"/>
+          <p:cNvSpPr txBox="1"/>
+          <p:nvPr/>
+        </p:nvSpPr>
+        <p:spPr>
+          <a:xfrm>
+            <a:off x="969264" y="4261104"/>
+            <a:ext cx="4526280" cy="786383"/>
+          </a:xfrm>
+          <a:prstGeom prst="rect">
+            <a:avLst/>
+          </a:prstGeom>
+          <a:noFill/>
+        </p:spPr>
+        <p:txBody>
+          <a:bodyPr wrap="square" lIns="73152" rIns="73152" tIns="36576" bIns="36576">
             <a:spAutoFit/>
           </a:bodyPr>
           <a:lstStyle/>
           <a:p>
-            <a:pPr algn="ctr"/>
-            <a:r>
-              <a:rPr sz="850" b="1" i="0">
-                <a:solidFill>
-                  <a:srgbClr val="FFFFFF"/>
-                </a:solidFill>
-                <a:latin typeface="Calibri"/>
-              </a:rPr>
-              <a:t>MED</a:t>
-            </a:r>
-          </a:p>
-        </p:txBody>
-      </p:sp>
-      <p:sp>
-        <p:nvSpPr>
-          <p:cNvPr id="24" name="TextBox 23"/>
-          <p:cNvSpPr txBox="1"/>
-          <p:nvPr/>
-        </p:nvSpPr>
-        <p:spPr>
-          <a:xfrm>
-            <a:off x="1517904" y="3712463"/>
-            <a:ext cx="3986783" cy="320040"/>
-          </a:xfrm>
-          <a:prstGeom prst="rect">
-            <a:avLst/>
-          </a:prstGeom>
-          <a:noFill/>
-        </p:spPr>
-        <p:txBody>
-          <a:bodyPr wrap="none" lIns="0" rIns="0" tIns="0" bIns="0" anchor="t">
-            <a:spAutoFit/>
-          </a:bodyPr>
-          <a:lstStyle/>
-          <a:p>
-            <a:pPr algn="l"/>
-            <a:r>
-              <a:rPr sz="1650" b="1" i="0">
-                <a:solidFill>
-                  <a:srgbClr val="21295C"/>
-                </a:solidFill>
-                <a:latin typeface="Calibri"/>
-              </a:rPr>
-              <a:t>微服务版本需验证</a:t>
-            </a:r>
-          </a:p>
-        </p:txBody>
-      </p:sp>
-      <p:sp>
-        <p:nvSpPr>
-          <p:cNvPr id="25" name="TextBox 24"/>
-          <p:cNvSpPr txBox="1"/>
-          <p:nvPr/>
-        </p:nvSpPr>
-        <p:spPr>
-          <a:xfrm>
-            <a:off x="969264" y="4261104"/>
-            <a:ext cx="4526280" cy="786383"/>
-          </a:xfrm>
-          <a:prstGeom prst="rect">
-            <a:avLst/>
-          </a:prstGeom>
-          <a:noFill/>
-        </p:spPr>
-        <p:txBody>
-          <a:bodyPr wrap="none" lIns="54864" rIns="54864" tIns="36576" bIns="36576">
-            <a:spAutoFit/>
-          </a:bodyPr>
-          <a:lstStyle/>
-          <a:p>
             <a:pPr>
               <a:lnSpc>
-                <a:spcPct val="105000"/>
+                <a:spcPct val="100000"/>
               </a:lnSpc>
               <a:spcAft>
-                <a:spcPts val="600"/>
-              </a:spcAft>
-            </a:pPr>
-            <a:r>
-              <a:rPr sz="1250">
+                <a:spcPts val="400"/>
+              </a:spcAft>
+            </a:pPr>
+            <a:r>
+              <a:rPr sz="1200">
                 <a:solidFill>
                   <a:srgbClr val="17323B"/>
                 </a:solidFill>
@@ -15695,20 +17074,39 @@
           <a:p>
             <a:pPr>
               <a:lnSpc>
-                <a:spcPct val="105000"/>
+                <a:spcPct val="100000"/>
               </a:lnSpc>
               <a:spcAft>
-                <a:spcPts val="600"/>
-              </a:spcAft>
-            </a:pPr>
-            <a:r>
-              <a:rPr sz="1250">
+                <a:spcPts val="100"/>
+              </a:spcAft>
+            </a:pPr>
+            <a:r>
+              <a:rPr sz="1200">
                 <a:solidFill>
                   <a:srgbClr val="17323B"/>
                 </a:solidFill>
                 <a:latin typeface="Calibri"/>
               </a:rPr>
-              <a:t>虽有完成提交，仍应逐服务做启动与调用验证</a:t>
+              <a:t>虽有完成提交，仍应逐服务启动与调用验</a:t>
+            </a:r>
+          </a:p>
+          <a:p>
+            <a:pPr>
+              <a:lnSpc>
+                <a:spcPct val="100000"/>
+              </a:lnSpc>
+              <a:spcAft>
+                <a:spcPts val="400"/>
+              </a:spcAft>
+            </a:pPr>
+            <a:r>
+              <a:rPr sz="1200">
+                <a:solidFill>
+                  <a:srgbClr val="17323B"/>
+                </a:solidFill>
+                <a:latin typeface="Calibri"/>
+              </a:rPr>
+              <a:t>证</a:t>
             </a:r>
           </a:p>
         </p:txBody>
@@ -15865,91 +17263,95 @@
           <a:noFill/>
         </p:spPr>
         <p:txBody>
-          <a:bodyPr wrap="none" lIns="0" rIns="0" tIns="0" bIns="0" anchor="ctr">
+          <a:bodyPr wrap="square" lIns="0" rIns="0" tIns="0" bIns="0" anchor="ctr"/>
+          <a:lstStyle/>
+          <a:p>
+            <a:pPr algn="ctr">
+              <a:spcAft>
+                <a:spcPts val="200"/>
+              </a:spcAft>
+            </a:pPr>
+            <a:r>
+              <a:rPr sz="850" b="1" i="0">
+                <a:solidFill>
+                  <a:srgbClr val="FFFFFF"/>
+                </a:solidFill>
+                <a:latin typeface="Calibri"/>
+              </a:rPr>
+              <a:t>MED</a:t>
+            </a:r>
+          </a:p>
+        </p:txBody>
+      </p:sp>
+      <p:sp>
+        <p:nvSpPr>
+          <p:cNvPr id="30" name="TextBox 29"/>
+          <p:cNvSpPr txBox="1"/>
+          <p:nvPr/>
+        </p:nvSpPr>
+        <p:spPr>
+          <a:xfrm>
+            <a:off x="7123175" y="3712463"/>
+            <a:ext cx="3986784" cy="320040"/>
+          </a:xfrm>
+          <a:prstGeom prst="rect">
+            <a:avLst/>
+          </a:prstGeom>
+          <a:noFill/>
+        </p:spPr>
+        <p:txBody>
+          <a:bodyPr wrap="square" lIns="0" rIns="0" tIns="0" bIns="0" anchor="t"/>
+          <a:lstStyle/>
+          <a:p>
+            <a:pPr algn="l">
+              <a:spcAft>
+                <a:spcPts val="200"/>
+              </a:spcAft>
+            </a:pPr>
+            <a:r>
+              <a:rPr sz="1650" b="1" i="0">
+                <a:solidFill>
+                  <a:srgbClr val="21295C"/>
+                </a:solidFill>
+                <a:latin typeface="Calibri"/>
+              </a:rPr>
+              <a:t>CI 缺口</a:t>
+            </a:r>
+          </a:p>
+        </p:txBody>
+      </p:sp>
+      <p:sp>
+        <p:nvSpPr>
+          <p:cNvPr id="31" name="TextBox 30"/>
+          <p:cNvSpPr txBox="1"/>
+          <p:nvPr/>
+        </p:nvSpPr>
+        <p:spPr>
+          <a:xfrm>
+            <a:off x="6574536" y="4261104"/>
+            <a:ext cx="4526280" cy="786383"/>
+          </a:xfrm>
+          <a:prstGeom prst="rect">
+            <a:avLst/>
+          </a:prstGeom>
+          <a:noFill/>
+        </p:spPr>
+        <p:txBody>
+          <a:bodyPr wrap="square" lIns="73152" rIns="73152" tIns="36576" bIns="36576">
             <a:spAutoFit/>
           </a:bodyPr>
           <a:lstStyle/>
           <a:p>
-            <a:pPr algn="ctr"/>
-            <a:r>
-              <a:rPr sz="850" b="1" i="0">
-                <a:solidFill>
-                  <a:srgbClr val="FFFFFF"/>
-                </a:solidFill>
-                <a:latin typeface="Calibri"/>
-              </a:rPr>
-              <a:t>MED</a:t>
-            </a:r>
-          </a:p>
-        </p:txBody>
-      </p:sp>
-      <p:sp>
-        <p:nvSpPr>
-          <p:cNvPr id="30" name="TextBox 29"/>
-          <p:cNvSpPr txBox="1"/>
-          <p:nvPr/>
-        </p:nvSpPr>
-        <p:spPr>
-          <a:xfrm>
-            <a:off x="7123175" y="3712463"/>
-            <a:ext cx="3986784" cy="320040"/>
-          </a:xfrm>
-          <a:prstGeom prst="rect">
-            <a:avLst/>
-          </a:prstGeom>
-          <a:noFill/>
-        </p:spPr>
-        <p:txBody>
-          <a:bodyPr wrap="none" lIns="0" rIns="0" tIns="0" bIns="0" anchor="t">
-            <a:spAutoFit/>
-          </a:bodyPr>
-          <a:lstStyle/>
-          <a:p>
-            <a:pPr algn="l"/>
-            <a:r>
-              <a:rPr sz="1650" b="1" i="0">
-                <a:solidFill>
-                  <a:srgbClr val="21295C"/>
-                </a:solidFill>
-                <a:latin typeface="Calibri"/>
-              </a:rPr>
-              <a:t>CI 缺口</a:t>
-            </a:r>
-          </a:p>
-        </p:txBody>
-      </p:sp>
-      <p:sp>
-        <p:nvSpPr>
-          <p:cNvPr id="31" name="TextBox 30"/>
-          <p:cNvSpPr txBox="1"/>
-          <p:nvPr/>
-        </p:nvSpPr>
-        <p:spPr>
-          <a:xfrm>
-            <a:off x="6574536" y="4261104"/>
-            <a:ext cx="4526280" cy="786383"/>
-          </a:xfrm>
-          <a:prstGeom prst="rect">
-            <a:avLst/>
-          </a:prstGeom>
-          <a:noFill/>
-        </p:spPr>
-        <p:txBody>
-          <a:bodyPr wrap="none" lIns="54864" rIns="54864" tIns="36576" bIns="36576">
-            <a:spAutoFit/>
-          </a:bodyPr>
-          <a:lstStyle/>
-          <a:p>
             <a:pPr>
               <a:lnSpc>
-                <a:spcPct val="105000"/>
+                <a:spcPct val="100000"/>
               </a:lnSpc>
               <a:spcAft>
-                <a:spcPts val="600"/>
-              </a:spcAft>
-            </a:pPr>
-            <a:r>
-              <a:rPr sz="1250">
+                <a:spcPts val="400"/>
+              </a:spcAft>
+            </a:pPr>
+            <a:r>
+              <a:rPr sz="1200">
                 <a:solidFill>
                   <a:srgbClr val="17323B"/>
                 </a:solidFill>
@@ -15961,20 +17363,39 @@
           <a:p>
             <a:pPr>
               <a:lnSpc>
-                <a:spcPct val="105000"/>
+                <a:spcPct val="100000"/>
               </a:lnSpc>
               <a:spcAft>
-                <a:spcPts val="600"/>
-              </a:spcAft>
-            </a:pPr>
-            <a:r>
-              <a:rPr sz="1250">
+                <a:spcPts val="100"/>
+              </a:spcAft>
+            </a:pPr>
+            <a:r>
+              <a:rPr sz="1200">
                 <a:solidFill>
                   <a:srgbClr val="17323B"/>
                 </a:solidFill>
                 <a:latin typeface="Calibri"/>
               </a:rPr>
-              <a:t>PR 合入前缺少统一构建、测试、前端 lint/typecheck 门禁</a:t>
+              <a:t>PR 合入前缺少统一构建、测试、li</a:t>
+            </a:r>
+          </a:p>
+          <a:p>
+            <a:pPr>
+              <a:lnSpc>
+                <a:spcPct val="100000"/>
+              </a:lnSpc>
+              <a:spcAft>
+                <a:spcPts val="400"/>
+              </a:spcAft>
+            </a:pPr>
+            <a:r>
+              <a:rPr sz="1200">
+                <a:solidFill>
+                  <a:srgbClr val="17323B"/>
+                </a:solidFill>
+                <a:latin typeface="Calibri"/>
+              </a:rPr>
+              <a:t>nt/typecheck 门禁</a:t>
             </a:r>
           </a:p>
         </p:txBody>
@@ -15996,12 +17417,14 @@
           <a:noFill/>
         </p:spPr>
         <p:txBody>
-          <a:bodyPr wrap="none" lIns="0" rIns="0" tIns="0" bIns="0" anchor="t">
-            <a:spAutoFit/>
-          </a:bodyPr>
-          <a:lstStyle/>
-          <a:p>
-            <a:pPr algn="l"/>
+          <a:bodyPr wrap="square" lIns="0" rIns="0" tIns="0" bIns="0" anchor="t"/>
+          <a:lstStyle/>
+          <a:p>
+            <a:pPr algn="l">
+              <a:spcAft>
+                <a:spcPts val="200"/>
+              </a:spcAft>
+            </a:pPr>
             <a:r>
               <a:rPr sz="1050" b="0" i="0">
                 <a:solidFill>
@@ -16192,12 +17615,14 @@
           <a:noFill/>
         </p:spPr>
         <p:txBody>
-          <a:bodyPr wrap="none" lIns="0" rIns="0" tIns="0" bIns="0" anchor="ctr">
-            <a:spAutoFit/>
-          </a:bodyPr>
-          <a:lstStyle/>
-          <a:p>
-            <a:pPr algn="ctr"/>
+          <a:bodyPr wrap="square" lIns="0" rIns="0" tIns="0" bIns="0" anchor="ctr"/>
+          <a:lstStyle/>
+          <a:p>
+            <a:pPr algn="ctr">
+              <a:spcAft>
+                <a:spcPts val="200"/>
+              </a:spcAft>
+            </a:pPr>
             <a:r>
               <a:rPr sz="900" b="1" i="0">
                 <a:solidFill>
@@ -16227,12 +17652,14 @@
           <a:noFill/>
         </p:spPr>
         <p:txBody>
-          <a:bodyPr wrap="none" lIns="0" rIns="0" tIns="0" bIns="0" anchor="t">
-            <a:spAutoFit/>
-          </a:bodyPr>
-          <a:lstStyle/>
-          <a:p>
-            <a:pPr algn="l"/>
+          <a:bodyPr wrap="square" lIns="0" rIns="0" tIns="0" bIns="0" anchor="t"/>
+          <a:lstStyle/>
+          <a:p>
+            <a:pPr algn="l">
+              <a:spcAft>
+                <a:spcPts val="200"/>
+              </a:spcAft>
+            </a:pPr>
             <a:r>
               <a:rPr sz="3400" b="1" i="0">
                 <a:solidFill>
@@ -16254,7 +17681,7 @@
         <p:spPr>
           <a:xfrm>
             <a:off x="1152144" y="841248"/>
-            <a:ext cx="8046720" cy="256032"/>
+            <a:ext cx="8046720" cy="274320"/>
           </a:xfrm>
           <a:prstGeom prst="rect">
             <a:avLst/>
@@ -16262,12 +17689,14 @@
           <a:noFill/>
         </p:spPr>
         <p:txBody>
-          <a:bodyPr wrap="none" lIns="0" rIns="0" tIns="0" bIns="0" anchor="t">
-            <a:spAutoFit/>
-          </a:bodyPr>
-          <a:lstStyle/>
-          <a:p>
-            <a:pPr algn="l"/>
+          <a:bodyPr wrap="square" lIns="0" rIns="0" tIns="0" bIns="0" anchor="t"/>
+          <a:lstStyle/>
+          <a:p>
+            <a:pPr algn="l">
+              <a:spcAft>
+                <a:spcPts val="200"/>
+              </a:spcAft>
+            </a:pPr>
             <a:r>
               <a:rPr sz="1150" b="0" i="0">
                 <a:solidFill>
@@ -16342,12 +17771,14 @@
           <a:noFill/>
         </p:spPr>
         <p:txBody>
-          <a:bodyPr wrap="none" lIns="0" rIns="0" tIns="0" bIns="0" anchor="ctr">
-            <a:spAutoFit/>
-          </a:bodyPr>
-          <a:lstStyle/>
-          <a:p>
-            <a:pPr algn="ctr"/>
+          <a:bodyPr wrap="square" lIns="0" rIns="0" tIns="0" bIns="0" anchor="ctr"/>
+          <a:lstStyle/>
+          <a:p>
+            <a:pPr algn="ctr">
+              <a:spcAft>
+                <a:spcPts val="200"/>
+              </a:spcAft>
+            </a:pPr>
             <a:r>
               <a:rPr sz="1050" b="1" i="0">
                 <a:solidFill>
@@ -16467,12 +17898,14 @@
           <a:noFill/>
         </p:spPr>
         <p:txBody>
-          <a:bodyPr wrap="none" lIns="0" rIns="0" tIns="0" bIns="0" anchor="ctr">
-            <a:spAutoFit/>
-          </a:bodyPr>
-          <a:lstStyle/>
-          <a:p>
-            <a:pPr algn="ctr"/>
+          <a:bodyPr wrap="square" lIns="0" rIns="0" tIns="0" bIns="0" anchor="ctr"/>
+          <a:lstStyle/>
+          <a:p>
+            <a:pPr algn="ctr">
+              <a:spcAft>
+                <a:spcPts val="200"/>
+              </a:spcAft>
+            </a:pPr>
             <a:r>
               <a:rPr sz="900" b="1" i="0">
                 <a:solidFill>
@@ -16502,12 +17935,14 @@
           <a:noFill/>
         </p:spPr>
         <p:txBody>
-          <a:bodyPr wrap="none" lIns="0" rIns="0" tIns="0" bIns="0" anchor="t">
-            <a:spAutoFit/>
-          </a:bodyPr>
-          <a:lstStyle/>
-          <a:p>
-            <a:pPr algn="l"/>
+          <a:bodyPr wrap="square" lIns="0" rIns="0" tIns="0" bIns="0" anchor="t"/>
+          <a:lstStyle/>
+          <a:p>
+            <a:pPr algn="l">
+              <a:spcAft>
+                <a:spcPts val="200"/>
+              </a:spcAft>
+            </a:pPr>
             <a:r>
               <a:rPr sz="1500" b="1" i="0">
                 <a:solidFill>
@@ -16529,7 +17964,7 @@
         <p:spPr>
           <a:xfrm>
             <a:off x="4370832" y="1362456"/>
-            <a:ext cx="6400800" cy="228600"/>
+            <a:ext cx="6400800" cy="310896"/>
           </a:xfrm>
           <a:prstGeom prst="rect">
             <a:avLst/>
@@ -16537,20 +17972,38 @@
           <a:noFill/>
         </p:spPr>
         <p:txBody>
-          <a:bodyPr wrap="none" lIns="0" rIns="0" tIns="0" bIns="0" anchor="t">
-            <a:spAutoFit/>
-          </a:bodyPr>
-          <a:lstStyle/>
-          <a:p>
-            <a:pPr algn="l"/>
-            <a:r>
-              <a:rPr sz="1250" b="0" i="0">
+          <a:bodyPr wrap="square" lIns="0" rIns="0" tIns="0" bIns="0" anchor="t"/>
+          <a:lstStyle/>
+          <a:p>
+            <a:pPr algn="l">
+              <a:spcAft>
+                <a:spcPts val="200"/>
+              </a:spcAft>
+            </a:pPr>
+            <a:r>
+              <a:rPr sz="1200" b="0" i="0">
                 <a:solidFill>
                   <a:srgbClr val="17323B"/>
                 </a:solidFill>
                 <a:latin typeface="Calibri"/>
               </a:rPr>
-              <a:t>将 AI/COS/Redis/MySQL/部署域名等配置转为环境变量与样例文档。</a:t>
+              <a:t>将 AI/COS/Redis/MySQL/部署域名等配置转为环境变量与样</a:t>
+            </a:r>
+          </a:p>
+          <a:p>
+            <a:pPr algn="l">
+              <a:spcAft>
+                <a:spcPts val="200"/>
+              </a:spcAft>
+            </a:pPr>
+            <a:r>
+              <a:rPr sz="1200" b="0" i="0">
+                <a:solidFill>
+                  <a:srgbClr val="17323B"/>
+                </a:solidFill>
+                <a:latin typeface="Calibri"/>
+              </a:rPr>
+              <a:t>例文档。</a:t>
             </a:r>
           </a:p>
         </p:txBody>
@@ -16662,12 +18115,14 @@
           <a:noFill/>
         </p:spPr>
         <p:txBody>
-          <a:bodyPr wrap="none" lIns="0" rIns="0" tIns="0" bIns="0" anchor="ctr">
-            <a:spAutoFit/>
-          </a:bodyPr>
-          <a:lstStyle/>
-          <a:p>
-            <a:pPr algn="ctr"/>
+          <a:bodyPr wrap="square" lIns="0" rIns="0" tIns="0" bIns="0" anchor="ctr"/>
+          <a:lstStyle/>
+          <a:p>
+            <a:pPr algn="ctr">
+              <a:spcAft>
+                <a:spcPts val="200"/>
+              </a:spcAft>
+            </a:pPr>
             <a:r>
               <a:rPr sz="900" b="1" i="0">
                 <a:solidFill>
@@ -16697,12 +18152,14 @@
           <a:noFill/>
         </p:spPr>
         <p:txBody>
-          <a:bodyPr wrap="none" lIns="0" rIns="0" tIns="0" bIns="0" anchor="t">
-            <a:spAutoFit/>
-          </a:bodyPr>
-          <a:lstStyle/>
-          <a:p>
-            <a:pPr algn="l"/>
+          <a:bodyPr wrap="square" lIns="0" rIns="0" tIns="0" bIns="0" anchor="t"/>
+          <a:lstStyle/>
+          <a:p>
+            <a:pPr algn="l">
+              <a:spcAft>
+                <a:spcPts val="200"/>
+              </a:spcAft>
+            </a:pPr>
             <a:r>
               <a:rPr sz="1500" b="1" i="0">
                 <a:solidFill>
@@ -16724,7 +18181,7 @@
         <p:spPr>
           <a:xfrm>
             <a:off x="4370832" y="2240280"/>
-            <a:ext cx="6400800" cy="228600"/>
+            <a:ext cx="6400800" cy="310896"/>
           </a:xfrm>
           <a:prstGeom prst="rect">
             <a:avLst/>
@@ -16732,20 +18189,38 @@
           <a:noFill/>
         </p:spPr>
         <p:txBody>
-          <a:bodyPr wrap="none" lIns="0" rIns="0" tIns="0" bIns="0" anchor="t">
-            <a:spAutoFit/>
-          </a:bodyPr>
-          <a:lstStyle/>
-          <a:p>
-            <a:pPr algn="l"/>
-            <a:r>
-              <a:rPr sz="1250" b="0" i="0">
+          <a:bodyPr wrap="square" lIns="0" rIns="0" tIns="0" bIns="0" anchor="t"/>
+          <a:lstStyle/>
+          <a:p>
+            <a:pPr algn="l">
+              <a:spcAft>
+                <a:spcPts val="200"/>
+              </a:spcAft>
+            </a:pPr>
+            <a:r>
+              <a:rPr sz="1200" b="0" i="0">
                 <a:solidFill>
                   <a:srgbClr val="17323B"/>
                 </a:solidFill>
                 <a:latin typeface="Calibri"/>
               </a:rPr>
-              <a:t>增加后端 Maven test、前端 npm build/lint/typecheck 的 PR 级流水线。</a:t>
+              <a:t>增加后端 Maven test、前端 npm</a:t>
+            </a:r>
+          </a:p>
+          <a:p>
+            <a:pPr algn="l">
+              <a:spcAft>
+                <a:spcPts val="200"/>
+              </a:spcAft>
+            </a:pPr>
+            <a:r>
+              <a:rPr sz="1200" b="0" i="0">
+                <a:solidFill>
+                  <a:srgbClr val="17323B"/>
+                </a:solidFill>
+                <a:latin typeface="Calibri"/>
+              </a:rPr>
+              <a:t>build/lint/typecheck 的 PR 级流水线。</a:t>
             </a:r>
           </a:p>
         </p:txBody>
@@ -16857,12 +18332,14 @@
           <a:noFill/>
         </p:spPr>
         <p:txBody>
-          <a:bodyPr wrap="none" lIns="0" rIns="0" tIns="0" bIns="0" anchor="ctr">
-            <a:spAutoFit/>
-          </a:bodyPr>
-          <a:lstStyle/>
-          <a:p>
-            <a:pPr algn="ctr"/>
+          <a:bodyPr wrap="square" lIns="0" rIns="0" tIns="0" bIns="0" anchor="ctr"/>
+          <a:lstStyle/>
+          <a:p>
+            <a:pPr algn="ctr">
+              <a:spcAft>
+                <a:spcPts val="200"/>
+              </a:spcAft>
+            </a:pPr>
             <a:r>
               <a:rPr sz="900" b="1" i="0">
                 <a:solidFill>
@@ -16892,12 +18369,14 @@
           <a:noFill/>
         </p:spPr>
         <p:txBody>
-          <a:bodyPr wrap="none" lIns="0" rIns="0" tIns="0" bIns="0" anchor="t">
-            <a:spAutoFit/>
-          </a:bodyPr>
-          <a:lstStyle/>
-          <a:p>
-            <a:pPr algn="l"/>
+          <a:bodyPr wrap="square" lIns="0" rIns="0" tIns="0" bIns="0" anchor="t"/>
+          <a:lstStyle/>
+          <a:p>
+            <a:pPr algn="l">
+              <a:spcAft>
+                <a:spcPts val="200"/>
+              </a:spcAft>
+            </a:pPr>
             <a:r>
               <a:rPr sz="1500" b="1" i="0">
                 <a:solidFill>
@@ -16919,7 +18398,7 @@
         <p:spPr>
           <a:xfrm>
             <a:off x="4370832" y="3118104"/>
-            <a:ext cx="6400800" cy="228600"/>
+            <a:ext cx="6400800" cy="310896"/>
           </a:xfrm>
           <a:prstGeom prst="rect">
             <a:avLst/>
@@ -16927,14 +18406,16 @@
           <a:noFill/>
         </p:spPr>
         <p:txBody>
-          <a:bodyPr wrap="none" lIns="0" rIns="0" tIns="0" bIns="0" anchor="t">
-            <a:spAutoFit/>
-          </a:bodyPr>
-          <a:lstStyle/>
-          <a:p>
-            <a:pPr algn="l"/>
-            <a:r>
-              <a:rPr sz="1250" b="0" i="0">
+          <a:bodyPr wrap="square" lIns="0" rIns="0" tIns="0" bIns="0" anchor="t"/>
+          <a:lstStyle/>
+          <a:p>
+            <a:pPr algn="l">
+              <a:spcAft>
+                <a:spcPts val="200"/>
+              </a:spcAft>
+            </a:pPr>
+            <a:r>
+              <a:rPr sz="1200" b="0" i="0">
                 <a:solidFill>
                   <a:srgbClr val="17323B"/>
                 </a:solidFill>
@@ -17052,12 +18533,14 @@
           <a:noFill/>
         </p:spPr>
         <p:txBody>
-          <a:bodyPr wrap="none" lIns="0" rIns="0" tIns="0" bIns="0" anchor="ctr">
-            <a:spAutoFit/>
-          </a:bodyPr>
-          <a:lstStyle/>
-          <a:p>
-            <a:pPr algn="ctr"/>
+          <a:bodyPr wrap="square" lIns="0" rIns="0" tIns="0" bIns="0" anchor="ctr"/>
+          <a:lstStyle/>
+          <a:p>
+            <a:pPr algn="ctr">
+              <a:spcAft>
+                <a:spcPts val="200"/>
+              </a:spcAft>
+            </a:pPr>
             <a:r>
               <a:rPr sz="900" b="1" i="0">
                 <a:solidFill>
@@ -17087,12 +18570,14 @@
           <a:noFill/>
         </p:spPr>
         <p:txBody>
-          <a:bodyPr wrap="none" lIns="0" rIns="0" tIns="0" bIns="0" anchor="t">
-            <a:spAutoFit/>
-          </a:bodyPr>
-          <a:lstStyle/>
-          <a:p>
-            <a:pPr algn="l"/>
+          <a:bodyPr wrap="square" lIns="0" rIns="0" tIns="0" bIns="0" anchor="t"/>
+          <a:lstStyle/>
+          <a:p>
+            <a:pPr algn="l">
+              <a:spcAft>
+                <a:spcPts val="200"/>
+              </a:spcAft>
+            </a:pPr>
             <a:r>
               <a:rPr sz="1500" b="1" i="0">
                 <a:solidFill>
@@ -17114,7 +18599,7 @@
         <p:spPr>
           <a:xfrm>
             <a:off x="4370832" y="3995928"/>
-            <a:ext cx="6400800" cy="228600"/>
+            <a:ext cx="6400800" cy="310896"/>
           </a:xfrm>
           <a:prstGeom prst="rect">
             <a:avLst/>
@@ -17122,20 +18607,38 @@
           <a:noFill/>
         </p:spPr>
         <p:txBody>
-          <a:bodyPr wrap="none" lIns="0" rIns="0" tIns="0" bIns="0" anchor="t">
-            <a:spAutoFit/>
-          </a:bodyPr>
-          <a:lstStyle/>
-          <a:p>
-            <a:pPr algn="l"/>
-            <a:r>
-              <a:rPr sz="1250" b="0" i="0">
+          <a:bodyPr wrap="square" lIns="0" rIns="0" tIns="0" bIns="0" anchor="t"/>
+          <a:lstStyle/>
+          <a:p>
+            <a:pPr algn="l">
+              <a:spcAft>
+                <a:spcPts val="200"/>
+              </a:spcAft>
+            </a:pPr>
+            <a:r>
+              <a:rPr sz="1200" b="0" i="0">
                 <a:solidFill>
                   <a:srgbClr val="17323B"/>
                 </a:solidFill>
                 <a:latin typeface="Calibri"/>
               </a:rPr>
-              <a:t>沉淀 Grafana 仪表盘与告警：AI 延迟、失败率、部署成功率、截图成功率。</a:t>
+              <a:t>沉淀 Grafana 仪表盘与告警：AI</a:t>
+            </a:r>
+          </a:p>
+          <a:p>
+            <a:pPr algn="l">
+              <a:spcAft>
+                <a:spcPts val="200"/>
+              </a:spcAft>
+            </a:pPr>
+            <a:r>
+              <a:rPr sz="1200" b="0" i="0">
+                <a:solidFill>
+                  <a:srgbClr val="17323B"/>
+                </a:solidFill>
+                <a:latin typeface="Calibri"/>
+              </a:rPr>
+              <a:t>延迟、失败率、部署成功率、截图成功率。</a:t>
             </a:r>
           </a:p>
         </p:txBody>
@@ -17247,12 +18750,14 @@
           <a:noFill/>
         </p:spPr>
         <p:txBody>
-          <a:bodyPr wrap="none" lIns="0" rIns="0" tIns="0" bIns="0" anchor="ctr">
-            <a:spAutoFit/>
-          </a:bodyPr>
-          <a:lstStyle/>
-          <a:p>
-            <a:pPr algn="ctr"/>
+          <a:bodyPr wrap="square" lIns="0" rIns="0" tIns="0" bIns="0" anchor="ctr"/>
+          <a:lstStyle/>
+          <a:p>
+            <a:pPr algn="ctr">
+              <a:spcAft>
+                <a:spcPts val="200"/>
+              </a:spcAft>
+            </a:pPr>
             <a:r>
               <a:rPr sz="900" b="1" i="0">
                 <a:solidFill>
@@ -17282,12 +18787,14 @@
           <a:noFill/>
         </p:spPr>
         <p:txBody>
-          <a:bodyPr wrap="none" lIns="0" rIns="0" tIns="0" bIns="0" anchor="t">
-            <a:spAutoFit/>
-          </a:bodyPr>
-          <a:lstStyle/>
-          <a:p>
-            <a:pPr algn="l"/>
+          <a:bodyPr wrap="square" lIns="0" rIns="0" tIns="0" bIns="0" anchor="t"/>
+          <a:lstStyle/>
+          <a:p>
+            <a:pPr algn="l">
+              <a:spcAft>
+                <a:spcPts val="200"/>
+              </a:spcAft>
+            </a:pPr>
             <a:r>
               <a:rPr sz="1500" b="1" i="0">
                 <a:solidFill>
@@ -17309,7 +18816,7 @@
         <p:spPr>
           <a:xfrm>
             <a:off x="4370832" y="4873751"/>
-            <a:ext cx="6400800" cy="228600"/>
+            <a:ext cx="6400800" cy="310896"/>
           </a:xfrm>
           <a:prstGeom prst="rect">
             <a:avLst/>
@@ -17317,20 +18824,38 @@
           <a:noFill/>
         </p:spPr>
         <p:txBody>
-          <a:bodyPr wrap="none" lIns="0" rIns="0" tIns="0" bIns="0" anchor="t">
-            <a:spAutoFit/>
-          </a:bodyPr>
-          <a:lstStyle/>
-          <a:p>
-            <a:pPr algn="l"/>
-            <a:r>
-              <a:rPr sz="1250" b="0" i="0">
+          <a:bodyPr wrap="square" lIns="0" rIns="0" tIns="0" bIns="0" anchor="t"/>
+          <a:lstStyle/>
+          <a:p>
+            <a:pPr algn="l">
+              <a:spcAft>
+                <a:spcPts val="200"/>
+              </a:spcAft>
+            </a:pPr>
+            <a:r>
+              <a:rPr sz="1200" b="0" i="0">
                 <a:solidFill>
                   <a:srgbClr val="17323B"/>
                 </a:solidFill>
                 <a:latin typeface="Calibri"/>
               </a:rPr>
-              <a:t>按 common/model/client/user/app/ai/screenshot 逐步验证启动、注册、Dubbo 调用。</a:t>
+              <a:t>按 common/model/client/user/app/ai/sc</a:t>
+            </a:r>
+          </a:p>
+          <a:p>
+            <a:pPr algn="l">
+              <a:spcAft>
+                <a:spcPts val="200"/>
+              </a:spcAft>
+            </a:pPr>
+            <a:r>
+              <a:rPr sz="1200" b="0" i="0">
+                <a:solidFill>
+                  <a:srgbClr val="17323B"/>
+                </a:solidFill>
+                <a:latin typeface="Calibri"/>
+              </a:rPr>
+              <a:t>reenshot 逐步验证启动、注册、Dubbo 调用。</a:t>
             </a:r>
           </a:p>
         </p:txBody>
@@ -17352,12 +18877,14 @@
           <a:noFill/>
         </p:spPr>
         <p:txBody>
-          <a:bodyPr wrap="none" lIns="0" rIns="0" tIns="0" bIns="0" anchor="t">
-            <a:spAutoFit/>
-          </a:bodyPr>
-          <a:lstStyle/>
-          <a:p>
-            <a:pPr algn="l"/>
+          <a:bodyPr wrap="square" lIns="0" rIns="0" tIns="0" bIns="0" anchor="t"/>
+          <a:lstStyle/>
+          <a:p>
+            <a:pPr algn="l">
+              <a:spcAft>
+                <a:spcPts val="200"/>
+              </a:spcAft>
+            </a:pPr>
             <a:r>
               <a:rPr sz="1050" b="0" i="0">
                 <a:solidFill>

--- a/docs/reports/project-status-2026-06-26.pptx
+++ b/docs/reports/project-status-2026-06-26.pptx
@@ -3293,51 +3293,6 @@
         </p:nvSpPr>
         <p:spPr>
           <a:xfrm>
-            <a:off x="502920" y="5074920"/>
-            <a:ext cx="1234440" cy="1234440"/>
-          </a:xfrm>
-          <a:prstGeom prst="ellipse">
-            <a:avLst/>
-          </a:prstGeom>
-          <a:solidFill>
-            <a:srgbClr val="02C39A"/>
-          </a:solidFill>
-          <a:ln>
-            <a:solidFill>
-              <a:srgbClr val="FFFFFF"/>
-            </a:solidFill>
-          </a:ln>
-        </p:spPr>
-        <p:style>
-          <a:lnRef idx="1">
-            <a:schemeClr val="accent1"/>
-          </a:lnRef>
-          <a:fillRef idx="3">
-            <a:schemeClr val="accent1"/>
-          </a:fillRef>
-          <a:effectRef idx="2">
-            <a:schemeClr val="accent1"/>
-          </a:effectRef>
-          <a:fontRef idx="minor">
-            <a:schemeClr val="lt1"/>
-          </a:fontRef>
-        </p:style>
-        <p:txBody>
-          <a:bodyPr rtlCol="0" anchor="ctr"/>
-          <a:lstStyle/>
-          <a:p>
-            <a:pPr algn="ctr"/>
-          </a:p>
-        </p:txBody>
-      </p:sp>
-      <p:sp>
-        <p:nvSpPr>
-          <p:cNvPr id="7" name="Oval 6"/>
-          <p:cNvSpPr/>
-          <p:nvPr/>
-        </p:nvSpPr>
-        <p:spPr>
-          <a:xfrm>
             <a:off x="9966960" y="411480"/>
             <a:ext cx="1508760" cy="1508760"/>
           </a:xfrm>
@@ -3377,14 +3332,53 @@
       </p:sp>
       <p:sp>
         <p:nvSpPr>
+          <p:cNvPr id="7" name="TextBox 6"/>
+          <p:cNvSpPr txBox="1"/>
+          <p:nvPr/>
+        </p:nvSpPr>
+        <p:spPr>
+          <a:xfrm>
+            <a:off x="713232" y="749808"/>
+            <a:ext cx="7315200" cy="457200"/>
+          </a:xfrm>
+          <a:prstGeom prst="rect">
+            <a:avLst/>
+          </a:prstGeom>
+          <a:noFill/>
+        </p:spPr>
+        <p:txBody>
+          <a:bodyPr wrap="square" lIns="0" rIns="0" tIns="0" bIns="0" anchor="t">
+            <a:spAutoFit/>
+          </a:bodyPr>
+          <a:lstStyle/>
+          <a:p>
+            <a:pPr algn="l">
+              <a:spcAft>
+                <a:spcPts val="100"/>
+              </a:spcAft>
+            </a:pPr>
+            <a:r>
+              <a:rPr sz="2000" b="1">
+                <a:solidFill>
+                  <a:srgbClr val="B7F4EF"/>
+                </a:solidFill>
+                <a:latin typeface="Calibri"/>
+              </a:rPr>
+              <a:t>AI 零代码应用生成平台</a:t>
+            </a:r>
+          </a:p>
+        </p:txBody>
+      </p:sp>
+      <p:sp>
+        <p:nvSpPr>
           <p:cNvPr id="8" name="TextBox 7"/>
           <p:cNvSpPr txBox="1"/>
           <p:nvPr/>
         </p:nvSpPr>
         <p:spPr>
           <a:xfrm>
-            <a:off x="713232" y="749808"/>
-            <a:ext cx="7315200" cy="457200"/>
+            <a:off x="694944" y="1325880"/>
+            <a:ext cx="8046720" cy="749808"/>
           </a:xfrm>
           <a:prstGeom prst="rect">
             <a:avLst/>
@@ -3392,22 +3386,24 @@
           <a:noFill/>
         </p:spPr>
         <p:txBody>
-          <a:bodyPr wrap="square" lIns="0" rIns="0" tIns="0" bIns="0" anchor="t"/>
+          <a:bodyPr wrap="square" lIns="0" rIns="0" tIns="0" bIns="0" anchor="t">
+            <a:spAutoFit/>
+          </a:bodyPr>
           <a:lstStyle/>
           <a:p>
             <a:pPr algn="l">
               <a:spcAft>
-                <a:spcPts val="200"/>
-              </a:spcAft>
-            </a:pPr>
-            <a:r>
-              <a:rPr sz="2000" b="1" i="0">
-                <a:solidFill>
-                  <a:srgbClr val="B7F4EF"/>
-                </a:solidFill>
-                <a:latin typeface="Calibri"/>
-              </a:rPr>
-              <a:t>AI 零代码应用生成平台</a:t>
+                <a:spcPts val="100"/>
+              </a:spcAft>
+            </a:pPr>
+            <a:r>
+              <a:rPr sz="4600" b="1">
+                <a:solidFill>
+                  <a:srgbClr val="FFFFFF"/>
+                </a:solidFill>
+                <a:latin typeface="Georgia"/>
+              </a:rPr>
+              <a:t>每日项目状态汇报</a:t>
             </a:r>
           </a:p>
         </p:txBody>
@@ -3420,8 +3416,8 @@
         </p:nvSpPr>
         <p:spPr>
           <a:xfrm>
-            <a:off x="694944" y="1325880"/>
-            <a:ext cx="8046720" cy="749808"/>
+            <a:off x="731520" y="2176272"/>
+            <a:ext cx="6217920" cy="347472"/>
           </a:xfrm>
           <a:prstGeom prst="rect">
             <a:avLst/>
@@ -3429,22 +3425,24 @@
           <a:noFill/>
         </p:spPr>
         <p:txBody>
-          <a:bodyPr wrap="square" lIns="0" rIns="0" tIns="0" bIns="0" anchor="t"/>
+          <a:bodyPr wrap="square" lIns="0" rIns="0" tIns="0" bIns="0" anchor="t">
+            <a:spAutoFit/>
+          </a:bodyPr>
           <a:lstStyle/>
           <a:p>
             <a:pPr algn="l">
               <a:spcAft>
-                <a:spcPts val="200"/>
-              </a:spcAft>
-            </a:pPr>
-            <a:r>
-              <a:rPr sz="4600" b="1" i="0">
-                <a:solidFill>
-                  <a:srgbClr val="FFFFFF"/>
-                </a:solidFill>
-                <a:latin typeface="Georgia"/>
-              </a:rPr>
-              <a:t>每日项目状态汇报</a:t>
+                <a:spcPts val="100"/>
+              </a:spcAft>
+            </a:pPr>
+            <a:r>
+              <a:rPr sz="1800" b="0">
+                <a:solidFill>
+                  <a:srgbClr val="E6FAFA"/>
+                </a:solidFill>
+                <a:latin typeface="Calibri"/>
+              </a:rPr>
+              <a:t>yu-ai-code-mother · 维护者/团队版</a:t>
             </a:r>
           </a:p>
         </p:txBody>
@@ -3457,8 +3455,8 @@
         </p:nvSpPr>
         <p:spPr>
           <a:xfrm>
-            <a:off x="731520" y="2176272"/>
-            <a:ext cx="6217920" cy="347472"/>
+            <a:off x="749808" y="4315968"/>
+            <a:ext cx="5394960" cy="960120"/>
           </a:xfrm>
           <a:prstGeom prst="rect">
             <a:avLst/>
@@ -3466,114 +3464,63 @@
           <a:noFill/>
         </p:spPr>
         <p:txBody>
-          <a:bodyPr wrap="square" lIns="0" rIns="0" tIns="0" bIns="0" anchor="t"/>
+          <a:bodyPr wrap="square" lIns="0" rIns="0" tIns="0" bIns="0" anchor="t">
+            <a:spAutoFit/>
+          </a:bodyPr>
           <a:lstStyle/>
           <a:p>
             <a:pPr algn="l">
               <a:spcAft>
-                <a:spcPts val="200"/>
-              </a:spcAft>
-            </a:pPr>
-            <a:r>
-              <a:rPr sz="1800" b="0" i="0">
-                <a:solidFill>
-                  <a:srgbClr val="E6FAFA"/>
-                </a:solidFill>
-                <a:latin typeface="Calibri"/>
-              </a:rPr>
-              <a:t>yu-ai-code-mother · 维护者/团队版</a:t>
-            </a:r>
-          </a:p>
-        </p:txBody>
-      </p:sp>
-      <p:sp>
-        <p:nvSpPr>
-          <p:cNvPr id="11" name="TextBox 10"/>
-          <p:cNvSpPr txBox="1"/>
-          <p:nvPr/>
-        </p:nvSpPr>
-        <p:spPr>
-          <a:xfrm>
-            <a:off x="749808" y="4498848"/>
-            <a:ext cx="5212080" cy="960120"/>
-          </a:xfrm>
-          <a:prstGeom prst="rect">
-            <a:avLst/>
-          </a:prstGeom>
-          <a:noFill/>
-        </p:spPr>
-        <p:txBody>
-          <a:bodyPr wrap="square" lIns="0" rIns="0" tIns="0" bIns="0" anchor="t"/>
-          <a:lstStyle/>
+                <a:spcPts val="100"/>
+              </a:spcAft>
+            </a:pPr>
+            <a:r>
+              <a:rPr sz="1500" b="0">
+                <a:solidFill>
+                  <a:srgbClr val="FFFFFF"/>
+                </a:solidFill>
+                <a:latin typeface="Calibri"/>
+              </a:rPr>
+              <a:t>生成日期：2026-06-26（北京时间）</a:t>
+            </a:r>
+          </a:p>
           <a:p>
             <a:pPr algn="l">
               <a:spcAft>
-                <a:spcPts val="200"/>
-              </a:spcAft>
-            </a:pPr>
-            <a:r>
-              <a:rPr sz="1500" b="0" i="0">
+                <a:spcPts val="100"/>
+              </a:spcAft>
+            </a:pPr>
+            <a:r>
+              <a:rPr sz="1500" b="0">
                 <a:solidFill>
                   <a:srgbClr val="FFFFFF"/>
                 </a:solidFill>
                 <a:latin typeface="Calibri"/>
               </a:rPr>
-              <a:t>生成日期：2026-06-26（北京时间）</a:t>
+              <a:t>触发方式：每日自动化任务</a:t>
             </a:r>
           </a:p>
           <a:p>
             <a:pPr algn="l">
               <a:spcAft>
-                <a:spcPts val="200"/>
-              </a:spcAft>
-            </a:pPr>
-            <a:r>
-              <a:rPr sz="1500" b="0" i="0">
+                <a:spcPts val="100"/>
+              </a:spcAft>
+            </a:pPr>
+            <a:r>
+              <a:rPr sz="1500" b="0">
                 <a:solidFill>
                   <a:srgbClr val="FFFFFF"/>
                 </a:solidFill>
                 <a:latin typeface="Calibri"/>
               </a:rPr>
-              <a:t>触发方式：每日自动化任务</a:t>
-            </a:r>
-          </a:p>
-          <a:p>
-            <a:pPr algn="l">
-              <a:spcAft>
-                <a:spcPts val="200"/>
-              </a:spcAft>
-            </a:pPr>
-            <a:r>
-              <a:rPr sz="1500" b="0" i="0">
-                <a:solidFill>
-                  <a:srgbClr val="FFFFFF"/>
-                </a:solidFill>
-                <a:latin typeface="Calibri"/>
-              </a:rPr>
-              <a:t>数据来源：README、模块目录、配置与 git</a:t>
-            </a:r>
-          </a:p>
-          <a:p>
-            <a:pPr algn="l">
-              <a:spcAft>
-                <a:spcPts val="200"/>
-              </a:spcAft>
-            </a:pPr>
-            <a:r>
-              <a:rPr sz="1500" b="0" i="0">
-                <a:solidFill>
-                  <a:srgbClr val="FFFFFF"/>
-                </a:solidFill>
-                <a:latin typeface="Calibri"/>
-              </a:rPr>
-              <a:t>提交</a:t>
-            </a:r>
-          </a:p>
-        </p:txBody>
-      </p:sp>
-      <p:sp>
-        <p:nvSpPr>
-          <p:cNvPr id="12" name="Rounded Rectangle 11"/>
+              <a:t>数据来源：README、模块目录、配置与 git 提交</a:t>
+            </a:r>
+          </a:p>
+        </p:txBody>
+      </p:sp>
+      <p:sp>
+        <p:nvSpPr>
+          <p:cNvPr id="11" name="Rounded Rectangle 10"/>
           <p:cNvSpPr/>
           <p:nvPr/>
         </p:nvSpPr>
@@ -3618,49 +3565,51 @@
       </p:sp>
       <p:sp>
         <p:nvSpPr>
+          <p:cNvPr id="12" name="TextBox 11"/>
+          <p:cNvSpPr txBox="1"/>
+          <p:nvPr/>
+        </p:nvSpPr>
+        <p:spPr>
+          <a:xfrm>
+            <a:off x="6620256" y="5376672"/>
+            <a:ext cx="1051560" cy="292608"/>
+          </a:xfrm>
+          <a:prstGeom prst="rect">
+            <a:avLst/>
+          </a:prstGeom>
+          <a:noFill/>
+        </p:spPr>
+        <p:txBody>
+          <a:bodyPr wrap="square" lIns="0" rIns="0" tIns="0" bIns="0" anchor="t">
+            <a:spAutoFit/>
+          </a:bodyPr>
+          <a:lstStyle/>
+          <a:p>
+            <a:pPr algn="ctr">
+              <a:spcAft>
+                <a:spcPts val="100"/>
+              </a:spcAft>
+            </a:pPr>
+            <a:r>
+              <a:rPr sz="2300" b="1">
+                <a:solidFill>
+                  <a:srgbClr val="FFFFFF"/>
+                </a:solidFill>
+                <a:latin typeface="Georgia"/>
+              </a:rPr>
+              <a:t>3</a:t>
+            </a:r>
+          </a:p>
+        </p:txBody>
+      </p:sp>
+      <p:sp>
+        <p:nvSpPr>
           <p:cNvPr id="13" name="TextBox 12"/>
           <p:cNvSpPr txBox="1"/>
           <p:nvPr/>
         </p:nvSpPr>
         <p:spPr>
           <a:xfrm>
-            <a:off x="6620256" y="5376672"/>
-            <a:ext cx="1051560" cy="292608"/>
-          </a:xfrm>
-          <a:prstGeom prst="rect">
-            <a:avLst/>
-          </a:prstGeom>
-          <a:noFill/>
-        </p:spPr>
-        <p:txBody>
-          <a:bodyPr wrap="square" lIns="0" rIns="0" tIns="0" bIns="0" anchor="t"/>
-          <a:lstStyle/>
-          <a:p>
-            <a:pPr algn="ctr">
-              <a:spcAft>
-                <a:spcPts val="200"/>
-              </a:spcAft>
-            </a:pPr>
-            <a:r>
-              <a:rPr sz="2300" b="1" i="0">
-                <a:solidFill>
-                  <a:srgbClr val="FFFFFF"/>
-                </a:solidFill>
-                <a:latin typeface="Georgia"/>
-              </a:rPr>
-              <a:t>3</a:t>
-            </a:r>
-          </a:p>
-        </p:txBody>
-      </p:sp>
-      <p:sp>
-        <p:nvSpPr>
-          <p:cNvPr id="14" name="TextBox 13"/>
-          <p:cNvSpPr txBox="1"/>
-          <p:nvPr/>
-        </p:nvSpPr>
-        <p:spPr>
-          <a:xfrm>
             <a:off x="6601968" y="5715000"/>
             <a:ext cx="1078992" cy="164592"/>
           </a:xfrm>
@@ -3670,16 +3619,18 @@
           <a:noFill/>
         </p:spPr>
         <p:txBody>
-          <a:bodyPr wrap="square" lIns="0" rIns="0" tIns="0" bIns="0" anchor="t"/>
+          <a:bodyPr wrap="square" lIns="0" rIns="0" tIns="0" bIns="0" anchor="t">
+            <a:spAutoFit/>
+          </a:bodyPr>
           <a:lstStyle/>
           <a:p>
             <a:pPr algn="ctr">
               <a:spcAft>
-                <a:spcPts val="200"/>
-              </a:spcAft>
-            </a:pPr>
-            <a:r>
-              <a:rPr sz="880" b="0" i="0">
+                <a:spcPts val="100"/>
+              </a:spcAft>
+            </a:pPr>
+            <a:r>
+              <a:rPr sz="880" b="0">
                 <a:solidFill>
                   <a:srgbClr val="FFFFFF"/>
                 </a:solidFill>
@@ -3692,7 +3643,7 @@
       </p:sp>
       <p:sp>
         <p:nvSpPr>
-          <p:cNvPr id="15" name="Rounded Rectangle 14"/>
+          <p:cNvPr id="14" name="Rounded Rectangle 13"/>
           <p:cNvSpPr/>
           <p:nvPr/>
         </p:nvSpPr>
@@ -3737,49 +3688,51 @@
       </p:sp>
       <p:sp>
         <p:nvSpPr>
+          <p:cNvPr id="15" name="TextBox 14"/>
+          <p:cNvSpPr txBox="1"/>
+          <p:nvPr/>
+        </p:nvSpPr>
+        <p:spPr>
+          <a:xfrm>
+            <a:off x="8220456" y="5376672"/>
+            <a:ext cx="1051560" cy="292608"/>
+          </a:xfrm>
+          <a:prstGeom prst="rect">
+            <a:avLst/>
+          </a:prstGeom>
+          <a:noFill/>
+        </p:spPr>
+        <p:txBody>
+          <a:bodyPr wrap="square" lIns="0" rIns="0" tIns="0" bIns="0" anchor="t">
+            <a:spAutoFit/>
+          </a:bodyPr>
+          <a:lstStyle/>
+          <a:p>
+            <a:pPr algn="ctr">
+              <a:spcAft>
+                <a:spcPts val="100"/>
+              </a:spcAft>
+            </a:pPr>
+            <a:r>
+              <a:rPr sz="2300" b="1">
+                <a:solidFill>
+                  <a:srgbClr val="FFFFFF"/>
+                </a:solidFill>
+                <a:latin typeface="Georgia"/>
+              </a:rPr>
+              <a:t>7</a:t>
+            </a:r>
+          </a:p>
+        </p:txBody>
+      </p:sp>
+      <p:sp>
+        <p:nvSpPr>
           <p:cNvPr id="16" name="TextBox 15"/>
           <p:cNvSpPr txBox="1"/>
           <p:nvPr/>
         </p:nvSpPr>
         <p:spPr>
           <a:xfrm>
-            <a:off x="8220456" y="5376672"/>
-            <a:ext cx="1051560" cy="292608"/>
-          </a:xfrm>
-          <a:prstGeom prst="rect">
-            <a:avLst/>
-          </a:prstGeom>
-          <a:noFill/>
-        </p:spPr>
-        <p:txBody>
-          <a:bodyPr wrap="square" lIns="0" rIns="0" tIns="0" bIns="0" anchor="t"/>
-          <a:lstStyle/>
-          <a:p>
-            <a:pPr algn="ctr">
-              <a:spcAft>
-                <a:spcPts val="200"/>
-              </a:spcAft>
-            </a:pPr>
-            <a:r>
-              <a:rPr sz="2300" b="1" i="0">
-                <a:solidFill>
-                  <a:srgbClr val="FFFFFF"/>
-                </a:solidFill>
-                <a:latin typeface="Georgia"/>
-              </a:rPr>
-              <a:t>7</a:t>
-            </a:r>
-          </a:p>
-        </p:txBody>
-      </p:sp>
-      <p:sp>
-        <p:nvSpPr>
-          <p:cNvPr id="17" name="TextBox 16"/>
-          <p:cNvSpPr txBox="1"/>
-          <p:nvPr/>
-        </p:nvSpPr>
-        <p:spPr>
-          <a:xfrm>
             <a:off x="8202167" y="5715000"/>
             <a:ext cx="1078992" cy="164592"/>
           </a:xfrm>
@@ -3789,16 +3742,18 @@
           <a:noFill/>
         </p:spPr>
         <p:txBody>
-          <a:bodyPr wrap="square" lIns="0" rIns="0" tIns="0" bIns="0" anchor="t"/>
+          <a:bodyPr wrap="square" lIns="0" rIns="0" tIns="0" bIns="0" anchor="t">
+            <a:spAutoFit/>
+          </a:bodyPr>
           <a:lstStyle/>
           <a:p>
             <a:pPr algn="ctr">
               <a:spcAft>
-                <a:spcPts val="200"/>
-              </a:spcAft>
-            </a:pPr>
-            <a:r>
-              <a:rPr sz="880" b="0" i="0">
+                <a:spcPts val="100"/>
+              </a:spcAft>
+            </a:pPr>
+            <a:r>
+              <a:rPr sz="880" b="0">
                 <a:solidFill>
                   <a:srgbClr val="FFFFFF"/>
                 </a:solidFill>
@@ -3811,7 +3766,7 @@
       </p:sp>
       <p:sp>
         <p:nvSpPr>
-          <p:cNvPr id="18" name="Rounded Rectangle 17"/>
+          <p:cNvPr id="17" name="Rounded Rectangle 16"/>
           <p:cNvSpPr/>
           <p:nvPr/>
         </p:nvSpPr>
@@ -3856,49 +3811,51 @@
       </p:sp>
       <p:sp>
         <p:nvSpPr>
+          <p:cNvPr id="18" name="TextBox 17"/>
+          <p:cNvSpPr txBox="1"/>
+          <p:nvPr/>
+        </p:nvSpPr>
+        <p:spPr>
+          <a:xfrm>
+            <a:off x="9820656" y="5376672"/>
+            <a:ext cx="1051560" cy="292608"/>
+          </a:xfrm>
+          <a:prstGeom prst="rect">
+            <a:avLst/>
+          </a:prstGeom>
+          <a:noFill/>
+        </p:spPr>
+        <p:txBody>
+          <a:bodyPr wrap="square" lIns="0" rIns="0" tIns="0" bIns="0" anchor="t">
+            <a:spAutoFit/>
+          </a:bodyPr>
+          <a:lstStyle/>
+          <a:p>
+            <a:pPr algn="ctr">
+              <a:spcAft>
+                <a:spcPts val="100"/>
+              </a:spcAft>
+            </a:pPr>
+            <a:r>
+              <a:rPr sz="2300" b="1">
+                <a:solidFill>
+                  <a:srgbClr val="FFFFFF"/>
+                </a:solidFill>
+                <a:latin typeface="Georgia"/>
+              </a:rPr>
+              <a:t>15</a:t>
+            </a:r>
+          </a:p>
+        </p:txBody>
+      </p:sp>
+      <p:sp>
+        <p:nvSpPr>
           <p:cNvPr id="19" name="TextBox 18"/>
           <p:cNvSpPr txBox="1"/>
           <p:nvPr/>
         </p:nvSpPr>
         <p:spPr>
           <a:xfrm>
-            <a:off x="9820656" y="5376672"/>
-            <a:ext cx="1051560" cy="292608"/>
-          </a:xfrm>
-          <a:prstGeom prst="rect">
-            <a:avLst/>
-          </a:prstGeom>
-          <a:noFill/>
-        </p:spPr>
-        <p:txBody>
-          <a:bodyPr wrap="square" lIns="0" rIns="0" tIns="0" bIns="0" anchor="t"/>
-          <a:lstStyle/>
-          <a:p>
-            <a:pPr algn="ctr">
-              <a:spcAft>
-                <a:spcPts val="200"/>
-              </a:spcAft>
-            </a:pPr>
-            <a:r>
-              <a:rPr sz="2300" b="1" i="0">
-                <a:solidFill>
-                  <a:srgbClr val="FFFFFF"/>
-                </a:solidFill>
-                <a:latin typeface="Georgia"/>
-              </a:rPr>
-              <a:t>15</a:t>
-            </a:r>
-          </a:p>
-        </p:txBody>
-      </p:sp>
-      <p:sp>
-        <p:nvSpPr>
-          <p:cNvPr id="20" name="TextBox 19"/>
-          <p:cNvSpPr txBox="1"/>
-          <p:nvPr/>
-        </p:nvSpPr>
-        <p:spPr>
-          <a:xfrm>
             <a:off x="9802367" y="5715000"/>
             <a:ext cx="1078992" cy="164592"/>
           </a:xfrm>
@@ -3908,16 +3865,18 @@
           <a:noFill/>
         </p:spPr>
         <p:txBody>
-          <a:bodyPr wrap="square" lIns="0" rIns="0" tIns="0" bIns="0" anchor="t"/>
+          <a:bodyPr wrap="square" lIns="0" rIns="0" tIns="0" bIns="0" anchor="t">
+            <a:spAutoFit/>
+          </a:bodyPr>
           <a:lstStyle/>
           <a:p>
             <a:pPr algn="ctr">
               <a:spcAft>
-                <a:spcPts val="200"/>
-              </a:spcAft>
-            </a:pPr>
-            <a:r>
-              <a:rPr sz="880" b="0" i="0">
+                <a:spcPts val="100"/>
+              </a:spcAft>
+            </a:pPr>
+            <a:r>
+              <a:rPr sz="880" b="0">
                 <a:solidFill>
                   <a:srgbClr val="FFFFFF"/>
                 </a:solidFill>
@@ -4142,51 +4101,6 @@
         </p:nvSpPr>
         <p:spPr>
           <a:xfrm>
-            <a:off x="502920" y="5074920"/>
-            <a:ext cx="1234440" cy="1234440"/>
-          </a:xfrm>
-          <a:prstGeom prst="ellipse">
-            <a:avLst/>
-          </a:prstGeom>
-          <a:solidFill>
-            <a:srgbClr val="02C39A"/>
-          </a:solidFill>
-          <a:ln>
-            <a:solidFill>
-              <a:srgbClr val="FFFFFF"/>
-            </a:solidFill>
-          </a:ln>
-        </p:spPr>
-        <p:style>
-          <a:lnRef idx="1">
-            <a:schemeClr val="accent1"/>
-          </a:lnRef>
-          <a:fillRef idx="3">
-            <a:schemeClr val="accent1"/>
-          </a:fillRef>
-          <a:effectRef idx="2">
-            <a:schemeClr val="accent1"/>
-          </a:effectRef>
-          <a:fontRef idx="minor">
-            <a:schemeClr val="lt1"/>
-          </a:fontRef>
-        </p:style>
-        <p:txBody>
-          <a:bodyPr rtlCol="0" anchor="ctr"/>
-          <a:lstStyle/>
-          <a:p>
-            <a:pPr algn="ctr"/>
-          </a:p>
-        </p:txBody>
-      </p:sp>
-      <p:sp>
-        <p:nvSpPr>
-          <p:cNvPr id="7" name="Oval 6"/>
-          <p:cNvSpPr/>
-          <p:nvPr/>
-        </p:nvSpPr>
-        <p:spPr>
-          <a:xfrm>
             <a:off x="9966960" y="411480"/>
             <a:ext cx="1508760" cy="1508760"/>
           </a:xfrm>
@@ -4226,49 +4140,51 @@
       </p:sp>
       <p:sp>
         <p:nvSpPr>
+          <p:cNvPr id="7" name="TextBox 6"/>
+          <p:cNvSpPr txBox="1"/>
+          <p:nvPr/>
+        </p:nvSpPr>
+        <p:spPr>
+          <a:xfrm>
+            <a:off x="713232" y="658368"/>
+            <a:ext cx="2926080" cy="384048"/>
+          </a:xfrm>
+          <a:prstGeom prst="rect">
+            <a:avLst/>
+          </a:prstGeom>
+          <a:noFill/>
+        </p:spPr>
+        <p:txBody>
+          <a:bodyPr wrap="square" lIns="0" rIns="0" tIns="0" bIns="0" anchor="t">
+            <a:spAutoFit/>
+          </a:bodyPr>
+          <a:lstStyle/>
+          <a:p>
+            <a:pPr algn="l">
+              <a:spcAft>
+                <a:spcPts val="100"/>
+              </a:spcAft>
+            </a:pPr>
+            <a:r>
+              <a:rPr sz="2100" b="1">
+                <a:solidFill>
+                  <a:srgbClr val="B7F4EF"/>
+                </a:solidFill>
+                <a:latin typeface="Calibri"/>
+              </a:rPr>
+              <a:t>今日结论</a:t>
+            </a:r>
+          </a:p>
+        </p:txBody>
+      </p:sp>
+      <p:sp>
+        <p:nvSpPr>
           <p:cNvPr id="8" name="TextBox 7"/>
           <p:cNvSpPr txBox="1"/>
           <p:nvPr/>
         </p:nvSpPr>
         <p:spPr>
           <a:xfrm>
-            <a:off x="713232" y="658368"/>
-            <a:ext cx="2926080" cy="384048"/>
-          </a:xfrm>
-          <a:prstGeom prst="rect">
-            <a:avLst/>
-          </a:prstGeom>
-          <a:noFill/>
-        </p:spPr>
-        <p:txBody>
-          <a:bodyPr wrap="square" lIns="0" rIns="0" tIns="0" bIns="0" anchor="t"/>
-          <a:lstStyle/>
-          <a:p>
-            <a:pPr algn="l">
-              <a:spcAft>
-                <a:spcPts val="200"/>
-              </a:spcAft>
-            </a:pPr>
-            <a:r>
-              <a:rPr sz="2100" b="1" i="0">
-                <a:solidFill>
-                  <a:srgbClr val="B7F4EF"/>
-                </a:solidFill>
-                <a:latin typeface="Calibri"/>
-              </a:rPr>
-              <a:t>今日结论</a:t>
-            </a:r>
-          </a:p>
-        </p:txBody>
-      </p:sp>
-      <p:sp>
-        <p:nvSpPr>
-          <p:cNvPr id="9" name="TextBox 8"/>
-          <p:cNvSpPr txBox="1"/>
-          <p:nvPr/>
-        </p:nvSpPr>
-        <p:spPr>
-          <a:xfrm>
             <a:off x="694944" y="1115568"/>
             <a:ext cx="8961120" cy="960120"/>
           </a:xfrm>
@@ -4278,16 +4194,18 @@
           <a:noFill/>
         </p:spPr>
         <p:txBody>
-          <a:bodyPr wrap="square" lIns="0" rIns="0" tIns="0" bIns="0" anchor="t"/>
+          <a:bodyPr wrap="square" lIns="0" rIns="0" tIns="0" bIns="0" anchor="t">
+            <a:spAutoFit/>
+          </a:bodyPr>
           <a:lstStyle/>
           <a:p>
             <a:pPr algn="l">
               <a:spcAft>
-                <a:spcPts val="200"/>
-              </a:spcAft>
-            </a:pPr>
-            <a:r>
-              <a:rPr sz="3400" b="1" i="0">
+                <a:spcPts val="100"/>
+              </a:spcAft>
+            </a:pPr>
+            <a:r>
+              <a:rPr sz="3400" b="1">
                 <a:solidFill>
                   <a:srgbClr val="FFFFFF"/>
                 </a:solidFill>
@@ -4299,11 +4217,11 @@
           <a:p>
             <a:pPr algn="l">
               <a:spcAft>
-                <a:spcPts val="200"/>
-              </a:spcAft>
-            </a:pPr>
-            <a:r>
-              <a:rPr sz="3400" b="1" i="0">
+                <a:spcPts val="100"/>
+              </a:spcAft>
+            </a:pPr>
+            <a:r>
+              <a:rPr sz="3400" b="1">
                 <a:solidFill>
                   <a:srgbClr val="FFFFFF"/>
                 </a:solidFill>
@@ -4316,7 +4234,7 @@
       </p:sp>
       <p:sp>
         <p:nvSpPr>
-          <p:cNvPr id="10" name="Rounded Rectangle 9"/>
+          <p:cNvPr id="9" name="Rounded Rectangle 8"/>
           <p:cNvSpPr/>
           <p:nvPr/>
         </p:nvSpPr>
@@ -4361,49 +4279,51 @@
       </p:sp>
       <p:sp>
         <p:nvSpPr>
+          <p:cNvPr id="10" name="TextBox 9"/>
+          <p:cNvSpPr txBox="1"/>
+          <p:nvPr/>
+        </p:nvSpPr>
+        <p:spPr>
+          <a:xfrm>
+            <a:off x="1005840" y="3127248"/>
+            <a:ext cx="2606040" cy="228600"/>
+          </a:xfrm>
+          <a:prstGeom prst="rect">
+            <a:avLst/>
+          </a:prstGeom>
+          <a:noFill/>
+        </p:spPr>
+        <p:txBody>
+          <a:bodyPr wrap="square" lIns="0" rIns="0" tIns="0" bIns="0" anchor="t">
+            <a:spAutoFit/>
+          </a:bodyPr>
+          <a:lstStyle/>
+          <a:p>
+            <a:pPr algn="l">
+              <a:spcAft>
+                <a:spcPts val="100"/>
+              </a:spcAft>
+            </a:pPr>
+            <a:r>
+              <a:rPr sz="1700" b="1">
+                <a:solidFill>
+                  <a:srgbClr val="FFFFFF"/>
+                </a:solidFill>
+                <a:latin typeface="Calibri"/>
+              </a:rPr>
+              <a:t>产品能力</a:t>
+            </a:r>
+          </a:p>
+        </p:txBody>
+      </p:sp>
+      <p:sp>
+        <p:nvSpPr>
           <p:cNvPr id="11" name="TextBox 10"/>
           <p:cNvSpPr txBox="1"/>
           <p:nvPr/>
         </p:nvSpPr>
         <p:spPr>
           <a:xfrm>
-            <a:off x="1005840" y="3127248"/>
-            <a:ext cx="2606040" cy="228600"/>
-          </a:xfrm>
-          <a:prstGeom prst="rect">
-            <a:avLst/>
-          </a:prstGeom>
-          <a:noFill/>
-        </p:spPr>
-        <p:txBody>
-          <a:bodyPr wrap="square" lIns="0" rIns="0" tIns="0" bIns="0" anchor="t"/>
-          <a:lstStyle/>
-          <a:p>
-            <a:pPr algn="l">
-              <a:spcAft>
-                <a:spcPts val="200"/>
-              </a:spcAft>
-            </a:pPr>
-            <a:r>
-              <a:rPr sz="1700" b="1" i="0">
-                <a:solidFill>
-                  <a:srgbClr val="FFFFFF"/>
-                </a:solidFill>
-                <a:latin typeface="Calibri"/>
-              </a:rPr>
-              <a:t>产品能力</a:t>
-            </a:r>
-          </a:p>
-        </p:txBody>
-      </p:sp>
-      <p:sp>
-        <p:nvSpPr>
-          <p:cNvPr id="12" name="TextBox 11"/>
-          <p:cNvSpPr txBox="1"/>
-          <p:nvPr/>
-        </p:nvSpPr>
-        <p:spPr>
-          <a:xfrm>
             <a:off x="1005840" y="3529584"/>
             <a:ext cx="2578608" cy="548640"/>
           </a:xfrm>
@@ -4413,61 +4333,63 @@
           <a:noFill/>
         </p:spPr>
         <p:txBody>
-          <a:bodyPr wrap="square" lIns="0" rIns="0" tIns="0" bIns="0" anchor="t"/>
+          <a:bodyPr wrap="square" lIns="0" rIns="0" tIns="0" bIns="0" anchor="t">
+            <a:spAutoFit/>
+          </a:bodyPr>
           <a:lstStyle/>
           <a:p>
             <a:pPr algn="l">
               <a:spcAft>
-                <a:spcPts val="200"/>
-              </a:spcAft>
-            </a:pPr>
-            <a:r>
-              <a:rPr sz="1180" b="0" i="0">
+                <a:spcPts val="100"/>
+              </a:spcAft>
+            </a:pPr>
+            <a:r>
+              <a:rPr sz="1180" b="0">
                 <a:solidFill>
                   <a:srgbClr val="E6FAFA"/>
                 </a:solidFill>
                 <a:latin typeface="Calibri"/>
               </a:rPr>
-              <a:t>生成、预览、部署、管理链路</a:t>
+              <a:t>生成、预览、部署、管理链路完整</a:t>
             </a:r>
           </a:p>
           <a:p>
             <a:pPr algn="l">
               <a:spcAft>
-                <a:spcPts val="200"/>
-              </a:spcAft>
-            </a:pPr>
-            <a:r>
-              <a:rPr sz="1180" b="0" i="0">
+                <a:spcPts val="100"/>
+              </a:spcAft>
+            </a:pPr>
+            <a:r>
+              <a:rPr sz="1180" b="0">
                 <a:solidFill>
                   <a:srgbClr val="E6FAFA"/>
                 </a:solidFill>
                 <a:latin typeface="Calibri"/>
               </a:rPr>
-              <a:t>完整，适合继续围绕稳定性与</a:t>
+              <a:t>，适合继续围绕稳定性与体验打磨</a:t>
             </a:r>
           </a:p>
           <a:p>
             <a:pPr algn="l">
               <a:spcAft>
-                <a:spcPts val="200"/>
-              </a:spcAft>
-            </a:pPr>
-            <a:r>
-              <a:rPr sz="1180" b="0" i="0">
+                <a:spcPts val="100"/>
+              </a:spcAft>
+            </a:pPr>
+            <a:r>
+              <a:rPr sz="1180" b="0">
                 <a:solidFill>
                   <a:srgbClr val="E6FAFA"/>
                 </a:solidFill>
                 <a:latin typeface="Calibri"/>
               </a:rPr>
-              <a:t>体验打磨。</a:t>
-            </a:r>
-          </a:p>
-        </p:txBody>
-      </p:sp>
-      <p:sp>
-        <p:nvSpPr>
-          <p:cNvPr id="13" name="Rounded Rectangle 12"/>
+              <a:t>。</a:t>
+            </a:r>
+          </a:p>
+        </p:txBody>
+      </p:sp>
+      <p:sp>
+        <p:nvSpPr>
+          <p:cNvPr id="12" name="Rounded Rectangle 11"/>
           <p:cNvSpPr/>
           <p:nvPr/>
         </p:nvSpPr>
@@ -4512,49 +4434,51 @@
       </p:sp>
       <p:sp>
         <p:nvSpPr>
+          <p:cNvPr id="13" name="TextBox 12"/>
+          <p:cNvSpPr txBox="1"/>
+          <p:nvPr/>
+        </p:nvSpPr>
+        <p:spPr>
+          <a:xfrm>
+            <a:off x="4709160" y="3127248"/>
+            <a:ext cx="2606040" cy="228600"/>
+          </a:xfrm>
+          <a:prstGeom prst="rect">
+            <a:avLst/>
+          </a:prstGeom>
+          <a:noFill/>
+        </p:spPr>
+        <p:txBody>
+          <a:bodyPr wrap="square" lIns="0" rIns="0" tIns="0" bIns="0" anchor="t">
+            <a:spAutoFit/>
+          </a:bodyPr>
+          <a:lstStyle/>
+          <a:p>
+            <a:pPr algn="l">
+              <a:spcAft>
+                <a:spcPts val="100"/>
+              </a:spcAft>
+            </a:pPr>
+            <a:r>
+              <a:rPr sz="1700" b="1">
+                <a:solidFill>
+                  <a:srgbClr val="FFFFFF"/>
+                </a:solidFill>
+                <a:latin typeface="Calibri"/>
+              </a:rPr>
+              <a:t>近期进展</a:t>
+            </a:r>
+          </a:p>
+        </p:txBody>
+      </p:sp>
+      <p:sp>
+        <p:nvSpPr>
           <p:cNvPr id="14" name="TextBox 13"/>
           <p:cNvSpPr txBox="1"/>
           <p:nvPr/>
         </p:nvSpPr>
         <p:spPr>
           <a:xfrm>
-            <a:off x="4709160" y="3127248"/>
-            <a:ext cx="2606040" cy="228600"/>
-          </a:xfrm>
-          <a:prstGeom prst="rect">
-            <a:avLst/>
-          </a:prstGeom>
-          <a:noFill/>
-        </p:spPr>
-        <p:txBody>
-          <a:bodyPr wrap="square" lIns="0" rIns="0" tIns="0" bIns="0" anchor="t"/>
-          <a:lstStyle/>
-          <a:p>
-            <a:pPr algn="l">
-              <a:spcAft>
-                <a:spcPts val="200"/>
-              </a:spcAft>
-            </a:pPr>
-            <a:r>
-              <a:rPr sz="1700" b="1" i="0">
-                <a:solidFill>
-                  <a:srgbClr val="FFFFFF"/>
-                </a:solidFill>
-                <a:latin typeface="Calibri"/>
-              </a:rPr>
-              <a:t>近期进展</a:t>
-            </a:r>
-          </a:p>
-        </p:txBody>
-      </p:sp>
-      <p:sp>
-        <p:nvSpPr>
-          <p:cNvPr id="15" name="TextBox 14"/>
-          <p:cNvSpPr txBox="1"/>
-          <p:nvPr/>
-        </p:nvSpPr>
-        <p:spPr>
-          <a:xfrm>
             <a:off x="4709160" y="3529584"/>
             <a:ext cx="2578608" cy="548640"/>
           </a:xfrm>
@@ -4564,61 +4488,47 @@
           <a:noFill/>
         </p:spPr>
         <p:txBody>
-          <a:bodyPr wrap="square" lIns="0" rIns="0" tIns="0" bIns="0" anchor="t"/>
+          <a:bodyPr wrap="square" lIns="0" rIns="0" tIns="0" bIns="0" anchor="t">
+            <a:spAutoFit/>
+          </a:bodyPr>
           <a:lstStyle/>
           <a:p>
             <a:pPr algn="l">
               <a:spcAft>
-                <a:spcPts val="200"/>
-              </a:spcAft>
-            </a:pPr>
-            <a:r>
-              <a:rPr sz="1180" b="0" i="0">
+                <a:spcPts val="100"/>
+              </a:spcAft>
+            </a:pPr>
+            <a:r>
+              <a:rPr sz="1180" b="0">
                 <a:solidFill>
                   <a:srgbClr val="E6FAFA"/>
                 </a:solidFill>
                 <a:latin typeface="Calibri"/>
               </a:rPr>
-              <a:t>近 7 天无提交；最近集中</a:t>
+              <a:t>近 7 天无提交；最近集中改造</a:t>
             </a:r>
           </a:p>
           <a:p>
             <a:pPr algn="l">
               <a:spcAft>
-                <a:spcPts val="200"/>
-              </a:spcAft>
-            </a:pPr>
-            <a:r>
-              <a:rPr sz="1180" b="0" i="0">
+                <a:spcPts val="100"/>
+              </a:spcAft>
+            </a:pPr>
+            <a:r>
+              <a:rPr sz="1180" b="0">
                 <a:solidFill>
                   <a:srgbClr val="E6FAFA"/>
                 </a:solidFill>
                 <a:latin typeface="Calibri"/>
               </a:rPr>
-              <a:t>改造为微服务拆分与可观测性</a:t>
-            </a:r>
-          </a:p>
-          <a:p>
-            <a:pPr algn="l">
-              <a:spcAft>
-                <a:spcPts val="200"/>
-              </a:spcAft>
-            </a:pPr>
-            <a:r>
-              <a:rPr sz="1180" b="0" i="0">
-                <a:solidFill>
-                  <a:srgbClr val="E6FAFA"/>
-                </a:solidFill>
-                <a:latin typeface="Calibri"/>
-              </a:rPr>
-              <a:t>增强。</a:t>
-            </a:r>
-          </a:p>
-        </p:txBody>
-      </p:sp>
-      <p:sp>
-        <p:nvSpPr>
-          <p:cNvPr id="16" name="Rounded Rectangle 15"/>
+              <a:t>为微服务拆分与可观测性增强。</a:t>
+            </a:r>
+          </a:p>
+        </p:txBody>
+      </p:sp>
+      <p:sp>
+        <p:nvSpPr>
+          <p:cNvPr id="15" name="Rounded Rectangle 14"/>
           <p:cNvSpPr/>
           <p:nvPr/>
         </p:nvSpPr>
@@ -4663,14 +4573,53 @@
       </p:sp>
       <p:sp>
         <p:nvSpPr>
+          <p:cNvPr id="16" name="TextBox 15"/>
+          <p:cNvSpPr txBox="1"/>
+          <p:nvPr/>
+        </p:nvSpPr>
+        <p:spPr>
+          <a:xfrm>
+            <a:off x="8412480" y="3127248"/>
+            <a:ext cx="2606040" cy="228600"/>
+          </a:xfrm>
+          <a:prstGeom prst="rect">
+            <a:avLst/>
+          </a:prstGeom>
+          <a:noFill/>
+        </p:spPr>
+        <p:txBody>
+          <a:bodyPr wrap="square" lIns="0" rIns="0" tIns="0" bIns="0" anchor="t">
+            <a:spAutoFit/>
+          </a:bodyPr>
+          <a:lstStyle/>
+          <a:p>
+            <a:pPr algn="l">
+              <a:spcAft>
+                <a:spcPts val="100"/>
+              </a:spcAft>
+            </a:pPr>
+            <a:r>
+              <a:rPr sz="1700" b="1">
+                <a:solidFill>
+                  <a:srgbClr val="FFFFFF"/>
+                </a:solidFill>
+                <a:latin typeface="Calibri"/>
+              </a:rPr>
+              <a:t>行动焦点</a:t>
+            </a:r>
+          </a:p>
+        </p:txBody>
+      </p:sp>
+      <p:sp>
+        <p:nvSpPr>
           <p:cNvPr id="17" name="TextBox 16"/>
           <p:cNvSpPr txBox="1"/>
           <p:nvPr/>
         </p:nvSpPr>
         <p:spPr>
           <a:xfrm>
-            <a:off x="8412480" y="3127248"/>
-            <a:ext cx="2606040" cy="228600"/>
+            <a:off x="8412480" y="3529584"/>
+            <a:ext cx="2578608" cy="548640"/>
           </a:xfrm>
           <a:prstGeom prst="rect">
             <a:avLst/>
@@ -4678,22 +4627,40 @@
           <a:noFill/>
         </p:spPr>
         <p:txBody>
-          <a:bodyPr wrap="square" lIns="0" rIns="0" tIns="0" bIns="0" anchor="t"/>
+          <a:bodyPr wrap="square" lIns="0" rIns="0" tIns="0" bIns="0" anchor="t">
+            <a:spAutoFit/>
+          </a:bodyPr>
           <a:lstStyle/>
           <a:p>
             <a:pPr algn="l">
               <a:spcAft>
-                <a:spcPts val="200"/>
-              </a:spcAft>
-            </a:pPr>
-            <a:r>
-              <a:rPr sz="1700" b="1" i="0">
-                <a:solidFill>
-                  <a:srgbClr val="FFFFFF"/>
-                </a:solidFill>
-                <a:latin typeface="Calibri"/>
-              </a:rPr>
-              <a:t>行动焦点</a:t>
+                <a:spcPts val="100"/>
+              </a:spcAft>
+            </a:pPr>
+            <a:r>
+              <a:rPr sz="1180" b="0">
+                <a:solidFill>
+                  <a:srgbClr val="E6FAFA"/>
+                </a:solidFill>
+                <a:latin typeface="Calibri"/>
+              </a:rPr>
+              <a:t>补齐配置治理、CI 门禁、主链</a:t>
+            </a:r>
+          </a:p>
+          <a:p>
+            <a:pPr algn="l">
+              <a:spcAft>
+                <a:spcPts val="100"/>
+              </a:spcAft>
+            </a:pPr>
+            <a:r>
+              <a:rPr sz="1180" b="0">
+                <a:solidFill>
+                  <a:srgbClr val="E6FAFA"/>
+                </a:solidFill>
+                <a:latin typeface="Calibri"/>
+              </a:rPr>
+              <a:t>路冒烟和运行态监控。</a:t>
             </a:r>
           </a:p>
         </p:txBody>
@@ -4706,8 +4673,8 @@
         </p:nvSpPr>
         <p:spPr>
           <a:xfrm>
-            <a:off x="8412480" y="3529584"/>
-            <a:ext cx="2578608" cy="548640"/>
+            <a:off x="749808" y="5897880"/>
+            <a:ext cx="7498079" cy="256032"/>
           </a:xfrm>
           <a:prstGeom prst="rect">
             <a:avLst/>
@@ -4715,38 +4682,24 @@
           <a:noFill/>
         </p:spPr>
         <p:txBody>
-          <a:bodyPr wrap="square" lIns="0" rIns="0" tIns="0" bIns="0" anchor="t"/>
+          <a:bodyPr wrap="square" lIns="0" rIns="0" tIns="0" bIns="0" anchor="t">
+            <a:spAutoFit/>
+          </a:bodyPr>
           <a:lstStyle/>
           <a:p>
             <a:pPr algn="l">
               <a:spcAft>
-                <a:spcPts val="200"/>
-              </a:spcAft>
-            </a:pPr>
-            <a:r>
-              <a:rPr sz="1180" b="0" i="0">
+                <a:spcPts val="100"/>
+              </a:spcAft>
+            </a:pPr>
+            <a:r>
+              <a:rPr sz="1250" b="0">
                 <a:solidFill>
                   <a:srgbClr val="E6FAFA"/>
                 </a:solidFill>
                 <a:latin typeface="Calibri"/>
               </a:rPr>
-              <a:t>补齐配置治理、CI 门禁、</a:t>
-            </a:r>
-          </a:p>
-          <a:p>
-            <a:pPr algn="l">
-              <a:spcAft>
-                <a:spcPts val="200"/>
-              </a:spcAft>
-            </a:pPr>
-            <a:r>
-              <a:rPr sz="1180" b="0" i="0">
-                <a:solidFill>
-                  <a:srgbClr val="E6FAFA"/>
-                </a:solidFill>
-                <a:latin typeface="Calibri"/>
-              </a:rPr>
-              <a:t>主链路冒烟和运行态监控。</a:t>
+              <a:t>PPT 路径：docs/reports/project-status-2026-06-26.pptx</a:t>
             </a:r>
           </a:p>
         </p:txBody>
@@ -4759,43 +4712,6 @@
         </p:nvSpPr>
         <p:spPr>
           <a:xfrm>
-            <a:off x="749808" y="6062472"/>
-            <a:ext cx="6400800" cy="256032"/>
-          </a:xfrm>
-          <a:prstGeom prst="rect">
-            <a:avLst/>
-          </a:prstGeom>
-          <a:noFill/>
-        </p:spPr>
-        <p:txBody>
-          <a:bodyPr wrap="square" lIns="0" rIns="0" tIns="0" bIns="0" anchor="t"/>
-          <a:lstStyle/>
-          <a:p>
-            <a:pPr algn="l">
-              <a:spcAft>
-                <a:spcPts val="200"/>
-              </a:spcAft>
-            </a:pPr>
-            <a:r>
-              <a:rPr sz="1250" b="0" i="0">
-                <a:solidFill>
-                  <a:srgbClr val="E6FAFA"/>
-                </a:solidFill>
-                <a:latin typeface="Calibri"/>
-              </a:rPr>
-              <a:t>PPT 路径：docs/reports/project-status-2026-06-26.pptx</a:t>
-            </a:r>
-          </a:p>
-        </p:txBody>
-      </p:sp>
-      <p:sp>
-        <p:nvSpPr>
-          <p:cNvPr id="20" name="TextBox 19"/>
-          <p:cNvSpPr txBox="1"/>
-          <p:nvPr/>
-        </p:nvSpPr>
-        <p:spPr>
-          <a:xfrm>
             <a:off x="9217152" y="6062472"/>
             <a:ext cx="2240280" cy="256032"/>
           </a:xfrm>
@@ -4805,16 +4721,18 @@
           <a:noFill/>
         </p:spPr>
         <p:txBody>
-          <a:bodyPr wrap="square" lIns="0" rIns="0" tIns="0" bIns="0" anchor="t"/>
+          <a:bodyPr wrap="square" lIns="0" rIns="0" tIns="0" bIns="0" anchor="t">
+            <a:spAutoFit/>
+          </a:bodyPr>
           <a:lstStyle/>
           <a:p>
             <a:pPr algn="r">
               <a:spcAft>
-                <a:spcPts val="200"/>
-              </a:spcAft>
-            </a:pPr>
-            <a:r>
-              <a:rPr sz="1250" b="1" i="0">
+                <a:spcPts val="100"/>
+              </a:spcAft>
+            </a:pPr>
+            <a:r>
+              <a:rPr sz="1250" b="1">
                 <a:solidFill>
                   <a:srgbClr val="B7F4EF"/>
                 </a:solidFill>
@@ -4913,16 +4831,18 @@
           <a:noFill/>
         </p:spPr>
         <p:txBody>
-          <a:bodyPr wrap="square" lIns="0" rIns="0" tIns="0" bIns="0" anchor="ctr"/>
+          <a:bodyPr wrap="square" lIns="0" rIns="0" tIns="0" bIns="0" anchor="ctr">
+            <a:spAutoFit/>
+          </a:bodyPr>
           <a:lstStyle/>
           <a:p>
             <a:pPr algn="ctr">
               <a:spcAft>
-                <a:spcPts val="200"/>
-              </a:spcAft>
-            </a:pPr>
-            <a:r>
-              <a:rPr sz="900" b="1" i="0">
+                <a:spcPts val="100"/>
+              </a:spcAft>
+            </a:pPr>
+            <a:r>
+              <a:rPr sz="900" b="1">
                 <a:solidFill>
                   <a:srgbClr val="FFFFFF"/>
                 </a:solidFill>
@@ -4950,16 +4870,18 @@
           <a:noFill/>
         </p:spPr>
         <p:txBody>
-          <a:bodyPr wrap="square" lIns="0" rIns="0" tIns="0" bIns="0" anchor="t"/>
+          <a:bodyPr wrap="square" lIns="0" rIns="0" tIns="0" bIns="0" anchor="t">
+            <a:spAutoFit/>
+          </a:bodyPr>
           <a:lstStyle/>
           <a:p>
             <a:pPr algn="l">
               <a:spcAft>
-                <a:spcPts val="200"/>
-              </a:spcAft>
-            </a:pPr>
-            <a:r>
-              <a:rPr sz="3400" b="1" i="0">
+                <a:spcPts val="100"/>
+              </a:spcAft>
+            </a:pPr>
+            <a:r>
+              <a:rPr sz="3400" b="1">
                 <a:solidFill>
                   <a:srgbClr val="21295C"/>
                 </a:solidFill>
@@ -4987,16 +4909,18 @@
           <a:noFill/>
         </p:spPr>
         <p:txBody>
-          <a:bodyPr wrap="square" lIns="0" rIns="0" tIns="0" bIns="0" anchor="t"/>
+          <a:bodyPr wrap="square" lIns="0" rIns="0" tIns="0" bIns="0" anchor="t">
+            <a:spAutoFit/>
+          </a:bodyPr>
           <a:lstStyle/>
           <a:p>
             <a:pPr algn="l">
               <a:spcAft>
-                <a:spcPts val="200"/>
-              </a:spcAft>
-            </a:pPr>
-            <a:r>
-              <a:rPr sz="1150" b="0" i="0">
+                <a:spcPts val="100"/>
+              </a:spcAft>
+            </a:pPr>
+            <a:r>
+              <a:rPr sz="1150" b="0">
                 <a:solidFill>
                   <a:srgbClr val="5B7780"/>
                 </a:solidFill>
@@ -5069,16 +4993,18 @@
           <a:noFill/>
         </p:spPr>
         <p:txBody>
-          <a:bodyPr wrap="square" lIns="0" rIns="0" tIns="0" bIns="0" anchor="ctr"/>
+          <a:bodyPr wrap="square" lIns="0" rIns="0" tIns="0" bIns="0" anchor="ctr">
+            <a:spAutoFit/>
+          </a:bodyPr>
           <a:lstStyle/>
           <a:p>
             <a:pPr algn="ctr">
               <a:spcAft>
-                <a:spcPts val="200"/>
-              </a:spcAft>
-            </a:pPr>
-            <a:r>
-              <a:rPr sz="1050" b="1" i="0">
+                <a:spcPts val="100"/>
+              </a:spcAft>
+            </a:pPr>
+            <a:r>
+              <a:rPr sz="1050" b="1">
                 <a:solidFill>
                   <a:srgbClr val="065A82"/>
                 </a:solidFill>
@@ -5241,16 +5167,18 @@
           <a:noFill/>
         </p:spPr>
         <p:txBody>
-          <a:bodyPr wrap="square" lIns="0" rIns="0" tIns="0" bIns="0" anchor="ctr"/>
+          <a:bodyPr wrap="square" lIns="0" rIns="0" tIns="0" bIns="0" anchor="ctr">
+            <a:spAutoFit/>
+          </a:bodyPr>
           <a:lstStyle/>
           <a:p>
             <a:pPr algn="ctr">
               <a:spcAft>
-                <a:spcPts val="200"/>
-              </a:spcAft>
-            </a:pPr>
-            <a:r>
-              <a:rPr sz="850" b="1" i="0">
+                <a:spcPts val="100"/>
+              </a:spcAft>
+            </a:pPr>
+            <a:r>
+              <a:rPr sz="850" b="1">
                 <a:solidFill>
                   <a:srgbClr val="FFFFFF"/>
                 </a:solidFill>
@@ -5278,16 +5206,18 @@
           <a:noFill/>
         </p:spPr>
         <p:txBody>
-          <a:bodyPr wrap="square" lIns="0" rIns="0" tIns="0" bIns="0" anchor="t"/>
+          <a:bodyPr wrap="square" lIns="0" rIns="0" tIns="0" bIns="0" anchor="t">
+            <a:spAutoFit/>
+          </a:bodyPr>
           <a:lstStyle/>
           <a:p>
             <a:pPr algn="l">
               <a:spcAft>
-                <a:spcPts val="200"/>
-              </a:spcAft>
-            </a:pPr>
-            <a:r>
-              <a:rPr sz="2000" b="1" i="0">
+                <a:spcPts val="100"/>
+              </a:spcAft>
+            </a:pPr>
+            <a:r>
+              <a:rPr sz="2000" b="1">
                 <a:solidFill>
                   <a:srgbClr val="21295C"/>
                 </a:solidFill>
@@ -5315,86 +5245,72 @@
           <a:noFill/>
         </p:spPr>
         <p:txBody>
-          <a:bodyPr wrap="square" lIns="27432" rIns="27432" tIns="27432" bIns="27432" anchor="t"/>
+          <a:bodyPr wrap="square" lIns="27432" rIns="27432" tIns="27432" bIns="27432" anchor="t">
+            <a:spAutoFit/>
+          </a:bodyPr>
           <a:lstStyle/>
           <a:p>
             <a:pPr algn="l">
               <a:spcAft>
-                <a:spcPts val="200"/>
-              </a:spcAft>
-            </a:pPr>
-            <a:r>
-              <a:rPr sz="1420" b="0" i="0">
+                <a:spcPts val="100"/>
+              </a:spcAft>
+            </a:pPr>
+            <a:r>
+              <a:rPr sz="1400" b="0">
                 <a:solidFill>
                   <a:srgbClr val="17323B"/>
                 </a:solidFill>
                 <a:latin typeface="Calibri"/>
               </a:rPr>
-              <a:t>项目已具备从需求输入、AI 对话生成</a:t>
+              <a:t>项目已具备从需求输入、AI 对话生成、实时预</a:t>
             </a:r>
           </a:p>
           <a:p>
             <a:pPr algn="l">
               <a:spcAft>
-                <a:spcPts val="200"/>
-              </a:spcAft>
-            </a:pPr>
-            <a:r>
-              <a:rPr sz="1420" b="0" i="0">
+                <a:spcPts val="100"/>
+              </a:spcAft>
+            </a:pPr>
+            <a:r>
+              <a:rPr sz="1400" b="0">
                 <a:solidFill>
                   <a:srgbClr val="17323B"/>
                 </a:solidFill>
                 <a:latin typeface="Calibri"/>
               </a:rPr>
-              <a:t>、实时预览、部署分享到后台管理的主链</a:t>
+              <a:t>览、部署分享到后台管理的主链路雏形；当前代码</a:t>
             </a:r>
           </a:p>
           <a:p>
             <a:pPr algn="l">
               <a:spcAft>
-                <a:spcPts val="200"/>
-              </a:spcAft>
-            </a:pPr>
-            <a:r>
-              <a:rPr sz="1420" b="0" i="0">
+                <a:spcPts val="100"/>
+              </a:spcAft>
+            </a:pPr>
+            <a:r>
+              <a:rPr sz="1400" b="0">
                 <a:solidFill>
                   <a:srgbClr val="17323B"/>
                 </a:solidFill>
                 <a:latin typeface="Calibri"/>
               </a:rPr>
-              <a:t>路雏形；当前代码同时保留单体后端与微</a:t>
+              <a:t>同时保留单体后端与微服务改造版本，适合作为教</a:t>
             </a:r>
           </a:p>
           <a:p>
             <a:pPr algn="l">
               <a:spcAft>
-                <a:spcPts val="200"/>
-              </a:spcAft>
-            </a:pPr>
-            <a:r>
-              <a:rPr sz="1420" b="0" i="0">
+                <a:spcPts val="100"/>
+              </a:spcAft>
+            </a:pPr>
+            <a:r>
+              <a:rPr sz="1400" b="0">
                 <a:solidFill>
                   <a:srgbClr val="17323B"/>
                 </a:solidFill>
                 <a:latin typeface="Calibri"/>
               </a:rPr>
-              <a:t>服务改造版本，适合作为教学与架构演进</a:t>
-            </a:r>
-          </a:p>
-          <a:p>
-            <a:pPr algn="l">
-              <a:spcAft>
-                <a:spcPts val="200"/>
-              </a:spcAft>
-            </a:pPr>
-            <a:r>
-              <a:rPr sz="1420" b="0" i="0">
-                <a:solidFill>
-                  <a:srgbClr val="17323B"/>
-                </a:solidFill>
-                <a:latin typeface="Calibri"/>
-              </a:rPr>
-              <a:t>样板。</a:t>
+              <a:t>学与架构演进样板。</a:t>
             </a:r>
           </a:p>
         </p:txBody>
@@ -5408,7 +5324,7 @@
         <p:spPr>
           <a:xfrm>
             <a:off x="5559552" y="1389888"/>
-            <a:ext cx="1444752" cy="1353312"/>
+            <a:ext cx="1444752" cy="1234440"/>
           </a:xfrm>
           <a:prstGeom prst="roundRect">
             <a:avLst/>
@@ -5452,8 +5368,8 @@
         </p:nvSpPr>
         <p:spPr>
           <a:xfrm>
-            <a:off x="5687568" y="1554480"/>
-            <a:ext cx="1188720" cy="566928"/>
+            <a:off x="5669280" y="1554480"/>
+            <a:ext cx="1225296" cy="502920"/>
           </a:xfrm>
           <a:prstGeom prst="rect">
             <a:avLst/>
@@ -5461,16 +5377,18 @@
           <a:noFill/>
         </p:spPr>
         <p:txBody>
-          <a:bodyPr wrap="square" lIns="0" rIns="0" tIns="0" bIns="0" anchor="ctr"/>
+          <a:bodyPr wrap="square" lIns="0" rIns="0" tIns="0" bIns="0" anchor="ctr">
+            <a:spAutoFit/>
+          </a:bodyPr>
           <a:lstStyle/>
           <a:p>
             <a:pPr algn="ctr">
               <a:spcAft>
-                <a:spcPts val="200"/>
-              </a:spcAft>
-            </a:pPr>
-            <a:r>
-              <a:rPr sz="3100" b="1" i="0">
+                <a:spcPts val="100"/>
+              </a:spcAft>
+            </a:pPr>
+            <a:r>
+              <a:rPr sz="3100" b="1">
                 <a:solidFill>
                   <a:srgbClr val="1C7293"/>
                 </a:solidFill>
@@ -5489,8 +5407,8 @@
         </p:nvSpPr>
         <p:spPr>
           <a:xfrm>
-            <a:off x="5724144" y="2194560"/>
-            <a:ext cx="1115568" cy="310896"/>
+            <a:off x="5696712" y="2231136"/>
+            <a:ext cx="1170432" cy="201168"/>
           </a:xfrm>
           <a:prstGeom prst="rect">
             <a:avLst/>
@@ -5498,121 +5416,38 @@
           <a:noFill/>
         </p:spPr>
         <p:txBody>
-          <a:bodyPr wrap="square" lIns="0" rIns="0" tIns="0" bIns="0" anchor="t"/>
+          <a:bodyPr wrap="square" lIns="0" rIns="0" tIns="0" bIns="0" anchor="t">
+            <a:spAutoFit/>
+          </a:bodyPr>
           <a:lstStyle/>
           <a:p>
             <a:pPr algn="ctr">
               <a:spcAft>
-                <a:spcPts val="200"/>
-              </a:spcAft>
-            </a:pPr>
-            <a:r>
-              <a:rPr sz="1220" b="1" i="0">
+                <a:spcPts val="100"/>
+              </a:spcAft>
+            </a:pPr>
+            <a:r>
+              <a:rPr sz="1200" b="1">
                 <a:solidFill>
                   <a:srgbClr val="17323B"/>
                 </a:solidFill>
                 <a:latin typeface="Calibri"/>
               </a:rPr>
-              <a:t>单体后端</a:t>
-            </a:r>
-          </a:p>
-          <a:p>
-            <a:pPr algn="ctr">
-              <a:spcAft>
-                <a:spcPts val="200"/>
-              </a:spcAft>
-            </a:pPr>
-            <a:r>
-              <a:rPr sz="1220" b="1" i="0">
-                <a:solidFill>
-                  <a:srgbClr val="17323B"/>
-                </a:solidFill>
-                <a:latin typeface="Calibri"/>
-              </a:rPr>
-              <a:t>Java</a:t>
-            </a:r>
-          </a:p>
-          <a:p>
-            <a:pPr algn="ctr">
-              <a:spcAft>
-                <a:spcPts val="200"/>
-              </a:spcAft>
-            </a:pPr>
-            <a:r>
-              <a:rPr sz="1220" b="1" i="0">
-                <a:solidFill>
-                  <a:srgbClr val="17323B"/>
-                </a:solidFill>
-                <a:latin typeface="Calibri"/>
-              </a:rPr>
-              <a:t>文件</a:t>
-            </a:r>
-          </a:p>
-        </p:txBody>
-      </p:sp>
-      <p:sp>
-        <p:nvSpPr>
-          <p:cNvPr id="17" name="TextBox 16"/>
-          <p:cNvSpPr txBox="1"/>
-          <p:nvPr/>
-        </p:nvSpPr>
-        <p:spPr>
-          <a:xfrm>
-            <a:off x="5724144" y="2514600"/>
-            <a:ext cx="1115568" cy="274320"/>
-          </a:xfrm>
-          <a:prstGeom prst="rect">
-            <a:avLst/>
-          </a:prstGeom>
-          <a:noFill/>
-        </p:spPr>
-        <p:txBody>
-          <a:bodyPr wrap="square" lIns="0" rIns="0" tIns="0" bIns="0" anchor="t"/>
-          <a:lstStyle/>
-          <a:p>
-            <a:pPr algn="ctr">
-              <a:spcAft>
-                <a:spcPts val="200"/>
-              </a:spcAft>
-            </a:pPr>
-            <a:r>
-              <a:rPr sz="919" b="0" i="0">
-                <a:solidFill>
-                  <a:srgbClr val="5B7780"/>
-                </a:solidFill>
-                <a:latin typeface="Calibri"/>
-              </a:rPr>
-              <a:t>核心业务/AI</a:t>
-            </a:r>
-          </a:p>
-          <a:p>
-            <a:pPr algn="ctr">
-              <a:spcAft>
-                <a:spcPts val="200"/>
-              </a:spcAft>
-            </a:pPr>
-            <a:r>
-              <a:rPr sz="919" b="0" i="0">
-                <a:solidFill>
-                  <a:srgbClr val="5B7780"/>
-                </a:solidFill>
-                <a:latin typeface="Calibri"/>
-              </a:rPr>
-              <a:t>/监控</a:t>
-            </a:r>
-          </a:p>
-        </p:txBody>
-      </p:sp>
-      <p:sp>
-        <p:nvSpPr>
-          <p:cNvPr id="18" name="Rounded Rectangle 17"/>
+              <a:t>后端文件</a:t>
+            </a:r>
+          </a:p>
+        </p:txBody>
+      </p:sp>
+      <p:sp>
+        <p:nvSpPr>
+          <p:cNvPr id="17" name="Rounded Rectangle 16"/>
           <p:cNvSpPr/>
           <p:nvPr/>
         </p:nvSpPr>
         <p:spPr>
           <a:xfrm>
             <a:off x="7278624" y="1389888"/>
-            <a:ext cx="1444752" cy="1353312"/>
+            <a:ext cx="1444752" cy="1234440"/>
           </a:xfrm>
           <a:prstGeom prst="roundRect">
             <a:avLst/>
@@ -5650,14 +5485,53 @@
       </p:sp>
       <p:sp>
         <p:nvSpPr>
+          <p:cNvPr id="18" name="TextBox 17"/>
+          <p:cNvSpPr txBox="1"/>
+          <p:nvPr/>
+        </p:nvSpPr>
+        <p:spPr>
+          <a:xfrm>
+            <a:off x="7388352" y="1554480"/>
+            <a:ext cx="1225296" cy="502920"/>
+          </a:xfrm>
+          <a:prstGeom prst="rect">
+            <a:avLst/>
+          </a:prstGeom>
+          <a:noFill/>
+        </p:spPr>
+        <p:txBody>
+          <a:bodyPr wrap="square" lIns="0" rIns="0" tIns="0" bIns="0" anchor="ctr">
+            <a:spAutoFit/>
+          </a:bodyPr>
+          <a:lstStyle/>
+          <a:p>
+            <a:pPr algn="ctr">
+              <a:spcAft>
+                <a:spcPts val="100"/>
+              </a:spcAft>
+            </a:pPr>
+            <a:r>
+              <a:rPr sz="3100" b="1">
+                <a:solidFill>
+                  <a:srgbClr val="028090"/>
+                </a:solidFill>
+                <a:latin typeface="Georgia"/>
+              </a:rPr>
+              <a:t>34</a:t>
+            </a:r>
+          </a:p>
+        </p:txBody>
+      </p:sp>
+      <p:sp>
+        <p:nvSpPr>
           <p:cNvPr id="19" name="TextBox 18"/>
           <p:cNvSpPr txBox="1"/>
           <p:nvPr/>
         </p:nvSpPr>
         <p:spPr>
           <a:xfrm>
-            <a:off x="7406640" y="1554480"/>
-            <a:ext cx="1188720" cy="566928"/>
+            <a:off x="7415783" y="2231136"/>
+            <a:ext cx="1170432" cy="201168"/>
           </a:xfrm>
           <a:prstGeom prst="rect">
             <a:avLst/>
@@ -5665,126 +5539,38 @@
           <a:noFill/>
         </p:spPr>
         <p:txBody>
-          <a:bodyPr wrap="square" lIns="0" rIns="0" tIns="0" bIns="0" anchor="ctr"/>
+          <a:bodyPr wrap="square" lIns="0" rIns="0" tIns="0" bIns="0" anchor="t">
+            <a:spAutoFit/>
+          </a:bodyPr>
           <a:lstStyle/>
           <a:p>
             <a:pPr algn="ctr">
               <a:spcAft>
-                <a:spcPts val="200"/>
-              </a:spcAft>
-            </a:pPr>
-            <a:r>
-              <a:rPr sz="3100" b="1" i="0">
-                <a:solidFill>
-                  <a:srgbClr val="028090"/>
-                </a:solidFill>
-                <a:latin typeface="Georgia"/>
-              </a:rPr>
-              <a:t>34</a:t>
-            </a:r>
-          </a:p>
-        </p:txBody>
-      </p:sp>
-      <p:sp>
-        <p:nvSpPr>
-          <p:cNvPr id="20" name="TextBox 19"/>
-          <p:cNvSpPr txBox="1"/>
-          <p:nvPr/>
-        </p:nvSpPr>
-        <p:spPr>
-          <a:xfrm>
-            <a:off x="7443216" y="2194560"/>
-            <a:ext cx="1115568" cy="310896"/>
-          </a:xfrm>
-          <a:prstGeom prst="rect">
-            <a:avLst/>
-          </a:prstGeom>
-          <a:noFill/>
-        </p:spPr>
-        <p:txBody>
-          <a:bodyPr wrap="square" lIns="0" rIns="0" tIns="0" bIns="0" anchor="t"/>
-          <a:lstStyle/>
-          <a:p>
-            <a:pPr algn="ctr">
-              <a:spcAft>
-                <a:spcPts val="200"/>
-              </a:spcAft>
-            </a:pPr>
-            <a:r>
-              <a:rPr sz="1220" b="1" i="0">
+                <a:spcPts val="100"/>
+              </a:spcAft>
+            </a:pPr>
+            <a:r>
+              <a:rPr sz="1200" b="1">
                 <a:solidFill>
                   <a:srgbClr val="17323B"/>
                 </a:solidFill>
                 <a:latin typeface="Calibri"/>
               </a:rPr>
-              <a:t>前端源码文件</a:t>
-            </a:r>
-          </a:p>
-        </p:txBody>
-      </p:sp>
-      <p:sp>
-        <p:nvSpPr>
-          <p:cNvPr id="21" name="TextBox 20"/>
-          <p:cNvSpPr txBox="1"/>
-          <p:nvPr/>
-        </p:nvSpPr>
-        <p:spPr>
-          <a:xfrm>
-            <a:off x="7443216" y="2514600"/>
-            <a:ext cx="1115568" cy="274320"/>
-          </a:xfrm>
-          <a:prstGeom prst="rect">
-            <a:avLst/>
-          </a:prstGeom>
-          <a:noFill/>
-        </p:spPr>
-        <p:txBody>
-          <a:bodyPr wrap="square" lIns="0" rIns="0" tIns="0" bIns="0" anchor="t"/>
-          <a:lstStyle/>
-          <a:p>
-            <a:pPr algn="ctr">
-              <a:spcAft>
-                <a:spcPts val="200"/>
-              </a:spcAft>
-            </a:pPr>
-            <a:r>
-              <a:rPr sz="919" b="0" i="0">
-                <a:solidFill>
-                  <a:srgbClr val="5B7780"/>
-                </a:solidFill>
-                <a:latin typeface="Calibri"/>
-              </a:rPr>
-              <a:t>Vue 3 +</a:t>
-            </a:r>
-          </a:p>
-          <a:p>
-            <a:pPr algn="ctr">
-              <a:spcAft>
-                <a:spcPts val="200"/>
-              </a:spcAft>
-            </a:pPr>
-            <a:r>
-              <a:rPr sz="919" b="0" i="0">
-                <a:solidFill>
-                  <a:srgbClr val="5B7780"/>
-                </a:solidFill>
-                <a:latin typeface="Calibri"/>
-              </a:rPr>
-              <a:t>TS</a:t>
-            </a:r>
-          </a:p>
-        </p:txBody>
-      </p:sp>
-      <p:sp>
-        <p:nvSpPr>
-          <p:cNvPr id="22" name="Rounded Rectangle 21"/>
+              <a:t>前端文件</a:t>
+            </a:r>
+          </a:p>
+        </p:txBody>
+      </p:sp>
+      <p:sp>
+        <p:nvSpPr>
+          <p:cNvPr id="20" name="Rounded Rectangle 19"/>
           <p:cNvSpPr/>
           <p:nvPr/>
         </p:nvSpPr>
         <p:spPr>
           <a:xfrm>
             <a:off x="8997696" y="1389888"/>
-            <a:ext cx="1444752" cy="1353312"/>
+            <a:ext cx="1444752" cy="1234440"/>
           </a:xfrm>
           <a:prstGeom prst="roundRect">
             <a:avLst/>
@@ -5822,14 +5608,14 @@
       </p:sp>
       <p:sp>
         <p:nvSpPr>
-          <p:cNvPr id="23" name="TextBox 22"/>
+          <p:cNvPr id="21" name="TextBox 20"/>
           <p:cNvSpPr txBox="1"/>
           <p:nvPr/>
         </p:nvSpPr>
         <p:spPr>
           <a:xfrm>
-            <a:off x="9125712" y="1554480"/>
-            <a:ext cx="1188720" cy="566928"/>
+            <a:off x="9107424" y="1554480"/>
+            <a:ext cx="1225296" cy="502920"/>
           </a:xfrm>
           <a:prstGeom prst="rect">
             <a:avLst/>
@@ -5837,16 +5623,18 @@
           <a:noFill/>
         </p:spPr>
         <p:txBody>
-          <a:bodyPr wrap="square" lIns="0" rIns="0" tIns="0" bIns="0" anchor="ctr"/>
+          <a:bodyPr wrap="square" lIns="0" rIns="0" tIns="0" bIns="0" anchor="ctr">
+            <a:spAutoFit/>
+          </a:bodyPr>
           <a:lstStyle/>
           <a:p>
             <a:pPr algn="ctr">
               <a:spcAft>
-                <a:spcPts val="200"/>
-              </a:spcAft>
-            </a:pPr>
-            <a:r>
-              <a:rPr sz="3100" b="1" i="0">
+                <a:spcPts val="100"/>
+              </a:spcAft>
+            </a:pPr>
+            <a:r>
+              <a:rPr sz="3100" b="1">
                 <a:solidFill>
                   <a:srgbClr val="065A82"/>
                 </a:solidFill>
@@ -5859,14 +5647,14 @@
       </p:sp>
       <p:sp>
         <p:nvSpPr>
-          <p:cNvPr id="24" name="TextBox 23"/>
+          <p:cNvPr id="22" name="TextBox 21"/>
           <p:cNvSpPr txBox="1"/>
           <p:nvPr/>
         </p:nvSpPr>
         <p:spPr>
           <a:xfrm>
-            <a:off x="9162288" y="2194560"/>
-            <a:ext cx="1115568" cy="310896"/>
+            <a:off x="9134856" y="2231136"/>
+            <a:ext cx="1170432" cy="201168"/>
           </a:xfrm>
           <a:prstGeom prst="rect">
             <a:avLst/>
@@ -5874,105 +5662,38 @@
           <a:noFill/>
         </p:spPr>
         <p:txBody>
-          <a:bodyPr wrap="square" lIns="0" rIns="0" tIns="0" bIns="0" anchor="t"/>
+          <a:bodyPr wrap="square" lIns="0" rIns="0" tIns="0" bIns="0" anchor="t">
+            <a:spAutoFit/>
+          </a:bodyPr>
           <a:lstStyle/>
           <a:p>
             <a:pPr algn="ctr">
               <a:spcAft>
-                <a:spcPts val="200"/>
-              </a:spcAft>
-            </a:pPr>
-            <a:r>
-              <a:rPr sz="1220" b="1" i="0">
+                <a:spcPts val="100"/>
+              </a:spcAft>
+            </a:pPr>
+            <a:r>
+              <a:rPr sz="1200" b="1">
                 <a:solidFill>
                   <a:srgbClr val="17323B"/>
                 </a:solidFill>
                 <a:latin typeface="Calibri"/>
               </a:rPr>
-              <a:t>Maven</a:t>
-            </a:r>
-          </a:p>
-          <a:p>
-            <a:pPr algn="ctr">
-              <a:spcAft>
-                <a:spcPts val="200"/>
-              </a:spcAft>
-            </a:pPr>
-            <a:r>
-              <a:rPr sz="1220" b="1" i="0">
-                <a:solidFill>
-                  <a:srgbClr val="17323B"/>
-                </a:solidFill>
-                <a:latin typeface="Calibri"/>
-              </a:rPr>
-              <a:t>POM</a:t>
-            </a:r>
-          </a:p>
-        </p:txBody>
-      </p:sp>
-      <p:sp>
-        <p:nvSpPr>
-          <p:cNvPr id="25" name="TextBox 24"/>
-          <p:cNvSpPr txBox="1"/>
-          <p:nvPr/>
-        </p:nvSpPr>
-        <p:spPr>
-          <a:xfrm>
-            <a:off x="9162288" y="2514600"/>
-            <a:ext cx="1115568" cy="274320"/>
-          </a:xfrm>
-          <a:prstGeom prst="rect">
-            <a:avLst/>
-          </a:prstGeom>
-          <a:noFill/>
-        </p:spPr>
-        <p:txBody>
-          <a:bodyPr wrap="square" lIns="0" rIns="0" tIns="0" bIns="0" anchor="t"/>
-          <a:lstStyle/>
-          <a:p>
-            <a:pPr algn="ctr">
-              <a:spcAft>
-                <a:spcPts val="200"/>
-              </a:spcAft>
-            </a:pPr>
-            <a:r>
-              <a:rPr sz="919" b="0" i="0">
-                <a:solidFill>
-                  <a:srgbClr val="5B7780"/>
-                </a:solidFill>
-                <a:latin typeface="Calibri"/>
-              </a:rPr>
-              <a:t>单体 +</a:t>
-            </a:r>
-          </a:p>
-          <a:p>
-            <a:pPr algn="ctr">
-              <a:spcAft>
-                <a:spcPts val="200"/>
-              </a:spcAft>
-            </a:pPr>
-            <a:r>
-              <a:rPr sz="919" b="0" i="0">
-                <a:solidFill>
-                  <a:srgbClr val="5B7780"/>
-                </a:solidFill>
-                <a:latin typeface="Calibri"/>
-              </a:rPr>
-              <a:t>微服务</a:t>
-            </a:r>
-          </a:p>
-        </p:txBody>
-      </p:sp>
-      <p:sp>
-        <p:nvSpPr>
-          <p:cNvPr id="26" name="Rounded Rectangle 25"/>
+              <a:t>Maven POM</a:t>
+            </a:r>
+          </a:p>
+        </p:txBody>
+      </p:sp>
+      <p:sp>
+        <p:nvSpPr>
+          <p:cNvPr id="23" name="Rounded Rectangle 22"/>
           <p:cNvSpPr/>
           <p:nvPr/>
         </p:nvSpPr>
         <p:spPr>
           <a:xfrm>
             <a:off x="10716768" y="1389888"/>
-            <a:ext cx="1005840" cy="1353312"/>
+            <a:ext cx="1444752" cy="1234440"/>
           </a:xfrm>
           <a:prstGeom prst="roundRect">
             <a:avLst/>
@@ -6010,14 +5731,14 @@
       </p:sp>
       <p:sp>
         <p:nvSpPr>
-          <p:cNvPr id="27" name="TextBox 26"/>
+          <p:cNvPr id="24" name="TextBox 23"/>
           <p:cNvSpPr txBox="1"/>
           <p:nvPr/>
         </p:nvSpPr>
         <p:spPr>
           <a:xfrm>
-            <a:off x="10844784" y="1554480"/>
-            <a:ext cx="749808" cy="566928"/>
+            <a:off x="10826496" y="1554480"/>
+            <a:ext cx="1225296" cy="502920"/>
           </a:xfrm>
           <a:prstGeom prst="rect">
             <a:avLst/>
@@ -6025,16 +5746,18 @@
           <a:noFill/>
         </p:spPr>
         <p:txBody>
-          <a:bodyPr wrap="square" lIns="0" rIns="0" tIns="0" bIns="0" anchor="ctr"/>
+          <a:bodyPr wrap="square" lIns="0" rIns="0" tIns="0" bIns="0" anchor="ctr">
+            <a:spAutoFit/>
+          </a:bodyPr>
           <a:lstStyle/>
           <a:p>
             <a:pPr algn="ctr">
               <a:spcAft>
-                <a:spcPts val="200"/>
-              </a:spcAft>
-            </a:pPr>
-            <a:r>
-              <a:rPr sz="3100" b="1" i="0">
+                <a:spcPts val="100"/>
+              </a:spcAft>
+            </a:pPr>
+            <a:r>
+              <a:rPr sz="3100" b="1">
                 <a:solidFill>
                   <a:srgbClr val="D95D39"/>
                 </a:solidFill>
@@ -6047,14 +5770,14 @@
       </p:sp>
       <p:sp>
         <p:nvSpPr>
-          <p:cNvPr id="28" name="TextBox 27"/>
+          <p:cNvPr id="25" name="TextBox 24"/>
           <p:cNvSpPr txBox="1"/>
           <p:nvPr/>
         </p:nvSpPr>
         <p:spPr>
           <a:xfrm>
-            <a:off x="10881360" y="2194560"/>
-            <a:ext cx="676656" cy="310896"/>
+            <a:off x="10853928" y="2231136"/>
+            <a:ext cx="1170432" cy="201168"/>
           </a:xfrm>
           <a:prstGeom prst="rect">
             <a:avLst/>
@@ -6062,89 +5785,38 @@
           <a:noFill/>
         </p:spPr>
         <p:txBody>
-          <a:bodyPr wrap="square" lIns="0" rIns="0" tIns="0" bIns="0" anchor="t"/>
+          <a:bodyPr wrap="square" lIns="0" rIns="0" tIns="0" bIns="0" anchor="t">
+            <a:spAutoFit/>
+          </a:bodyPr>
           <a:lstStyle/>
           <a:p>
             <a:pPr algn="ctr">
               <a:spcAft>
-                <a:spcPts val="200"/>
-              </a:spcAft>
-            </a:pPr>
-            <a:r>
-              <a:rPr sz="1220" b="1" i="0">
+                <a:spcPts val="100"/>
+              </a:spcAft>
+            </a:pPr>
+            <a:r>
+              <a:rPr sz="1200" b="1">
                 <a:solidFill>
                   <a:srgbClr val="17323B"/>
                 </a:solidFill>
                 <a:latin typeface="Calibri"/>
               </a:rPr>
-              <a:t>近 7</a:t>
-            </a:r>
-          </a:p>
-          <a:p>
-            <a:pPr algn="ctr">
-              <a:spcAft>
-                <a:spcPts val="200"/>
-              </a:spcAft>
-            </a:pPr>
-            <a:r>
-              <a:rPr sz="1220" b="1" i="0">
-                <a:solidFill>
-                  <a:srgbClr val="17323B"/>
-                </a:solidFill>
-                <a:latin typeface="Calibri"/>
-              </a:rPr>
-              <a:t>天提交</a:t>
-            </a:r>
-          </a:p>
-        </p:txBody>
-      </p:sp>
-      <p:sp>
-        <p:nvSpPr>
-          <p:cNvPr id="29" name="TextBox 28"/>
-          <p:cNvSpPr txBox="1"/>
-          <p:nvPr/>
-        </p:nvSpPr>
-        <p:spPr>
-          <a:xfrm>
-            <a:off x="10881360" y="2514600"/>
-            <a:ext cx="676656" cy="274320"/>
-          </a:xfrm>
-          <a:prstGeom prst="rect">
-            <a:avLst/>
-          </a:prstGeom>
-          <a:noFill/>
-        </p:spPr>
-        <p:txBody>
-          <a:bodyPr wrap="square" lIns="0" rIns="0" tIns="0" bIns="0" anchor="t"/>
-          <a:lstStyle/>
-          <a:p>
-            <a:pPr algn="ctr">
-              <a:spcAft>
-                <a:spcPts val="200"/>
-              </a:spcAft>
-            </a:pPr>
-            <a:r>
-              <a:rPr sz="919" b="0" i="0">
-                <a:solidFill>
-                  <a:srgbClr val="5B7780"/>
-                </a:solidFill>
-                <a:latin typeface="Calibri"/>
-              </a:rPr>
-              <a:t>仓库记录</a:t>
-            </a:r>
-          </a:p>
-        </p:txBody>
-      </p:sp>
-      <p:sp>
-        <p:nvSpPr>
-          <p:cNvPr id="30" name="Rounded Rectangle 29"/>
+              <a:t>近7天提交</a:t>
+            </a:r>
+          </a:p>
+        </p:txBody>
+      </p:sp>
+      <p:sp>
+        <p:nvSpPr>
+          <p:cNvPr id="26" name="Rounded Rectangle 25"/>
           <p:cNvSpPr/>
           <p:nvPr/>
         </p:nvSpPr>
         <p:spPr>
           <a:xfrm>
-            <a:off x="5559552" y="3154680"/>
-            <a:ext cx="2880360" cy="1508760"/>
+            <a:off x="5559552" y="3063240"/>
+            <a:ext cx="2880360" cy="1600200"/>
           </a:xfrm>
           <a:prstGeom prst="roundRect">
             <a:avLst/>
@@ -6182,14 +5854,14 @@
       </p:sp>
       <p:sp>
         <p:nvSpPr>
-          <p:cNvPr id="31" name="Rectangle 30"/>
+          <p:cNvPr id="27" name="Rectangle 26"/>
           <p:cNvSpPr/>
           <p:nvPr/>
         </p:nvSpPr>
         <p:spPr>
           <a:xfrm>
-            <a:off x="5559552" y="3154680"/>
-            <a:ext cx="109728" cy="1508760"/>
+            <a:off x="5559552" y="3063240"/>
+            <a:ext cx="109728" cy="1600200"/>
           </a:xfrm>
           <a:prstGeom prst="rect">
             <a:avLst/>
@@ -6227,13 +5899,13 @@
       </p:sp>
       <p:sp>
         <p:nvSpPr>
-          <p:cNvPr id="32" name="Oval 31"/>
+          <p:cNvPr id="28" name="Oval 27"/>
           <p:cNvSpPr/>
           <p:nvPr/>
         </p:nvSpPr>
         <p:spPr>
           <a:xfrm>
-            <a:off x="5815584" y="3383280"/>
+            <a:off x="5815584" y="3291840"/>
             <a:ext cx="475488" cy="475488"/>
           </a:xfrm>
           <a:prstGeom prst="ellipse">
@@ -6272,13 +5944,13 @@
       </p:sp>
       <p:sp>
         <p:nvSpPr>
-          <p:cNvPr id="33" name="TextBox 32"/>
+          <p:cNvPr id="29" name="TextBox 28"/>
           <p:cNvSpPr txBox="1"/>
           <p:nvPr/>
         </p:nvSpPr>
         <p:spPr>
           <a:xfrm>
-            <a:off x="5833872" y="3520440"/>
+            <a:off x="5833872" y="3429000"/>
             <a:ext cx="438912" cy="137160"/>
           </a:xfrm>
           <a:prstGeom prst="rect">
@@ -6287,16 +5959,18 @@
           <a:noFill/>
         </p:spPr>
         <p:txBody>
-          <a:bodyPr wrap="square" lIns="0" rIns="0" tIns="0" bIns="0" anchor="ctr"/>
+          <a:bodyPr wrap="square" lIns="0" rIns="0" tIns="0" bIns="0" anchor="ctr">
+            <a:spAutoFit/>
+          </a:bodyPr>
           <a:lstStyle/>
           <a:p>
             <a:pPr algn="ctr">
               <a:spcAft>
-                <a:spcPts val="200"/>
-              </a:spcAft>
-            </a:pPr>
-            <a:r>
-              <a:rPr sz="850" b="1" i="0">
+                <a:spcPts val="100"/>
+              </a:spcAft>
+            </a:pPr>
+            <a:r>
+              <a:rPr sz="850" b="1">
                 <a:solidFill>
                   <a:srgbClr val="FFFFFF"/>
                 </a:solidFill>
@@ -6309,13 +5983,13 @@
       </p:sp>
       <p:sp>
         <p:nvSpPr>
-          <p:cNvPr id="34" name="TextBox 33"/>
+          <p:cNvPr id="30" name="TextBox 29"/>
           <p:cNvSpPr txBox="1"/>
           <p:nvPr/>
         </p:nvSpPr>
         <p:spPr>
           <a:xfrm>
-            <a:off x="6419088" y="3374136"/>
+            <a:off x="6419088" y="3282696"/>
             <a:ext cx="1792224" cy="320040"/>
           </a:xfrm>
           <a:prstGeom prst="rect">
@@ -6324,16 +5998,18 @@
           <a:noFill/>
         </p:spPr>
         <p:txBody>
-          <a:bodyPr wrap="square" lIns="0" rIns="0" tIns="0" bIns="0" anchor="t"/>
+          <a:bodyPr wrap="square" lIns="0" rIns="0" tIns="0" bIns="0" anchor="t">
+            <a:spAutoFit/>
+          </a:bodyPr>
           <a:lstStyle/>
           <a:p>
             <a:pPr algn="l">
               <a:spcAft>
-                <a:spcPts val="200"/>
-              </a:spcAft>
-            </a:pPr>
-            <a:r>
-              <a:rPr sz="1600" b="1" i="0">
+                <a:spcPts val="100"/>
+              </a:spcAft>
+            </a:pPr>
+            <a:r>
+              <a:rPr sz="1600" b="1">
                 <a:solidFill>
                   <a:srgbClr val="21295C"/>
                 </a:solidFill>
@@ -6346,14 +6022,14 @@
       </p:sp>
       <p:sp>
         <p:nvSpPr>
-          <p:cNvPr id="35" name="TextBox 34"/>
+          <p:cNvPr id="31" name="TextBox 30"/>
           <p:cNvSpPr txBox="1"/>
           <p:nvPr/>
         </p:nvSpPr>
         <p:spPr>
           <a:xfrm>
-            <a:off x="5870448" y="3922776"/>
-            <a:ext cx="2331720" cy="576071"/>
+            <a:off x="5870448" y="3831336"/>
+            <a:ext cx="2331720" cy="667512"/>
           </a:xfrm>
           <a:prstGeom prst="rect">
             <a:avLst/>
@@ -6361,15 +6037,12 @@
           <a:noFill/>
         </p:spPr>
         <p:txBody>
-          <a:bodyPr wrap="square" lIns="73152" rIns="73152" tIns="36576" bIns="36576">
+          <a:bodyPr wrap="square" lIns="73152" rIns="73152" tIns="27432" bIns="27432">
             <a:spAutoFit/>
           </a:bodyPr>
           <a:lstStyle/>
           <a:p>
             <a:pPr>
-              <a:lnSpc>
-                <a:spcPct val="100000"/>
-              </a:lnSpc>
               <a:spcAft>
                 <a:spcPts val="400"/>
               </a:spcAft>
@@ -6386,9 +6059,6 @@
           </a:p>
           <a:p>
             <a:pPr>
-              <a:lnSpc>
-                <a:spcPct val="100000"/>
-              </a:lnSpc>
               <a:spcAft>
                 <a:spcPts val="400"/>
               </a:spcAft>
@@ -6405,9 +6075,6 @@
           </a:p>
           <a:p>
             <a:pPr>
-              <a:lnSpc>
-                <a:spcPct val="100000"/>
-              </a:lnSpc>
               <a:spcAft>
                 <a:spcPts val="400"/>
               </a:spcAft>
@@ -6426,14 +6093,14 @@
       </p:sp>
       <p:sp>
         <p:nvSpPr>
-          <p:cNvPr id="36" name="Rounded Rectangle 35"/>
+          <p:cNvPr id="32" name="Rounded Rectangle 31"/>
           <p:cNvSpPr/>
           <p:nvPr/>
         </p:nvSpPr>
         <p:spPr>
           <a:xfrm>
-            <a:off x="8732520" y="3154680"/>
-            <a:ext cx="2880360" cy="1508760"/>
+            <a:off x="8732520" y="3063240"/>
+            <a:ext cx="2880360" cy="1600200"/>
           </a:xfrm>
           <a:prstGeom prst="roundRect">
             <a:avLst/>
@@ -6471,14 +6138,14 @@
       </p:sp>
       <p:sp>
         <p:nvSpPr>
-          <p:cNvPr id="37" name="Rectangle 36"/>
+          <p:cNvPr id="33" name="Rectangle 32"/>
           <p:cNvSpPr/>
           <p:nvPr/>
         </p:nvSpPr>
         <p:spPr>
           <a:xfrm>
-            <a:off x="8732520" y="3154680"/>
-            <a:ext cx="109728" cy="1508760"/>
+            <a:off x="8732520" y="3063240"/>
+            <a:ext cx="109728" cy="1600200"/>
           </a:xfrm>
           <a:prstGeom prst="rect">
             <a:avLst/>
@@ -6516,13 +6183,13 @@
       </p:sp>
       <p:sp>
         <p:nvSpPr>
-          <p:cNvPr id="38" name="Oval 37"/>
+          <p:cNvPr id="34" name="Oval 33"/>
           <p:cNvSpPr/>
           <p:nvPr/>
         </p:nvSpPr>
         <p:spPr>
           <a:xfrm>
-            <a:off x="8988552" y="3383280"/>
+            <a:off x="8988552" y="3291840"/>
             <a:ext cx="475488" cy="475488"/>
           </a:xfrm>
           <a:prstGeom prst="ellipse">
@@ -6561,13 +6228,13 @@
       </p:sp>
       <p:sp>
         <p:nvSpPr>
-          <p:cNvPr id="39" name="TextBox 38"/>
+          <p:cNvPr id="35" name="TextBox 34"/>
           <p:cNvSpPr txBox="1"/>
           <p:nvPr/>
         </p:nvSpPr>
         <p:spPr>
           <a:xfrm>
-            <a:off x="9006840" y="3520440"/>
+            <a:off x="9006840" y="3429000"/>
             <a:ext cx="438912" cy="137160"/>
           </a:xfrm>
           <a:prstGeom prst="rect">
@@ -6576,16 +6243,18 @@
           <a:noFill/>
         </p:spPr>
         <p:txBody>
-          <a:bodyPr wrap="square" lIns="0" rIns="0" tIns="0" bIns="0" anchor="ctr"/>
+          <a:bodyPr wrap="square" lIns="0" rIns="0" tIns="0" bIns="0" anchor="ctr">
+            <a:spAutoFit/>
+          </a:bodyPr>
           <a:lstStyle/>
           <a:p>
             <a:pPr algn="ctr">
               <a:spcAft>
-                <a:spcPts val="200"/>
-              </a:spcAft>
-            </a:pPr>
-            <a:r>
-              <a:rPr sz="850" b="1" i="0">
+                <a:spcPts val="100"/>
+              </a:spcAft>
+            </a:pPr>
+            <a:r>
+              <a:rPr sz="850" b="1">
                 <a:solidFill>
                   <a:srgbClr val="FFFFFF"/>
                 </a:solidFill>
@@ -6598,13 +6267,13 @@
       </p:sp>
       <p:sp>
         <p:nvSpPr>
-          <p:cNvPr id="40" name="TextBox 39"/>
+          <p:cNvPr id="36" name="TextBox 35"/>
           <p:cNvSpPr txBox="1"/>
           <p:nvPr/>
         </p:nvSpPr>
         <p:spPr>
           <a:xfrm>
-            <a:off x="9592056" y="3374136"/>
+            <a:off x="9592056" y="3282696"/>
             <a:ext cx="1792224" cy="320040"/>
           </a:xfrm>
           <a:prstGeom prst="rect">
@@ -6613,16 +6282,18 @@
           <a:noFill/>
         </p:spPr>
         <p:txBody>
-          <a:bodyPr wrap="square" lIns="0" rIns="0" tIns="0" bIns="0" anchor="t"/>
+          <a:bodyPr wrap="square" lIns="0" rIns="0" tIns="0" bIns="0" anchor="t">
+            <a:spAutoFit/>
+          </a:bodyPr>
           <a:lstStyle/>
           <a:p>
             <a:pPr algn="l">
               <a:spcAft>
-                <a:spcPts val="200"/>
-              </a:spcAft>
-            </a:pPr>
-            <a:r>
-              <a:rPr sz="1600" b="1" i="0">
+                <a:spcPts val="100"/>
+              </a:spcAft>
+            </a:pPr>
+            <a:r>
+              <a:rPr sz="1600" b="1">
                 <a:solidFill>
                   <a:srgbClr val="21295C"/>
                 </a:solidFill>
@@ -6635,14 +6306,14 @@
       </p:sp>
       <p:sp>
         <p:nvSpPr>
-          <p:cNvPr id="41" name="TextBox 40"/>
+          <p:cNvPr id="37" name="TextBox 36"/>
           <p:cNvSpPr txBox="1"/>
           <p:nvPr/>
         </p:nvSpPr>
         <p:spPr>
           <a:xfrm>
-            <a:off x="9043416" y="3922776"/>
-            <a:ext cx="2331720" cy="576071"/>
+            <a:off x="9043416" y="3831336"/>
+            <a:ext cx="2331720" cy="667512"/>
           </a:xfrm>
           <a:prstGeom prst="rect">
             <a:avLst/>
@@ -6650,17 +6321,14 @@
           <a:noFill/>
         </p:spPr>
         <p:txBody>
-          <a:bodyPr wrap="square" lIns="73152" rIns="73152" tIns="36576" bIns="36576">
+          <a:bodyPr wrap="square" lIns="73152" rIns="73152" tIns="27432" bIns="27432">
             <a:spAutoFit/>
           </a:bodyPr>
           <a:lstStyle/>
           <a:p>
             <a:pPr>
-              <a:lnSpc>
-                <a:spcPct val="100000"/>
-              </a:lnSpc>
-              <a:spcAft>
-                <a:spcPts val="100"/>
+              <a:spcAft>
+                <a:spcPts val="400"/>
               </a:spcAft>
             </a:pPr>
             <a:r>
@@ -6670,14 +6338,11 @@
                 </a:solidFill>
                 <a:latin typeface="Calibri"/>
               </a:rPr>
-              <a:t>Spring Boot</a:t>
+              <a:t>Spring Boot 3 /</a:t>
             </a:r>
           </a:p>
           <a:p>
             <a:pPr>
-              <a:lnSpc>
-                <a:spcPct val="100000"/>
-              </a:lnSpc>
               <a:spcAft>
                 <a:spcPts val="400"/>
               </a:spcAft>
@@ -6689,16 +6354,13 @@
                 </a:solidFill>
                 <a:latin typeface="Calibri"/>
               </a:rPr>
-              <a:t>3 / Java 21</a:t>
+              <a:t>Java 21</a:t>
             </a:r>
           </a:p>
           <a:p>
             <a:pPr>
-              <a:lnSpc>
-                <a:spcPct val="100000"/>
-              </a:lnSpc>
-              <a:spcAft>
-                <a:spcPts val="100"/>
+              <a:spcAft>
+                <a:spcPts val="400"/>
               </a:spcAft>
             </a:pPr>
             <a:r>
@@ -6708,16 +6370,13 @@
                 </a:solidFill>
                 <a:latin typeface="Calibri"/>
               </a:rPr>
-              <a:t>LangChain4j</a:t>
+              <a:t>LangChain4j + 工作流</a:t>
             </a:r>
           </a:p>
           <a:p>
             <a:pPr>
-              <a:lnSpc>
-                <a:spcPct val="100000"/>
-              </a:lnSpc>
-              <a:spcAft>
-                <a:spcPts val="100"/>
+              <a:spcAft>
+                <a:spcPts val="400"/>
               </a:spcAft>
             </a:pPr>
             <a:r>
@@ -6727,14 +6386,11 @@
                 </a:solidFill>
                 <a:latin typeface="Calibri"/>
               </a:rPr>
-              <a:t>+</a:t>
+              <a:t>Redis / MySQL / COS</a:t>
             </a:r>
           </a:p>
           <a:p>
             <a:pPr>
-              <a:lnSpc>
-                <a:spcPct val="100000"/>
-              </a:lnSpc>
               <a:spcAft>
                 <a:spcPts val="400"/>
               </a:spcAft>
@@ -6746,71 +6402,14 @@
                 </a:solidFill>
                 <a:latin typeface="Calibri"/>
               </a:rPr>
-              <a:t>LangGraph4j</a:t>
-            </a:r>
-          </a:p>
-          <a:p>
-            <a:pPr>
-              <a:lnSpc>
-                <a:spcPct val="100000"/>
-              </a:lnSpc>
-              <a:spcAft>
-                <a:spcPts val="100"/>
-              </a:spcAft>
-            </a:pPr>
-            <a:r>
-              <a:rPr sz="1220">
-                <a:solidFill>
-                  <a:srgbClr val="17323B"/>
-                </a:solidFill>
-                <a:latin typeface="Calibri"/>
-              </a:rPr>
-              <a:t>Redis/MySQL/</a:t>
-            </a:r>
-          </a:p>
-          <a:p>
-            <a:pPr>
-              <a:lnSpc>
-                <a:spcPct val="100000"/>
-              </a:lnSpc>
-              <a:spcAft>
-                <a:spcPts val="100"/>
-              </a:spcAft>
-            </a:pPr>
-            <a:r>
-              <a:rPr sz="1220">
-                <a:solidFill>
-                  <a:srgbClr val="17323B"/>
-                </a:solidFill>
-                <a:latin typeface="Calibri"/>
-              </a:rPr>
-              <a:t>COS/Promethe</a:t>
-            </a:r>
-          </a:p>
-          <a:p>
-            <a:pPr>
-              <a:lnSpc>
-                <a:spcPct val="100000"/>
-              </a:lnSpc>
-              <a:spcAft>
-                <a:spcPts val="400"/>
-              </a:spcAft>
-            </a:pPr>
-            <a:r>
-              <a:rPr sz="1220">
-                <a:solidFill>
-                  <a:srgbClr val="17323B"/>
-                </a:solidFill>
-                <a:latin typeface="Calibri"/>
-              </a:rPr>
-              <a:t>us</a:t>
-            </a:r>
-          </a:p>
-        </p:txBody>
-      </p:sp>
-      <p:sp>
-        <p:nvSpPr>
-          <p:cNvPr id="42" name="TextBox 41"/>
+              <a:t>/ Prom 指标</a:t>
+            </a:r>
+          </a:p>
+        </p:txBody>
+      </p:sp>
+      <p:sp>
+        <p:nvSpPr>
+          <p:cNvPr id="38" name="TextBox 37"/>
           <p:cNvSpPr txBox="1"/>
           <p:nvPr/>
         </p:nvSpPr>
@@ -6825,16 +6424,18 @@
           <a:noFill/>
         </p:spPr>
         <p:txBody>
-          <a:bodyPr wrap="square" lIns="0" rIns="0" tIns="0" bIns="0" anchor="t"/>
+          <a:bodyPr wrap="square" lIns="0" rIns="0" tIns="0" bIns="0" anchor="t">
+            <a:spAutoFit/>
+          </a:bodyPr>
           <a:lstStyle/>
           <a:p>
             <a:pPr algn="l">
               <a:spcAft>
-                <a:spcPts val="200"/>
-              </a:spcAft>
-            </a:pPr>
-            <a:r>
-              <a:rPr sz="1050" b="0" i="0">
+                <a:spcPts val="100"/>
+              </a:spcAft>
+            </a:pPr>
+            <a:r>
+              <a:rPr sz="1050" b="0">
                 <a:solidFill>
                   <a:srgbClr val="5B7780"/>
                 </a:solidFill>
@@ -6847,7 +6448,7 @@
       </p:sp>
       <p:sp>
         <p:nvSpPr>
-          <p:cNvPr id="43" name="Oval 42"/>
+          <p:cNvPr id="39" name="Oval 38"/>
           <p:cNvSpPr/>
           <p:nvPr/>
         </p:nvSpPr>
@@ -6892,7 +6493,7 @@
       </p:sp>
       <p:sp>
         <p:nvSpPr>
-          <p:cNvPr id="44" name="Oval 43"/>
+          <p:cNvPr id="40" name="Oval 39"/>
           <p:cNvSpPr/>
           <p:nvPr/>
         </p:nvSpPr>
@@ -7023,16 +6624,18 @@
           <a:noFill/>
         </p:spPr>
         <p:txBody>
-          <a:bodyPr wrap="square" lIns="0" rIns="0" tIns="0" bIns="0" anchor="ctr"/>
+          <a:bodyPr wrap="square" lIns="0" rIns="0" tIns="0" bIns="0" anchor="ctr">
+            <a:spAutoFit/>
+          </a:bodyPr>
           <a:lstStyle/>
           <a:p>
             <a:pPr algn="ctr">
               <a:spcAft>
-                <a:spcPts val="200"/>
-              </a:spcAft>
-            </a:pPr>
-            <a:r>
-              <a:rPr sz="900" b="1" i="0">
+                <a:spcPts val="100"/>
+              </a:spcAft>
+            </a:pPr>
+            <a:r>
+              <a:rPr sz="900" b="1">
                 <a:solidFill>
                   <a:srgbClr val="FFFFFF"/>
                 </a:solidFill>
@@ -7060,16 +6663,18 @@
           <a:noFill/>
         </p:spPr>
         <p:txBody>
-          <a:bodyPr wrap="square" lIns="0" rIns="0" tIns="0" bIns="0" anchor="t"/>
+          <a:bodyPr wrap="square" lIns="0" rIns="0" tIns="0" bIns="0" anchor="t">
+            <a:spAutoFit/>
+          </a:bodyPr>
           <a:lstStyle/>
           <a:p>
             <a:pPr algn="l">
               <a:spcAft>
-                <a:spcPts val="200"/>
-              </a:spcAft>
-            </a:pPr>
-            <a:r>
-              <a:rPr sz="3400" b="1" i="0">
+                <a:spcPts val="100"/>
+              </a:spcAft>
+            </a:pPr>
+            <a:r>
+              <a:rPr sz="3400" b="1">
                 <a:solidFill>
                   <a:srgbClr val="21295C"/>
                 </a:solidFill>
@@ -7097,16 +6702,18 @@
           <a:noFill/>
         </p:spPr>
         <p:txBody>
-          <a:bodyPr wrap="square" lIns="0" rIns="0" tIns="0" bIns="0" anchor="t"/>
+          <a:bodyPr wrap="square" lIns="0" rIns="0" tIns="0" bIns="0" anchor="t">
+            <a:spAutoFit/>
+          </a:bodyPr>
           <a:lstStyle/>
           <a:p>
             <a:pPr algn="l">
               <a:spcAft>
-                <a:spcPts val="200"/>
-              </a:spcAft>
-            </a:pPr>
-            <a:r>
-              <a:rPr sz="1150" b="0" i="0">
+                <a:spcPts val="100"/>
+              </a:spcAft>
+            </a:pPr>
+            <a:r>
+              <a:rPr sz="1150" b="0">
                 <a:solidFill>
                   <a:srgbClr val="5B7780"/>
                 </a:solidFill>
@@ -7179,16 +6786,18 @@
           <a:noFill/>
         </p:spPr>
         <p:txBody>
-          <a:bodyPr wrap="square" lIns="0" rIns="0" tIns="0" bIns="0" anchor="ctr"/>
+          <a:bodyPr wrap="square" lIns="0" rIns="0" tIns="0" bIns="0" anchor="ctr">
+            <a:spAutoFit/>
+          </a:bodyPr>
           <a:lstStyle/>
           <a:p>
             <a:pPr algn="ctr">
               <a:spcAft>
-                <a:spcPts val="200"/>
-              </a:spcAft>
-            </a:pPr>
-            <a:r>
-              <a:rPr sz="1050" b="1" i="0">
+                <a:spcPts val="100"/>
+              </a:spcAft>
+            </a:pPr>
+            <a:r>
+              <a:rPr sz="1050" b="1">
                 <a:solidFill>
                   <a:srgbClr val="065A82"/>
                 </a:solidFill>
@@ -7351,16 +6960,18 @@
           <a:noFill/>
         </p:spPr>
         <p:txBody>
-          <a:bodyPr wrap="square" lIns="0" rIns="0" tIns="0" bIns="0" anchor="ctr"/>
+          <a:bodyPr wrap="square" lIns="0" rIns="0" tIns="0" bIns="0" anchor="ctr">
+            <a:spAutoFit/>
+          </a:bodyPr>
           <a:lstStyle/>
           <a:p>
             <a:pPr algn="ctr">
               <a:spcAft>
-                <a:spcPts val="200"/>
-              </a:spcAft>
-            </a:pPr>
-            <a:r>
-              <a:rPr sz="850" b="1" i="0">
+                <a:spcPts val="100"/>
+              </a:spcAft>
+            </a:pPr>
+            <a:r>
+              <a:rPr sz="850" b="1">
                 <a:solidFill>
                   <a:srgbClr val="FFFFFF"/>
                 </a:solidFill>
@@ -7388,16 +6999,18 @@
           <a:noFill/>
         </p:spPr>
         <p:txBody>
-          <a:bodyPr wrap="square" lIns="0" rIns="0" tIns="0" bIns="0" anchor="t"/>
+          <a:bodyPr wrap="square" lIns="0" rIns="0" tIns="0" bIns="0" anchor="t">
+            <a:spAutoFit/>
+          </a:bodyPr>
           <a:lstStyle/>
           <a:p>
             <a:pPr algn="l">
               <a:spcAft>
-                <a:spcPts val="200"/>
-              </a:spcAft>
-            </a:pPr>
-            <a:r>
-              <a:rPr sz="1800" b="1" i="0">
+                <a:spcPts val="100"/>
+              </a:spcAft>
+            </a:pPr>
+            <a:r>
+              <a:rPr sz="1800" b="1">
                 <a:solidFill>
                   <a:srgbClr val="21295C"/>
                 </a:solidFill>
@@ -7425,21 +7038,18 @@
           <a:noFill/>
         </p:spPr>
         <p:txBody>
-          <a:bodyPr wrap="square" lIns="73152" rIns="73152" tIns="36576" bIns="36576">
+          <a:bodyPr wrap="square" lIns="73152" rIns="73152" tIns="27432" bIns="27432">
             <a:spAutoFit/>
           </a:bodyPr>
           <a:lstStyle/>
           <a:p>
             <a:pPr>
-              <a:lnSpc>
-                <a:spcPct val="100000"/>
-              </a:lnSpc>
               <a:spcAft>
                 <a:spcPts val="400"/>
               </a:spcAft>
             </a:pPr>
             <a:r>
-              <a:rPr sz="1320">
+              <a:rPr sz="1300">
                 <a:solidFill>
                   <a:srgbClr val="17323B"/>
                 </a:solidFill>
@@ -7450,15 +7060,12 @@
           </a:p>
           <a:p>
             <a:pPr>
-              <a:lnSpc>
-                <a:spcPct val="100000"/>
-              </a:lnSpc>
               <a:spcAft>
                 <a:spcPts val="400"/>
               </a:spcAft>
             </a:pPr>
             <a:r>
-              <a:rPr sz="1320">
+              <a:rPr sz="1300">
                 <a:solidFill>
                   <a:srgbClr val="17323B"/>
                 </a:solidFill>
@@ -7469,21 +7076,18 @@
           </a:p>
           <a:p>
             <a:pPr>
-              <a:lnSpc>
-                <a:spcPct val="100000"/>
-              </a:lnSpc>
               <a:spcAft>
                 <a:spcPts val="400"/>
               </a:spcAft>
             </a:pPr>
             <a:r>
-              <a:rPr sz="1320">
+              <a:rPr sz="1300">
                 <a:solidFill>
                   <a:srgbClr val="17323B"/>
                 </a:solidFill>
                 <a:latin typeface="Calibri"/>
               </a:rPr>
-              <a:t>SSE/Flux 流式返回过程</a:t>
+              <a:t>SSE / Flux 流式返回过程</a:t>
             </a:r>
           </a:p>
         </p:txBody>
@@ -7640,16 +7244,18 @@
           <a:noFill/>
         </p:spPr>
         <p:txBody>
-          <a:bodyPr wrap="square" lIns="0" rIns="0" tIns="0" bIns="0" anchor="ctr"/>
+          <a:bodyPr wrap="square" lIns="0" rIns="0" tIns="0" bIns="0" anchor="ctr">
+            <a:spAutoFit/>
+          </a:bodyPr>
           <a:lstStyle/>
           <a:p>
             <a:pPr algn="ctr">
               <a:spcAft>
-                <a:spcPts val="200"/>
-              </a:spcAft>
-            </a:pPr>
-            <a:r>
-              <a:rPr sz="850" b="1" i="0">
+                <a:spcPts val="100"/>
+              </a:spcAft>
+            </a:pPr>
+            <a:r>
+              <a:rPr sz="850" b="1">
                 <a:solidFill>
                   <a:srgbClr val="FFFFFF"/>
                 </a:solidFill>
@@ -7677,16 +7283,18 @@
           <a:noFill/>
         </p:spPr>
         <p:txBody>
-          <a:bodyPr wrap="square" lIns="0" rIns="0" tIns="0" bIns="0" anchor="t"/>
+          <a:bodyPr wrap="square" lIns="0" rIns="0" tIns="0" bIns="0" anchor="t">
+            <a:spAutoFit/>
+          </a:bodyPr>
           <a:lstStyle/>
           <a:p>
             <a:pPr algn="l">
               <a:spcAft>
-                <a:spcPts val="200"/>
-              </a:spcAft>
-            </a:pPr>
-            <a:r>
-              <a:rPr sz="1800" b="1" i="0">
+                <a:spcPts val="100"/>
+              </a:spcAft>
+            </a:pPr>
+            <a:r>
+              <a:rPr sz="1800" b="1">
                 <a:solidFill>
                   <a:srgbClr val="21295C"/>
                 </a:solidFill>
@@ -7714,21 +7322,18 @@
           <a:noFill/>
         </p:spPr>
         <p:txBody>
-          <a:bodyPr wrap="square" lIns="73152" rIns="73152" tIns="36576" bIns="36576">
+          <a:bodyPr wrap="square" lIns="73152" rIns="73152" tIns="27432" bIns="27432">
             <a:spAutoFit/>
           </a:bodyPr>
           <a:lstStyle/>
           <a:p>
             <a:pPr>
-              <a:lnSpc>
-                <a:spcPct val="100000"/>
-              </a:lnSpc>
               <a:spcAft>
                 <a:spcPts val="400"/>
               </a:spcAft>
             </a:pPr>
             <a:r>
-              <a:rPr sz="1320">
+              <a:rPr sz="1300">
                 <a:solidFill>
                   <a:srgbClr val="17323B"/>
                 </a:solidFill>
@@ -7739,15 +7344,12 @@
           </a:p>
           <a:p>
             <a:pPr>
-              <a:lnSpc>
-                <a:spcPct val="100000"/>
-              </a:lnSpc>
               <a:spcAft>
                 <a:spcPts val="400"/>
               </a:spcAft>
             </a:pPr>
             <a:r>
-              <a:rPr sz="1320">
+              <a:rPr sz="1300">
                 <a:solidFill>
                   <a:srgbClr val="17323B"/>
                 </a:solidFill>
@@ -7758,15 +7360,12 @@
           </a:p>
           <a:p>
             <a:pPr>
-              <a:lnSpc>
-                <a:spcPct val="100000"/>
-              </a:lnSpc>
               <a:spcAft>
                 <a:spcPts val="400"/>
               </a:spcAft>
             </a:pPr>
             <a:r>
-              <a:rPr sz="1320">
+              <a:rPr sz="1300">
                 <a:solidFill>
                   <a:srgbClr val="17323B"/>
                 </a:solidFill>
@@ -7929,16 +7528,18 @@
           <a:noFill/>
         </p:spPr>
         <p:txBody>
-          <a:bodyPr wrap="square" lIns="0" rIns="0" tIns="0" bIns="0" anchor="ctr"/>
+          <a:bodyPr wrap="square" lIns="0" rIns="0" tIns="0" bIns="0" anchor="ctr">
+            <a:spAutoFit/>
+          </a:bodyPr>
           <a:lstStyle/>
           <a:p>
             <a:pPr algn="ctr">
               <a:spcAft>
-                <a:spcPts val="200"/>
-              </a:spcAft>
-            </a:pPr>
-            <a:r>
-              <a:rPr sz="850" b="1" i="0">
+                <a:spcPts val="100"/>
+              </a:spcAft>
+            </a:pPr>
+            <a:r>
+              <a:rPr sz="850" b="1">
                 <a:solidFill>
                   <a:srgbClr val="FFFFFF"/>
                 </a:solidFill>
@@ -7966,16 +7567,18 @@
           <a:noFill/>
         </p:spPr>
         <p:txBody>
-          <a:bodyPr wrap="square" lIns="0" rIns="0" tIns="0" bIns="0" anchor="t"/>
+          <a:bodyPr wrap="square" lIns="0" rIns="0" tIns="0" bIns="0" anchor="t">
+            <a:spAutoFit/>
+          </a:bodyPr>
           <a:lstStyle/>
           <a:p>
             <a:pPr algn="l">
               <a:spcAft>
-                <a:spcPts val="200"/>
-              </a:spcAft>
-            </a:pPr>
-            <a:r>
-              <a:rPr sz="1800" b="1" i="0">
+                <a:spcPts val="100"/>
+              </a:spcAft>
+            </a:pPr>
+            <a:r>
+              <a:rPr sz="1800" b="1">
                 <a:solidFill>
                   <a:srgbClr val="21295C"/>
                 </a:solidFill>
@@ -8003,21 +7606,18 @@
           <a:noFill/>
         </p:spPr>
         <p:txBody>
-          <a:bodyPr wrap="square" lIns="73152" rIns="73152" tIns="36576" bIns="36576">
+          <a:bodyPr wrap="square" lIns="73152" rIns="73152" tIns="27432" bIns="27432">
             <a:spAutoFit/>
           </a:bodyPr>
           <a:lstStyle/>
           <a:p>
             <a:pPr>
-              <a:lnSpc>
-                <a:spcPct val="100000"/>
-              </a:lnSpc>
               <a:spcAft>
                 <a:spcPts val="400"/>
               </a:spcAft>
             </a:pPr>
             <a:r>
-              <a:rPr sz="1320">
+              <a:rPr sz="1300">
                 <a:solidFill>
                   <a:srgbClr val="17323B"/>
                 </a:solidFill>
@@ -8028,15 +7628,12 @@
           </a:p>
           <a:p>
             <a:pPr>
-              <a:lnSpc>
-                <a:spcPct val="100000"/>
-              </a:lnSpc>
               <a:spcAft>
                 <a:spcPts val="400"/>
               </a:spcAft>
             </a:pPr>
             <a:r>
-              <a:rPr sz="1320">
+              <a:rPr sz="1300">
                 <a:solidFill>
                   <a:srgbClr val="17323B"/>
                 </a:solidFill>
@@ -8047,15 +7644,12 @@
           </a:p>
           <a:p>
             <a:pPr>
-              <a:lnSpc>
-                <a:spcPct val="100000"/>
-              </a:lnSpc>
               <a:spcAft>
                 <a:spcPts val="400"/>
               </a:spcAft>
             </a:pPr>
             <a:r>
-              <a:rPr sz="1320">
+              <a:rPr sz="1300">
                 <a:solidFill>
                   <a:srgbClr val="17323B"/>
                 </a:solidFill>
@@ -8218,16 +7812,18 @@
           <a:noFill/>
         </p:spPr>
         <p:txBody>
-          <a:bodyPr wrap="square" lIns="0" rIns="0" tIns="0" bIns="0" anchor="ctr"/>
+          <a:bodyPr wrap="square" lIns="0" rIns="0" tIns="0" bIns="0" anchor="ctr">
+            <a:spAutoFit/>
+          </a:bodyPr>
           <a:lstStyle/>
           <a:p>
             <a:pPr algn="ctr">
               <a:spcAft>
-                <a:spcPts val="200"/>
-              </a:spcAft>
-            </a:pPr>
-            <a:r>
-              <a:rPr sz="850" b="1" i="0">
+                <a:spcPts val="100"/>
+              </a:spcAft>
+            </a:pPr>
+            <a:r>
+              <a:rPr sz="850" b="1">
                 <a:solidFill>
                   <a:srgbClr val="FFFFFF"/>
                 </a:solidFill>
@@ -8255,16 +7851,18 @@
           <a:noFill/>
         </p:spPr>
         <p:txBody>
-          <a:bodyPr wrap="square" lIns="0" rIns="0" tIns="0" bIns="0" anchor="t"/>
+          <a:bodyPr wrap="square" lIns="0" rIns="0" tIns="0" bIns="0" anchor="t">
+            <a:spAutoFit/>
+          </a:bodyPr>
           <a:lstStyle/>
           <a:p>
             <a:pPr algn="l">
               <a:spcAft>
-                <a:spcPts val="200"/>
-              </a:spcAft>
-            </a:pPr>
-            <a:r>
-              <a:rPr sz="1800" b="1" i="0">
+                <a:spcPts val="100"/>
+              </a:spcAft>
+            </a:pPr>
+            <a:r>
+              <a:rPr sz="1800" b="1">
                 <a:solidFill>
                   <a:srgbClr val="21295C"/>
                 </a:solidFill>
@@ -8292,21 +7890,18 @@
           <a:noFill/>
         </p:spPr>
         <p:txBody>
-          <a:bodyPr wrap="square" lIns="73152" rIns="73152" tIns="36576" bIns="36576">
+          <a:bodyPr wrap="square" lIns="73152" rIns="73152" tIns="27432" bIns="27432">
             <a:spAutoFit/>
           </a:bodyPr>
           <a:lstStyle/>
           <a:p>
             <a:pPr>
-              <a:lnSpc>
-                <a:spcPct val="100000"/>
-              </a:lnSpc>
               <a:spcAft>
                 <a:spcPts val="400"/>
               </a:spcAft>
             </a:pPr>
             <a:r>
-              <a:rPr sz="1320">
+              <a:rPr sz="1300">
                 <a:solidFill>
                   <a:srgbClr val="17323B"/>
                 </a:solidFill>
@@ -8317,15 +7912,12 @@
           </a:p>
           <a:p>
             <a:pPr>
-              <a:lnSpc>
-                <a:spcPct val="100000"/>
-              </a:lnSpc>
               <a:spcAft>
                 <a:spcPts val="400"/>
               </a:spcAft>
             </a:pPr>
             <a:r>
-              <a:rPr sz="1320">
+              <a:rPr sz="1300">
                 <a:solidFill>
                   <a:srgbClr val="17323B"/>
                 </a:solidFill>
@@ -8336,40 +7928,18 @@
           </a:p>
           <a:p>
             <a:pPr>
-              <a:lnSpc>
-                <a:spcPct val="100000"/>
-              </a:lnSpc>
-              <a:spcAft>
-                <a:spcPts val="100"/>
-              </a:spcAft>
-            </a:pPr>
-            <a:r>
-              <a:rPr sz="1320">
+              <a:spcAft>
+                <a:spcPts val="400"/>
+              </a:spcAft>
+            </a:pPr>
+            <a:r>
+              <a:rPr sz="1300">
                 <a:solidFill>
                   <a:srgbClr val="17323B"/>
                 </a:solidFill>
                 <a:latin typeface="Calibri"/>
               </a:rPr>
-              <a:t>Actuator +</a:t>
-            </a:r>
-          </a:p>
-          <a:p>
-            <a:pPr>
-              <a:lnSpc>
-                <a:spcPct val="100000"/>
-              </a:lnSpc>
-              <a:spcAft>
-                <a:spcPts val="400"/>
-              </a:spcAft>
-            </a:pPr>
-            <a:r>
-              <a:rPr sz="1320">
-                <a:solidFill>
-                  <a:srgbClr val="17323B"/>
-                </a:solidFill>
-                <a:latin typeface="Calibri"/>
-              </a:rPr>
-              <a:t>Prometheus 指标出口</a:t>
+              <a:t>Actuator + Prom 指标出口</a:t>
             </a:r>
           </a:p>
         </p:txBody>
@@ -8391,16 +7961,18 @@
           <a:noFill/>
         </p:spPr>
         <p:txBody>
-          <a:bodyPr wrap="square" lIns="0" rIns="0" tIns="0" bIns="0" anchor="t"/>
+          <a:bodyPr wrap="square" lIns="0" rIns="0" tIns="0" bIns="0" anchor="t">
+            <a:spAutoFit/>
+          </a:bodyPr>
           <a:lstStyle/>
           <a:p>
             <a:pPr algn="l">
               <a:spcAft>
-                <a:spcPts val="200"/>
-              </a:spcAft>
-            </a:pPr>
-            <a:r>
-              <a:rPr sz="1050" b="0" i="0">
+                <a:spcPts val="100"/>
+              </a:spcAft>
+            </a:pPr>
+            <a:r>
+              <a:rPr sz="1050" b="0">
                 <a:solidFill>
                   <a:srgbClr val="5B7780"/>
                 </a:solidFill>
@@ -8589,16 +8161,18 @@
           <a:noFill/>
         </p:spPr>
         <p:txBody>
-          <a:bodyPr wrap="square" lIns="0" rIns="0" tIns="0" bIns="0" anchor="ctr"/>
+          <a:bodyPr wrap="square" lIns="0" rIns="0" tIns="0" bIns="0" anchor="ctr">
+            <a:spAutoFit/>
+          </a:bodyPr>
           <a:lstStyle/>
           <a:p>
             <a:pPr algn="ctr">
               <a:spcAft>
-                <a:spcPts val="200"/>
-              </a:spcAft>
-            </a:pPr>
-            <a:r>
-              <a:rPr sz="900" b="1" i="0">
+                <a:spcPts val="100"/>
+              </a:spcAft>
+            </a:pPr>
+            <a:r>
+              <a:rPr sz="900" b="1">
                 <a:solidFill>
                   <a:srgbClr val="FFFFFF"/>
                 </a:solidFill>
@@ -8626,16 +8200,18 @@
           <a:noFill/>
         </p:spPr>
         <p:txBody>
-          <a:bodyPr wrap="square" lIns="0" rIns="0" tIns="0" bIns="0" anchor="t"/>
+          <a:bodyPr wrap="square" lIns="0" rIns="0" tIns="0" bIns="0" anchor="t">
+            <a:spAutoFit/>
+          </a:bodyPr>
           <a:lstStyle/>
           <a:p>
             <a:pPr algn="l">
               <a:spcAft>
-                <a:spcPts val="200"/>
-              </a:spcAft>
-            </a:pPr>
-            <a:r>
-              <a:rPr sz="3400" b="1" i="0">
+                <a:spcPts val="100"/>
+              </a:spcAft>
+            </a:pPr>
+            <a:r>
+              <a:rPr sz="3400" b="1">
                 <a:solidFill>
                   <a:srgbClr val="21295C"/>
                 </a:solidFill>
@@ -8663,16 +8239,18 @@
           <a:noFill/>
         </p:spPr>
         <p:txBody>
-          <a:bodyPr wrap="square" lIns="0" rIns="0" tIns="0" bIns="0" anchor="t"/>
+          <a:bodyPr wrap="square" lIns="0" rIns="0" tIns="0" bIns="0" anchor="t">
+            <a:spAutoFit/>
+          </a:bodyPr>
           <a:lstStyle/>
           <a:p>
             <a:pPr algn="l">
               <a:spcAft>
-                <a:spcPts val="200"/>
-              </a:spcAft>
-            </a:pPr>
-            <a:r>
-              <a:rPr sz="1150" b="0" i="0">
+                <a:spcPts val="100"/>
+              </a:spcAft>
+            </a:pPr>
+            <a:r>
+              <a:rPr sz="1150" b="0">
                 <a:solidFill>
                   <a:srgbClr val="5B7780"/>
                 </a:solidFill>
@@ -8745,16 +8323,18 @@
           <a:noFill/>
         </p:spPr>
         <p:txBody>
-          <a:bodyPr wrap="square" lIns="0" rIns="0" tIns="0" bIns="0" anchor="ctr"/>
+          <a:bodyPr wrap="square" lIns="0" rIns="0" tIns="0" bIns="0" anchor="ctr">
+            <a:spAutoFit/>
+          </a:bodyPr>
           <a:lstStyle/>
           <a:p>
             <a:pPr algn="ctr">
               <a:spcAft>
-                <a:spcPts val="200"/>
-              </a:spcAft>
-            </a:pPr>
-            <a:r>
-              <a:rPr sz="1050" b="1" i="0">
+                <a:spcPts val="100"/>
+              </a:spcAft>
+            </a:pPr>
+            <a:r>
+              <a:rPr sz="1050" b="1">
                 <a:solidFill>
                   <a:srgbClr val="065A82"/>
                 </a:solidFill>
@@ -8827,16 +8407,18 @@
           <a:noFill/>
         </p:spPr>
         <p:txBody>
-          <a:bodyPr wrap="square" lIns="0" rIns="0" tIns="0" bIns="0" anchor="t"/>
+          <a:bodyPr wrap="square" lIns="0" rIns="0" tIns="0" bIns="0" anchor="t">
+            <a:spAutoFit/>
+          </a:bodyPr>
           <a:lstStyle/>
           <a:p>
             <a:pPr algn="ctr">
               <a:spcAft>
-                <a:spcPts val="200"/>
-              </a:spcAft>
-            </a:pPr>
-            <a:r>
-              <a:rPr sz="1500" b="1" i="0">
+                <a:spcPts val="100"/>
+              </a:spcAft>
+            </a:pPr>
+            <a:r>
+              <a:rPr sz="1500" b="1">
                 <a:solidFill>
                   <a:srgbClr val="21295C"/>
                 </a:solidFill>
@@ -8864,16 +8446,18 @@
           <a:noFill/>
         </p:spPr>
         <p:txBody>
-          <a:bodyPr wrap="square" lIns="0" rIns="0" tIns="0" bIns="0" anchor="t"/>
+          <a:bodyPr wrap="square" lIns="0" rIns="0" tIns="0" bIns="0" anchor="t">
+            <a:spAutoFit/>
+          </a:bodyPr>
           <a:lstStyle/>
           <a:p>
             <a:pPr algn="ctr">
               <a:spcAft>
-                <a:spcPts val="200"/>
-              </a:spcAft>
-            </a:pPr>
-            <a:r>
-              <a:rPr sz="1050" b="0" i="0">
+                <a:spcPts val="100"/>
+              </a:spcAft>
+            </a:pPr>
+            <a:r>
+              <a:rPr sz="1050" b="0">
                 <a:solidFill>
                   <a:srgbClr val="5B7780"/>
                 </a:solidFill>
@@ -8981,16 +8565,18 @@
           <a:noFill/>
         </p:spPr>
         <p:txBody>
-          <a:bodyPr wrap="square" lIns="0" rIns="0" tIns="0" bIns="0" anchor="t"/>
+          <a:bodyPr wrap="square" lIns="0" rIns="0" tIns="0" bIns="0" anchor="t">
+            <a:spAutoFit/>
+          </a:bodyPr>
           <a:lstStyle/>
           <a:p>
             <a:pPr algn="ctr">
               <a:spcAft>
-                <a:spcPts val="200"/>
-              </a:spcAft>
-            </a:pPr>
-            <a:r>
-              <a:rPr sz="1500" b="1" i="0">
+                <a:spcPts val="100"/>
+              </a:spcAft>
+            </a:pPr>
+            <a:r>
+              <a:rPr sz="1500" b="1">
                 <a:solidFill>
                   <a:srgbClr val="21295C"/>
                 </a:solidFill>
@@ -9018,16 +8604,18 @@
           <a:noFill/>
         </p:spPr>
         <p:txBody>
-          <a:bodyPr wrap="square" lIns="0" rIns="0" tIns="0" bIns="0" anchor="t"/>
+          <a:bodyPr wrap="square" lIns="0" rIns="0" tIns="0" bIns="0" anchor="t">
+            <a:spAutoFit/>
+          </a:bodyPr>
           <a:lstStyle/>
           <a:p>
             <a:pPr algn="ctr">
               <a:spcAft>
-                <a:spcPts val="200"/>
-              </a:spcAft>
-            </a:pPr>
-            <a:r>
-              <a:rPr sz="1050" b="0" i="0">
+                <a:spcPts val="100"/>
+              </a:spcAft>
+            </a:pPr>
+            <a:r>
+              <a:rPr sz="1050" b="0">
                 <a:solidFill>
                   <a:srgbClr val="5B7780"/>
                 </a:solidFill>
@@ -9135,16 +8723,18 @@
           <a:noFill/>
         </p:spPr>
         <p:txBody>
-          <a:bodyPr wrap="square" lIns="0" rIns="0" tIns="0" bIns="0" anchor="t"/>
+          <a:bodyPr wrap="square" lIns="0" rIns="0" tIns="0" bIns="0" anchor="t">
+            <a:spAutoFit/>
+          </a:bodyPr>
           <a:lstStyle/>
           <a:p>
             <a:pPr algn="ctr">
               <a:spcAft>
-                <a:spcPts val="200"/>
-              </a:spcAft>
-            </a:pPr>
-            <a:r>
-              <a:rPr sz="1500" b="1" i="0">
+                <a:spcPts val="100"/>
+              </a:spcAft>
+            </a:pPr>
+            <a:r>
+              <a:rPr sz="1500" b="1">
                 <a:solidFill>
                   <a:srgbClr val="21295C"/>
                 </a:solidFill>
@@ -9172,16 +8762,18 @@
           <a:noFill/>
         </p:spPr>
         <p:txBody>
-          <a:bodyPr wrap="square" lIns="0" rIns="0" tIns="0" bIns="0" anchor="t"/>
+          <a:bodyPr wrap="square" lIns="0" rIns="0" tIns="0" bIns="0" anchor="t">
+            <a:spAutoFit/>
+          </a:bodyPr>
           <a:lstStyle/>
           <a:p>
             <a:pPr algn="ctr">
               <a:spcAft>
-                <a:spcPts val="200"/>
-              </a:spcAft>
-            </a:pPr>
-            <a:r>
-              <a:rPr sz="1050" b="0" i="0">
+                <a:spcPts val="100"/>
+              </a:spcAft>
+            </a:pPr>
+            <a:r>
+              <a:rPr sz="1050" b="0">
                 <a:solidFill>
                   <a:srgbClr val="5B7780"/>
                 </a:solidFill>
@@ -9193,11 +8785,11 @@
           <a:p>
             <a:pPr algn="ctr">
               <a:spcAft>
-                <a:spcPts val="200"/>
-              </a:spcAft>
-            </a:pPr>
-            <a:r>
-              <a:rPr sz="1050" b="0" i="0">
+                <a:spcPts val="100"/>
+              </a:spcAft>
+            </a:pPr>
+            <a:r>
+              <a:rPr sz="1050" b="0">
                 <a:solidFill>
                   <a:srgbClr val="5B7780"/>
                 </a:solidFill>
@@ -9305,16 +8897,18 @@
           <a:noFill/>
         </p:spPr>
         <p:txBody>
-          <a:bodyPr wrap="square" lIns="0" rIns="0" tIns="0" bIns="0" anchor="t"/>
+          <a:bodyPr wrap="square" lIns="0" rIns="0" tIns="0" bIns="0" anchor="t">
+            <a:spAutoFit/>
+          </a:bodyPr>
           <a:lstStyle/>
           <a:p>
             <a:pPr algn="ctr">
               <a:spcAft>
-                <a:spcPts val="200"/>
-              </a:spcAft>
-            </a:pPr>
-            <a:r>
-              <a:rPr sz="1500" b="1" i="0">
+                <a:spcPts val="100"/>
+              </a:spcAft>
+            </a:pPr>
+            <a:r>
+              <a:rPr sz="1500" b="1">
                 <a:solidFill>
                   <a:srgbClr val="21295C"/>
                 </a:solidFill>
@@ -9342,16 +8936,18 @@
           <a:noFill/>
         </p:spPr>
         <p:txBody>
-          <a:bodyPr wrap="square" lIns="0" rIns="0" tIns="0" bIns="0" anchor="t"/>
+          <a:bodyPr wrap="square" lIns="0" rIns="0" tIns="0" bIns="0" anchor="t">
+            <a:spAutoFit/>
+          </a:bodyPr>
           <a:lstStyle/>
           <a:p>
             <a:pPr algn="ctr">
               <a:spcAft>
-                <a:spcPts val="200"/>
-              </a:spcAft>
-            </a:pPr>
-            <a:r>
-              <a:rPr sz="1050" b="0" i="0">
+                <a:spcPts val="100"/>
+              </a:spcAft>
+            </a:pPr>
+            <a:r>
+              <a:rPr sz="1050" b="0">
                 <a:solidFill>
                   <a:srgbClr val="5B7780"/>
                 </a:solidFill>
@@ -9459,16 +9055,18 @@
           <a:noFill/>
         </p:spPr>
         <p:txBody>
-          <a:bodyPr wrap="square" lIns="0" rIns="0" tIns="0" bIns="0" anchor="t"/>
+          <a:bodyPr wrap="square" lIns="0" rIns="0" tIns="0" bIns="0" anchor="t">
+            <a:spAutoFit/>
+          </a:bodyPr>
           <a:lstStyle/>
           <a:p>
             <a:pPr algn="ctr">
               <a:spcAft>
-                <a:spcPts val="200"/>
-              </a:spcAft>
-            </a:pPr>
-            <a:r>
-              <a:rPr sz="1500" b="1" i="0">
+                <a:spcPts val="100"/>
+              </a:spcAft>
+            </a:pPr>
+            <a:r>
+              <a:rPr sz="1500" b="1">
                 <a:solidFill>
                   <a:srgbClr val="21295C"/>
                 </a:solidFill>
@@ -9496,16 +9094,18 @@
           <a:noFill/>
         </p:spPr>
         <p:txBody>
-          <a:bodyPr wrap="square" lIns="0" rIns="0" tIns="0" bIns="0" anchor="t"/>
+          <a:bodyPr wrap="square" lIns="0" rIns="0" tIns="0" bIns="0" anchor="t">
+            <a:spAutoFit/>
+          </a:bodyPr>
           <a:lstStyle/>
           <a:p>
             <a:pPr algn="ctr">
               <a:spcAft>
-                <a:spcPts val="200"/>
-              </a:spcAft>
-            </a:pPr>
-            <a:r>
-              <a:rPr sz="1050" b="0" i="0">
+                <a:spcPts val="100"/>
+              </a:spcAft>
+            </a:pPr>
+            <a:r>
+              <a:rPr sz="1050" b="0">
                 <a:solidFill>
                   <a:srgbClr val="5B7780"/>
                 </a:solidFill>
@@ -9517,17 +9117,17 @@
           <a:p>
             <a:pPr algn="ctr">
               <a:spcAft>
-                <a:spcPts val="200"/>
-              </a:spcAft>
-            </a:pPr>
-            <a:r>
-              <a:rPr sz="1050" b="0" i="0">
+                <a:spcPts val="100"/>
+              </a:spcAft>
+            </a:pPr>
+            <a:r>
+              <a:rPr sz="1050" b="0">
                 <a:solidFill>
                   <a:srgbClr val="5B7780"/>
                 </a:solidFill>
                 <a:latin typeface="Calibri"/>
               </a:rPr>
-              <a:t>Prometheus</a:t>
+              <a:t>Prom 指标</a:t>
             </a:r>
           </a:p>
         </p:txBody>
@@ -9684,16 +9284,18 @@
           <a:noFill/>
         </p:spPr>
         <p:txBody>
-          <a:bodyPr wrap="square" lIns="0" rIns="0" tIns="0" bIns="0" anchor="ctr"/>
+          <a:bodyPr wrap="square" lIns="0" rIns="0" tIns="0" bIns="0" anchor="ctr">
+            <a:spAutoFit/>
+          </a:bodyPr>
           <a:lstStyle/>
           <a:p>
             <a:pPr algn="ctr">
               <a:spcAft>
-                <a:spcPts val="200"/>
-              </a:spcAft>
-            </a:pPr>
-            <a:r>
-              <a:rPr sz="850" b="1" i="0">
+                <a:spcPts val="100"/>
+              </a:spcAft>
+            </a:pPr>
+            <a:r>
+              <a:rPr sz="850" b="1">
                 <a:solidFill>
                   <a:srgbClr val="FFFFFF"/>
                 </a:solidFill>
@@ -9721,16 +9323,18 @@
           <a:noFill/>
         </p:spPr>
         <p:txBody>
-          <a:bodyPr wrap="square" lIns="0" rIns="0" tIns="0" bIns="0" anchor="t"/>
+          <a:bodyPr wrap="square" lIns="0" rIns="0" tIns="0" bIns="0" anchor="t">
+            <a:spAutoFit/>
+          </a:bodyPr>
           <a:lstStyle/>
           <a:p>
             <a:pPr algn="l">
               <a:spcAft>
-                <a:spcPts val="200"/>
-              </a:spcAft>
-            </a:pPr>
-            <a:r>
-              <a:rPr sz="1800" b="1" i="0">
+                <a:spcPts val="100"/>
+              </a:spcAft>
+            </a:pPr>
+            <a:r>
+              <a:rPr sz="1800" b="1">
                 <a:solidFill>
                   <a:srgbClr val="21295C"/>
                 </a:solidFill>
@@ -9758,15 +9362,12 @@
           <a:noFill/>
         </p:spPr>
         <p:txBody>
-          <a:bodyPr wrap="square" lIns="73152" rIns="73152" tIns="36576" bIns="36576">
+          <a:bodyPr wrap="square" lIns="73152" rIns="73152" tIns="27432" bIns="27432">
             <a:spAutoFit/>
           </a:bodyPr>
           <a:lstStyle/>
           <a:p>
             <a:pPr>
-              <a:lnSpc>
-                <a:spcPct val="100000"/>
-              </a:lnSpc>
               <a:spcAft>
                 <a:spcPts val="400"/>
               </a:spcAft>
@@ -9783,9 +9384,6 @@
           </a:p>
           <a:p>
             <a:pPr>
-              <a:lnSpc>
-                <a:spcPct val="100000"/>
-              </a:lnSpc>
               <a:spcAft>
                 <a:spcPts val="400"/>
               </a:spcAft>
@@ -9802,9 +9400,6 @@
           </a:p>
           <a:p>
             <a:pPr>
-              <a:lnSpc>
-                <a:spcPct val="100000"/>
-              </a:lnSpc>
               <a:spcAft>
                 <a:spcPts val="400"/>
               </a:spcAft>
@@ -9821,11 +9416,8 @@
           </a:p>
           <a:p>
             <a:pPr>
-              <a:lnSpc>
-                <a:spcPct val="100000"/>
-              </a:lnSpc>
-              <a:spcAft>
-                <a:spcPts val="100"/>
+              <a:spcAft>
+                <a:spcPts val="400"/>
               </a:spcAft>
             </a:pPr>
             <a:r>
@@ -9835,14 +9427,11 @@
                 </a:solidFill>
                 <a:latin typeface="Calibri"/>
               </a:rPr>
-              <a:t>user / app / ai /</a:t>
+              <a:t>user / app / ai / screenshot：领</a:t>
             </a:r>
           </a:p>
           <a:p>
             <a:pPr>
-              <a:lnSpc>
-                <a:spcPct val="100000"/>
-              </a:lnSpc>
               <a:spcAft>
                 <a:spcPts val="400"/>
               </a:spcAft>
@@ -9854,7 +9443,7 @@
                 </a:solidFill>
                 <a:latin typeface="Calibri"/>
               </a:rPr>
-              <a:t>screenshot：领域服务</a:t>
+              <a:t>域服务</a:t>
             </a:r>
           </a:p>
         </p:txBody>
@@ -10011,16 +9600,18 @@
           <a:noFill/>
         </p:spPr>
         <p:txBody>
-          <a:bodyPr wrap="square" lIns="0" rIns="0" tIns="0" bIns="0" anchor="ctr"/>
+          <a:bodyPr wrap="square" lIns="0" rIns="0" tIns="0" bIns="0" anchor="ctr">
+            <a:spAutoFit/>
+          </a:bodyPr>
           <a:lstStyle/>
           <a:p>
             <a:pPr algn="ctr">
               <a:spcAft>
-                <a:spcPts val="200"/>
-              </a:spcAft>
-            </a:pPr>
-            <a:r>
-              <a:rPr sz="850" b="1" i="0">
+                <a:spcPts val="100"/>
+              </a:spcAft>
+            </a:pPr>
+            <a:r>
+              <a:rPr sz="850" b="1">
                 <a:solidFill>
                   <a:srgbClr val="FFFFFF"/>
                 </a:solidFill>
@@ -10048,16 +9639,18 @@
           <a:noFill/>
         </p:spPr>
         <p:txBody>
-          <a:bodyPr wrap="square" lIns="0" rIns="0" tIns="0" bIns="0" anchor="t"/>
+          <a:bodyPr wrap="square" lIns="0" rIns="0" tIns="0" bIns="0" anchor="t">
+            <a:spAutoFit/>
+          </a:bodyPr>
           <a:lstStyle/>
           <a:p>
             <a:pPr algn="l">
               <a:spcAft>
-                <a:spcPts val="200"/>
-              </a:spcAft>
-            </a:pPr>
-            <a:r>
-              <a:rPr sz="1800" b="1" i="0">
+                <a:spcPts val="100"/>
+              </a:spcAft>
+            </a:pPr>
+            <a:r>
+              <a:rPr sz="1800" b="1">
                 <a:solidFill>
                   <a:srgbClr val="21295C"/>
                 </a:solidFill>
@@ -10085,15 +9678,12 @@
           <a:noFill/>
         </p:spPr>
         <p:txBody>
-          <a:bodyPr wrap="square" lIns="73152" rIns="73152" tIns="36576" bIns="36576">
+          <a:bodyPr wrap="square" lIns="73152" rIns="73152" tIns="27432" bIns="27432">
             <a:spAutoFit/>
           </a:bodyPr>
           <a:lstStyle/>
           <a:p>
             <a:pPr>
-              <a:lnSpc>
-                <a:spcPct val="100000"/>
-              </a:lnSpc>
               <a:spcAft>
                 <a:spcPts val="400"/>
               </a:spcAft>
@@ -10110,9 +9700,6 @@
           </a:p>
           <a:p>
             <a:pPr>
-              <a:lnSpc>
-                <a:spcPct val="100000"/>
-              </a:lnSpc>
               <a:spcAft>
                 <a:spcPts val="400"/>
               </a:spcAft>
@@ -10129,11 +9716,8 @@
           </a:p>
           <a:p>
             <a:pPr>
-              <a:lnSpc>
-                <a:spcPct val="100000"/>
-              </a:lnSpc>
-              <a:spcAft>
-                <a:spcPts val="100"/>
+              <a:spcAft>
+                <a:spcPts val="400"/>
               </a:spcAft>
             </a:pPr>
             <a:r>
@@ -10143,33 +9727,11 @@
                 </a:solidFill>
                 <a:latin typeface="Calibri"/>
               </a:rPr>
-              <a:t>COS、Selenium/Chrome</a:t>
+              <a:t>COS、Selenium 支撑部署截图</a:t>
             </a:r>
           </a:p>
           <a:p>
             <a:pPr>
-              <a:lnSpc>
-                <a:spcPct val="100000"/>
-              </a:lnSpc>
-              <a:spcAft>
-                <a:spcPts val="400"/>
-              </a:spcAft>
-            </a:pPr>
-            <a:r>
-              <a:rPr sz="1300">
-                <a:solidFill>
-                  <a:srgbClr val="17323B"/>
-                </a:solidFill>
-                <a:latin typeface="Calibri"/>
-              </a:rPr>
-              <a:t>支撑部署截图</a:t>
-            </a:r>
-          </a:p>
-          <a:p>
-            <a:pPr>
-              <a:lnSpc>
-                <a:spcPct val="100000"/>
-              </a:lnSpc>
               <a:spcAft>
                 <a:spcPts val="400"/>
               </a:spcAft>
@@ -10203,16 +9765,18 @@
           <a:noFill/>
         </p:spPr>
         <p:txBody>
-          <a:bodyPr wrap="square" lIns="0" rIns="0" tIns="0" bIns="0" anchor="t"/>
+          <a:bodyPr wrap="square" lIns="0" rIns="0" tIns="0" bIns="0" anchor="t">
+            <a:spAutoFit/>
+          </a:bodyPr>
           <a:lstStyle/>
           <a:p>
             <a:pPr algn="l">
               <a:spcAft>
-                <a:spcPts val="200"/>
-              </a:spcAft>
-            </a:pPr>
-            <a:r>
-              <a:rPr sz="1050" b="0" i="0">
+                <a:spcPts val="100"/>
+              </a:spcAft>
+            </a:pPr>
+            <a:r>
+              <a:rPr sz="1050" b="0">
                 <a:solidFill>
                   <a:srgbClr val="5B7780"/>
                 </a:solidFill>
@@ -10401,16 +9965,18 @@
           <a:noFill/>
         </p:spPr>
         <p:txBody>
-          <a:bodyPr wrap="square" lIns="0" rIns="0" tIns="0" bIns="0" anchor="ctr"/>
+          <a:bodyPr wrap="square" lIns="0" rIns="0" tIns="0" bIns="0" anchor="ctr">
+            <a:spAutoFit/>
+          </a:bodyPr>
           <a:lstStyle/>
           <a:p>
             <a:pPr algn="ctr">
               <a:spcAft>
-                <a:spcPts val="200"/>
-              </a:spcAft>
-            </a:pPr>
-            <a:r>
-              <a:rPr sz="900" b="1" i="0">
+                <a:spcPts val="100"/>
+              </a:spcAft>
+            </a:pPr>
+            <a:r>
+              <a:rPr sz="900" b="1">
                 <a:solidFill>
                   <a:srgbClr val="FFFFFF"/>
                 </a:solidFill>
@@ -10438,16 +10004,18 @@
           <a:noFill/>
         </p:spPr>
         <p:txBody>
-          <a:bodyPr wrap="square" lIns="0" rIns="0" tIns="0" bIns="0" anchor="t"/>
+          <a:bodyPr wrap="square" lIns="0" rIns="0" tIns="0" bIns="0" anchor="t">
+            <a:spAutoFit/>
+          </a:bodyPr>
           <a:lstStyle/>
           <a:p>
             <a:pPr algn="l">
               <a:spcAft>
-                <a:spcPts val="200"/>
-              </a:spcAft>
-            </a:pPr>
-            <a:r>
-              <a:rPr sz="3400" b="1" i="0">
+                <a:spcPts val="100"/>
+              </a:spcAft>
+            </a:pPr>
+            <a:r>
+              <a:rPr sz="3400" b="1">
                 <a:solidFill>
                   <a:srgbClr val="21295C"/>
                 </a:solidFill>
@@ -10475,16 +10043,18 @@
           <a:noFill/>
         </p:spPr>
         <p:txBody>
-          <a:bodyPr wrap="square" lIns="0" rIns="0" tIns="0" bIns="0" anchor="t"/>
+          <a:bodyPr wrap="square" lIns="0" rIns="0" tIns="0" bIns="0" anchor="t">
+            <a:spAutoFit/>
+          </a:bodyPr>
           <a:lstStyle/>
           <a:p>
             <a:pPr algn="l">
               <a:spcAft>
-                <a:spcPts val="200"/>
-              </a:spcAft>
-            </a:pPr>
-            <a:r>
-              <a:rPr sz="1150" b="0" i="0">
+                <a:spcPts val="100"/>
+              </a:spcAft>
+            </a:pPr>
+            <a:r>
+              <a:rPr sz="1150" b="0">
                 <a:solidFill>
                   <a:srgbClr val="5B7780"/>
                 </a:solidFill>
@@ -10557,16 +10127,18 @@
           <a:noFill/>
         </p:spPr>
         <p:txBody>
-          <a:bodyPr wrap="square" lIns="0" rIns="0" tIns="0" bIns="0" anchor="ctr"/>
+          <a:bodyPr wrap="square" lIns="0" rIns="0" tIns="0" bIns="0" anchor="ctr">
+            <a:spAutoFit/>
+          </a:bodyPr>
           <a:lstStyle/>
           <a:p>
             <a:pPr algn="ctr">
               <a:spcAft>
-                <a:spcPts val="200"/>
-              </a:spcAft>
-            </a:pPr>
-            <a:r>
-              <a:rPr sz="1050" b="1" i="0">
+                <a:spcPts val="100"/>
+              </a:spcAft>
+            </a:pPr>
+            <a:r>
+              <a:rPr sz="1050" b="1">
                 <a:solidFill>
                   <a:srgbClr val="065A82"/>
                 </a:solidFill>
@@ -10674,16 +10246,18 @@
           <a:noFill/>
         </p:spPr>
         <p:txBody>
-          <a:bodyPr wrap="square" lIns="0" rIns="0" tIns="0" bIns="0" anchor="t"/>
+          <a:bodyPr wrap="square" lIns="0" rIns="0" tIns="0" bIns="0" anchor="t">
+            <a:spAutoFit/>
+          </a:bodyPr>
           <a:lstStyle/>
           <a:p>
             <a:pPr algn="l">
               <a:spcAft>
-                <a:spcPts val="200"/>
-              </a:spcAft>
-            </a:pPr>
-            <a:r>
-              <a:rPr sz="1120" b="1" i="0">
+                <a:spcPts val="100"/>
+              </a:spcAft>
+            </a:pPr>
+            <a:r>
+              <a:rPr sz="1120" b="1">
                 <a:solidFill>
                   <a:srgbClr val="065A82"/>
                 </a:solidFill>
@@ -10711,16 +10285,18 @@
           <a:noFill/>
         </p:spPr>
         <p:txBody>
-          <a:bodyPr wrap="square" lIns="0" rIns="0" tIns="0" bIns="0" anchor="t"/>
+          <a:bodyPr wrap="square" lIns="0" rIns="0" tIns="0" bIns="0" anchor="t">
+            <a:spAutoFit/>
+          </a:bodyPr>
           <a:lstStyle/>
           <a:p>
             <a:pPr algn="l">
               <a:spcAft>
-                <a:spcPts val="200"/>
-              </a:spcAft>
-            </a:pPr>
-            <a:r>
-              <a:rPr sz="1550" b="1" i="0">
+                <a:spcPts val="100"/>
+              </a:spcAft>
+            </a:pPr>
+            <a:r>
+              <a:rPr sz="1550" b="1">
                 <a:solidFill>
                   <a:srgbClr val="21295C"/>
                 </a:solidFill>
@@ -10748,16 +10324,18 @@
           <a:noFill/>
         </p:spPr>
         <p:txBody>
-          <a:bodyPr wrap="square" lIns="0" rIns="0" tIns="0" bIns="0" anchor="t"/>
+          <a:bodyPr wrap="square" lIns="0" rIns="0" tIns="0" bIns="0" anchor="t">
+            <a:spAutoFit/>
+          </a:bodyPr>
           <a:lstStyle/>
           <a:p>
             <a:pPr algn="l">
               <a:spcAft>
-                <a:spcPts val="200"/>
-              </a:spcAft>
-            </a:pPr>
-            <a:r>
-              <a:rPr sz="1150" b="0" i="0">
+                <a:spcPts val="100"/>
+              </a:spcAft>
+            </a:pPr>
+            <a:r>
+              <a:rPr sz="1150" b="0">
                 <a:solidFill>
                   <a:srgbClr val="5B7780"/>
                 </a:solidFill>
@@ -10865,16 +10443,18 @@
           <a:noFill/>
         </p:spPr>
         <p:txBody>
-          <a:bodyPr wrap="square" lIns="0" rIns="0" tIns="0" bIns="0" anchor="t"/>
+          <a:bodyPr wrap="square" lIns="0" rIns="0" tIns="0" bIns="0" anchor="t">
+            <a:spAutoFit/>
+          </a:bodyPr>
           <a:lstStyle/>
           <a:p>
             <a:pPr algn="l">
               <a:spcAft>
-                <a:spcPts val="200"/>
-              </a:spcAft>
-            </a:pPr>
-            <a:r>
-              <a:rPr sz="1120" b="1" i="0">
+                <a:spcPts val="100"/>
+              </a:spcAft>
+            </a:pPr>
+            <a:r>
+              <a:rPr sz="1120" b="1">
                 <a:solidFill>
                   <a:srgbClr val="065A82"/>
                 </a:solidFill>
@@ -10902,16 +10482,18 @@
           <a:noFill/>
         </p:spPr>
         <p:txBody>
-          <a:bodyPr wrap="square" lIns="0" rIns="0" tIns="0" bIns="0" anchor="t"/>
+          <a:bodyPr wrap="square" lIns="0" rIns="0" tIns="0" bIns="0" anchor="t">
+            <a:spAutoFit/>
+          </a:bodyPr>
           <a:lstStyle/>
           <a:p>
             <a:pPr algn="l">
               <a:spcAft>
-                <a:spcPts val="200"/>
-              </a:spcAft>
-            </a:pPr>
-            <a:r>
-              <a:rPr sz="1550" b="1" i="0">
+                <a:spcPts val="100"/>
+              </a:spcAft>
+            </a:pPr>
+            <a:r>
+              <a:rPr sz="1550" b="1">
                 <a:solidFill>
                   <a:srgbClr val="21295C"/>
                 </a:solidFill>
@@ -10939,16 +10521,18 @@
           <a:noFill/>
         </p:spPr>
         <p:txBody>
-          <a:bodyPr wrap="square" lIns="0" rIns="0" tIns="0" bIns="0" anchor="t"/>
+          <a:bodyPr wrap="square" lIns="0" rIns="0" tIns="0" bIns="0" anchor="t">
+            <a:spAutoFit/>
+          </a:bodyPr>
           <a:lstStyle/>
           <a:p>
             <a:pPr algn="l">
               <a:spcAft>
-                <a:spcPts val="200"/>
-              </a:spcAft>
-            </a:pPr>
-            <a:r>
-              <a:rPr sz="1150" b="0" i="0">
+                <a:spcPts val="100"/>
+              </a:spcAft>
+            </a:pPr>
+            <a:r>
+              <a:rPr sz="1150" b="0">
                 <a:solidFill>
                   <a:srgbClr val="5B7780"/>
                 </a:solidFill>
@@ -11056,16 +10640,18 @@
           <a:noFill/>
         </p:spPr>
         <p:txBody>
-          <a:bodyPr wrap="square" lIns="0" rIns="0" tIns="0" bIns="0" anchor="t"/>
+          <a:bodyPr wrap="square" lIns="0" rIns="0" tIns="0" bIns="0" anchor="t">
+            <a:spAutoFit/>
+          </a:bodyPr>
           <a:lstStyle/>
           <a:p>
             <a:pPr algn="l">
               <a:spcAft>
-                <a:spcPts val="200"/>
-              </a:spcAft>
-            </a:pPr>
-            <a:r>
-              <a:rPr sz="1120" b="1" i="0">
+                <a:spcPts val="100"/>
+              </a:spcAft>
+            </a:pPr>
+            <a:r>
+              <a:rPr sz="1120" b="1">
                 <a:solidFill>
                   <a:srgbClr val="065A82"/>
                 </a:solidFill>
@@ -11093,16 +10679,18 @@
           <a:noFill/>
         </p:spPr>
         <p:txBody>
-          <a:bodyPr wrap="square" lIns="0" rIns="0" tIns="0" bIns="0" anchor="t"/>
+          <a:bodyPr wrap="square" lIns="0" rIns="0" tIns="0" bIns="0" anchor="t">
+            <a:spAutoFit/>
+          </a:bodyPr>
           <a:lstStyle/>
           <a:p>
             <a:pPr algn="l">
               <a:spcAft>
-                <a:spcPts val="200"/>
-              </a:spcAft>
-            </a:pPr>
-            <a:r>
-              <a:rPr sz="1550" b="1" i="0">
+                <a:spcPts val="100"/>
+              </a:spcAft>
+            </a:pPr>
+            <a:r>
+              <a:rPr sz="1550" b="1">
                 <a:solidFill>
                   <a:srgbClr val="21295C"/>
                 </a:solidFill>
@@ -11130,16 +10718,18 @@
           <a:noFill/>
         </p:spPr>
         <p:txBody>
-          <a:bodyPr wrap="square" lIns="0" rIns="0" tIns="0" bIns="0" anchor="t"/>
+          <a:bodyPr wrap="square" lIns="0" rIns="0" tIns="0" bIns="0" anchor="t">
+            <a:spAutoFit/>
+          </a:bodyPr>
           <a:lstStyle/>
           <a:p>
             <a:pPr algn="l">
               <a:spcAft>
-                <a:spcPts val="200"/>
-              </a:spcAft>
-            </a:pPr>
-            <a:r>
-              <a:rPr sz="1150" b="0" i="0">
+                <a:spcPts val="100"/>
+              </a:spcAft>
+            </a:pPr>
+            <a:r>
+              <a:rPr sz="1150" b="0">
                 <a:solidFill>
                   <a:srgbClr val="5B7780"/>
                 </a:solidFill>
@@ -11247,16 +10837,18 @@
           <a:noFill/>
         </p:spPr>
         <p:txBody>
-          <a:bodyPr wrap="square" lIns="0" rIns="0" tIns="0" bIns="0" anchor="t"/>
+          <a:bodyPr wrap="square" lIns="0" rIns="0" tIns="0" bIns="0" anchor="t">
+            <a:spAutoFit/>
+          </a:bodyPr>
           <a:lstStyle/>
           <a:p>
             <a:pPr algn="l">
               <a:spcAft>
-                <a:spcPts val="200"/>
-              </a:spcAft>
-            </a:pPr>
-            <a:r>
-              <a:rPr sz="1120" b="1" i="0">
+                <a:spcPts val="100"/>
+              </a:spcAft>
+            </a:pPr>
+            <a:r>
+              <a:rPr sz="1120" b="1">
                 <a:solidFill>
                   <a:srgbClr val="065A82"/>
                 </a:solidFill>
@@ -11284,16 +10876,18 @@
           <a:noFill/>
         </p:spPr>
         <p:txBody>
-          <a:bodyPr wrap="square" lIns="0" rIns="0" tIns="0" bIns="0" anchor="t"/>
+          <a:bodyPr wrap="square" lIns="0" rIns="0" tIns="0" bIns="0" anchor="t">
+            <a:spAutoFit/>
+          </a:bodyPr>
           <a:lstStyle/>
           <a:p>
             <a:pPr algn="l">
               <a:spcAft>
-                <a:spcPts val="200"/>
-              </a:spcAft>
-            </a:pPr>
-            <a:r>
-              <a:rPr sz="1550" b="1" i="0">
+                <a:spcPts val="100"/>
+              </a:spcAft>
+            </a:pPr>
+            <a:r>
+              <a:rPr sz="1550" b="1">
                 <a:solidFill>
                   <a:srgbClr val="21295C"/>
                 </a:solidFill>
@@ -11321,38 +10915,24 @@
           <a:noFill/>
         </p:spPr>
         <p:txBody>
-          <a:bodyPr wrap="square" lIns="0" rIns="0" tIns="0" bIns="0" anchor="t"/>
+          <a:bodyPr wrap="square" lIns="0" rIns="0" tIns="0" bIns="0" anchor="t">
+            <a:spAutoFit/>
+          </a:bodyPr>
           <a:lstStyle/>
           <a:p>
             <a:pPr algn="l">
               <a:spcAft>
-                <a:spcPts val="200"/>
-              </a:spcAft>
-            </a:pPr>
-            <a:r>
-              <a:rPr sz="1150" b="0" i="0">
+                <a:spcPts val="100"/>
+              </a:spcAft>
+            </a:pPr>
+            <a:r>
+              <a:rPr sz="1150" b="0">
                 <a:solidFill>
                   <a:srgbClr val="5B7780"/>
                 </a:solidFill>
                 <a:latin typeface="Calibri"/>
               </a:rPr>
-              <a:t>Actuator、Prometheus 与</a:t>
-            </a:r>
-          </a:p>
-          <a:p>
-            <a:pPr algn="l">
-              <a:spcAft>
-                <a:spcPts val="200"/>
-              </a:spcAft>
-            </a:pPr>
-            <a:r>
-              <a:rPr sz="1150" b="0" i="0">
-                <a:solidFill>
-                  <a:srgbClr val="5B7780"/>
-                </a:solidFill>
-                <a:latin typeface="Calibri"/>
-              </a:rPr>
-              <a:t>Grafana 配置</a:t>
+              <a:t>Actuator、Prometheus 与 Grafana 配置</a:t>
             </a:r>
           </a:p>
         </p:txBody>
@@ -11419,16 +10999,18 @@
           <a:noFill/>
         </p:spPr>
         <p:txBody>
-          <a:bodyPr wrap="square" lIns="0" rIns="0" tIns="0" bIns="0" anchor="t"/>
+          <a:bodyPr wrap="square" lIns="0" rIns="0" tIns="0" bIns="0" anchor="t">
+            <a:spAutoFit/>
+          </a:bodyPr>
           <a:lstStyle/>
           <a:p>
             <a:pPr algn="l">
               <a:spcAft>
-                <a:spcPts val="200"/>
-              </a:spcAft>
-            </a:pPr>
-            <a:r>
-              <a:rPr sz="1120" b="1" i="0">
+                <a:spcPts val="100"/>
+              </a:spcAft>
+            </a:pPr>
+            <a:r>
+              <a:rPr sz="1120" b="1">
                 <a:solidFill>
                   <a:srgbClr val="065A82"/>
                 </a:solidFill>
@@ -11456,16 +11038,18 @@
           <a:noFill/>
         </p:spPr>
         <p:txBody>
-          <a:bodyPr wrap="square" lIns="0" rIns="0" tIns="0" bIns="0" anchor="t"/>
+          <a:bodyPr wrap="square" lIns="0" rIns="0" tIns="0" bIns="0" anchor="t">
+            <a:spAutoFit/>
+          </a:bodyPr>
           <a:lstStyle/>
           <a:p>
             <a:pPr algn="l">
               <a:spcAft>
-                <a:spcPts val="200"/>
-              </a:spcAft>
-            </a:pPr>
-            <a:r>
-              <a:rPr sz="1550" b="1" i="0">
+                <a:spcPts val="100"/>
+              </a:spcAft>
+            </a:pPr>
+            <a:r>
+              <a:rPr sz="1550" b="1">
                 <a:solidFill>
                   <a:srgbClr val="21295C"/>
                 </a:solidFill>
@@ -11493,16 +11077,18 @@
           <a:noFill/>
         </p:spPr>
         <p:txBody>
-          <a:bodyPr wrap="square" lIns="0" rIns="0" tIns="0" bIns="0" anchor="t"/>
+          <a:bodyPr wrap="square" lIns="0" rIns="0" tIns="0" bIns="0" anchor="t">
+            <a:spAutoFit/>
+          </a:bodyPr>
           <a:lstStyle/>
           <a:p>
             <a:pPr algn="l">
               <a:spcAft>
-                <a:spcPts val="200"/>
-              </a:spcAft>
-            </a:pPr>
-            <a:r>
-              <a:rPr sz="1150" b="0" i="0">
+                <a:spcPts val="100"/>
+              </a:spcAft>
+            </a:pPr>
+            <a:r>
+              <a:rPr sz="1150" b="0">
                 <a:solidFill>
                   <a:srgbClr val="5B7780"/>
                 </a:solidFill>
@@ -11665,16 +11251,18 @@
           <a:noFill/>
         </p:spPr>
         <p:txBody>
-          <a:bodyPr wrap="square" lIns="0" rIns="0" tIns="0" bIns="0" anchor="ctr"/>
+          <a:bodyPr wrap="square" lIns="0" rIns="0" tIns="0" bIns="0" anchor="ctr">
+            <a:spAutoFit/>
+          </a:bodyPr>
           <a:lstStyle/>
           <a:p>
             <a:pPr algn="ctr">
               <a:spcAft>
-                <a:spcPts val="200"/>
-              </a:spcAft>
-            </a:pPr>
-            <a:r>
-              <a:rPr sz="850" b="1" i="0">
+                <a:spcPts val="100"/>
+              </a:spcAft>
+            </a:pPr>
+            <a:r>
+              <a:rPr sz="850" b="1">
                 <a:solidFill>
                   <a:srgbClr val="FFFFFF"/>
                 </a:solidFill>
@@ -11702,16 +11290,18 @@
           <a:noFill/>
         </p:spPr>
         <p:txBody>
-          <a:bodyPr wrap="square" lIns="0" rIns="0" tIns="0" bIns="0" anchor="t"/>
+          <a:bodyPr wrap="square" lIns="0" rIns="0" tIns="0" bIns="0" anchor="t">
+            <a:spAutoFit/>
+          </a:bodyPr>
           <a:lstStyle/>
           <a:p>
             <a:pPr algn="l">
               <a:spcAft>
-                <a:spcPts val="200"/>
-              </a:spcAft>
-            </a:pPr>
-            <a:r>
-              <a:rPr sz="1600" b="1" i="0">
+                <a:spcPts val="100"/>
+              </a:spcAft>
+            </a:pPr>
+            <a:r>
+              <a:rPr sz="1600" b="1">
                 <a:solidFill>
                   <a:srgbClr val="21295C"/>
                 </a:solidFill>
@@ -11739,54 +11329,56 @@
           <a:noFill/>
         </p:spPr>
         <p:txBody>
-          <a:bodyPr wrap="square" lIns="27432" rIns="27432" tIns="27432" bIns="27432" anchor="t"/>
+          <a:bodyPr wrap="square" lIns="27432" rIns="27432" tIns="27432" bIns="27432" anchor="t">
+            <a:spAutoFit/>
+          </a:bodyPr>
           <a:lstStyle/>
           <a:p>
             <a:pPr algn="l">
               <a:spcAft>
-                <a:spcPts val="200"/>
-              </a:spcAft>
-            </a:pPr>
-            <a:r>
-              <a:rPr sz="1240" b="0" i="0">
+                <a:spcPts val="100"/>
+              </a:spcAft>
+            </a:pPr>
+            <a:r>
+              <a:rPr sz="1240" b="0">
                 <a:solidFill>
                   <a:srgbClr val="17323B"/>
                 </a:solidFill>
                 <a:latin typeface="Calibri"/>
               </a:rPr>
-              <a:t>近期变更更像架构演进快照：主链路</a:t>
+              <a:t>近期变更更像架构演进快照：主链路完整</a:t>
             </a:r>
           </a:p>
           <a:p>
             <a:pPr algn="l">
               <a:spcAft>
-                <a:spcPts val="200"/>
-              </a:spcAft>
-            </a:pPr>
-            <a:r>
-              <a:rPr sz="1240" b="0" i="0">
+                <a:spcPts val="100"/>
+              </a:spcAft>
+            </a:pPr>
+            <a:r>
+              <a:rPr sz="1240" b="0">
                 <a:solidFill>
                   <a:srgbClr val="17323B"/>
                 </a:solidFill>
                 <a:latin typeface="Calibri"/>
               </a:rPr>
-              <a:t>完整，微服务版本已落盘，但运行与</a:t>
+              <a:t>，微服务版本已落盘，但运行与发布还需</a:t>
             </a:r>
           </a:p>
           <a:p>
             <a:pPr algn="l">
               <a:spcAft>
-                <a:spcPts val="200"/>
-              </a:spcAft>
-            </a:pPr>
-            <a:r>
-              <a:rPr sz="1240" b="0" i="0">
+                <a:spcPts val="100"/>
+              </a:spcAft>
+            </a:pPr>
+            <a:r>
+              <a:rPr sz="1240" b="0">
                 <a:solidFill>
                   <a:srgbClr val="17323B"/>
                 </a:solidFill>
                 <a:latin typeface="Calibri"/>
               </a:rPr>
-              <a:t>发布还需要环境验证。</a:t>
+              <a:t>要环境验证。</a:t>
             </a:r>
           </a:p>
         </p:txBody>
@@ -11943,16 +11535,18 @@
           <a:noFill/>
         </p:spPr>
         <p:txBody>
-          <a:bodyPr wrap="square" lIns="0" rIns="0" tIns="0" bIns="0" anchor="ctr"/>
+          <a:bodyPr wrap="square" lIns="0" rIns="0" tIns="0" bIns="0" anchor="ctr">
+            <a:spAutoFit/>
+          </a:bodyPr>
           <a:lstStyle/>
           <a:p>
             <a:pPr algn="ctr">
               <a:spcAft>
-                <a:spcPts val="200"/>
-              </a:spcAft>
-            </a:pPr>
-            <a:r>
-              <a:rPr sz="850" b="1" i="0">
+                <a:spcPts val="100"/>
+              </a:spcAft>
+            </a:pPr>
+            <a:r>
+              <a:rPr sz="850" b="1">
                 <a:solidFill>
                   <a:srgbClr val="FFFFFF"/>
                 </a:solidFill>
@@ -11980,16 +11574,18 @@
           <a:noFill/>
         </p:spPr>
         <p:txBody>
-          <a:bodyPr wrap="square" lIns="0" rIns="0" tIns="0" bIns="0" anchor="t"/>
+          <a:bodyPr wrap="square" lIns="0" rIns="0" tIns="0" bIns="0" anchor="t">
+            <a:spAutoFit/>
+          </a:bodyPr>
           <a:lstStyle/>
           <a:p>
             <a:pPr algn="l">
               <a:spcAft>
-                <a:spcPts val="200"/>
-              </a:spcAft>
-            </a:pPr>
-            <a:r>
-              <a:rPr sz="1600" b="1" i="0">
+                <a:spcPts val="100"/>
+              </a:spcAft>
+            </a:pPr>
+            <a:r>
+              <a:rPr sz="1600" b="1">
                 <a:solidFill>
                   <a:srgbClr val="21295C"/>
                 </a:solidFill>
@@ -12017,54 +11613,40 @@
           <a:noFill/>
         </p:spPr>
         <p:txBody>
-          <a:bodyPr wrap="square" lIns="27432" rIns="27432" tIns="27432" bIns="27432" anchor="t"/>
+          <a:bodyPr wrap="square" lIns="27432" rIns="27432" tIns="27432" bIns="27432" anchor="t">
+            <a:spAutoFit/>
+          </a:bodyPr>
           <a:lstStyle/>
           <a:p>
             <a:pPr algn="l">
               <a:spcAft>
-                <a:spcPts val="200"/>
-              </a:spcAft>
-            </a:pPr>
-            <a:r>
-              <a:rPr sz="1240" b="0" i="0">
+                <a:spcPts val="100"/>
+              </a:spcAft>
+            </a:pPr>
+            <a:r>
+              <a:rPr sz="1240" b="0">
                 <a:solidFill>
                   <a:srgbClr val="17323B"/>
                 </a:solidFill>
                 <a:latin typeface="Calibri"/>
               </a:rPr>
-              <a:t>本次自动化只生成项目状态 PPT</a:t>
+              <a:t>本次自动化仅生成项目状态 PPT，不修</a:t>
             </a:r>
           </a:p>
           <a:p>
             <a:pPr algn="l">
               <a:spcAft>
-                <a:spcPts val="200"/>
-              </a:spcAft>
-            </a:pPr>
-            <a:r>
-              <a:rPr sz="1240" b="0" i="0">
+                <a:spcPts val="100"/>
+              </a:spcAft>
+            </a:pPr>
+            <a:r>
+              <a:rPr sz="1240" b="0">
                 <a:solidFill>
                   <a:srgbClr val="17323B"/>
                 </a:solidFill>
                 <a:latin typeface="Calibri"/>
               </a:rPr>
-              <a:t>；未修改业务代码、配置或依赖声明</a:t>
-            </a:r>
-          </a:p>
-          <a:p>
-            <a:pPr algn="l">
-              <a:spcAft>
-                <a:spcPts val="200"/>
-              </a:spcAft>
-            </a:pPr>
-            <a:r>
-              <a:rPr sz="1240" b="0" i="0">
-                <a:solidFill>
-                  <a:srgbClr val="17323B"/>
-                </a:solidFill>
-                <a:latin typeface="Calibri"/>
-              </a:rPr>
-              <a:t>。</a:t>
+              <a:t>改业务代码、配置或依赖声明。</a:t>
             </a:r>
           </a:p>
         </p:txBody>
@@ -12086,16 +11668,18 @@
           <a:noFill/>
         </p:spPr>
         <p:txBody>
-          <a:bodyPr wrap="square" lIns="0" rIns="0" tIns="0" bIns="0" anchor="t"/>
+          <a:bodyPr wrap="square" lIns="0" rIns="0" tIns="0" bIns="0" anchor="t">
+            <a:spAutoFit/>
+          </a:bodyPr>
           <a:lstStyle/>
           <a:p>
             <a:pPr algn="l">
               <a:spcAft>
-                <a:spcPts val="200"/>
-              </a:spcAft>
-            </a:pPr>
-            <a:r>
-              <a:rPr sz="1050" b="0" i="0">
+                <a:spcPts val="100"/>
+              </a:spcAft>
+            </a:pPr>
+            <a:r>
+              <a:rPr sz="1050" b="0">
                 <a:solidFill>
                   <a:srgbClr val="5B7780"/>
                 </a:solidFill>
@@ -12284,16 +11868,18 @@
           <a:noFill/>
         </p:spPr>
         <p:txBody>
-          <a:bodyPr wrap="square" lIns="0" rIns="0" tIns="0" bIns="0" anchor="ctr"/>
+          <a:bodyPr wrap="square" lIns="0" rIns="0" tIns="0" bIns="0" anchor="ctr">
+            <a:spAutoFit/>
+          </a:bodyPr>
           <a:lstStyle/>
           <a:p>
             <a:pPr algn="ctr">
               <a:spcAft>
-                <a:spcPts val="200"/>
-              </a:spcAft>
-            </a:pPr>
-            <a:r>
-              <a:rPr sz="900" b="1" i="0">
+                <a:spcPts val="100"/>
+              </a:spcAft>
+            </a:pPr>
+            <a:r>
+              <a:rPr sz="900" b="1">
                 <a:solidFill>
                   <a:srgbClr val="FFFFFF"/>
                 </a:solidFill>
@@ -12321,16 +11907,18 @@
           <a:noFill/>
         </p:spPr>
         <p:txBody>
-          <a:bodyPr wrap="square" lIns="0" rIns="0" tIns="0" bIns="0" anchor="t"/>
+          <a:bodyPr wrap="square" lIns="0" rIns="0" tIns="0" bIns="0" anchor="t">
+            <a:spAutoFit/>
+          </a:bodyPr>
           <a:lstStyle/>
           <a:p>
             <a:pPr algn="l">
               <a:spcAft>
-                <a:spcPts val="200"/>
-              </a:spcAft>
-            </a:pPr>
-            <a:r>
-              <a:rPr sz="3400" b="1" i="0">
+                <a:spcPts val="100"/>
+              </a:spcAft>
+            </a:pPr>
+            <a:r>
+              <a:rPr sz="3400" b="1">
                 <a:solidFill>
                   <a:srgbClr val="21295C"/>
                 </a:solidFill>
@@ -12358,16 +11946,18 @@
           <a:noFill/>
         </p:spPr>
         <p:txBody>
-          <a:bodyPr wrap="square" lIns="0" rIns="0" tIns="0" bIns="0" anchor="t"/>
+          <a:bodyPr wrap="square" lIns="0" rIns="0" tIns="0" bIns="0" anchor="t">
+            <a:spAutoFit/>
+          </a:bodyPr>
           <a:lstStyle/>
           <a:p>
             <a:pPr algn="l">
               <a:spcAft>
-                <a:spcPts val="200"/>
-              </a:spcAft>
-            </a:pPr>
-            <a:r>
-              <a:rPr sz="1150" b="0" i="0">
+                <a:spcPts val="100"/>
+              </a:spcAft>
+            </a:pPr>
+            <a:r>
+              <a:rPr sz="1150" b="0">
                 <a:solidFill>
                   <a:srgbClr val="5B7780"/>
                 </a:solidFill>
@@ -12440,16 +12030,18 @@
           <a:noFill/>
         </p:spPr>
         <p:txBody>
-          <a:bodyPr wrap="square" lIns="0" rIns="0" tIns="0" bIns="0" anchor="ctr"/>
+          <a:bodyPr wrap="square" lIns="0" rIns="0" tIns="0" bIns="0" anchor="ctr">
+            <a:spAutoFit/>
+          </a:bodyPr>
           <a:lstStyle/>
           <a:p>
             <a:pPr algn="ctr">
               <a:spcAft>
-                <a:spcPts val="200"/>
-              </a:spcAft>
-            </a:pPr>
-            <a:r>
-              <a:rPr sz="1050" b="1" i="0">
+                <a:spcPts val="100"/>
+              </a:spcAft>
+            </a:pPr>
+            <a:r>
+              <a:rPr sz="1050" b="1">
                 <a:solidFill>
                   <a:srgbClr val="065A82"/>
                 </a:solidFill>
@@ -12469,7 +12061,7 @@
         <p:spPr>
           <a:xfrm>
             <a:off x="804672" y="1417320"/>
-            <a:ext cx="2057400" cy="1572768"/>
+            <a:ext cx="2057400" cy="1234440"/>
           </a:xfrm>
           <a:prstGeom prst="roundRect">
             <a:avLst/>
@@ -12513,8 +12105,8 @@
         </p:nvSpPr>
         <p:spPr>
           <a:xfrm>
-            <a:off x="932688" y="1581912"/>
-            <a:ext cx="1801368" cy="566928"/>
+            <a:off x="914400" y="1581912"/>
+            <a:ext cx="1837943" cy="502920"/>
           </a:xfrm>
           <a:prstGeom prst="rect">
             <a:avLst/>
@@ -12522,16 +12114,18 @@
           <a:noFill/>
         </p:spPr>
         <p:txBody>
-          <a:bodyPr wrap="square" lIns="0" rIns="0" tIns="0" bIns="0" anchor="ctr"/>
+          <a:bodyPr wrap="square" lIns="0" rIns="0" tIns="0" bIns="0" anchor="ctr">
+            <a:spAutoFit/>
+          </a:bodyPr>
           <a:lstStyle/>
           <a:p>
             <a:pPr algn="ctr">
               <a:spcAft>
-                <a:spcPts val="200"/>
-              </a:spcAft>
-            </a:pPr>
-            <a:r>
-              <a:rPr sz="3100" b="1" i="0">
+                <a:spcPts val="100"/>
+              </a:spcAft>
+            </a:pPr>
+            <a:r>
+              <a:rPr sz="3100" b="1">
                 <a:solidFill>
                   <a:srgbClr val="065A82"/>
                 </a:solidFill>
@@ -12550,8 +12144,8 @@
         </p:nvSpPr>
         <p:spPr>
           <a:xfrm>
-            <a:off x="969264" y="2221992"/>
-            <a:ext cx="1728216" cy="310896"/>
+            <a:off x="941832" y="2258568"/>
+            <a:ext cx="1783080" cy="201168"/>
           </a:xfrm>
           <a:prstGeom prst="rect">
             <a:avLst/>
@@ -12559,121 +12153,38 @@
           <a:noFill/>
         </p:spPr>
         <p:txBody>
-          <a:bodyPr wrap="square" lIns="0" rIns="0" tIns="0" bIns="0" anchor="t"/>
+          <a:bodyPr wrap="square" lIns="0" rIns="0" tIns="0" bIns="0" anchor="t">
+            <a:spAutoFit/>
+          </a:bodyPr>
           <a:lstStyle/>
           <a:p>
             <a:pPr algn="ctr">
               <a:spcAft>
-                <a:spcPts val="200"/>
-              </a:spcAft>
-            </a:pPr>
-            <a:r>
-              <a:rPr sz="1220" b="1" i="0">
+                <a:spcPts val="100"/>
+              </a:spcAft>
+            </a:pPr>
+            <a:r>
+              <a:rPr sz="1200" b="1">
                 <a:solidFill>
                   <a:srgbClr val="17323B"/>
                 </a:solidFill>
                 <a:latin typeface="Calibri"/>
               </a:rPr>
-              <a:t>Prometheu</a:t>
-            </a:r>
-          </a:p>
-          <a:p>
-            <a:pPr algn="ctr">
-              <a:spcAft>
-                <a:spcPts val="200"/>
-              </a:spcAft>
-            </a:pPr>
-            <a:r>
-              <a:rPr sz="1220" b="1" i="0">
-                <a:solidFill>
-                  <a:srgbClr val="17323B"/>
-                </a:solidFill>
-                <a:latin typeface="Calibri"/>
-              </a:rPr>
-              <a:t>s 抓取间隔</a:t>
-            </a:r>
-          </a:p>
-        </p:txBody>
-      </p:sp>
-      <p:sp>
-        <p:nvSpPr>
-          <p:cNvPr id="11" name="TextBox 10"/>
-          <p:cNvSpPr txBox="1"/>
-          <p:nvPr/>
-        </p:nvSpPr>
-        <p:spPr>
-          <a:xfrm>
-            <a:off x="969264" y="2542032"/>
-            <a:ext cx="1728216" cy="274320"/>
-          </a:xfrm>
-          <a:prstGeom prst="rect">
-            <a:avLst/>
-          </a:prstGeom>
-          <a:noFill/>
-        </p:spPr>
-        <p:txBody>
-          <a:bodyPr wrap="square" lIns="0" rIns="0" tIns="0" bIns="0" anchor="t"/>
-          <a:lstStyle/>
-          <a:p>
-            <a:pPr algn="ctr">
-              <a:spcAft>
-                <a:spcPts val="200"/>
-              </a:spcAft>
-            </a:pPr>
-            <a:r>
-              <a:rPr sz="919" b="0" i="0">
-                <a:solidFill>
-                  <a:srgbClr val="5B7780"/>
-                </a:solidFill>
-                <a:latin typeface="Calibri"/>
-              </a:rPr>
-              <a:t>/api/actua</a:t>
-            </a:r>
-          </a:p>
-          <a:p>
-            <a:pPr algn="ctr">
-              <a:spcAft>
-                <a:spcPts val="200"/>
-              </a:spcAft>
-            </a:pPr>
-            <a:r>
-              <a:rPr sz="919" b="0" i="0">
-                <a:solidFill>
-                  <a:srgbClr val="5B7780"/>
-                </a:solidFill>
-                <a:latin typeface="Calibri"/>
-              </a:rPr>
-              <a:t>tor/promet</a:t>
-            </a:r>
-          </a:p>
-          <a:p>
-            <a:pPr algn="ctr">
-              <a:spcAft>
-                <a:spcPts val="200"/>
-              </a:spcAft>
-            </a:pPr>
-            <a:r>
-              <a:rPr sz="919" b="0" i="0">
-                <a:solidFill>
-                  <a:srgbClr val="5B7780"/>
-                </a:solidFill>
-                <a:latin typeface="Calibri"/>
-              </a:rPr>
-              <a:t>heus</a:t>
-            </a:r>
-          </a:p>
-        </p:txBody>
-      </p:sp>
-      <p:sp>
-        <p:nvSpPr>
-          <p:cNvPr id="12" name="Rounded Rectangle 11"/>
+              <a:t>抓取间隔</a:t>
+            </a:r>
+          </a:p>
+        </p:txBody>
+      </p:sp>
+      <p:sp>
+        <p:nvSpPr>
+          <p:cNvPr id="11" name="Rounded Rectangle 10"/>
           <p:cNvSpPr/>
           <p:nvPr/>
         </p:nvSpPr>
         <p:spPr>
           <a:xfrm>
             <a:off x="3127248" y="1417320"/>
-            <a:ext cx="2057400" cy="1572768"/>
+            <a:ext cx="2057400" cy="1234440"/>
           </a:xfrm>
           <a:prstGeom prst="roundRect">
             <a:avLst/>
@@ -12711,14 +12222,53 @@
       </p:sp>
       <p:sp>
         <p:nvSpPr>
+          <p:cNvPr id="12" name="TextBox 11"/>
+          <p:cNvSpPr txBox="1"/>
+          <p:nvPr/>
+        </p:nvSpPr>
+        <p:spPr>
+          <a:xfrm>
+            <a:off x="3236976" y="1581912"/>
+            <a:ext cx="1837943" cy="502920"/>
+          </a:xfrm>
+          <a:prstGeom prst="rect">
+            <a:avLst/>
+          </a:prstGeom>
+          <a:noFill/>
+        </p:spPr>
+        <p:txBody>
+          <a:bodyPr wrap="square" lIns="0" rIns="0" tIns="0" bIns="0" anchor="ctr">
+            <a:spAutoFit/>
+          </a:bodyPr>
+          <a:lstStyle/>
+          <a:p>
+            <a:pPr algn="ctr">
+              <a:spcAft>
+                <a:spcPts val="100"/>
+              </a:spcAft>
+            </a:pPr>
+            <a:r>
+              <a:rPr sz="3100" b="1">
+                <a:solidFill>
+                  <a:srgbClr val="028090"/>
+                </a:solidFill>
+                <a:latin typeface="Georgia"/>
+              </a:rPr>
+              <a:t>3</a:t>
+            </a:r>
+          </a:p>
+        </p:txBody>
+      </p:sp>
+      <p:sp>
+        <p:nvSpPr>
           <p:cNvPr id="13" name="TextBox 12"/>
           <p:cNvSpPr txBox="1"/>
           <p:nvPr/>
         </p:nvSpPr>
         <p:spPr>
           <a:xfrm>
-            <a:off x="3255264" y="1581912"/>
-            <a:ext cx="1801368" cy="566928"/>
+            <a:off x="3264408" y="2258568"/>
+            <a:ext cx="1783080" cy="201168"/>
           </a:xfrm>
           <a:prstGeom prst="rect">
             <a:avLst/>
@@ -12726,142 +12276,38 @@
           <a:noFill/>
         </p:spPr>
         <p:txBody>
-          <a:bodyPr wrap="square" lIns="0" rIns="0" tIns="0" bIns="0" anchor="ctr"/>
+          <a:bodyPr wrap="square" lIns="0" rIns="0" tIns="0" bIns="0" anchor="t">
+            <a:spAutoFit/>
+          </a:bodyPr>
           <a:lstStyle/>
           <a:p>
             <a:pPr algn="ctr">
               <a:spcAft>
-                <a:spcPts val="200"/>
-              </a:spcAft>
-            </a:pPr>
-            <a:r>
-              <a:rPr sz="3100" b="1" i="0">
-                <a:solidFill>
-                  <a:srgbClr val="028090"/>
-                </a:solidFill>
-                <a:latin typeface="Georgia"/>
-              </a:rPr>
-              <a:t>3</a:t>
-            </a:r>
-          </a:p>
-        </p:txBody>
-      </p:sp>
-      <p:sp>
-        <p:nvSpPr>
-          <p:cNvPr id="14" name="TextBox 13"/>
-          <p:cNvSpPr txBox="1"/>
-          <p:nvPr/>
-        </p:nvSpPr>
-        <p:spPr>
-          <a:xfrm>
-            <a:off x="3291840" y="2221992"/>
-            <a:ext cx="1728216" cy="310896"/>
-          </a:xfrm>
-          <a:prstGeom prst="rect">
-            <a:avLst/>
-          </a:prstGeom>
-          <a:noFill/>
-        </p:spPr>
-        <p:txBody>
-          <a:bodyPr wrap="square" lIns="0" rIns="0" tIns="0" bIns="0" anchor="t"/>
-          <a:lstStyle/>
-          <a:p>
-            <a:pPr algn="ctr">
-              <a:spcAft>
-                <a:spcPts val="200"/>
-              </a:spcAft>
-            </a:pPr>
-            <a:r>
-              <a:rPr sz="1220" b="1" i="0">
+                <a:spcPts val="100"/>
+              </a:spcAft>
+            </a:pPr>
+            <a:r>
+              <a:rPr sz="1200" b="1">
                 <a:solidFill>
                   <a:srgbClr val="17323B"/>
                 </a:solidFill>
                 <a:latin typeface="Calibri"/>
               </a:rPr>
-              <a:t>核心业务表</a:t>
-            </a:r>
-          </a:p>
-        </p:txBody>
-      </p:sp>
-      <p:sp>
-        <p:nvSpPr>
-          <p:cNvPr id="15" name="TextBox 14"/>
-          <p:cNvSpPr txBox="1"/>
-          <p:nvPr/>
-        </p:nvSpPr>
-        <p:spPr>
-          <a:xfrm>
-            <a:off x="3291840" y="2542032"/>
-            <a:ext cx="1728216" cy="274320"/>
-          </a:xfrm>
-          <a:prstGeom prst="rect">
-            <a:avLst/>
-          </a:prstGeom>
-          <a:noFill/>
-        </p:spPr>
-        <p:txBody>
-          <a:bodyPr wrap="square" lIns="0" rIns="0" tIns="0" bIns="0" anchor="t"/>
-          <a:lstStyle/>
-          <a:p>
-            <a:pPr algn="ctr">
-              <a:spcAft>
-                <a:spcPts val="200"/>
-              </a:spcAft>
-            </a:pPr>
-            <a:r>
-              <a:rPr sz="919" b="0" i="0">
-                <a:solidFill>
-                  <a:srgbClr val="5B7780"/>
-                </a:solidFill>
-                <a:latin typeface="Calibri"/>
-              </a:rPr>
-              <a:t>user / app</a:t>
-            </a:r>
-          </a:p>
-          <a:p>
-            <a:pPr algn="ctr">
-              <a:spcAft>
-                <a:spcPts val="200"/>
-              </a:spcAft>
-            </a:pPr>
-            <a:r>
-              <a:rPr sz="919" b="0" i="0">
-                <a:solidFill>
-                  <a:srgbClr val="5B7780"/>
-                </a:solidFill>
-                <a:latin typeface="Calibri"/>
-              </a:rPr>
-              <a:t>/ chat_his</a:t>
-            </a:r>
-          </a:p>
-          <a:p>
-            <a:pPr algn="ctr">
-              <a:spcAft>
-                <a:spcPts val="200"/>
-              </a:spcAft>
-            </a:pPr>
-            <a:r>
-              <a:rPr sz="919" b="0" i="0">
-                <a:solidFill>
-                  <a:srgbClr val="5B7780"/>
-                </a:solidFill>
-                <a:latin typeface="Calibri"/>
-              </a:rPr>
-              <a:t>tory</a:t>
-            </a:r>
-          </a:p>
-        </p:txBody>
-      </p:sp>
-      <p:sp>
-        <p:nvSpPr>
-          <p:cNvPr id="16" name="Rounded Rectangle 15"/>
+              <a:t>业务表</a:t>
+            </a:r>
+          </a:p>
+        </p:txBody>
+      </p:sp>
+      <p:sp>
+        <p:nvSpPr>
+          <p:cNvPr id="14" name="Rounded Rectangle 13"/>
           <p:cNvSpPr/>
           <p:nvPr/>
         </p:nvSpPr>
         <p:spPr>
           <a:xfrm>
             <a:off x="5449824" y="1417320"/>
-            <a:ext cx="2057400" cy="1572768"/>
+            <a:ext cx="2057400" cy="1234440"/>
           </a:xfrm>
           <a:prstGeom prst="roundRect">
             <a:avLst/>
@@ -12899,14 +12345,14 @@
       </p:sp>
       <p:sp>
         <p:nvSpPr>
-          <p:cNvPr id="17" name="TextBox 16"/>
+          <p:cNvPr id="15" name="TextBox 14"/>
           <p:cNvSpPr txBox="1"/>
           <p:nvPr/>
         </p:nvSpPr>
         <p:spPr>
           <a:xfrm>
-            <a:off x="5577840" y="1581912"/>
-            <a:ext cx="1801368" cy="566928"/>
+            <a:off x="5559552" y="1581912"/>
+            <a:ext cx="1837943" cy="502920"/>
           </a:xfrm>
           <a:prstGeom prst="rect">
             <a:avLst/>
@@ -12914,16 +12360,18 @@
           <a:noFill/>
         </p:spPr>
         <p:txBody>
-          <a:bodyPr wrap="square" lIns="0" rIns="0" tIns="0" bIns="0" anchor="ctr"/>
+          <a:bodyPr wrap="square" lIns="0" rIns="0" tIns="0" bIns="0" anchor="ctr">
+            <a:spAutoFit/>
+          </a:bodyPr>
           <a:lstStyle/>
           <a:p>
             <a:pPr algn="ctr">
               <a:spcAft>
-                <a:spcPts val="200"/>
-              </a:spcAft>
-            </a:pPr>
-            <a:r>
-              <a:rPr sz="3100" b="1" i="0">
+                <a:spcPts val="100"/>
+              </a:spcAft>
+            </a:pPr>
+            <a:r>
+              <a:rPr sz="3100" b="1">
                 <a:solidFill>
                   <a:srgbClr val="1C7293"/>
                 </a:solidFill>
@@ -12936,14 +12384,14 @@
       </p:sp>
       <p:sp>
         <p:nvSpPr>
-          <p:cNvPr id="18" name="TextBox 17"/>
+          <p:cNvPr id="16" name="TextBox 15"/>
           <p:cNvSpPr txBox="1"/>
           <p:nvPr/>
         </p:nvSpPr>
         <p:spPr>
           <a:xfrm>
-            <a:off x="5614416" y="2221992"/>
-            <a:ext cx="1728216" cy="310896"/>
+            <a:off x="5586984" y="2258568"/>
+            <a:ext cx="1783080" cy="201168"/>
           </a:xfrm>
           <a:prstGeom prst="rect">
             <a:avLst/>
@@ -12951,16 +12399,18 @@
           <a:noFill/>
         </p:spPr>
         <p:txBody>
-          <a:bodyPr wrap="square" lIns="0" rIns="0" tIns="0" bIns="0" anchor="t"/>
+          <a:bodyPr wrap="square" lIns="0" rIns="0" tIns="0" bIns="0" anchor="t">
+            <a:spAutoFit/>
+          </a:bodyPr>
           <a:lstStyle/>
           <a:p>
             <a:pPr algn="ctr">
               <a:spcAft>
-                <a:spcPts val="200"/>
-              </a:spcAft>
-            </a:pPr>
-            <a:r>
-              <a:rPr sz="1220" b="1" i="0">
+                <a:spcPts val="100"/>
+              </a:spcAft>
+            </a:pPr>
+            <a:r>
+              <a:rPr sz="1200" b="1">
                 <a:solidFill>
                   <a:srgbClr val="17323B"/>
                 </a:solidFill>
@@ -12973,67 +12423,14 @@
       </p:sp>
       <p:sp>
         <p:nvSpPr>
-          <p:cNvPr id="19" name="TextBox 18"/>
-          <p:cNvSpPr txBox="1"/>
-          <p:nvPr/>
-        </p:nvSpPr>
-        <p:spPr>
-          <a:xfrm>
-            <a:off x="5614416" y="2542032"/>
-            <a:ext cx="1728216" cy="274320"/>
-          </a:xfrm>
-          <a:prstGeom prst="rect">
-            <a:avLst/>
-          </a:prstGeom>
-          <a:noFill/>
-        </p:spPr>
-        <p:txBody>
-          <a:bodyPr wrap="square" lIns="0" rIns="0" tIns="0" bIns="0" anchor="t"/>
-          <a:lstStyle/>
-          <a:p>
-            <a:pPr algn="ctr">
-              <a:spcAft>
-                <a:spcPts val="200"/>
-              </a:spcAft>
-            </a:pPr>
-            <a:r>
-              <a:rPr sz="919" b="0" i="0">
-                <a:solidFill>
-                  <a:srgbClr val="5B7780"/>
-                </a:solidFill>
-                <a:latin typeface="Calibri"/>
-              </a:rPr>
-              <a:t>HTML / 多文件</a:t>
-            </a:r>
-          </a:p>
-          <a:p>
-            <a:pPr algn="ctr">
-              <a:spcAft>
-                <a:spcPts val="200"/>
-              </a:spcAft>
-            </a:pPr>
-            <a:r>
-              <a:rPr sz="919" b="0" i="0">
-                <a:solidFill>
-                  <a:srgbClr val="5B7780"/>
-                </a:solidFill>
-                <a:latin typeface="Calibri"/>
-              </a:rPr>
-              <a:t>/ Vue</a:t>
-            </a:r>
-          </a:p>
-        </p:txBody>
-      </p:sp>
-      <p:sp>
-        <p:nvSpPr>
-          <p:cNvPr id="20" name="Rounded Rectangle 19"/>
+          <p:cNvPr id="17" name="Rounded Rectangle 16"/>
           <p:cNvSpPr/>
           <p:nvPr/>
         </p:nvSpPr>
         <p:spPr>
           <a:xfrm>
             <a:off x="7772400" y="1417320"/>
-            <a:ext cx="2057400" cy="1572768"/>
+            <a:ext cx="2057400" cy="1234440"/>
           </a:xfrm>
           <a:prstGeom prst="roundRect">
             <a:avLst/>
@@ -13071,14 +12468,14 @@
       </p:sp>
       <p:sp>
         <p:nvSpPr>
-          <p:cNvPr id="21" name="TextBox 20"/>
+          <p:cNvPr id="18" name="TextBox 17"/>
           <p:cNvSpPr txBox="1"/>
           <p:nvPr/>
         </p:nvSpPr>
         <p:spPr>
           <a:xfrm>
-            <a:off x="7900416" y="1581912"/>
-            <a:ext cx="1801368" cy="566928"/>
+            <a:off x="7882127" y="1581912"/>
+            <a:ext cx="1837943" cy="502920"/>
           </a:xfrm>
           <a:prstGeom prst="rect">
             <a:avLst/>
@@ -13086,16 +12483,18 @@
           <a:noFill/>
         </p:spPr>
         <p:txBody>
-          <a:bodyPr wrap="square" lIns="0" rIns="0" tIns="0" bIns="0" anchor="ctr"/>
+          <a:bodyPr wrap="square" lIns="0" rIns="0" tIns="0" bIns="0" anchor="ctr">
+            <a:spAutoFit/>
+          </a:bodyPr>
           <a:lstStyle/>
           <a:p>
             <a:pPr algn="ctr">
               <a:spcAft>
-                <a:spcPts val="200"/>
-              </a:spcAft>
-            </a:pPr>
-            <a:r>
-              <a:rPr sz="3100" b="1" i="0">
+                <a:spcPts val="100"/>
+              </a:spcAft>
+            </a:pPr>
+            <a:r>
+              <a:rPr sz="3100" b="1">
                 <a:solidFill>
                   <a:srgbClr val="00A896"/>
                 </a:solidFill>
@@ -13108,14 +12507,14 @@
       </p:sp>
       <p:sp>
         <p:nvSpPr>
-          <p:cNvPr id="22" name="TextBox 21"/>
+          <p:cNvPr id="19" name="TextBox 18"/>
           <p:cNvSpPr txBox="1"/>
           <p:nvPr/>
         </p:nvSpPr>
         <p:spPr>
           <a:xfrm>
-            <a:off x="7936992" y="2221992"/>
-            <a:ext cx="1728216" cy="310896"/>
+            <a:off x="7909560" y="2258568"/>
+            <a:ext cx="1783080" cy="201168"/>
           </a:xfrm>
           <a:prstGeom prst="rect">
             <a:avLst/>
@@ -13123,73 +12522,38 @@
           <a:noFill/>
         </p:spPr>
         <p:txBody>
-          <a:bodyPr wrap="square" lIns="0" rIns="0" tIns="0" bIns="0" anchor="t"/>
+          <a:bodyPr wrap="square" lIns="0" rIns="0" tIns="0" bIns="0" anchor="t">
+            <a:spAutoFit/>
+          </a:bodyPr>
           <a:lstStyle/>
           <a:p>
             <a:pPr algn="ctr">
               <a:spcAft>
-                <a:spcPts val="200"/>
-              </a:spcAft>
-            </a:pPr>
-            <a:r>
-              <a:rPr sz="1220" b="1" i="0">
+                <a:spcPts val="100"/>
+              </a:spcAft>
+            </a:pPr>
+            <a:r>
+              <a:rPr sz="1200" b="1">
                 <a:solidFill>
                   <a:srgbClr val="17323B"/>
                 </a:solidFill>
                 <a:latin typeface="Calibri"/>
               </a:rPr>
-              <a:t>后端测试文件</a:t>
-            </a:r>
-          </a:p>
-        </p:txBody>
-      </p:sp>
-      <p:sp>
-        <p:nvSpPr>
-          <p:cNvPr id="23" name="TextBox 22"/>
-          <p:cNvSpPr txBox="1"/>
-          <p:nvPr/>
-        </p:nvSpPr>
-        <p:spPr>
-          <a:xfrm>
-            <a:off x="7936992" y="2542032"/>
-            <a:ext cx="1728216" cy="274320"/>
-          </a:xfrm>
-          <a:prstGeom prst="rect">
-            <a:avLst/>
-          </a:prstGeom>
-          <a:noFill/>
-        </p:spPr>
-        <p:txBody>
-          <a:bodyPr wrap="square" lIns="0" rIns="0" tIns="0" bIns="0" anchor="t"/>
-          <a:lstStyle/>
-          <a:p>
-            <a:pPr algn="ctr">
-              <a:spcAft>
-                <a:spcPts val="200"/>
-              </a:spcAft>
-            </a:pPr>
-            <a:r>
-              <a:rPr sz="919" b="0" i="0">
-                <a:solidFill>
-                  <a:srgbClr val="5B7780"/>
-                </a:solidFill>
-                <a:latin typeface="Calibri"/>
-              </a:rPr>
-              <a:t>AI/工作流/工具</a:t>
-            </a:r>
-          </a:p>
-        </p:txBody>
-      </p:sp>
-      <p:sp>
-        <p:nvSpPr>
-          <p:cNvPr id="24" name="Rounded Rectangle 23"/>
+              <a:t>测试文件</a:t>
+            </a:r>
+          </a:p>
+        </p:txBody>
+      </p:sp>
+      <p:sp>
+        <p:nvSpPr>
+          <p:cNvPr id="20" name="Rounded Rectangle 19"/>
           <p:cNvSpPr/>
           <p:nvPr/>
         </p:nvSpPr>
         <p:spPr>
           <a:xfrm>
-            <a:off x="804672" y="3703320"/>
-            <a:ext cx="4983480" cy="1719072"/>
+            <a:off x="804672" y="3520440"/>
+            <a:ext cx="4983480" cy="1874519"/>
           </a:xfrm>
           <a:prstGeom prst="roundRect">
             <a:avLst/>
@@ -13227,14 +12591,14 @@
       </p:sp>
       <p:sp>
         <p:nvSpPr>
-          <p:cNvPr id="25" name="Rectangle 24"/>
+          <p:cNvPr id="21" name="Rectangle 20"/>
           <p:cNvSpPr/>
           <p:nvPr/>
         </p:nvSpPr>
         <p:spPr>
           <a:xfrm>
-            <a:off x="804672" y="3703320"/>
-            <a:ext cx="109728" cy="1719072"/>
+            <a:off x="804672" y="3520440"/>
+            <a:ext cx="109728" cy="1874519"/>
           </a:xfrm>
           <a:prstGeom prst="rect">
             <a:avLst/>
@@ -13272,13 +12636,13 @@
       </p:sp>
       <p:sp>
         <p:nvSpPr>
-          <p:cNvPr id="26" name="Oval 25"/>
+          <p:cNvPr id="22" name="Oval 21"/>
           <p:cNvSpPr/>
           <p:nvPr/>
         </p:nvSpPr>
         <p:spPr>
           <a:xfrm>
-            <a:off x="1060704" y="3931920"/>
+            <a:off x="1060704" y="3749039"/>
             <a:ext cx="475488" cy="475488"/>
           </a:xfrm>
           <a:prstGeom prst="ellipse">
@@ -13317,13 +12681,13 @@
       </p:sp>
       <p:sp>
         <p:nvSpPr>
-          <p:cNvPr id="27" name="TextBox 26"/>
+          <p:cNvPr id="23" name="TextBox 22"/>
           <p:cNvSpPr txBox="1"/>
           <p:nvPr/>
         </p:nvSpPr>
         <p:spPr>
           <a:xfrm>
-            <a:off x="1078992" y="4069080"/>
+            <a:off x="1078992" y="3886200"/>
             <a:ext cx="438912" cy="137160"/>
           </a:xfrm>
           <a:prstGeom prst="rect">
@@ -13332,16 +12696,18 @@
           <a:noFill/>
         </p:spPr>
         <p:txBody>
-          <a:bodyPr wrap="square" lIns="0" rIns="0" tIns="0" bIns="0" anchor="ctr"/>
+          <a:bodyPr wrap="square" lIns="0" rIns="0" tIns="0" bIns="0" anchor="ctr">
+            <a:spAutoFit/>
+          </a:bodyPr>
           <a:lstStyle/>
           <a:p>
             <a:pPr algn="ctr">
               <a:spcAft>
-                <a:spcPts val="200"/>
-              </a:spcAft>
-            </a:pPr>
-            <a:r>
-              <a:rPr sz="850" b="1" i="0">
+                <a:spcPts val="100"/>
+              </a:spcAft>
+            </a:pPr>
+            <a:r>
+              <a:rPr sz="850" b="1">
                 <a:solidFill>
                   <a:srgbClr val="FFFFFF"/>
                 </a:solidFill>
@@ -13354,13 +12720,13 @@
       </p:sp>
       <p:sp>
         <p:nvSpPr>
-          <p:cNvPr id="28" name="TextBox 27"/>
+          <p:cNvPr id="24" name="TextBox 23"/>
           <p:cNvSpPr txBox="1"/>
           <p:nvPr/>
         </p:nvSpPr>
         <p:spPr>
           <a:xfrm>
-            <a:off x="1664207" y="3922776"/>
+            <a:off x="1664207" y="3739896"/>
             <a:ext cx="3895344" cy="320040"/>
           </a:xfrm>
           <a:prstGeom prst="rect">
@@ -13369,16 +12735,18 @@
           <a:noFill/>
         </p:spPr>
         <p:txBody>
-          <a:bodyPr wrap="square" lIns="0" rIns="0" tIns="0" bIns="0" anchor="t"/>
+          <a:bodyPr wrap="square" lIns="0" rIns="0" tIns="0" bIns="0" anchor="t">
+            <a:spAutoFit/>
+          </a:bodyPr>
           <a:lstStyle/>
           <a:p>
             <a:pPr algn="l">
               <a:spcAft>
-                <a:spcPts val="200"/>
-              </a:spcAft>
-            </a:pPr>
-            <a:r>
-              <a:rPr sz="1600" b="1" i="0">
+                <a:spcPts val="100"/>
+              </a:spcAft>
+            </a:pPr>
+            <a:r>
+              <a:rPr sz="1600" b="1">
                 <a:solidFill>
                   <a:srgbClr val="21295C"/>
                 </a:solidFill>
@@ -13391,14 +12759,14 @@
       </p:sp>
       <p:sp>
         <p:nvSpPr>
-          <p:cNvPr id="29" name="TextBox 28"/>
+          <p:cNvPr id="25" name="TextBox 24"/>
           <p:cNvSpPr txBox="1"/>
           <p:nvPr/>
         </p:nvSpPr>
         <p:spPr>
           <a:xfrm>
-            <a:off x="1115568" y="4471416"/>
-            <a:ext cx="4434840" cy="786383"/>
+            <a:off x="1115568" y="4288536"/>
+            <a:ext cx="4434840" cy="941831"/>
           </a:xfrm>
           <a:prstGeom prst="rect">
             <a:avLst/>
@@ -13406,17 +12774,14 @@
           <a:noFill/>
         </p:spPr>
         <p:txBody>
-          <a:bodyPr wrap="square" lIns="73152" rIns="73152" tIns="36576" bIns="36576">
+          <a:bodyPr wrap="square" lIns="73152" rIns="73152" tIns="27432" bIns="27432">
             <a:spAutoFit/>
           </a:bodyPr>
           <a:lstStyle/>
           <a:p>
             <a:pPr>
-              <a:lnSpc>
-                <a:spcPct val="100000"/>
-              </a:lnSpc>
-              <a:spcAft>
-                <a:spcPts val="100"/>
+              <a:spcAft>
+                <a:spcPts val="400"/>
               </a:spcAft>
             </a:pPr>
             <a:r>
@@ -13426,14 +12791,11 @@
                 </a:solidFill>
                 <a:latin typeface="Calibri"/>
               </a:rPr>
-              <a:t>Actuator 暴露 health、i</a:t>
+              <a:t>Actuator 暴露健康与 Prom 指标</a:t>
             </a:r>
           </a:p>
           <a:p>
             <a:pPr>
-              <a:lnSpc>
-                <a:spcPct val="100000"/>
-              </a:lnSpc>
               <a:spcAft>
                 <a:spcPts val="400"/>
               </a:spcAft>
@@ -13445,16 +12807,13 @@
                 </a:solidFill>
                 <a:latin typeface="Calibri"/>
               </a:rPr>
-              <a:t>nfo、prometheus</a:t>
+              <a:t>prometheus.yml 指向应用指标端点</a:t>
             </a:r>
           </a:p>
           <a:p>
             <a:pPr>
-              <a:lnSpc>
-                <a:spcPct val="100000"/>
-              </a:lnSpc>
-              <a:spcAft>
-                <a:spcPts val="100"/>
+              <a:spcAft>
+                <a:spcPts val="400"/>
               </a:spcAft>
             </a:pPr>
             <a:r>
@@ -13464,44 +12823,6 @@
                 </a:solidFill>
                 <a:latin typeface="Calibri"/>
               </a:rPr>
-              <a:t>prometheus.yml</a:t>
-            </a:r>
-          </a:p>
-          <a:p>
-            <a:pPr>
-              <a:lnSpc>
-                <a:spcPct val="100000"/>
-              </a:lnSpc>
-              <a:spcAft>
-                <a:spcPts val="400"/>
-              </a:spcAft>
-            </a:pPr>
-            <a:r>
-              <a:rPr sz="1230">
-                <a:solidFill>
-                  <a:srgbClr val="17323B"/>
-                </a:solidFill>
-                <a:latin typeface="Calibri"/>
-              </a:rPr>
-              <a:t>指向应用指标端点</a:t>
-            </a:r>
-          </a:p>
-          <a:p>
-            <a:pPr>
-              <a:lnSpc>
-                <a:spcPct val="100000"/>
-              </a:lnSpc>
-              <a:spcAft>
-                <a:spcPts val="400"/>
-              </a:spcAft>
-            </a:pPr>
-            <a:r>
-              <a:rPr sz="1230">
-                <a:solidFill>
-                  <a:srgbClr val="17323B"/>
-                </a:solidFill>
-                <a:latin typeface="Calibri"/>
-              </a:rPr>
               <a:t>grafana 目录存在，可沉淀仪表盘</a:t>
             </a:r>
           </a:p>
@@ -13509,14 +12830,14 @@
       </p:sp>
       <p:sp>
         <p:nvSpPr>
-          <p:cNvPr id="30" name="Rounded Rectangle 29"/>
+          <p:cNvPr id="26" name="Rounded Rectangle 25"/>
           <p:cNvSpPr/>
           <p:nvPr/>
         </p:nvSpPr>
         <p:spPr>
           <a:xfrm>
-            <a:off x="6263640" y="3703320"/>
-            <a:ext cx="4983480" cy="1719072"/>
+            <a:off x="6263640" y="3520440"/>
+            <a:ext cx="4983480" cy="1874519"/>
           </a:xfrm>
           <a:prstGeom prst="roundRect">
             <a:avLst/>
@@ -13554,14 +12875,14 @@
       </p:sp>
       <p:sp>
         <p:nvSpPr>
-          <p:cNvPr id="31" name="Rectangle 30"/>
+          <p:cNvPr id="27" name="Rectangle 26"/>
           <p:cNvSpPr/>
           <p:nvPr/>
         </p:nvSpPr>
         <p:spPr>
           <a:xfrm>
-            <a:off x="6263640" y="3703320"/>
-            <a:ext cx="109728" cy="1719072"/>
+            <a:off x="6263640" y="3520440"/>
+            <a:ext cx="109728" cy="1874519"/>
           </a:xfrm>
           <a:prstGeom prst="rect">
             <a:avLst/>
@@ -13599,13 +12920,13 @@
       </p:sp>
       <p:sp>
         <p:nvSpPr>
-          <p:cNvPr id="32" name="Oval 31"/>
+          <p:cNvPr id="28" name="Oval 27"/>
           <p:cNvSpPr/>
           <p:nvPr/>
         </p:nvSpPr>
         <p:spPr>
           <a:xfrm>
-            <a:off x="6519672" y="3931920"/>
+            <a:off x="6519672" y="3749039"/>
             <a:ext cx="475488" cy="475488"/>
           </a:xfrm>
           <a:prstGeom prst="ellipse">
@@ -13644,13 +12965,13 @@
       </p:sp>
       <p:sp>
         <p:nvSpPr>
-          <p:cNvPr id="33" name="TextBox 32"/>
+          <p:cNvPr id="29" name="TextBox 28"/>
           <p:cNvSpPr txBox="1"/>
           <p:nvPr/>
         </p:nvSpPr>
         <p:spPr>
           <a:xfrm>
-            <a:off x="6537959" y="4069080"/>
+            <a:off x="6537959" y="3886200"/>
             <a:ext cx="438912" cy="137160"/>
           </a:xfrm>
           <a:prstGeom prst="rect">
@@ -13659,16 +12980,18 @@
           <a:noFill/>
         </p:spPr>
         <p:txBody>
-          <a:bodyPr wrap="square" lIns="0" rIns="0" tIns="0" bIns="0" anchor="ctr"/>
+          <a:bodyPr wrap="square" lIns="0" rIns="0" tIns="0" bIns="0" anchor="ctr">
+            <a:spAutoFit/>
+          </a:bodyPr>
           <a:lstStyle/>
           <a:p>
             <a:pPr algn="ctr">
               <a:spcAft>
-                <a:spcPts val="200"/>
-              </a:spcAft>
-            </a:pPr>
-            <a:r>
-              <a:rPr sz="850" b="1" i="0">
+                <a:spcPts val="100"/>
+              </a:spcAft>
+            </a:pPr>
+            <a:r>
+              <a:rPr sz="850" b="1">
                 <a:solidFill>
                   <a:srgbClr val="FFFFFF"/>
                 </a:solidFill>
@@ -13681,13 +13004,13 @@
       </p:sp>
       <p:sp>
         <p:nvSpPr>
-          <p:cNvPr id="34" name="TextBox 33"/>
+          <p:cNvPr id="30" name="TextBox 29"/>
           <p:cNvSpPr txBox="1"/>
           <p:nvPr/>
         </p:nvSpPr>
         <p:spPr>
           <a:xfrm>
-            <a:off x="7123175" y="3922776"/>
+            <a:off x="7123175" y="3739896"/>
             <a:ext cx="3895344" cy="320040"/>
           </a:xfrm>
           <a:prstGeom prst="rect">
@@ -13696,16 +13019,18 @@
           <a:noFill/>
         </p:spPr>
         <p:txBody>
-          <a:bodyPr wrap="square" lIns="0" rIns="0" tIns="0" bIns="0" anchor="t"/>
+          <a:bodyPr wrap="square" lIns="0" rIns="0" tIns="0" bIns="0" anchor="t">
+            <a:spAutoFit/>
+          </a:bodyPr>
           <a:lstStyle/>
           <a:p>
             <a:pPr algn="l">
               <a:spcAft>
-                <a:spcPts val="200"/>
-              </a:spcAft>
-            </a:pPr>
-            <a:r>
-              <a:rPr sz="1600" b="1" i="0">
+                <a:spcPts val="100"/>
+              </a:spcAft>
+            </a:pPr>
+            <a:r>
+              <a:rPr sz="1600" b="1">
                 <a:solidFill>
                   <a:srgbClr val="21295C"/>
                 </a:solidFill>
@@ -13718,14 +13043,14 @@
       </p:sp>
       <p:sp>
         <p:nvSpPr>
-          <p:cNvPr id="35" name="TextBox 34"/>
+          <p:cNvPr id="31" name="TextBox 30"/>
           <p:cNvSpPr txBox="1"/>
           <p:nvPr/>
         </p:nvSpPr>
         <p:spPr>
           <a:xfrm>
-            <a:off x="6574536" y="4471416"/>
-            <a:ext cx="4434840" cy="786383"/>
+            <a:off x="6574536" y="4288536"/>
+            <a:ext cx="4434840" cy="941831"/>
           </a:xfrm>
           <a:prstGeom prst="rect">
             <a:avLst/>
@@ -13733,15 +13058,12 @@
           <a:noFill/>
         </p:spPr>
         <p:txBody>
-          <a:bodyPr wrap="square" lIns="73152" rIns="73152" tIns="36576" bIns="36576">
+          <a:bodyPr wrap="square" lIns="73152" rIns="73152" tIns="27432" bIns="27432">
             <a:spAutoFit/>
           </a:bodyPr>
           <a:lstStyle/>
           <a:p>
             <a:pPr>
-              <a:lnSpc>
-                <a:spcPct val="100000"/>
-              </a:lnSpc>
               <a:spcAft>
                 <a:spcPts val="400"/>
               </a:spcAft>
@@ -13758,11 +13080,8 @@
           </a:p>
           <a:p>
             <a:pPr>
-              <a:lnSpc>
-                <a:spcPct val="100000"/>
-              </a:lnSpc>
-              <a:spcAft>
-                <a:spcPts val="100"/>
+              <a:spcAft>
+                <a:spcPts val="400"/>
               </a:spcAft>
             </a:pPr>
             <a:r>
@@ -13772,14 +13091,11 @@
                 </a:solidFill>
                 <a:latin typeface="Calibri"/>
               </a:rPr>
-              <a:t>AI</a:t>
+              <a:t>AI 调用耗时、token/成本、失败类型</a:t>
             </a:r>
           </a:p>
           <a:p>
             <a:pPr>
-              <a:lnSpc>
-                <a:spcPct val="100000"/>
-              </a:lnSpc>
               <a:spcAft>
                 <a:spcPts val="400"/>
               </a:spcAft>
@@ -13791,25 +13107,6 @@
                 </a:solidFill>
                 <a:latin typeface="Calibri"/>
               </a:rPr>
-              <a:t>调用耗时、token/成本、失败类型</a:t>
-            </a:r>
-          </a:p>
-          <a:p>
-            <a:pPr>
-              <a:lnSpc>
-                <a:spcPct val="100000"/>
-              </a:lnSpc>
-              <a:spcAft>
-                <a:spcPts val="400"/>
-              </a:spcAft>
-            </a:pPr>
-            <a:r>
-              <a:rPr sz="1230">
-                <a:solidFill>
-                  <a:srgbClr val="17323B"/>
-                </a:solidFill>
-                <a:latin typeface="Calibri"/>
-              </a:rPr>
               <a:t>截图、构建、对象存储上传成功率</a:t>
             </a:r>
           </a:p>
@@ -13817,7 +13114,7 @@
       </p:sp>
       <p:sp>
         <p:nvSpPr>
-          <p:cNvPr id="36" name="TextBox 35"/>
+          <p:cNvPr id="32" name="TextBox 31"/>
           <p:cNvSpPr txBox="1"/>
           <p:nvPr/>
         </p:nvSpPr>
@@ -13832,16 +13129,18 @@
           <a:noFill/>
         </p:spPr>
         <p:txBody>
-          <a:bodyPr wrap="square" lIns="0" rIns="0" tIns="0" bIns="0" anchor="t"/>
+          <a:bodyPr wrap="square" lIns="0" rIns="0" tIns="0" bIns="0" anchor="t">
+            <a:spAutoFit/>
+          </a:bodyPr>
           <a:lstStyle/>
           <a:p>
             <a:pPr algn="l">
               <a:spcAft>
-                <a:spcPts val="200"/>
-              </a:spcAft>
-            </a:pPr>
-            <a:r>
-              <a:rPr sz="1050" b="0" i="0">
+                <a:spcPts val="100"/>
+              </a:spcAft>
+            </a:pPr>
+            <a:r>
+              <a:rPr sz="1050" b="0">
                 <a:solidFill>
                   <a:srgbClr val="5B7780"/>
                 </a:solidFill>
@@ -13854,7 +13153,7 @@
       </p:sp>
       <p:sp>
         <p:nvSpPr>
-          <p:cNvPr id="37" name="Oval 36"/>
+          <p:cNvPr id="33" name="Oval 32"/>
           <p:cNvSpPr/>
           <p:nvPr/>
         </p:nvSpPr>
@@ -13899,7 +13198,7 @@
       </p:sp>
       <p:sp>
         <p:nvSpPr>
-          <p:cNvPr id="38" name="Oval 37"/>
+          <p:cNvPr id="34" name="Oval 33"/>
           <p:cNvSpPr/>
           <p:nvPr/>
         </p:nvSpPr>
@@ -14030,16 +13329,18 @@
           <a:noFill/>
         </p:spPr>
         <p:txBody>
-          <a:bodyPr wrap="square" lIns="0" rIns="0" tIns="0" bIns="0" anchor="ctr"/>
+          <a:bodyPr wrap="square" lIns="0" rIns="0" tIns="0" bIns="0" anchor="ctr">
+            <a:spAutoFit/>
+          </a:bodyPr>
           <a:lstStyle/>
           <a:p>
             <a:pPr algn="ctr">
               <a:spcAft>
-                <a:spcPts val="200"/>
-              </a:spcAft>
-            </a:pPr>
-            <a:r>
-              <a:rPr sz="900" b="1" i="0">
+                <a:spcPts val="100"/>
+              </a:spcAft>
+            </a:pPr>
+            <a:r>
+              <a:rPr sz="900" b="1">
                 <a:solidFill>
                   <a:srgbClr val="FFFFFF"/>
                 </a:solidFill>
@@ -14067,16 +13368,18 @@
           <a:noFill/>
         </p:spPr>
         <p:txBody>
-          <a:bodyPr wrap="square" lIns="0" rIns="0" tIns="0" bIns="0" anchor="t"/>
+          <a:bodyPr wrap="square" lIns="0" rIns="0" tIns="0" bIns="0" anchor="t">
+            <a:spAutoFit/>
+          </a:bodyPr>
           <a:lstStyle/>
           <a:p>
             <a:pPr algn="l">
               <a:spcAft>
-                <a:spcPts val="200"/>
-              </a:spcAft>
-            </a:pPr>
-            <a:r>
-              <a:rPr sz="3400" b="1" i="0">
+                <a:spcPts val="100"/>
+              </a:spcAft>
+            </a:pPr>
+            <a:r>
+              <a:rPr sz="3400" b="1">
                 <a:solidFill>
                   <a:srgbClr val="21295C"/>
                 </a:solidFill>
@@ -14104,16 +13407,18 @@
           <a:noFill/>
         </p:spPr>
         <p:txBody>
-          <a:bodyPr wrap="square" lIns="0" rIns="0" tIns="0" bIns="0" anchor="t"/>
+          <a:bodyPr wrap="square" lIns="0" rIns="0" tIns="0" bIns="0" anchor="t">
+            <a:spAutoFit/>
+          </a:bodyPr>
           <a:lstStyle/>
           <a:p>
             <a:pPr algn="l">
               <a:spcAft>
-                <a:spcPts val="200"/>
-              </a:spcAft>
-            </a:pPr>
-            <a:r>
-              <a:rPr sz="1150" b="0" i="0">
+                <a:spcPts val="100"/>
+              </a:spcAft>
+            </a:pPr>
+            <a:r>
+              <a:rPr sz="1150" b="0">
                 <a:solidFill>
                   <a:srgbClr val="5B7780"/>
                 </a:solidFill>
@@ -14186,16 +13491,18 @@
           <a:noFill/>
         </p:spPr>
         <p:txBody>
-          <a:bodyPr wrap="square" lIns="0" rIns="0" tIns="0" bIns="0" anchor="ctr"/>
+          <a:bodyPr wrap="square" lIns="0" rIns="0" tIns="0" bIns="0" anchor="ctr">
+            <a:spAutoFit/>
+          </a:bodyPr>
           <a:lstStyle/>
           <a:p>
             <a:pPr algn="ctr">
               <a:spcAft>
-                <a:spcPts val="200"/>
-              </a:spcAft>
-            </a:pPr>
-            <a:r>
-              <a:rPr sz="1050" b="1" i="0">
+                <a:spcPts val="100"/>
+              </a:spcAft>
+            </a:pPr>
+            <a:r>
+              <a:rPr sz="1050" b="1">
                 <a:solidFill>
                   <a:srgbClr val="065A82"/>
                 </a:solidFill>
@@ -14358,16 +13665,18 @@
           <a:noFill/>
         </p:spPr>
         <p:txBody>
-          <a:bodyPr wrap="square" lIns="0" rIns="0" tIns="0" bIns="0" anchor="ctr"/>
+          <a:bodyPr wrap="square" lIns="0" rIns="0" tIns="0" bIns="0" anchor="ctr">
+            <a:spAutoFit/>
+          </a:bodyPr>
           <a:lstStyle/>
           <a:p>
             <a:pPr algn="ctr">
               <a:spcAft>
-                <a:spcPts val="200"/>
-              </a:spcAft>
-            </a:pPr>
-            <a:r>
-              <a:rPr sz="850" b="1" i="0">
+                <a:spcPts val="100"/>
+              </a:spcAft>
+            </a:pPr>
+            <a:r>
+              <a:rPr sz="850" b="1">
                 <a:solidFill>
                   <a:srgbClr val="FFFFFF"/>
                 </a:solidFill>
@@ -14395,16 +13704,18 @@
           <a:noFill/>
         </p:spPr>
         <p:txBody>
-          <a:bodyPr wrap="square" lIns="0" rIns="0" tIns="0" bIns="0" anchor="t"/>
+          <a:bodyPr wrap="square" lIns="0" rIns="0" tIns="0" bIns="0" anchor="t">
+            <a:spAutoFit/>
+          </a:bodyPr>
           <a:lstStyle/>
           <a:p>
             <a:pPr algn="l">
               <a:spcAft>
-                <a:spcPts val="200"/>
-              </a:spcAft>
-            </a:pPr>
-            <a:r>
-              <a:rPr sz="1600" b="1" i="0">
+                <a:spcPts val="100"/>
+              </a:spcAft>
+            </a:pPr>
+            <a:r>
+              <a:rPr sz="1600" b="1">
                 <a:solidFill>
                   <a:srgbClr val="21295C"/>
                 </a:solidFill>
@@ -14432,21 +13743,18 @@
           <a:noFill/>
         </p:spPr>
         <p:txBody>
-          <a:bodyPr wrap="square" lIns="73152" rIns="73152" tIns="36576" bIns="36576">
+          <a:bodyPr wrap="square" lIns="73152" rIns="73152" tIns="27432" bIns="27432">
             <a:spAutoFit/>
           </a:bodyPr>
           <a:lstStyle/>
           <a:p>
             <a:pPr>
-              <a:lnSpc>
-                <a:spcPct val="100000"/>
-              </a:lnSpc>
               <a:spcAft>
                 <a:spcPts val="400"/>
               </a:spcAft>
             </a:pPr>
             <a:r>
-              <a:rPr sz="1150">
+              <a:rPr sz="1180">
                 <a:solidFill>
                   <a:srgbClr val="17323B"/>
                 </a:solidFill>
@@ -14457,110 +13765,60 @@
           </a:p>
           <a:p>
             <a:pPr>
-              <a:lnSpc>
-                <a:spcPct val="100000"/>
-              </a:lnSpc>
-              <a:spcAft>
-                <a:spcPts val="100"/>
-              </a:spcAft>
-            </a:pPr>
-            <a:r>
-              <a:rPr sz="1150">
+              <a:spcAft>
+                <a:spcPts val="400"/>
+              </a:spcAft>
+            </a:pPr>
+            <a:r>
+              <a:rPr sz="1180">
                 <a:solidFill>
                   <a:srgbClr val="17323B"/>
                 </a:solidFill>
                 <a:latin typeface="Calibri"/>
               </a:rPr>
-              <a:t>覆盖 AI 生成、类型路由、</a:t>
+              <a:t>覆盖 AI、类型路由、工作流、图</a:t>
             </a:r>
           </a:p>
           <a:p>
             <a:pPr>
-              <a:lnSpc>
-                <a:spcPct val="100000"/>
-              </a:lnSpc>
-              <a:spcAft>
-                <a:spcPts val="100"/>
-              </a:spcAft>
-            </a:pPr>
-            <a:r>
-              <a:rPr sz="1150">
+              <a:spcAft>
+                <a:spcPts val="400"/>
+              </a:spcAft>
+            </a:pPr>
+            <a:r>
+              <a:rPr sz="1180">
                 <a:solidFill>
                   <a:srgbClr val="17323B"/>
                 </a:solidFill>
                 <a:latin typeface="Calibri"/>
               </a:rPr>
-              <a:t>工作流、图片/Logo/Me</a:t>
+              <a:t>片工具</a:t>
             </a:r>
           </a:p>
           <a:p>
             <a:pPr>
-              <a:lnSpc>
-                <a:spcPct val="100000"/>
-              </a:lnSpc>
               <a:spcAft>
                 <a:spcPts val="400"/>
               </a:spcAft>
             </a:pPr>
             <a:r>
-              <a:rPr sz="1150">
+              <a:rPr sz="1180">
                 <a:solidFill>
                   <a:srgbClr val="17323B"/>
                 </a:solidFill>
                 <a:latin typeface="Calibri"/>
               </a:rPr>
-              <a:t>rmaid 工具</a:t>
+              <a:t>Maven / Spring Boot</a:t>
             </a:r>
           </a:p>
           <a:p>
             <a:pPr>
-              <a:lnSpc>
-                <a:spcPct val="100000"/>
-              </a:lnSpc>
-              <a:spcAft>
-                <a:spcPts val="100"/>
-              </a:spcAft>
-            </a:pPr>
-            <a:r>
-              <a:rPr sz="1150">
-                <a:solidFill>
-                  <a:srgbClr val="17323B"/>
-                </a:solidFill>
-                <a:latin typeface="Calibri"/>
-              </a:rPr>
-              <a:t>基于 Maven /</a:t>
-            </a:r>
-          </a:p>
-          <a:p>
-            <a:pPr>
-              <a:lnSpc>
-                <a:spcPct val="100000"/>
-              </a:lnSpc>
-              <a:spcAft>
-                <a:spcPts val="100"/>
-              </a:spcAft>
-            </a:pPr>
-            <a:r>
-              <a:rPr sz="1150">
-                <a:solidFill>
-                  <a:srgbClr val="17323B"/>
-                </a:solidFill>
-                <a:latin typeface="Calibri"/>
-              </a:rPr>
-              <a:t>Spring Boot</a:t>
-            </a:r>
-          </a:p>
-          <a:p>
-            <a:pPr>
-              <a:lnSpc>
-                <a:spcPct val="100000"/>
-              </a:lnSpc>
               <a:spcAft>
                 <a:spcPts val="400"/>
               </a:spcAft>
             </a:pPr>
             <a:r>
-              <a:rPr sz="1150">
+              <a:rPr sz="1180">
                 <a:solidFill>
                   <a:srgbClr val="17323B"/>
                 </a:solidFill>
@@ -14723,16 +13981,18 @@
           <a:noFill/>
         </p:spPr>
         <p:txBody>
-          <a:bodyPr wrap="square" lIns="0" rIns="0" tIns="0" bIns="0" anchor="ctr"/>
+          <a:bodyPr wrap="square" lIns="0" rIns="0" tIns="0" bIns="0" anchor="ctr">
+            <a:spAutoFit/>
+          </a:bodyPr>
           <a:lstStyle/>
           <a:p>
             <a:pPr algn="ctr">
               <a:spcAft>
-                <a:spcPts val="200"/>
-              </a:spcAft>
-            </a:pPr>
-            <a:r>
-              <a:rPr sz="850" b="1" i="0">
+                <a:spcPts val="100"/>
+              </a:spcAft>
+            </a:pPr>
+            <a:r>
+              <a:rPr sz="850" b="1">
                 <a:solidFill>
                   <a:srgbClr val="FFFFFF"/>
                 </a:solidFill>
@@ -14760,16 +14020,18 @@
           <a:noFill/>
         </p:spPr>
         <p:txBody>
-          <a:bodyPr wrap="square" lIns="0" rIns="0" tIns="0" bIns="0" anchor="t"/>
+          <a:bodyPr wrap="square" lIns="0" rIns="0" tIns="0" bIns="0" anchor="t">
+            <a:spAutoFit/>
+          </a:bodyPr>
           <a:lstStyle/>
           <a:p>
             <a:pPr algn="l">
               <a:spcAft>
-                <a:spcPts val="200"/>
-              </a:spcAft>
-            </a:pPr>
-            <a:r>
-              <a:rPr sz="1600" b="1" i="0">
+                <a:spcPts val="100"/>
+              </a:spcAft>
+            </a:pPr>
+            <a:r>
+              <a:rPr sz="1600" b="1">
                 <a:solidFill>
                   <a:srgbClr val="21295C"/>
                 </a:solidFill>
@@ -14797,179 +14059,72 @@
           <a:noFill/>
         </p:spPr>
         <p:txBody>
-          <a:bodyPr wrap="square" lIns="73152" rIns="73152" tIns="36576" bIns="36576">
+          <a:bodyPr wrap="square" lIns="73152" rIns="73152" tIns="27432" bIns="27432">
             <a:spAutoFit/>
           </a:bodyPr>
           <a:lstStyle/>
           <a:p>
             <a:pPr>
-              <a:lnSpc>
-                <a:spcPct val="100000"/>
-              </a:lnSpc>
-              <a:spcAft>
-                <a:spcPts val="100"/>
-              </a:spcAft>
-            </a:pPr>
-            <a:r>
-              <a:rPr sz="1150">
+              <a:spcAft>
+                <a:spcPts val="400"/>
+              </a:spcAft>
+            </a:pPr>
+            <a:r>
+              <a:rPr sz="1180">
                 <a:solidFill>
                   <a:srgbClr val="17323B"/>
                 </a:solidFill>
                 <a:latin typeface="Calibri"/>
               </a:rPr>
-              <a:t>npm run</a:t>
+              <a:t>build：类型检查 + Vite 构</a:t>
             </a:r>
           </a:p>
           <a:p>
             <a:pPr>
-              <a:lnSpc>
-                <a:spcPct val="100000"/>
-              </a:lnSpc>
-              <a:spcAft>
-                <a:spcPts val="100"/>
-              </a:spcAft>
-            </a:pPr>
-            <a:r>
-              <a:rPr sz="1150">
+              <a:spcAft>
+                <a:spcPts val="400"/>
+              </a:spcAft>
+            </a:pPr>
+            <a:r>
+              <a:rPr sz="1180">
                 <a:solidFill>
                   <a:srgbClr val="17323B"/>
                 </a:solidFill>
                 <a:latin typeface="Calibri"/>
               </a:rPr>
-              <a:t>build：类型检查 +</a:t>
+              <a:t>建</a:t>
             </a:r>
           </a:p>
           <a:p>
             <a:pPr>
-              <a:lnSpc>
-                <a:spcPct val="100000"/>
-              </a:lnSpc>
               <a:spcAft>
                 <a:spcPts val="400"/>
               </a:spcAft>
             </a:pPr>
             <a:r>
-              <a:rPr sz="1150">
+              <a:rPr sz="1180">
                 <a:solidFill>
                   <a:srgbClr val="17323B"/>
                 </a:solidFill>
                 <a:latin typeface="Calibri"/>
               </a:rPr>
-              <a:t>Vite 构建</a:t>
+              <a:t>lint：ESLint 代码检查</a:t>
             </a:r>
           </a:p>
           <a:p>
             <a:pPr>
-              <a:lnSpc>
-                <a:spcPct val="100000"/>
-              </a:lnSpc>
-              <a:spcAft>
-                <a:spcPts val="100"/>
-              </a:spcAft>
-            </a:pPr>
-            <a:r>
-              <a:rPr sz="1150">
+              <a:spcAft>
+                <a:spcPts val="400"/>
+              </a:spcAft>
+            </a:pPr>
+            <a:r>
+              <a:rPr sz="1180">
                 <a:solidFill>
                   <a:srgbClr val="17323B"/>
                 </a:solidFill>
                 <a:latin typeface="Calibri"/>
               </a:rPr>
-              <a:t>npm run</a:t>
-            </a:r>
-          </a:p>
-          <a:p>
-            <a:pPr>
-              <a:lnSpc>
-                <a:spcPct val="100000"/>
-              </a:lnSpc>
-              <a:spcAft>
-                <a:spcPts val="100"/>
-              </a:spcAft>
-            </a:pPr>
-            <a:r>
-              <a:rPr sz="1150">
-                <a:solidFill>
-                  <a:srgbClr val="17323B"/>
-                </a:solidFill>
-                <a:latin typeface="Calibri"/>
-              </a:rPr>
-              <a:t>lint：ESLint</a:t>
-            </a:r>
-          </a:p>
-          <a:p>
-            <a:pPr>
-              <a:lnSpc>
-                <a:spcPct val="100000"/>
-              </a:lnSpc>
-              <a:spcAft>
-                <a:spcPts val="400"/>
-              </a:spcAft>
-            </a:pPr>
-            <a:r>
-              <a:rPr sz="1150">
-                <a:solidFill>
-                  <a:srgbClr val="17323B"/>
-                </a:solidFill>
-                <a:latin typeface="Calibri"/>
-              </a:rPr>
-              <a:t>自动修复</a:t>
-            </a:r>
-          </a:p>
-          <a:p>
-            <a:pPr>
-              <a:lnSpc>
-                <a:spcPct val="100000"/>
-              </a:lnSpc>
-              <a:spcAft>
-                <a:spcPts val="100"/>
-              </a:spcAft>
-            </a:pPr>
-            <a:r>
-              <a:rPr sz="1150">
-                <a:solidFill>
-                  <a:srgbClr val="17323B"/>
-                </a:solidFill>
-                <a:latin typeface="Calibri"/>
-              </a:rPr>
-              <a:t>npm run format</a:t>
-            </a:r>
-          </a:p>
-          <a:p>
-            <a:pPr>
-              <a:lnSpc>
-                <a:spcPct val="100000"/>
-              </a:lnSpc>
-              <a:spcAft>
-                <a:spcPts val="100"/>
-              </a:spcAft>
-            </a:pPr>
-            <a:r>
-              <a:rPr sz="1150">
-                <a:solidFill>
-                  <a:srgbClr val="17323B"/>
-                </a:solidFill>
-                <a:latin typeface="Calibri"/>
-              </a:rPr>
-              <a:t>：Prettier 格式化</a:t>
-            </a:r>
-          </a:p>
-          <a:p>
-            <a:pPr>
-              <a:lnSpc>
-                <a:spcPct val="100000"/>
-              </a:lnSpc>
-              <a:spcAft>
-                <a:spcPts val="400"/>
-              </a:spcAft>
-            </a:pPr>
-            <a:r>
-              <a:rPr sz="1150">
-                <a:solidFill>
-                  <a:srgbClr val="17323B"/>
-                </a:solidFill>
-                <a:latin typeface="Calibri"/>
-              </a:rPr>
-              <a:t>src</a:t>
+              <a:t>format：Prettier 格式化</a:t>
             </a:r>
           </a:p>
         </p:txBody>
@@ -15126,16 +14281,18 @@
           <a:noFill/>
         </p:spPr>
         <p:txBody>
-          <a:bodyPr wrap="square" lIns="0" rIns="0" tIns="0" bIns="0" anchor="ctr"/>
+          <a:bodyPr wrap="square" lIns="0" rIns="0" tIns="0" bIns="0" anchor="ctr">
+            <a:spAutoFit/>
+          </a:bodyPr>
           <a:lstStyle/>
           <a:p>
             <a:pPr algn="ctr">
               <a:spcAft>
-                <a:spcPts val="200"/>
-              </a:spcAft>
-            </a:pPr>
-            <a:r>
-              <a:rPr sz="850" b="1" i="0">
+                <a:spcPts val="100"/>
+              </a:spcAft>
+            </a:pPr>
+            <a:r>
+              <a:rPr sz="850" b="1">
                 <a:solidFill>
                   <a:srgbClr val="FFFFFF"/>
                 </a:solidFill>
@@ -15163,16 +14320,18 @@
           <a:noFill/>
         </p:spPr>
         <p:txBody>
-          <a:bodyPr wrap="square" lIns="0" rIns="0" tIns="0" bIns="0" anchor="t"/>
+          <a:bodyPr wrap="square" lIns="0" rIns="0" tIns="0" bIns="0" anchor="t">
+            <a:spAutoFit/>
+          </a:bodyPr>
           <a:lstStyle/>
           <a:p>
             <a:pPr algn="l">
               <a:spcAft>
-                <a:spcPts val="200"/>
-              </a:spcAft>
-            </a:pPr>
-            <a:r>
-              <a:rPr sz="1600" b="1" i="0">
+                <a:spcPts val="100"/>
+              </a:spcAft>
+            </a:pPr>
+            <a:r>
+              <a:rPr sz="1600" b="1">
                 <a:solidFill>
                   <a:srgbClr val="21295C"/>
                 </a:solidFill>
@@ -15200,122 +14359,56 @@
           <a:noFill/>
         </p:spPr>
         <p:txBody>
-          <a:bodyPr wrap="square" lIns="73152" rIns="73152" tIns="36576" bIns="36576">
+          <a:bodyPr wrap="square" lIns="73152" rIns="73152" tIns="27432" bIns="27432">
             <a:spAutoFit/>
           </a:bodyPr>
           <a:lstStyle/>
           <a:p>
             <a:pPr>
-              <a:lnSpc>
-                <a:spcPct val="100000"/>
-              </a:lnSpc>
-              <a:spcAft>
-                <a:spcPts val="100"/>
-              </a:spcAft>
-            </a:pPr>
-            <a:r>
-              <a:rPr sz="1150">
+              <a:spcAft>
+                <a:spcPts val="400"/>
+              </a:spcAft>
+            </a:pPr>
+            <a:r>
+              <a:rPr sz="1180">
                 <a:solidFill>
                   <a:srgbClr val="17323B"/>
                 </a:solidFill>
                 <a:latin typeface="Calibri"/>
               </a:rPr>
-              <a:t>未发现 .github/</a:t>
+              <a:t>未发现 .github/workflows</a:t>
             </a:r>
           </a:p>
           <a:p>
             <a:pPr>
-              <a:lnSpc>
-                <a:spcPct val="100000"/>
-              </a:lnSpc>
               <a:spcAft>
                 <a:spcPts val="400"/>
               </a:spcAft>
             </a:pPr>
             <a:r>
-              <a:rPr sz="1150">
+              <a:rPr sz="1180">
                 <a:solidFill>
                   <a:srgbClr val="17323B"/>
                 </a:solidFill>
                 <a:latin typeface="Calibri"/>
               </a:rPr>
-              <a:t>workflows</a:t>
+              <a:t>无法判断最近 CI 结果</a:t>
             </a:r>
           </a:p>
           <a:p>
             <a:pPr>
-              <a:lnSpc>
-                <a:spcPct val="100000"/>
-              </a:lnSpc>
-              <a:spcAft>
-                <a:spcPts val="100"/>
-              </a:spcAft>
-            </a:pPr>
-            <a:r>
-              <a:rPr sz="1150">
+              <a:spcAft>
+                <a:spcPts val="400"/>
+              </a:spcAft>
+            </a:pPr>
+            <a:r>
+              <a:rPr sz="1180">
                 <a:solidFill>
                   <a:srgbClr val="17323B"/>
                 </a:solidFill>
                 <a:latin typeface="Calibri"/>
               </a:rPr>
-              <a:t>无法从仓库配置判断最近</a:t>
-            </a:r>
-          </a:p>
-          <a:p>
-            <a:pPr>
-              <a:lnSpc>
-                <a:spcPct val="100000"/>
-              </a:lnSpc>
-              <a:spcAft>
-                <a:spcPts val="400"/>
-              </a:spcAft>
-            </a:pPr>
-            <a:r>
-              <a:rPr sz="1150">
-                <a:solidFill>
-                  <a:srgbClr val="17323B"/>
-                </a:solidFill>
-                <a:latin typeface="Calibri"/>
-              </a:rPr>
-              <a:t>CI 结果</a:t>
-            </a:r>
-          </a:p>
-          <a:p>
-            <a:pPr>
-              <a:lnSpc>
-                <a:spcPct val="100000"/>
-              </a:lnSpc>
-              <a:spcAft>
-                <a:spcPts val="100"/>
-              </a:spcAft>
-            </a:pPr>
-            <a:r>
-              <a:rPr sz="1150">
-                <a:solidFill>
-                  <a:srgbClr val="17323B"/>
-                </a:solidFill>
-                <a:latin typeface="Calibri"/>
-              </a:rPr>
-              <a:t>建议补充 PR</a:t>
-            </a:r>
-          </a:p>
-          <a:p>
-            <a:pPr>
-              <a:lnSpc>
-                <a:spcPct val="100000"/>
-              </a:lnSpc>
-              <a:spcAft>
-                <a:spcPts val="400"/>
-              </a:spcAft>
-            </a:pPr>
-            <a:r>
-              <a:rPr sz="1150">
-                <a:solidFill>
-                  <a:srgbClr val="17323B"/>
-                </a:solidFill>
-                <a:latin typeface="Calibri"/>
-              </a:rPr>
-              <a:t>级构建/测试流水线</a:t>
+              <a:t>建议补充 PR 级流水线</a:t>
             </a:r>
           </a:p>
         </p:txBody>
@@ -15382,16 +14475,18 @@
           <a:noFill/>
         </p:spPr>
         <p:txBody>
-          <a:bodyPr wrap="square" lIns="0" rIns="0" tIns="0" bIns="0" anchor="t"/>
+          <a:bodyPr wrap="square" lIns="0" rIns="0" tIns="0" bIns="0" anchor="t">
+            <a:spAutoFit/>
+          </a:bodyPr>
           <a:lstStyle/>
           <a:p>
             <a:pPr algn="ctr">
               <a:spcAft>
-                <a:spcPts val="200"/>
-              </a:spcAft>
-            </a:pPr>
-            <a:r>
-              <a:rPr sz="1400" b="1" i="0">
+                <a:spcPts val="100"/>
+              </a:spcAft>
+            </a:pPr>
+            <a:r>
+              <a:rPr sz="1400" b="1">
                 <a:solidFill>
                   <a:srgbClr val="21295C"/>
                 </a:solidFill>
@@ -15419,16 +14514,18 @@
           <a:noFill/>
         </p:spPr>
         <p:txBody>
-          <a:bodyPr wrap="square" lIns="0" rIns="0" tIns="0" bIns="0" anchor="t"/>
+          <a:bodyPr wrap="square" lIns="0" rIns="0" tIns="0" bIns="0" anchor="t">
+            <a:spAutoFit/>
+          </a:bodyPr>
           <a:lstStyle/>
           <a:p>
             <a:pPr algn="ctr">
               <a:spcAft>
-                <a:spcPts val="200"/>
-              </a:spcAft>
-            </a:pPr>
-            <a:r>
-              <a:rPr sz="1050" b="0" i="0">
+                <a:spcPts val="100"/>
+              </a:spcAft>
+            </a:pPr>
+            <a:r>
+              <a:rPr sz="1050" b="0">
                 <a:solidFill>
                   <a:srgbClr val="5B7780"/>
                 </a:solidFill>
@@ -15501,16 +14598,18 @@
           <a:noFill/>
         </p:spPr>
         <p:txBody>
-          <a:bodyPr wrap="square" lIns="0" rIns="0" tIns="0" bIns="0" anchor="t"/>
+          <a:bodyPr wrap="square" lIns="0" rIns="0" tIns="0" bIns="0" anchor="t">
+            <a:spAutoFit/>
+          </a:bodyPr>
           <a:lstStyle/>
           <a:p>
             <a:pPr algn="ctr">
               <a:spcAft>
-                <a:spcPts val="200"/>
-              </a:spcAft>
-            </a:pPr>
-            <a:r>
-              <a:rPr sz="1400" b="1" i="0">
+                <a:spcPts val="100"/>
+              </a:spcAft>
+            </a:pPr>
+            <a:r>
+              <a:rPr sz="1400" b="1">
                 <a:solidFill>
                   <a:srgbClr val="21295C"/>
                 </a:solidFill>
@@ -15538,16 +14637,18 @@
           <a:noFill/>
         </p:spPr>
         <p:txBody>
-          <a:bodyPr wrap="square" lIns="0" rIns="0" tIns="0" bIns="0" anchor="t"/>
+          <a:bodyPr wrap="square" lIns="0" rIns="0" tIns="0" bIns="0" anchor="t">
+            <a:spAutoFit/>
+          </a:bodyPr>
           <a:lstStyle/>
           <a:p>
             <a:pPr algn="ctr">
               <a:spcAft>
-                <a:spcPts val="200"/>
-              </a:spcAft>
-            </a:pPr>
-            <a:r>
-              <a:rPr sz="1050" b="0" i="0">
+                <a:spcPts val="100"/>
+              </a:spcAft>
+            </a:pPr>
+            <a:r>
+              <a:rPr sz="1050" b="0">
                 <a:solidFill>
                   <a:srgbClr val="5B7780"/>
                 </a:solidFill>
@@ -15620,16 +14721,18 @@
           <a:noFill/>
         </p:spPr>
         <p:txBody>
-          <a:bodyPr wrap="square" lIns="0" rIns="0" tIns="0" bIns="0" anchor="t"/>
+          <a:bodyPr wrap="square" lIns="0" rIns="0" tIns="0" bIns="0" anchor="t">
+            <a:spAutoFit/>
+          </a:bodyPr>
           <a:lstStyle/>
           <a:p>
             <a:pPr algn="ctr">
               <a:spcAft>
-                <a:spcPts val="200"/>
-              </a:spcAft>
-            </a:pPr>
-            <a:r>
-              <a:rPr sz="1400" b="1" i="0">
+                <a:spcPts val="100"/>
+              </a:spcAft>
+            </a:pPr>
+            <a:r>
+              <a:rPr sz="1400" b="1">
                 <a:solidFill>
                   <a:srgbClr val="21295C"/>
                 </a:solidFill>
@@ -15657,16 +14760,18 @@
           <a:noFill/>
         </p:spPr>
         <p:txBody>
-          <a:bodyPr wrap="square" lIns="0" rIns="0" tIns="0" bIns="0" anchor="t"/>
+          <a:bodyPr wrap="square" lIns="0" rIns="0" tIns="0" bIns="0" anchor="t">
+            <a:spAutoFit/>
+          </a:bodyPr>
           <a:lstStyle/>
           <a:p>
             <a:pPr algn="ctr">
               <a:spcAft>
-                <a:spcPts val="200"/>
-              </a:spcAft>
-            </a:pPr>
-            <a:r>
-              <a:rPr sz="1050" b="0" i="0">
+                <a:spcPts val="100"/>
+              </a:spcAft>
+            </a:pPr>
+            <a:r>
+              <a:rPr sz="1050" b="0">
                 <a:solidFill>
                   <a:srgbClr val="5B7780"/>
                 </a:solidFill>
@@ -15739,16 +14844,18 @@
           <a:noFill/>
         </p:spPr>
         <p:txBody>
-          <a:bodyPr wrap="square" lIns="0" rIns="0" tIns="0" bIns="0" anchor="t"/>
+          <a:bodyPr wrap="square" lIns="0" rIns="0" tIns="0" bIns="0" anchor="t">
+            <a:spAutoFit/>
+          </a:bodyPr>
           <a:lstStyle/>
           <a:p>
             <a:pPr algn="ctr">
               <a:spcAft>
-                <a:spcPts val="200"/>
-              </a:spcAft>
-            </a:pPr>
-            <a:r>
-              <a:rPr sz="1400" b="1" i="0">
+                <a:spcPts val="100"/>
+              </a:spcAft>
+            </a:pPr>
+            <a:r>
+              <a:rPr sz="1400" b="1">
                 <a:solidFill>
                   <a:srgbClr val="21295C"/>
                 </a:solidFill>
@@ -15776,16 +14883,18 @@
           <a:noFill/>
         </p:spPr>
         <p:txBody>
-          <a:bodyPr wrap="square" lIns="0" rIns="0" tIns="0" bIns="0" anchor="t"/>
+          <a:bodyPr wrap="square" lIns="0" rIns="0" tIns="0" bIns="0" anchor="t">
+            <a:spAutoFit/>
+          </a:bodyPr>
           <a:lstStyle/>
           <a:p>
             <a:pPr algn="ctr">
               <a:spcAft>
-                <a:spcPts val="200"/>
-              </a:spcAft>
-            </a:pPr>
-            <a:r>
-              <a:rPr sz="1050" b="0" i="0">
+                <a:spcPts val="100"/>
+              </a:spcAft>
+            </a:pPr>
+            <a:r>
+              <a:rPr sz="1050" b="0">
                 <a:solidFill>
                   <a:srgbClr val="5B7780"/>
                 </a:solidFill>
@@ -15813,16 +14922,18 @@
           <a:noFill/>
         </p:spPr>
         <p:txBody>
-          <a:bodyPr wrap="square" lIns="0" rIns="0" tIns="0" bIns="0" anchor="t"/>
+          <a:bodyPr wrap="square" lIns="0" rIns="0" tIns="0" bIns="0" anchor="t">
+            <a:spAutoFit/>
+          </a:bodyPr>
           <a:lstStyle/>
           <a:p>
             <a:pPr algn="l">
               <a:spcAft>
-                <a:spcPts val="200"/>
-              </a:spcAft>
-            </a:pPr>
-            <a:r>
-              <a:rPr sz="1050" b="0" i="0">
+                <a:spcPts val="100"/>
+              </a:spcAft>
+            </a:pPr>
+            <a:r>
+              <a:rPr sz="1050" b="0">
                 <a:solidFill>
                   <a:srgbClr val="5B7780"/>
                 </a:solidFill>
@@ -16011,16 +15122,18 @@
           <a:noFill/>
         </p:spPr>
         <p:txBody>
-          <a:bodyPr wrap="square" lIns="0" rIns="0" tIns="0" bIns="0" anchor="ctr"/>
+          <a:bodyPr wrap="square" lIns="0" rIns="0" tIns="0" bIns="0" anchor="ctr">
+            <a:spAutoFit/>
+          </a:bodyPr>
           <a:lstStyle/>
           <a:p>
             <a:pPr algn="ctr">
               <a:spcAft>
-                <a:spcPts val="200"/>
-              </a:spcAft>
-            </a:pPr>
-            <a:r>
-              <a:rPr sz="900" b="1" i="0">
+                <a:spcPts val="100"/>
+              </a:spcAft>
+            </a:pPr>
+            <a:r>
+              <a:rPr sz="900" b="1">
                 <a:solidFill>
                   <a:srgbClr val="FFFFFF"/>
                 </a:solidFill>
@@ -16048,16 +15161,18 @@
           <a:noFill/>
         </p:spPr>
         <p:txBody>
-          <a:bodyPr wrap="square" lIns="0" rIns="0" tIns="0" bIns="0" anchor="t"/>
+          <a:bodyPr wrap="square" lIns="0" rIns="0" tIns="0" bIns="0" anchor="t">
+            <a:spAutoFit/>
+          </a:bodyPr>
           <a:lstStyle/>
           <a:p>
             <a:pPr algn="l">
               <a:spcAft>
-                <a:spcPts val="200"/>
-              </a:spcAft>
-            </a:pPr>
-            <a:r>
-              <a:rPr sz="3400" b="1" i="0">
+                <a:spcPts val="100"/>
+              </a:spcAft>
+            </a:pPr>
+            <a:r>
+              <a:rPr sz="3400" b="1">
                 <a:solidFill>
                   <a:srgbClr val="21295C"/>
                 </a:solidFill>
@@ -16085,16 +15200,18 @@
           <a:noFill/>
         </p:spPr>
         <p:txBody>
-          <a:bodyPr wrap="square" lIns="0" rIns="0" tIns="0" bIns="0" anchor="t"/>
+          <a:bodyPr wrap="square" lIns="0" rIns="0" tIns="0" bIns="0" anchor="t">
+            <a:spAutoFit/>
+          </a:bodyPr>
           <a:lstStyle/>
           <a:p>
             <a:pPr algn="l">
               <a:spcAft>
-                <a:spcPts val="200"/>
-              </a:spcAft>
-            </a:pPr>
-            <a:r>
-              <a:rPr sz="1150" b="0" i="0">
+                <a:spcPts val="100"/>
+              </a:spcAft>
+            </a:pPr>
+            <a:r>
+              <a:rPr sz="1150" b="0">
                 <a:solidFill>
                   <a:srgbClr val="5B7780"/>
                 </a:solidFill>
@@ -16167,16 +15284,18 @@
           <a:noFill/>
         </p:spPr>
         <p:txBody>
-          <a:bodyPr wrap="square" lIns="0" rIns="0" tIns="0" bIns="0" anchor="ctr"/>
+          <a:bodyPr wrap="square" lIns="0" rIns="0" tIns="0" bIns="0" anchor="ctr">
+            <a:spAutoFit/>
+          </a:bodyPr>
           <a:lstStyle/>
           <a:p>
             <a:pPr algn="ctr">
               <a:spcAft>
-                <a:spcPts val="200"/>
-              </a:spcAft>
-            </a:pPr>
-            <a:r>
-              <a:rPr sz="1050" b="1" i="0">
+                <a:spcPts val="100"/>
+              </a:spcAft>
+            </a:pPr>
+            <a:r>
+              <a:rPr sz="1050" b="1">
                 <a:solidFill>
                   <a:srgbClr val="065A82"/>
                 </a:solidFill>
@@ -16339,16 +15458,18 @@
           <a:noFill/>
         </p:spPr>
         <p:txBody>
-          <a:bodyPr wrap="square" lIns="0" rIns="0" tIns="0" bIns="0" anchor="ctr"/>
+          <a:bodyPr wrap="square" lIns="0" rIns="0" tIns="0" bIns="0" anchor="ctr">
+            <a:spAutoFit/>
+          </a:bodyPr>
           <a:lstStyle/>
           <a:p>
             <a:pPr algn="ctr">
               <a:spcAft>
-                <a:spcPts val="200"/>
-              </a:spcAft>
-            </a:pPr>
-            <a:r>
-              <a:rPr sz="850" b="1" i="0">
+                <a:spcPts val="100"/>
+              </a:spcAft>
+            </a:pPr>
+            <a:r>
+              <a:rPr sz="850" b="1">
                 <a:solidFill>
                   <a:srgbClr val="FFFFFF"/>
                 </a:solidFill>
@@ -16376,16 +15497,18 @@
           <a:noFill/>
         </p:spPr>
         <p:txBody>
-          <a:bodyPr wrap="square" lIns="0" rIns="0" tIns="0" bIns="0" anchor="t"/>
+          <a:bodyPr wrap="square" lIns="0" rIns="0" tIns="0" bIns="0" anchor="t">
+            <a:spAutoFit/>
+          </a:bodyPr>
           <a:lstStyle/>
           <a:p>
             <a:pPr algn="l">
               <a:spcAft>
-                <a:spcPts val="200"/>
-              </a:spcAft>
-            </a:pPr>
-            <a:r>
-              <a:rPr sz="1650" b="1" i="0">
+                <a:spcPts val="100"/>
+              </a:spcAft>
+            </a:pPr>
+            <a:r>
+              <a:rPr sz="1650" b="1">
                 <a:solidFill>
                   <a:srgbClr val="21295C"/>
                 </a:solidFill>
@@ -16413,17 +15536,14 @@
           <a:noFill/>
         </p:spPr>
         <p:txBody>
-          <a:bodyPr wrap="square" lIns="73152" rIns="73152" tIns="36576" bIns="36576">
+          <a:bodyPr wrap="square" lIns="73152" rIns="73152" tIns="27432" bIns="27432">
             <a:spAutoFit/>
           </a:bodyPr>
           <a:lstStyle/>
           <a:p>
             <a:pPr>
-              <a:lnSpc>
-                <a:spcPct val="100000"/>
-              </a:lnSpc>
-              <a:spcAft>
-                <a:spcPts val="100"/>
+              <a:spcAft>
+                <a:spcPts val="400"/>
               </a:spcAft>
             </a:pPr>
             <a:r>
@@ -16433,16 +15553,13 @@
                 </a:solidFill>
                 <a:latin typeface="Calibri"/>
               </a:rPr>
-              <a:t>application.yml</a:t>
+              <a:t>应用配置中仍有 API Key、COS、</a:t>
             </a:r>
           </a:p>
           <a:p>
             <a:pPr>
-              <a:lnSpc>
-                <a:spcPct val="100000"/>
-              </a:lnSpc>
-              <a:spcAft>
-                <a:spcPts val="100"/>
+              <a:spcAft>
+                <a:spcPts val="400"/>
               </a:spcAft>
             </a:pPr>
             <a:r>
@@ -16452,14 +15569,11 @@
                 </a:solidFill>
                 <a:latin typeface="Calibri"/>
               </a:rPr>
-              <a:t>中仍有 API</a:t>
+              <a:t>Bucket 示例值</a:t>
             </a:r>
           </a:p>
           <a:p>
             <a:pPr>
-              <a:lnSpc>
-                <a:spcPct val="100000"/>
-              </a:lnSpc>
               <a:spcAft>
                 <a:spcPts val="400"/>
               </a:spcAft>
@@ -16471,45 +15585,7 @@
                 </a:solidFill>
                 <a:latin typeface="Calibri"/>
               </a:rPr>
-              <a:t>Key、COS、Bucket 示例值</a:t>
-            </a:r>
-          </a:p>
-          <a:p>
-            <a:pPr>
-              <a:lnSpc>
-                <a:spcPct val="100000"/>
-              </a:lnSpc>
-              <a:spcAft>
-                <a:spcPts val="100"/>
-              </a:spcAft>
-            </a:pPr>
-            <a:r>
-              <a:rPr sz="1200">
-                <a:solidFill>
-                  <a:srgbClr val="17323B"/>
-                </a:solidFill>
-                <a:latin typeface="Calibri"/>
-              </a:rPr>
-              <a:t>本地 MySQL/Redis/部署域</a:t>
-            </a:r>
-          </a:p>
-          <a:p>
-            <a:pPr>
-              <a:lnSpc>
-                <a:spcPct val="100000"/>
-              </a:lnSpc>
-              <a:spcAft>
-                <a:spcPts val="400"/>
-              </a:spcAft>
-            </a:pPr>
-            <a:r>
-              <a:rPr sz="1200">
-                <a:solidFill>
-                  <a:srgbClr val="17323B"/>
-                </a:solidFill>
-                <a:latin typeface="Calibri"/>
-              </a:rPr>
-              <a:t>名依赖需按环境注入</a:t>
+              <a:t>MySQL、Redis、部署域名需按环境注入</a:t>
             </a:r>
           </a:p>
         </p:txBody>
@@ -16666,16 +15742,18 @@
           <a:noFill/>
         </p:spPr>
         <p:txBody>
-          <a:bodyPr wrap="square" lIns="0" rIns="0" tIns="0" bIns="0" anchor="ctr"/>
+          <a:bodyPr wrap="square" lIns="0" rIns="0" tIns="0" bIns="0" anchor="ctr">
+            <a:spAutoFit/>
+          </a:bodyPr>
           <a:lstStyle/>
           <a:p>
             <a:pPr algn="ctr">
               <a:spcAft>
-                <a:spcPts val="200"/>
-              </a:spcAft>
-            </a:pPr>
-            <a:r>
-              <a:rPr sz="850" b="1" i="0">
+                <a:spcPts val="100"/>
+              </a:spcAft>
+            </a:pPr>
+            <a:r>
+              <a:rPr sz="850" b="1">
                 <a:solidFill>
                   <a:srgbClr val="FFFFFF"/>
                 </a:solidFill>
@@ -16703,16 +15781,18 @@
           <a:noFill/>
         </p:spPr>
         <p:txBody>
-          <a:bodyPr wrap="square" lIns="0" rIns="0" tIns="0" bIns="0" anchor="t"/>
+          <a:bodyPr wrap="square" lIns="0" rIns="0" tIns="0" bIns="0" anchor="t">
+            <a:spAutoFit/>
+          </a:bodyPr>
           <a:lstStyle/>
           <a:p>
             <a:pPr algn="l">
               <a:spcAft>
-                <a:spcPts val="200"/>
-              </a:spcAft>
-            </a:pPr>
-            <a:r>
-              <a:rPr sz="1650" b="1" i="0">
+                <a:spcPts val="100"/>
+              </a:spcAft>
+            </a:pPr>
+            <a:r>
+              <a:rPr sz="1650" b="1">
                 <a:solidFill>
                   <a:srgbClr val="21295C"/>
                 </a:solidFill>
@@ -16740,17 +15820,14 @@
           <a:noFill/>
         </p:spPr>
         <p:txBody>
-          <a:bodyPr wrap="square" lIns="73152" rIns="73152" tIns="36576" bIns="36576">
+          <a:bodyPr wrap="square" lIns="73152" rIns="73152" tIns="27432" bIns="27432">
             <a:spAutoFit/>
           </a:bodyPr>
           <a:lstStyle/>
           <a:p>
             <a:pPr>
-              <a:lnSpc>
-                <a:spcPct val="100000"/>
-              </a:lnSpc>
-              <a:spcAft>
-                <a:spcPts val="100"/>
+              <a:spcAft>
+                <a:spcPts val="400"/>
               </a:spcAft>
             </a:pPr>
             <a:r>
@@ -16760,16 +15837,13 @@
                 </a:solidFill>
                 <a:latin typeface="Calibri"/>
               </a:rPr>
-              <a:t>AI 模型、DashScope、Pe</a:t>
+              <a:t>AI 模型、图片搜索、COS、截图链路都会</a:t>
             </a:r>
           </a:p>
           <a:p>
             <a:pPr>
-              <a:lnSpc>
-                <a:spcPct val="100000"/>
-              </a:lnSpc>
-              <a:spcAft>
-                <a:spcPts val="100"/>
+              <a:spcAft>
+                <a:spcPts val="400"/>
               </a:spcAft>
             </a:pPr>
             <a:r>
@@ -16779,33 +15853,11 @@
                 </a:solidFill>
                 <a:latin typeface="Calibri"/>
               </a:rPr>
-              <a:t>xels、COS、Selenium</a:t>
+              <a:t>影响体验</a:t>
             </a:r>
           </a:p>
           <a:p>
             <a:pPr>
-              <a:lnSpc>
-                <a:spcPct val="100000"/>
-              </a:lnSpc>
-              <a:spcAft>
-                <a:spcPts val="400"/>
-              </a:spcAft>
-            </a:pPr>
-            <a:r>
-              <a:rPr sz="1200">
-                <a:solidFill>
-                  <a:srgbClr val="17323B"/>
-                </a:solidFill>
-                <a:latin typeface="Calibri"/>
-              </a:rPr>
-              <a:t>截图都会影响体验</a:t>
-            </a:r>
-          </a:p>
-          <a:p>
-            <a:pPr>
-              <a:lnSpc>
-                <a:spcPct val="100000"/>
-              </a:lnSpc>
               <a:spcAft>
                 <a:spcPts val="400"/>
               </a:spcAft>
@@ -16974,16 +16026,18 @@
           <a:noFill/>
         </p:spPr>
         <p:txBody>
-          <a:bodyPr wrap="square" lIns="0" rIns="0" tIns="0" bIns="0" anchor="ctr"/>
+          <a:bodyPr wrap="square" lIns="0" rIns="0" tIns="0" bIns="0" anchor="ctr">
+            <a:spAutoFit/>
+          </a:bodyPr>
           <a:lstStyle/>
           <a:p>
             <a:pPr algn="ctr">
               <a:spcAft>
-                <a:spcPts val="200"/>
-              </a:spcAft>
-            </a:pPr>
-            <a:r>
-              <a:rPr sz="850" b="1" i="0">
+                <a:spcPts val="100"/>
+              </a:spcAft>
+            </a:pPr>
+            <a:r>
+              <a:rPr sz="850" b="1">
                 <a:solidFill>
                   <a:srgbClr val="FFFFFF"/>
                 </a:solidFill>
@@ -17011,16 +16065,18 @@
           <a:noFill/>
         </p:spPr>
         <p:txBody>
-          <a:bodyPr wrap="square" lIns="0" rIns="0" tIns="0" bIns="0" anchor="t"/>
+          <a:bodyPr wrap="square" lIns="0" rIns="0" tIns="0" bIns="0" anchor="t">
+            <a:spAutoFit/>
+          </a:bodyPr>
           <a:lstStyle/>
           <a:p>
             <a:pPr algn="l">
               <a:spcAft>
-                <a:spcPts val="200"/>
-              </a:spcAft>
-            </a:pPr>
-            <a:r>
-              <a:rPr sz="1650" b="1" i="0">
+                <a:spcPts val="100"/>
+              </a:spcAft>
+            </a:pPr>
+            <a:r>
+              <a:rPr sz="1650" b="1">
                 <a:solidFill>
                   <a:srgbClr val="21295C"/>
                 </a:solidFill>
@@ -17048,15 +16104,12 @@
           <a:noFill/>
         </p:spPr>
         <p:txBody>
-          <a:bodyPr wrap="square" lIns="73152" rIns="73152" tIns="36576" bIns="36576">
+          <a:bodyPr wrap="square" lIns="73152" rIns="73152" tIns="27432" bIns="27432">
             <a:spAutoFit/>
           </a:bodyPr>
           <a:lstStyle/>
           <a:p>
             <a:pPr>
-              <a:lnSpc>
-                <a:spcPct val="100000"/>
-              </a:lnSpc>
               <a:spcAft>
                 <a:spcPts val="400"/>
               </a:spcAft>
@@ -17068,16 +16121,13 @@
                 </a:solidFill>
                 <a:latin typeface="Calibri"/>
               </a:rPr>
-              <a:t>最近微服务改造提交多次标注“中间态”</a:t>
+              <a:t>微服务改造提交曾多次标注“中间态”</a:t>
             </a:r>
           </a:p>
           <a:p>
             <a:pPr>
-              <a:lnSpc>
-                <a:spcPct val="100000"/>
-              </a:lnSpc>
-              <a:spcAft>
-                <a:spcPts val="100"/>
+              <a:spcAft>
+                <a:spcPts val="400"/>
               </a:spcAft>
             </a:pPr>
             <a:r>
@@ -17087,26 +16137,7 @@
                 </a:solidFill>
                 <a:latin typeface="Calibri"/>
               </a:rPr>
-              <a:t>虽有完成提交，仍应逐服务启动与调用验</a:t>
-            </a:r>
-          </a:p>
-          <a:p>
-            <a:pPr>
-              <a:lnSpc>
-                <a:spcPct val="100000"/>
-              </a:lnSpc>
-              <a:spcAft>
-                <a:spcPts val="400"/>
-              </a:spcAft>
-            </a:pPr>
-            <a:r>
-              <a:rPr sz="1200">
-                <a:solidFill>
-                  <a:srgbClr val="17323B"/>
-                </a:solidFill>
-                <a:latin typeface="Calibri"/>
-              </a:rPr>
-              <a:t>证</a:t>
+              <a:t>虽有完成提交，仍应逐服务启动与调用验证</a:t>
             </a:r>
           </a:p>
         </p:txBody>
@@ -17263,16 +16294,18 @@
           <a:noFill/>
         </p:spPr>
         <p:txBody>
-          <a:bodyPr wrap="square" lIns="0" rIns="0" tIns="0" bIns="0" anchor="ctr"/>
+          <a:bodyPr wrap="square" lIns="0" rIns="0" tIns="0" bIns="0" anchor="ctr">
+            <a:spAutoFit/>
+          </a:bodyPr>
           <a:lstStyle/>
           <a:p>
             <a:pPr algn="ctr">
               <a:spcAft>
-                <a:spcPts val="200"/>
-              </a:spcAft>
-            </a:pPr>
-            <a:r>
-              <a:rPr sz="850" b="1" i="0">
+                <a:spcPts val="100"/>
+              </a:spcAft>
+            </a:pPr>
+            <a:r>
+              <a:rPr sz="850" b="1">
                 <a:solidFill>
                   <a:srgbClr val="FFFFFF"/>
                 </a:solidFill>
@@ -17300,16 +16333,18 @@
           <a:noFill/>
         </p:spPr>
         <p:txBody>
-          <a:bodyPr wrap="square" lIns="0" rIns="0" tIns="0" bIns="0" anchor="t"/>
+          <a:bodyPr wrap="square" lIns="0" rIns="0" tIns="0" bIns="0" anchor="t">
+            <a:spAutoFit/>
+          </a:bodyPr>
           <a:lstStyle/>
           <a:p>
             <a:pPr algn="l">
               <a:spcAft>
-                <a:spcPts val="200"/>
-              </a:spcAft>
-            </a:pPr>
-            <a:r>
-              <a:rPr sz="1650" b="1" i="0">
+                <a:spcPts val="100"/>
+              </a:spcAft>
+            </a:pPr>
+            <a:r>
+              <a:rPr sz="1650" b="1">
                 <a:solidFill>
                   <a:srgbClr val="21295C"/>
                 </a:solidFill>
@@ -17337,15 +16372,12 @@
           <a:noFill/>
         </p:spPr>
         <p:txBody>
-          <a:bodyPr wrap="square" lIns="73152" rIns="73152" tIns="36576" bIns="36576">
+          <a:bodyPr wrap="square" lIns="73152" rIns="73152" tIns="27432" bIns="27432">
             <a:spAutoFit/>
           </a:bodyPr>
           <a:lstStyle/>
           <a:p>
             <a:pPr>
-              <a:lnSpc>
-                <a:spcPct val="100000"/>
-              </a:lnSpc>
               <a:spcAft>
                 <a:spcPts val="400"/>
               </a:spcAft>
@@ -17362,11 +16394,8 @@
           </a:p>
           <a:p>
             <a:pPr>
-              <a:lnSpc>
-                <a:spcPct val="100000"/>
-              </a:lnSpc>
-              <a:spcAft>
-                <a:spcPts val="100"/>
+              <a:spcAft>
+                <a:spcPts val="400"/>
               </a:spcAft>
             </a:pPr>
             <a:r>
@@ -17376,26 +16405,7 @@
                 </a:solidFill>
                 <a:latin typeface="Calibri"/>
               </a:rPr>
-              <a:t>PR 合入前缺少统一构建、测试、li</a:t>
-            </a:r>
-          </a:p>
-          <a:p>
-            <a:pPr>
-              <a:lnSpc>
-                <a:spcPct val="100000"/>
-              </a:lnSpc>
-              <a:spcAft>
-                <a:spcPts val="400"/>
-              </a:spcAft>
-            </a:pPr>
-            <a:r>
-              <a:rPr sz="1200">
-                <a:solidFill>
-                  <a:srgbClr val="17323B"/>
-                </a:solidFill>
-                <a:latin typeface="Calibri"/>
-              </a:rPr>
-              <a:t>nt/typecheck 门禁</a:t>
+              <a:t>PR 合入前缺少构建、测试、代码检查门禁</a:t>
             </a:r>
           </a:p>
         </p:txBody>
@@ -17417,16 +16427,18 @@
           <a:noFill/>
         </p:spPr>
         <p:txBody>
-          <a:bodyPr wrap="square" lIns="0" rIns="0" tIns="0" bIns="0" anchor="t"/>
+          <a:bodyPr wrap="square" lIns="0" rIns="0" tIns="0" bIns="0" anchor="t">
+            <a:spAutoFit/>
+          </a:bodyPr>
           <a:lstStyle/>
           <a:p>
             <a:pPr algn="l">
               <a:spcAft>
-                <a:spcPts val="200"/>
-              </a:spcAft>
-            </a:pPr>
-            <a:r>
-              <a:rPr sz="1050" b="0" i="0">
+                <a:spcPts val="100"/>
+              </a:spcAft>
+            </a:pPr>
+            <a:r>
+              <a:rPr sz="1050" b="0">
                 <a:solidFill>
                   <a:srgbClr val="5B7780"/>
                 </a:solidFill>
@@ -17615,16 +16627,18 @@
           <a:noFill/>
         </p:spPr>
         <p:txBody>
-          <a:bodyPr wrap="square" lIns="0" rIns="0" tIns="0" bIns="0" anchor="ctr"/>
+          <a:bodyPr wrap="square" lIns="0" rIns="0" tIns="0" bIns="0" anchor="ctr">
+            <a:spAutoFit/>
+          </a:bodyPr>
           <a:lstStyle/>
           <a:p>
             <a:pPr algn="ctr">
               <a:spcAft>
-                <a:spcPts val="200"/>
-              </a:spcAft>
-            </a:pPr>
-            <a:r>
-              <a:rPr sz="900" b="1" i="0">
+                <a:spcPts val="100"/>
+              </a:spcAft>
+            </a:pPr>
+            <a:r>
+              <a:rPr sz="900" b="1">
                 <a:solidFill>
                   <a:srgbClr val="FFFFFF"/>
                 </a:solidFill>
@@ -17652,16 +16666,18 @@
           <a:noFill/>
         </p:spPr>
         <p:txBody>
-          <a:bodyPr wrap="square" lIns="0" rIns="0" tIns="0" bIns="0" anchor="t"/>
+          <a:bodyPr wrap="square" lIns="0" rIns="0" tIns="0" bIns="0" anchor="t">
+            <a:spAutoFit/>
+          </a:bodyPr>
           <a:lstStyle/>
           <a:p>
             <a:pPr algn="l">
               <a:spcAft>
-                <a:spcPts val="200"/>
-              </a:spcAft>
-            </a:pPr>
-            <a:r>
-              <a:rPr sz="3400" b="1" i="0">
+                <a:spcPts val="100"/>
+              </a:spcAft>
+            </a:pPr>
+            <a:r>
+              <a:rPr sz="3400" b="1">
                 <a:solidFill>
                   <a:srgbClr val="21295C"/>
                 </a:solidFill>
@@ -17689,16 +16705,18 @@
           <a:noFill/>
         </p:spPr>
         <p:txBody>
-          <a:bodyPr wrap="square" lIns="0" rIns="0" tIns="0" bIns="0" anchor="t"/>
+          <a:bodyPr wrap="square" lIns="0" rIns="0" tIns="0" bIns="0" anchor="t">
+            <a:spAutoFit/>
+          </a:bodyPr>
           <a:lstStyle/>
           <a:p>
             <a:pPr algn="l">
               <a:spcAft>
-                <a:spcPts val="200"/>
-              </a:spcAft>
-            </a:pPr>
-            <a:r>
-              <a:rPr sz="1150" b="0" i="0">
+                <a:spcPts val="100"/>
+              </a:spcAft>
+            </a:pPr>
+            <a:r>
+              <a:rPr sz="1150" b="0">
                 <a:solidFill>
                   <a:srgbClr val="5B7780"/>
                 </a:solidFill>
@@ -17771,16 +16789,18 @@
           <a:noFill/>
         </p:spPr>
         <p:txBody>
-          <a:bodyPr wrap="square" lIns="0" rIns="0" tIns="0" bIns="0" anchor="ctr"/>
+          <a:bodyPr wrap="square" lIns="0" rIns="0" tIns="0" bIns="0" anchor="ctr">
+            <a:spAutoFit/>
+          </a:bodyPr>
           <a:lstStyle/>
           <a:p>
             <a:pPr algn="ctr">
               <a:spcAft>
-                <a:spcPts val="200"/>
-              </a:spcAft>
-            </a:pPr>
-            <a:r>
-              <a:rPr sz="1050" b="1" i="0">
+                <a:spcPts val="100"/>
+              </a:spcAft>
+            </a:pPr>
+            <a:r>
+              <a:rPr sz="1050" b="1">
                 <a:solidFill>
                   <a:srgbClr val="065A82"/>
                 </a:solidFill>
@@ -17898,16 +16918,18 @@
           <a:noFill/>
         </p:spPr>
         <p:txBody>
-          <a:bodyPr wrap="square" lIns="0" rIns="0" tIns="0" bIns="0" anchor="ctr"/>
+          <a:bodyPr wrap="square" lIns="0" rIns="0" tIns="0" bIns="0" anchor="ctr">
+            <a:spAutoFit/>
+          </a:bodyPr>
           <a:lstStyle/>
           <a:p>
             <a:pPr algn="ctr">
               <a:spcAft>
-                <a:spcPts val="200"/>
-              </a:spcAft>
-            </a:pPr>
-            <a:r>
-              <a:rPr sz="900" b="1" i="0">
+                <a:spcPts val="100"/>
+              </a:spcAft>
+            </a:pPr>
+            <a:r>
+              <a:rPr sz="900" b="1">
                 <a:solidFill>
                   <a:srgbClr val="FFFFFF"/>
                 </a:solidFill>
@@ -17935,16 +16957,18 @@
           <a:noFill/>
         </p:spPr>
         <p:txBody>
-          <a:bodyPr wrap="square" lIns="0" rIns="0" tIns="0" bIns="0" anchor="t"/>
+          <a:bodyPr wrap="square" lIns="0" rIns="0" tIns="0" bIns="0" anchor="t">
+            <a:spAutoFit/>
+          </a:bodyPr>
           <a:lstStyle/>
           <a:p>
             <a:pPr algn="l">
               <a:spcAft>
-                <a:spcPts val="200"/>
-              </a:spcAft>
-            </a:pPr>
-            <a:r>
-              <a:rPr sz="1500" b="1" i="0">
+                <a:spcPts val="100"/>
+              </a:spcAft>
+            </a:pPr>
+            <a:r>
+              <a:rPr sz="1500" b="1">
                 <a:solidFill>
                   <a:srgbClr val="21295C"/>
                 </a:solidFill>
@@ -17972,38 +16996,24 @@
           <a:noFill/>
         </p:spPr>
         <p:txBody>
-          <a:bodyPr wrap="square" lIns="0" rIns="0" tIns="0" bIns="0" anchor="t"/>
+          <a:bodyPr wrap="square" lIns="0" rIns="0" tIns="0" bIns="0" anchor="t">
+            <a:spAutoFit/>
+          </a:bodyPr>
           <a:lstStyle/>
           <a:p>
             <a:pPr algn="l">
               <a:spcAft>
-                <a:spcPts val="200"/>
-              </a:spcAft>
-            </a:pPr>
-            <a:r>
-              <a:rPr sz="1200" b="0" i="0">
+                <a:spcPts val="100"/>
+              </a:spcAft>
+            </a:pPr>
+            <a:r>
+              <a:rPr sz="1200" b="0">
                 <a:solidFill>
                   <a:srgbClr val="17323B"/>
                 </a:solidFill>
                 <a:latin typeface="Calibri"/>
               </a:rPr>
-              <a:t>将 AI/COS/Redis/MySQL/部署域名等配置转为环境变量与样</a:t>
-            </a:r>
-          </a:p>
-          <a:p>
-            <a:pPr algn="l">
-              <a:spcAft>
-                <a:spcPts val="200"/>
-              </a:spcAft>
-            </a:pPr>
-            <a:r>
-              <a:rPr sz="1200" b="0" i="0">
-                <a:solidFill>
-                  <a:srgbClr val="17323B"/>
-                </a:solidFill>
-                <a:latin typeface="Calibri"/>
-              </a:rPr>
-              <a:t>例文档。</a:t>
+              <a:t>将 AI/COS/Redis/MySQL/部署域名等配置转为环境变量与样例文档。</a:t>
             </a:r>
           </a:p>
         </p:txBody>
@@ -18115,16 +17125,18 @@
           <a:noFill/>
         </p:spPr>
         <p:txBody>
-          <a:bodyPr wrap="square" lIns="0" rIns="0" tIns="0" bIns="0" anchor="ctr"/>
+          <a:bodyPr wrap="square" lIns="0" rIns="0" tIns="0" bIns="0" anchor="ctr">
+            <a:spAutoFit/>
+          </a:bodyPr>
           <a:lstStyle/>
           <a:p>
             <a:pPr algn="ctr">
               <a:spcAft>
-                <a:spcPts val="200"/>
-              </a:spcAft>
-            </a:pPr>
-            <a:r>
-              <a:rPr sz="900" b="1" i="0">
+                <a:spcPts val="100"/>
+              </a:spcAft>
+            </a:pPr>
+            <a:r>
+              <a:rPr sz="900" b="1">
                 <a:solidFill>
                   <a:srgbClr val="FFFFFF"/>
                 </a:solidFill>
@@ -18152,16 +17164,18 @@
           <a:noFill/>
         </p:spPr>
         <p:txBody>
-          <a:bodyPr wrap="square" lIns="0" rIns="0" tIns="0" bIns="0" anchor="t"/>
+          <a:bodyPr wrap="square" lIns="0" rIns="0" tIns="0" bIns="0" anchor="t">
+            <a:spAutoFit/>
+          </a:bodyPr>
           <a:lstStyle/>
           <a:p>
             <a:pPr algn="l">
               <a:spcAft>
-                <a:spcPts val="200"/>
-              </a:spcAft>
-            </a:pPr>
-            <a:r>
-              <a:rPr sz="1500" b="1" i="0">
+                <a:spcPts val="100"/>
+              </a:spcAft>
+            </a:pPr>
+            <a:r>
+              <a:rPr sz="1500" b="1">
                 <a:solidFill>
                   <a:srgbClr val="21295C"/>
                 </a:solidFill>
@@ -18189,38 +17203,24 @@
           <a:noFill/>
         </p:spPr>
         <p:txBody>
-          <a:bodyPr wrap="square" lIns="0" rIns="0" tIns="0" bIns="0" anchor="t"/>
+          <a:bodyPr wrap="square" lIns="0" rIns="0" tIns="0" bIns="0" anchor="t">
+            <a:spAutoFit/>
+          </a:bodyPr>
           <a:lstStyle/>
           <a:p>
             <a:pPr algn="l">
               <a:spcAft>
-                <a:spcPts val="200"/>
-              </a:spcAft>
-            </a:pPr>
-            <a:r>
-              <a:rPr sz="1200" b="0" i="0">
+                <a:spcPts val="100"/>
+              </a:spcAft>
+            </a:pPr>
+            <a:r>
+              <a:rPr sz="1200" b="0">
                 <a:solidFill>
                   <a:srgbClr val="17323B"/>
                 </a:solidFill>
                 <a:latin typeface="Calibri"/>
               </a:rPr>
-              <a:t>增加后端 Maven test、前端 npm</a:t>
-            </a:r>
-          </a:p>
-          <a:p>
-            <a:pPr algn="l">
-              <a:spcAft>
-                <a:spcPts val="200"/>
-              </a:spcAft>
-            </a:pPr>
-            <a:r>
-              <a:rPr sz="1200" b="0" i="0">
-                <a:solidFill>
-                  <a:srgbClr val="17323B"/>
-                </a:solidFill>
-                <a:latin typeface="Calibri"/>
-              </a:rPr>
-              <a:t>build/lint/typecheck 的 PR 级流水线。</a:t>
+              <a:t>增加后端 Maven test、前端 npm build/lint/typecheck 的 PR 级流水线。</a:t>
             </a:r>
           </a:p>
         </p:txBody>
@@ -18332,16 +17332,18 @@
           <a:noFill/>
         </p:spPr>
         <p:txBody>
-          <a:bodyPr wrap="square" lIns="0" rIns="0" tIns="0" bIns="0" anchor="ctr"/>
+          <a:bodyPr wrap="square" lIns="0" rIns="0" tIns="0" bIns="0" anchor="ctr">
+            <a:spAutoFit/>
+          </a:bodyPr>
           <a:lstStyle/>
           <a:p>
             <a:pPr algn="ctr">
               <a:spcAft>
-                <a:spcPts val="200"/>
-              </a:spcAft>
-            </a:pPr>
-            <a:r>
-              <a:rPr sz="900" b="1" i="0">
+                <a:spcPts val="100"/>
+              </a:spcAft>
+            </a:pPr>
+            <a:r>
+              <a:rPr sz="900" b="1">
                 <a:solidFill>
                   <a:srgbClr val="FFFFFF"/>
                 </a:solidFill>
@@ -18369,16 +17371,18 @@
           <a:noFill/>
         </p:spPr>
         <p:txBody>
-          <a:bodyPr wrap="square" lIns="0" rIns="0" tIns="0" bIns="0" anchor="t"/>
+          <a:bodyPr wrap="square" lIns="0" rIns="0" tIns="0" bIns="0" anchor="t">
+            <a:spAutoFit/>
+          </a:bodyPr>
           <a:lstStyle/>
           <a:p>
             <a:pPr algn="l">
               <a:spcAft>
-                <a:spcPts val="200"/>
-              </a:spcAft>
-            </a:pPr>
-            <a:r>
-              <a:rPr sz="1500" b="1" i="0">
+                <a:spcPts val="100"/>
+              </a:spcAft>
+            </a:pPr>
+            <a:r>
+              <a:rPr sz="1500" b="1">
                 <a:solidFill>
                   <a:srgbClr val="21295C"/>
                 </a:solidFill>
@@ -18406,16 +17410,18 @@
           <a:noFill/>
         </p:spPr>
         <p:txBody>
-          <a:bodyPr wrap="square" lIns="0" rIns="0" tIns="0" bIns="0" anchor="t"/>
+          <a:bodyPr wrap="square" lIns="0" rIns="0" tIns="0" bIns="0" anchor="t">
+            <a:spAutoFit/>
+          </a:bodyPr>
           <a:lstStyle/>
           <a:p>
             <a:pPr algn="l">
               <a:spcAft>
-                <a:spcPts val="200"/>
-              </a:spcAft>
-            </a:pPr>
-            <a:r>
-              <a:rPr sz="1200" b="0" i="0">
+                <a:spcPts val="100"/>
+              </a:spcAft>
+            </a:pPr>
+            <a:r>
+              <a:rPr sz="1200" b="0">
                 <a:solidFill>
                   <a:srgbClr val="17323B"/>
                 </a:solidFill>
@@ -18533,16 +17539,18 @@
           <a:noFill/>
         </p:spPr>
         <p:txBody>
-          <a:bodyPr wrap="square" lIns="0" rIns="0" tIns="0" bIns="0" anchor="ctr"/>
+          <a:bodyPr wrap="square" lIns="0" rIns="0" tIns="0" bIns="0" anchor="ctr">
+            <a:spAutoFit/>
+          </a:bodyPr>
           <a:lstStyle/>
           <a:p>
             <a:pPr algn="ctr">
               <a:spcAft>
-                <a:spcPts val="200"/>
-              </a:spcAft>
-            </a:pPr>
-            <a:r>
-              <a:rPr sz="900" b="1" i="0">
+                <a:spcPts val="100"/>
+              </a:spcAft>
+            </a:pPr>
+            <a:r>
+              <a:rPr sz="900" b="1">
                 <a:solidFill>
                   <a:srgbClr val="FFFFFF"/>
                 </a:solidFill>
@@ -18570,16 +17578,18 @@
           <a:noFill/>
         </p:spPr>
         <p:txBody>
-          <a:bodyPr wrap="square" lIns="0" rIns="0" tIns="0" bIns="0" anchor="t"/>
+          <a:bodyPr wrap="square" lIns="0" rIns="0" tIns="0" bIns="0" anchor="t">
+            <a:spAutoFit/>
+          </a:bodyPr>
           <a:lstStyle/>
           <a:p>
             <a:pPr algn="l">
               <a:spcAft>
-                <a:spcPts val="200"/>
-              </a:spcAft>
-            </a:pPr>
-            <a:r>
-              <a:rPr sz="1500" b="1" i="0">
+                <a:spcPts val="100"/>
+              </a:spcAft>
+            </a:pPr>
+            <a:r>
+              <a:rPr sz="1500" b="1">
                 <a:solidFill>
                   <a:srgbClr val="21295C"/>
                 </a:solidFill>
@@ -18607,38 +17617,24 @@
           <a:noFill/>
         </p:spPr>
         <p:txBody>
-          <a:bodyPr wrap="square" lIns="0" rIns="0" tIns="0" bIns="0" anchor="t"/>
+          <a:bodyPr wrap="square" lIns="0" rIns="0" tIns="0" bIns="0" anchor="t">
+            <a:spAutoFit/>
+          </a:bodyPr>
           <a:lstStyle/>
           <a:p>
             <a:pPr algn="l">
               <a:spcAft>
-                <a:spcPts val="200"/>
-              </a:spcAft>
-            </a:pPr>
-            <a:r>
-              <a:rPr sz="1200" b="0" i="0">
+                <a:spcPts val="100"/>
+              </a:spcAft>
+            </a:pPr>
+            <a:r>
+              <a:rPr sz="1200" b="0">
                 <a:solidFill>
                   <a:srgbClr val="17323B"/>
                 </a:solidFill>
                 <a:latin typeface="Calibri"/>
               </a:rPr>
-              <a:t>沉淀 Grafana 仪表盘与告警：AI</a:t>
-            </a:r>
-          </a:p>
-          <a:p>
-            <a:pPr algn="l">
-              <a:spcAft>
-                <a:spcPts val="200"/>
-              </a:spcAft>
-            </a:pPr>
-            <a:r>
-              <a:rPr sz="1200" b="0" i="0">
-                <a:solidFill>
-                  <a:srgbClr val="17323B"/>
-                </a:solidFill>
-                <a:latin typeface="Calibri"/>
-              </a:rPr>
-              <a:t>延迟、失败率、部署成功率、截图成功率。</a:t>
+              <a:t>沉淀 Grafana 仪表盘与告警：AI 延迟、失败率、部署成功率、截图成功率。</a:t>
             </a:r>
           </a:p>
         </p:txBody>
@@ -18750,16 +17746,18 @@
           <a:noFill/>
         </p:spPr>
         <p:txBody>
-          <a:bodyPr wrap="square" lIns="0" rIns="0" tIns="0" bIns="0" anchor="ctr"/>
+          <a:bodyPr wrap="square" lIns="0" rIns="0" tIns="0" bIns="0" anchor="ctr">
+            <a:spAutoFit/>
+          </a:bodyPr>
           <a:lstStyle/>
           <a:p>
             <a:pPr algn="ctr">
               <a:spcAft>
-                <a:spcPts val="200"/>
-              </a:spcAft>
-            </a:pPr>
-            <a:r>
-              <a:rPr sz="900" b="1" i="0">
+                <a:spcPts val="100"/>
+              </a:spcAft>
+            </a:pPr>
+            <a:r>
+              <a:rPr sz="900" b="1">
                 <a:solidFill>
                   <a:srgbClr val="FFFFFF"/>
                 </a:solidFill>
@@ -18787,16 +17785,18 @@
           <a:noFill/>
         </p:spPr>
         <p:txBody>
-          <a:bodyPr wrap="square" lIns="0" rIns="0" tIns="0" bIns="0" anchor="t"/>
+          <a:bodyPr wrap="square" lIns="0" rIns="0" tIns="0" bIns="0" anchor="t">
+            <a:spAutoFit/>
+          </a:bodyPr>
           <a:lstStyle/>
           <a:p>
             <a:pPr algn="l">
               <a:spcAft>
-                <a:spcPts val="200"/>
-              </a:spcAft>
-            </a:pPr>
-            <a:r>
-              <a:rPr sz="1500" b="1" i="0">
+                <a:spcPts val="100"/>
+              </a:spcAft>
+            </a:pPr>
+            <a:r>
+              <a:rPr sz="1500" b="1">
                 <a:solidFill>
                   <a:srgbClr val="21295C"/>
                 </a:solidFill>
@@ -18824,38 +17824,24 @@
           <a:noFill/>
         </p:spPr>
         <p:txBody>
-          <a:bodyPr wrap="square" lIns="0" rIns="0" tIns="0" bIns="0" anchor="t"/>
+          <a:bodyPr wrap="square" lIns="0" rIns="0" tIns="0" bIns="0" anchor="t">
+            <a:spAutoFit/>
+          </a:bodyPr>
           <a:lstStyle/>
           <a:p>
             <a:pPr algn="l">
               <a:spcAft>
-                <a:spcPts val="200"/>
-              </a:spcAft>
-            </a:pPr>
-            <a:r>
-              <a:rPr sz="1200" b="0" i="0">
+                <a:spcPts val="100"/>
+              </a:spcAft>
+            </a:pPr>
+            <a:r>
+              <a:rPr sz="1200" b="0">
                 <a:solidFill>
                   <a:srgbClr val="17323B"/>
                 </a:solidFill>
                 <a:latin typeface="Calibri"/>
               </a:rPr>
-              <a:t>按 common/model/client/user/app/ai/sc</a:t>
-            </a:r>
-          </a:p>
-          <a:p>
-            <a:pPr algn="l">
-              <a:spcAft>
-                <a:spcPts val="200"/>
-              </a:spcAft>
-            </a:pPr>
-            <a:r>
-              <a:rPr sz="1200" b="0" i="0">
-                <a:solidFill>
-                  <a:srgbClr val="17323B"/>
-                </a:solidFill>
-                <a:latin typeface="Calibri"/>
-              </a:rPr>
-              <a:t>reenshot 逐步验证启动、注册、Dubbo 调用。</a:t>
+              <a:t>按 common/model/client/user/app/ai/截图服务逐步验证注册与 Dubbo 调用。</a:t>
             </a:r>
           </a:p>
         </p:txBody>
@@ -18877,16 +17863,18 @@
           <a:noFill/>
         </p:spPr>
         <p:txBody>
-          <a:bodyPr wrap="square" lIns="0" rIns="0" tIns="0" bIns="0" anchor="t"/>
+          <a:bodyPr wrap="square" lIns="0" rIns="0" tIns="0" bIns="0" anchor="t">
+            <a:spAutoFit/>
+          </a:bodyPr>
           <a:lstStyle/>
           <a:p>
             <a:pPr algn="l">
               <a:spcAft>
-                <a:spcPts val="200"/>
-              </a:spcAft>
-            </a:pPr>
-            <a:r>
-              <a:rPr sz="1050" b="0" i="0">
+                <a:spcPts val="100"/>
+              </a:spcAft>
+            </a:pPr>
+            <a:r>
+              <a:rPr sz="1050" b="0">
                 <a:solidFill>
                   <a:srgbClr val="5B7780"/>
                 </a:solidFill>
